--- a/Diagrama.pptx
+++ b/Diagrama.pptx
@@ -114,12 +114,12 @@
   <p:extLst>
     <p:ext uri="{EFAFB233-063F-42B5-8137-9DF3F51BA10A}">
       <p15:sldGuideLst xmlns:p15="http://schemas.microsoft.com/office/powerpoint/2012/main">
-        <p15:guide id="1" orient="horz" pos="2160" userDrawn="1">
+        <p15:guide id="1" orient="horz" pos="2108" userDrawn="1">
           <p15:clr>
             <a:srgbClr val="A4A3A4"/>
           </p15:clr>
         </p15:guide>
-        <p15:guide id="2" pos="3837" userDrawn="1">
+        <p15:guide id="2" pos="3814" userDrawn="1">
           <p15:clr>
             <a:srgbClr val="A4A3A4"/>
           </p15:clr>
@@ -3694,13 +3694,2292 @@
       <p:grpSpPr/>
       <p:grpSp>
         <p:nvGrpSpPr>
+          <p:cNvPr id="10" name="Grupo 9"/>
+          <p:cNvGrpSpPr/>
+          <p:nvPr/>
+        </p:nvGrpSpPr>
+        <p:grpSpPr>
+          <a:xfrm>
+            <a:off x="95250" y="140970"/>
+            <a:ext cx="9505950" cy="6144895"/>
+            <a:chOff x="150" y="222"/>
+            <a:chExt cx="14970" cy="9677"/>
+          </a:xfrm>
+        </p:grpSpPr>
+        <p:pic>
+          <p:nvPicPr>
+            <p:cNvPr id="5" name="Imagen 4"/>
+            <p:cNvPicPr/>
+            <p:nvPr/>
+          </p:nvPicPr>
+          <p:blipFill>
+            <a:blip r:embed="rId1"/>
+            <a:srcRect l="5889" t="6926" r="6852" b="53685"/>
+            <a:stretch>
+              <a:fillRect/>
+            </a:stretch>
+          </p:blipFill>
+          <p:spPr>
+            <a:xfrm rot="10800000">
+              <a:off x="8210" y="222"/>
+              <a:ext cx="6911" cy="3120"/>
+            </a:xfrm>
+            <a:prstGeom prst="rect">
+              <a:avLst/>
+            </a:prstGeom>
+          </p:spPr>
+        </p:pic>
+        <p:grpSp>
+          <p:nvGrpSpPr>
+            <p:cNvPr id="108" name="Grupo 107"/>
+            <p:cNvGrpSpPr/>
+            <p:nvPr/>
+          </p:nvGrpSpPr>
+          <p:grpSpPr>
+            <a:xfrm>
+              <a:off x="150" y="761"/>
+              <a:ext cx="8262" cy="9138"/>
+              <a:chOff x="150" y="957"/>
+              <a:chExt cx="11266" cy="12460"/>
+            </a:xfrm>
+          </p:grpSpPr>
+          <p:cxnSp>
+            <p:nvCxnSpPr>
+              <p:cNvPr id="105" name="Conector angular 104"/>
+              <p:cNvCxnSpPr>
+                <a:stCxn id="71" idx="7"/>
+                <a:endCxn id="3" idx="2"/>
+              </p:cNvCxnSpPr>
+              <p:nvPr/>
+            </p:nvCxnSpPr>
+            <p:spPr>
+              <a:xfrm rot="16200000" flipH="1">
+                <a:off x="6226" y="-2791"/>
+                <a:ext cx="1023" cy="8806"/>
+              </a:xfrm>
+              <a:prstGeom prst="bentConnector4">
+                <a:avLst>
+                  <a:gd name="adj1" fmla="val -54000"/>
+                  <a:gd name="adj2" fmla="val 93244"/>
+                </a:avLst>
+              </a:prstGeom>
+              <a:ln w="28575">
+                <a:solidFill>
+                  <a:srgbClr val="FF0000"/>
+                </a:solidFill>
+              </a:ln>
+            </p:spPr>
+            <p:style>
+              <a:lnRef idx="2">
+                <a:schemeClr val="accent1"/>
+              </a:lnRef>
+              <a:fillRef idx="0">
+                <a:srgbClr val="FFFFFF"/>
+              </a:fillRef>
+              <a:effectRef idx="0">
+                <a:srgbClr val="FFFFFF"/>
+              </a:effectRef>
+              <a:fontRef idx="minor">
+                <a:schemeClr val="tx1"/>
+              </a:fontRef>
+            </p:style>
+          </p:cxnSp>
+          <p:grpSp>
+            <p:nvGrpSpPr>
+              <p:cNvPr id="11" name="Grupo 10"/>
+              <p:cNvGrpSpPr/>
+              <p:nvPr/>
+            </p:nvGrpSpPr>
+            <p:grpSpPr>
+              <a:xfrm>
+                <a:off x="11140" y="1694"/>
+                <a:ext cx="276" cy="1151"/>
+                <a:chOff x="10467" y="1920"/>
+                <a:chExt cx="276" cy="1151"/>
+              </a:xfrm>
+            </p:grpSpPr>
+            <p:sp>
+              <p:nvSpPr>
+                <p:cNvPr id="2" name="Óvalo 1"/>
+                <p:cNvSpPr/>
+                <p:nvPr/>
+              </p:nvSpPr>
+              <p:spPr>
+                <a:xfrm>
+                  <a:off x="10467" y="1920"/>
+                  <a:ext cx="276" cy="277"/>
+                </a:xfrm>
+                <a:prstGeom prst="ellipse">
+                  <a:avLst/>
+                </a:prstGeom>
+                <a:solidFill>
+                  <a:schemeClr val="bg1"/>
+                </a:solidFill>
+                <a:ln>
+                  <a:solidFill>
+                    <a:schemeClr val="tx1"/>
+                  </a:solidFill>
+                </a:ln>
+              </p:spPr>
+              <p:style>
+                <a:lnRef idx="2">
+                  <a:schemeClr val="accent1">
+                    <a:lumMod val="75000"/>
+                  </a:schemeClr>
+                </a:lnRef>
+                <a:fillRef idx="1">
+                  <a:schemeClr val="accent1"/>
+                </a:fillRef>
+                <a:effectRef idx="0">
+                  <a:srgbClr val="FFFFFF"/>
+                </a:effectRef>
+                <a:fontRef idx="minor">
+                  <a:schemeClr val="lt1"/>
+                </a:fontRef>
+              </p:style>
+              <p:txBody>
+                <a:bodyPr rtlCol="0" anchor="ctr"/>
+                <a:p>
+                  <a:pPr algn="ctr"/>
+                  <a:endParaRPr lang="es-MX" altLang="en-US" u="sng"/>
+                </a:p>
+              </p:txBody>
+            </p:sp>
+            <p:sp>
+              <p:nvSpPr>
+                <p:cNvPr id="3" name="Óvalo 2"/>
+                <p:cNvSpPr/>
+                <p:nvPr/>
+              </p:nvSpPr>
+              <p:spPr>
+                <a:xfrm>
+                  <a:off x="10467" y="2211"/>
+                  <a:ext cx="276" cy="277"/>
+                </a:xfrm>
+                <a:prstGeom prst="ellipse">
+                  <a:avLst/>
+                </a:prstGeom>
+                <a:solidFill>
+                  <a:schemeClr val="bg1"/>
+                </a:solidFill>
+                <a:ln>
+                  <a:solidFill>
+                    <a:schemeClr val="tx1"/>
+                  </a:solidFill>
+                </a:ln>
+              </p:spPr>
+              <p:style>
+                <a:lnRef idx="2">
+                  <a:schemeClr val="accent1">
+                    <a:lumMod val="75000"/>
+                  </a:schemeClr>
+                </a:lnRef>
+                <a:fillRef idx="1">
+                  <a:schemeClr val="accent1"/>
+                </a:fillRef>
+                <a:effectRef idx="0">
+                  <a:srgbClr val="FFFFFF"/>
+                </a:effectRef>
+                <a:fontRef idx="minor">
+                  <a:schemeClr val="lt1"/>
+                </a:fontRef>
+              </p:style>
+              <p:txBody>
+                <a:bodyPr rtlCol="0" anchor="ctr"/>
+                <a:p>
+                  <a:pPr algn="ctr"/>
+                  <a:endParaRPr lang="es-MX" altLang="en-US" u="sng"/>
+                </a:p>
+              </p:txBody>
+            </p:sp>
+            <p:sp>
+              <p:nvSpPr>
+                <p:cNvPr id="4" name="Óvalo 3"/>
+                <p:cNvSpPr/>
+                <p:nvPr/>
+              </p:nvSpPr>
+              <p:spPr>
+                <a:xfrm>
+                  <a:off x="10467" y="2502"/>
+                  <a:ext cx="276" cy="277"/>
+                </a:xfrm>
+                <a:prstGeom prst="ellipse">
+                  <a:avLst/>
+                </a:prstGeom>
+                <a:solidFill>
+                  <a:schemeClr val="bg1"/>
+                </a:solidFill>
+                <a:ln>
+                  <a:solidFill>
+                    <a:schemeClr val="tx1"/>
+                  </a:solidFill>
+                </a:ln>
+              </p:spPr>
+              <p:style>
+                <a:lnRef idx="2">
+                  <a:schemeClr val="accent1">
+                    <a:lumMod val="75000"/>
+                  </a:schemeClr>
+                </a:lnRef>
+                <a:fillRef idx="1">
+                  <a:schemeClr val="accent1"/>
+                </a:fillRef>
+                <a:effectRef idx="0">
+                  <a:srgbClr val="FFFFFF"/>
+                </a:effectRef>
+                <a:fontRef idx="minor">
+                  <a:schemeClr val="lt1"/>
+                </a:fontRef>
+              </p:style>
+              <p:txBody>
+                <a:bodyPr rtlCol="0" anchor="ctr"/>
+                <a:p>
+                  <a:pPr algn="ctr"/>
+                  <a:endParaRPr lang="es-MX" altLang="en-US" u="sng"/>
+                </a:p>
+              </p:txBody>
+            </p:sp>
+            <p:sp>
+              <p:nvSpPr>
+                <p:cNvPr id="9" name="Óvalo 8"/>
+                <p:cNvSpPr/>
+                <p:nvPr/>
+              </p:nvSpPr>
+              <p:spPr>
+                <a:xfrm>
+                  <a:off x="10467" y="2794"/>
+                  <a:ext cx="276" cy="277"/>
+                </a:xfrm>
+                <a:prstGeom prst="ellipse">
+                  <a:avLst/>
+                </a:prstGeom>
+                <a:solidFill>
+                  <a:schemeClr val="bg1"/>
+                </a:solidFill>
+                <a:ln>
+                  <a:solidFill>
+                    <a:schemeClr val="tx1"/>
+                  </a:solidFill>
+                </a:ln>
+              </p:spPr>
+              <p:style>
+                <a:lnRef idx="2">
+                  <a:schemeClr val="accent1">
+                    <a:lumMod val="75000"/>
+                  </a:schemeClr>
+                </a:lnRef>
+                <a:fillRef idx="1">
+                  <a:schemeClr val="accent1"/>
+                </a:fillRef>
+                <a:effectRef idx="0">
+                  <a:srgbClr val="FFFFFF"/>
+                </a:effectRef>
+                <a:fontRef idx="minor">
+                  <a:schemeClr val="lt1"/>
+                </a:fontRef>
+              </p:style>
+              <p:txBody>
+                <a:bodyPr rtlCol="0" anchor="ctr"/>
+                <a:p>
+                  <a:pPr algn="ctr"/>
+                  <a:endParaRPr lang="es-MX" altLang="en-US" u="sng"/>
+                </a:p>
+              </p:txBody>
+            </p:sp>
+          </p:grpSp>
+          <p:grpSp>
+            <p:nvGrpSpPr>
+              <p:cNvPr id="66" name="Grupo 65"/>
+              <p:cNvGrpSpPr/>
+              <p:nvPr/>
+            </p:nvGrpSpPr>
+            <p:grpSpPr>
+              <a:xfrm rot="10800000">
+                <a:off x="8426" y="7794"/>
+                <a:ext cx="2336" cy="5623"/>
+                <a:chOff x="5564" y="1119"/>
+                <a:chExt cx="2336" cy="5623"/>
+              </a:xfrm>
+            </p:grpSpPr>
+            <p:pic>
+              <p:nvPicPr>
+                <p:cNvPr id="6" name="Imagen 5"/>
+                <p:cNvPicPr>
+                  <a:picLocks noChangeAspect="1"/>
+                </p:cNvPicPr>
+                <p:nvPr/>
+              </p:nvPicPr>
+              <p:blipFill>
+                <a:blip r:embed="rId2"/>
+                <a:srcRect l="35387" t="16187" r="33467" b="15120"/>
+                <a:stretch>
+                  <a:fillRect/>
+                </a:stretch>
+              </p:blipFill>
+              <p:spPr>
+                <a:xfrm rot="10800000">
+                  <a:off x="5564" y="1119"/>
+                  <a:ext cx="2336" cy="5152"/>
+                </a:xfrm>
+                <a:prstGeom prst="rect">
+                  <a:avLst/>
+                </a:prstGeom>
+              </p:spPr>
+            </p:pic>
+            <p:pic>
+              <p:nvPicPr>
+                <p:cNvPr id="57" name="Imagen 56"/>
+                <p:cNvPicPr>
+                  <a:picLocks noChangeAspect="1"/>
+                </p:cNvPicPr>
+                <p:nvPr/>
+              </p:nvPicPr>
+              <p:blipFill>
+                <a:blip r:embed="rId3"/>
+                <a:stretch>
+                  <a:fillRect/>
+                </a:stretch>
+              </p:blipFill>
+              <p:spPr>
+                <a:xfrm rot="16200000">
+                  <a:off x="5743" y="4585"/>
+                  <a:ext cx="2098" cy="2216"/>
+                </a:xfrm>
+                <a:prstGeom prst="rect">
+                  <a:avLst/>
+                </a:prstGeom>
+              </p:spPr>
+            </p:pic>
+            <p:sp>
+              <p:nvSpPr>
+                <p:cNvPr id="58" name="Óvalo 57"/>
+                <p:cNvSpPr/>
+                <p:nvPr/>
+              </p:nvSpPr>
+              <p:spPr>
+                <a:xfrm>
+                  <a:off x="7342" y="6374"/>
+                  <a:ext cx="276" cy="277"/>
+                </a:xfrm>
+                <a:prstGeom prst="ellipse">
+                  <a:avLst/>
+                </a:prstGeom>
+                <a:solidFill>
+                  <a:schemeClr val="bg1"/>
+                </a:solidFill>
+                <a:ln>
+                  <a:solidFill>
+                    <a:schemeClr val="tx1"/>
+                  </a:solidFill>
+                </a:ln>
+              </p:spPr>
+              <p:style>
+                <a:lnRef idx="2">
+                  <a:schemeClr val="accent1">
+                    <a:lumMod val="75000"/>
+                  </a:schemeClr>
+                </a:lnRef>
+                <a:fillRef idx="1">
+                  <a:schemeClr val="accent1"/>
+                </a:fillRef>
+                <a:effectRef idx="0">
+                  <a:srgbClr val="FFFFFF"/>
+                </a:effectRef>
+                <a:fontRef idx="minor">
+                  <a:schemeClr val="lt1"/>
+                </a:fontRef>
+              </p:style>
+              <p:txBody>
+                <a:bodyPr rtlCol="0" anchor="ctr"/>
+                <a:p>
+                  <a:pPr algn="ctr"/>
+                  <a:endParaRPr lang="es-MX" altLang="en-US" u="sng"/>
+                </a:p>
+              </p:txBody>
+            </p:sp>
+            <p:sp>
+              <p:nvSpPr>
+                <p:cNvPr id="59" name="Óvalo 58"/>
+                <p:cNvSpPr/>
+                <p:nvPr/>
+              </p:nvSpPr>
+              <p:spPr>
+                <a:xfrm>
+                  <a:off x="7066" y="6374"/>
+                  <a:ext cx="276" cy="277"/>
+                </a:xfrm>
+                <a:prstGeom prst="ellipse">
+                  <a:avLst/>
+                </a:prstGeom>
+                <a:solidFill>
+                  <a:schemeClr val="bg1"/>
+                </a:solidFill>
+                <a:ln>
+                  <a:solidFill>
+                    <a:schemeClr val="tx1"/>
+                  </a:solidFill>
+                </a:ln>
+              </p:spPr>
+              <p:style>
+                <a:lnRef idx="2">
+                  <a:schemeClr val="accent1">
+                    <a:lumMod val="75000"/>
+                  </a:schemeClr>
+                </a:lnRef>
+                <a:fillRef idx="1">
+                  <a:schemeClr val="accent1"/>
+                </a:fillRef>
+                <a:effectRef idx="0">
+                  <a:srgbClr val="FFFFFF"/>
+                </a:effectRef>
+                <a:fontRef idx="minor">
+                  <a:schemeClr val="lt1"/>
+                </a:fontRef>
+              </p:style>
+              <p:txBody>
+                <a:bodyPr rtlCol="0" anchor="ctr"/>
+                <a:p>
+                  <a:pPr algn="ctr"/>
+                  <a:endParaRPr lang="es-MX" altLang="en-US" u="sng"/>
+                </a:p>
+              </p:txBody>
+            </p:sp>
+            <p:sp>
+              <p:nvSpPr>
+                <p:cNvPr id="60" name="Óvalo 59"/>
+                <p:cNvSpPr/>
+                <p:nvPr/>
+              </p:nvSpPr>
+              <p:spPr>
+                <a:xfrm>
+                  <a:off x="6790" y="6374"/>
+                  <a:ext cx="276" cy="277"/>
+                </a:xfrm>
+                <a:prstGeom prst="ellipse">
+                  <a:avLst/>
+                </a:prstGeom>
+                <a:solidFill>
+                  <a:schemeClr val="bg1"/>
+                </a:solidFill>
+                <a:ln>
+                  <a:solidFill>
+                    <a:schemeClr val="tx1"/>
+                  </a:solidFill>
+                </a:ln>
+              </p:spPr>
+              <p:style>
+                <a:lnRef idx="2">
+                  <a:schemeClr val="accent1">
+                    <a:lumMod val="75000"/>
+                  </a:schemeClr>
+                </a:lnRef>
+                <a:fillRef idx="1">
+                  <a:schemeClr val="accent1"/>
+                </a:fillRef>
+                <a:effectRef idx="0">
+                  <a:srgbClr val="FFFFFF"/>
+                </a:effectRef>
+                <a:fontRef idx="minor">
+                  <a:schemeClr val="lt1"/>
+                </a:fontRef>
+              </p:style>
+              <p:txBody>
+                <a:bodyPr rtlCol="0" anchor="ctr"/>
+                <a:p>
+                  <a:pPr algn="ctr"/>
+                  <a:endParaRPr lang="es-MX" altLang="en-US" u="sng"/>
+                </a:p>
+              </p:txBody>
+            </p:sp>
+            <p:sp>
+              <p:nvSpPr>
+                <p:cNvPr id="61" name="Óvalo 60"/>
+                <p:cNvSpPr/>
+                <p:nvPr/>
+              </p:nvSpPr>
+              <p:spPr>
+                <a:xfrm>
+                  <a:off x="6514" y="6374"/>
+                  <a:ext cx="276" cy="277"/>
+                </a:xfrm>
+                <a:prstGeom prst="ellipse">
+                  <a:avLst/>
+                </a:prstGeom>
+                <a:solidFill>
+                  <a:schemeClr val="bg1"/>
+                </a:solidFill>
+                <a:ln>
+                  <a:solidFill>
+                    <a:schemeClr val="tx1"/>
+                  </a:solidFill>
+                </a:ln>
+              </p:spPr>
+              <p:style>
+                <a:lnRef idx="2">
+                  <a:schemeClr val="accent1">
+                    <a:lumMod val="75000"/>
+                  </a:schemeClr>
+                </a:lnRef>
+                <a:fillRef idx="1">
+                  <a:schemeClr val="accent1"/>
+                </a:fillRef>
+                <a:effectRef idx="0">
+                  <a:srgbClr val="FFFFFF"/>
+                </a:effectRef>
+                <a:fontRef idx="minor">
+                  <a:schemeClr val="lt1"/>
+                </a:fontRef>
+              </p:style>
+              <p:txBody>
+                <a:bodyPr rtlCol="0" anchor="ctr"/>
+                <a:p>
+                  <a:pPr algn="ctr"/>
+                  <a:endParaRPr lang="es-MX" altLang="en-US" u="sng"/>
+                </a:p>
+              </p:txBody>
+            </p:sp>
+          </p:grpSp>
+          <p:cxnSp>
+            <p:nvCxnSpPr>
+              <p:cNvPr id="67" name="Conector angular 66"/>
+              <p:cNvCxnSpPr>
+                <a:stCxn id="70" idx="4"/>
+                <a:endCxn id="58" idx="4"/>
+              </p:cNvCxnSpPr>
+              <p:nvPr/>
+            </p:nvCxnSpPr>
+            <p:spPr>
+              <a:xfrm rot="5400000" flipV="1">
+                <a:off x="4419" y="3457"/>
+                <a:ext cx="2245" cy="6609"/>
+              </a:xfrm>
+              <a:prstGeom prst="bentConnector3">
+                <a:avLst>
+                  <a:gd name="adj1" fmla="val 73140"/>
+                </a:avLst>
+              </a:prstGeom>
+              <a:ln w="28575">
+                <a:solidFill>
+                  <a:srgbClr val="FF0000"/>
+                </a:solidFill>
+              </a:ln>
+            </p:spPr>
+            <p:style>
+              <a:lnRef idx="2">
+                <a:schemeClr val="accent1"/>
+              </a:lnRef>
+              <a:fillRef idx="0">
+                <a:srgbClr val="FFFFFF"/>
+              </a:fillRef>
+              <a:effectRef idx="0">
+                <a:srgbClr val="FFFFFF"/>
+              </a:effectRef>
+              <a:fontRef idx="minor">
+                <a:schemeClr val="tx1"/>
+              </a:fontRef>
+            </p:style>
+          </p:cxnSp>
+          <p:cxnSp>
+            <p:nvCxnSpPr>
+              <p:cNvPr id="68" name="Conector angular 67"/>
+              <p:cNvCxnSpPr>
+                <a:stCxn id="80" idx="4"/>
+                <a:endCxn id="59" idx="4"/>
+              </p:cNvCxnSpPr>
+              <p:nvPr/>
+            </p:nvCxnSpPr>
+            <p:spPr>
+              <a:xfrm rot="5400000" flipV="1">
+                <a:off x="5641" y="4403"/>
+                <a:ext cx="2245" cy="4717"/>
+              </a:xfrm>
+              <a:prstGeom prst="bentConnector3">
+                <a:avLst>
+                  <a:gd name="adj1" fmla="val 50022"/>
+                </a:avLst>
+              </a:prstGeom>
+              <a:ln w="28575">
+                <a:solidFill>
+                  <a:schemeClr val="accent4"/>
+                </a:solidFill>
+              </a:ln>
+            </p:spPr>
+            <p:style>
+              <a:lnRef idx="2">
+                <a:schemeClr val="accent1"/>
+              </a:lnRef>
+              <a:fillRef idx="0">
+                <a:srgbClr val="FFFFFF"/>
+              </a:fillRef>
+              <a:effectRef idx="0">
+                <a:srgbClr val="FFFFFF"/>
+              </a:effectRef>
+              <a:fontRef idx="minor">
+                <a:schemeClr val="tx1"/>
+              </a:fontRef>
+            </p:style>
+          </p:cxnSp>
+          <p:grpSp>
+            <p:nvGrpSpPr>
+              <p:cNvPr id="101" name="Grupo 100"/>
+              <p:cNvGrpSpPr/>
+              <p:nvPr/>
+            </p:nvGrpSpPr>
+            <p:grpSpPr>
+              <a:xfrm>
+                <a:off x="150" y="957"/>
+                <a:ext cx="9182" cy="4744"/>
+                <a:chOff x="237" y="855"/>
+                <a:chExt cx="9182" cy="4744"/>
+              </a:xfrm>
+            </p:grpSpPr>
+            <p:pic>
+              <p:nvPicPr>
+                <p:cNvPr id="69" name="Imagen 68"/>
+                <p:cNvPicPr/>
+                <p:nvPr/>
+              </p:nvPicPr>
+              <p:blipFill>
+                <a:blip r:embed="rId4"/>
+                <a:srcRect l="24356" t="7898" r="12971" b="7083"/>
+                <a:stretch>
+                  <a:fillRect/>
+                </a:stretch>
+              </p:blipFill>
+              <p:spPr>
+                <a:xfrm rot="5400000">
+                  <a:off x="2456" y="-1364"/>
+                  <a:ext cx="4745" cy="9182"/>
+                </a:xfrm>
+                <a:prstGeom prst="rect">
+                  <a:avLst/>
+                </a:prstGeom>
+              </p:spPr>
+            </p:pic>
+            <p:sp>
+              <p:nvSpPr>
+                <p:cNvPr id="70" name="Óvalo 69"/>
+                <p:cNvSpPr/>
+                <p:nvPr/>
+              </p:nvSpPr>
+              <p:spPr>
+                <a:xfrm>
+                  <a:off x="2186" y="5261"/>
+                  <a:ext cx="276" cy="277"/>
+                </a:xfrm>
+                <a:prstGeom prst="ellipse">
+                  <a:avLst/>
+                </a:prstGeom>
+                <a:solidFill>
+                  <a:schemeClr val="bg1"/>
+                </a:solidFill>
+                <a:ln>
+                  <a:solidFill>
+                    <a:schemeClr val="tx1"/>
+                  </a:solidFill>
+                </a:ln>
+              </p:spPr>
+              <p:style>
+                <a:lnRef idx="2">
+                  <a:schemeClr val="accent1">
+                    <a:lumMod val="75000"/>
+                  </a:schemeClr>
+                </a:lnRef>
+                <a:fillRef idx="1">
+                  <a:schemeClr val="accent1"/>
+                </a:fillRef>
+                <a:effectRef idx="0">
+                  <a:srgbClr val="FFFFFF"/>
+                </a:effectRef>
+                <a:fontRef idx="minor">
+                  <a:schemeClr val="lt1"/>
+                </a:fontRef>
+              </p:style>
+              <p:txBody>
+                <a:bodyPr rtlCol="0" anchor="ctr"/>
+                <a:p>
+                  <a:pPr algn="ctr"/>
+                  <a:endParaRPr lang="es-MX" altLang="en-US" u="sng"/>
+                </a:p>
+              </p:txBody>
+            </p:sp>
+            <p:sp>
+              <p:nvSpPr>
+                <p:cNvPr id="71" name="Óvalo 70"/>
+                <p:cNvSpPr/>
+                <p:nvPr/>
+              </p:nvSpPr>
+              <p:spPr>
+                <a:xfrm>
+                  <a:off x="2186" y="957"/>
+                  <a:ext cx="276" cy="277"/>
+                </a:xfrm>
+                <a:prstGeom prst="ellipse">
+                  <a:avLst/>
+                </a:prstGeom>
+                <a:solidFill>
+                  <a:schemeClr val="bg1"/>
+                </a:solidFill>
+                <a:ln>
+                  <a:solidFill>
+                    <a:schemeClr val="tx1"/>
+                  </a:solidFill>
+                </a:ln>
+              </p:spPr>
+              <p:style>
+                <a:lnRef idx="2">
+                  <a:schemeClr val="accent1">
+                    <a:lumMod val="75000"/>
+                  </a:schemeClr>
+                </a:lnRef>
+                <a:fillRef idx="1">
+                  <a:schemeClr val="accent1"/>
+                </a:fillRef>
+                <a:effectRef idx="0">
+                  <a:srgbClr val="FFFFFF"/>
+                </a:effectRef>
+                <a:fontRef idx="minor">
+                  <a:schemeClr val="lt1"/>
+                </a:fontRef>
+              </p:style>
+              <p:txBody>
+                <a:bodyPr rtlCol="0" anchor="ctr"/>
+                <a:p>
+                  <a:pPr algn="ctr"/>
+                  <a:endParaRPr lang="es-MX" altLang="en-US" u="sng"/>
+                </a:p>
+              </p:txBody>
+            </p:sp>
+            <p:sp>
+              <p:nvSpPr>
+                <p:cNvPr id="72" name="Óvalo 71"/>
+                <p:cNvSpPr/>
+                <p:nvPr/>
+              </p:nvSpPr>
+              <p:spPr>
+                <a:xfrm>
+                  <a:off x="2626" y="5261"/>
+                  <a:ext cx="276" cy="277"/>
+                </a:xfrm>
+                <a:prstGeom prst="ellipse">
+                  <a:avLst/>
+                </a:prstGeom>
+                <a:solidFill>
+                  <a:schemeClr val="bg1"/>
+                </a:solidFill>
+                <a:ln>
+                  <a:solidFill>
+                    <a:schemeClr val="tx1"/>
+                  </a:solidFill>
+                </a:ln>
+              </p:spPr>
+              <p:style>
+                <a:lnRef idx="2">
+                  <a:schemeClr val="accent1">
+                    <a:lumMod val="75000"/>
+                  </a:schemeClr>
+                </a:lnRef>
+                <a:fillRef idx="1">
+                  <a:schemeClr val="accent1"/>
+                </a:fillRef>
+                <a:effectRef idx="0">
+                  <a:srgbClr val="FFFFFF"/>
+                </a:effectRef>
+                <a:fontRef idx="minor">
+                  <a:schemeClr val="lt1"/>
+                </a:fontRef>
+              </p:style>
+              <p:txBody>
+                <a:bodyPr rtlCol="0" anchor="ctr"/>
+                <a:p>
+                  <a:pPr algn="ctr"/>
+                  <a:endParaRPr lang="es-MX" altLang="en-US" u="sng"/>
+                </a:p>
+              </p:txBody>
+            </p:sp>
+            <p:sp>
+              <p:nvSpPr>
+                <p:cNvPr id="73" name="Óvalo 72"/>
+                <p:cNvSpPr/>
+                <p:nvPr/>
+              </p:nvSpPr>
+              <p:spPr>
+                <a:xfrm>
+                  <a:off x="2626" y="957"/>
+                  <a:ext cx="276" cy="277"/>
+                </a:xfrm>
+                <a:prstGeom prst="ellipse">
+                  <a:avLst/>
+                </a:prstGeom>
+                <a:solidFill>
+                  <a:schemeClr val="bg1"/>
+                </a:solidFill>
+                <a:ln>
+                  <a:solidFill>
+                    <a:schemeClr val="tx1"/>
+                  </a:solidFill>
+                </a:ln>
+              </p:spPr>
+              <p:style>
+                <a:lnRef idx="2">
+                  <a:schemeClr val="accent1">
+                    <a:lumMod val="75000"/>
+                  </a:schemeClr>
+                </a:lnRef>
+                <a:fillRef idx="1">
+                  <a:schemeClr val="accent1"/>
+                </a:fillRef>
+                <a:effectRef idx="0">
+                  <a:srgbClr val="FFFFFF"/>
+                </a:effectRef>
+                <a:fontRef idx="minor">
+                  <a:schemeClr val="lt1"/>
+                </a:fontRef>
+              </p:style>
+              <p:txBody>
+                <a:bodyPr rtlCol="0" anchor="ctr"/>
+                <a:p>
+                  <a:pPr algn="ctr"/>
+                  <a:endParaRPr lang="es-MX" altLang="en-US" u="sng"/>
+                </a:p>
+              </p:txBody>
+            </p:sp>
+            <p:sp>
+              <p:nvSpPr>
+                <p:cNvPr id="74" name="Óvalo 73"/>
+                <p:cNvSpPr/>
+                <p:nvPr/>
+              </p:nvSpPr>
+              <p:spPr>
+                <a:xfrm>
+                  <a:off x="3066" y="5261"/>
+                  <a:ext cx="276" cy="277"/>
+                </a:xfrm>
+                <a:prstGeom prst="ellipse">
+                  <a:avLst/>
+                </a:prstGeom>
+                <a:solidFill>
+                  <a:schemeClr val="bg1"/>
+                </a:solidFill>
+                <a:ln>
+                  <a:solidFill>
+                    <a:schemeClr val="tx1"/>
+                  </a:solidFill>
+                </a:ln>
+              </p:spPr>
+              <p:style>
+                <a:lnRef idx="2">
+                  <a:schemeClr val="accent1">
+                    <a:lumMod val="75000"/>
+                  </a:schemeClr>
+                </a:lnRef>
+                <a:fillRef idx="1">
+                  <a:schemeClr val="accent1"/>
+                </a:fillRef>
+                <a:effectRef idx="0">
+                  <a:srgbClr val="FFFFFF"/>
+                </a:effectRef>
+                <a:fontRef idx="minor">
+                  <a:schemeClr val="lt1"/>
+                </a:fontRef>
+              </p:style>
+              <p:txBody>
+                <a:bodyPr rtlCol="0" anchor="ctr"/>
+                <a:p>
+                  <a:pPr algn="ctr"/>
+                  <a:endParaRPr lang="es-MX" altLang="en-US" u="sng"/>
+                </a:p>
+              </p:txBody>
+            </p:sp>
+            <p:sp>
+              <p:nvSpPr>
+                <p:cNvPr id="75" name="Óvalo 74"/>
+                <p:cNvSpPr/>
+                <p:nvPr/>
+              </p:nvSpPr>
+              <p:spPr>
+                <a:xfrm>
+                  <a:off x="3066" y="957"/>
+                  <a:ext cx="276" cy="277"/>
+                </a:xfrm>
+                <a:prstGeom prst="ellipse">
+                  <a:avLst/>
+                </a:prstGeom>
+                <a:solidFill>
+                  <a:schemeClr val="bg1"/>
+                </a:solidFill>
+                <a:ln>
+                  <a:solidFill>
+                    <a:schemeClr val="tx1"/>
+                  </a:solidFill>
+                </a:ln>
+              </p:spPr>
+              <p:style>
+                <a:lnRef idx="2">
+                  <a:schemeClr val="accent1">
+                    <a:lumMod val="75000"/>
+                  </a:schemeClr>
+                </a:lnRef>
+                <a:fillRef idx="1">
+                  <a:schemeClr val="accent1"/>
+                </a:fillRef>
+                <a:effectRef idx="0">
+                  <a:srgbClr val="FFFFFF"/>
+                </a:effectRef>
+                <a:fontRef idx="minor">
+                  <a:schemeClr val="lt1"/>
+                </a:fontRef>
+              </p:style>
+              <p:txBody>
+                <a:bodyPr rtlCol="0" anchor="ctr"/>
+                <a:p>
+                  <a:pPr algn="ctr"/>
+                  <a:endParaRPr lang="es-MX" altLang="en-US" u="sng"/>
+                </a:p>
+              </p:txBody>
+            </p:sp>
+            <p:sp>
+              <p:nvSpPr>
+                <p:cNvPr id="76" name="Óvalo 75"/>
+                <p:cNvSpPr/>
+                <p:nvPr/>
+              </p:nvSpPr>
+              <p:spPr>
+                <a:xfrm>
+                  <a:off x="3506" y="5261"/>
+                  <a:ext cx="276" cy="277"/>
+                </a:xfrm>
+                <a:prstGeom prst="ellipse">
+                  <a:avLst/>
+                </a:prstGeom>
+                <a:solidFill>
+                  <a:schemeClr val="bg1"/>
+                </a:solidFill>
+                <a:ln>
+                  <a:solidFill>
+                    <a:schemeClr val="tx1"/>
+                  </a:solidFill>
+                </a:ln>
+              </p:spPr>
+              <p:style>
+                <a:lnRef idx="2">
+                  <a:schemeClr val="accent1">
+                    <a:lumMod val="75000"/>
+                  </a:schemeClr>
+                </a:lnRef>
+                <a:fillRef idx="1">
+                  <a:schemeClr val="accent1"/>
+                </a:fillRef>
+                <a:effectRef idx="0">
+                  <a:srgbClr val="FFFFFF"/>
+                </a:effectRef>
+                <a:fontRef idx="minor">
+                  <a:schemeClr val="lt1"/>
+                </a:fontRef>
+              </p:style>
+              <p:txBody>
+                <a:bodyPr rtlCol="0" anchor="ctr"/>
+                <a:p>
+                  <a:pPr algn="ctr"/>
+                  <a:endParaRPr lang="es-MX" altLang="en-US" u="sng"/>
+                </a:p>
+              </p:txBody>
+            </p:sp>
+            <p:sp>
+              <p:nvSpPr>
+                <p:cNvPr id="77" name="Óvalo 76"/>
+                <p:cNvSpPr/>
+                <p:nvPr/>
+              </p:nvSpPr>
+              <p:spPr>
+                <a:xfrm>
+                  <a:off x="3506" y="957"/>
+                  <a:ext cx="276" cy="277"/>
+                </a:xfrm>
+                <a:prstGeom prst="ellipse">
+                  <a:avLst/>
+                </a:prstGeom>
+                <a:solidFill>
+                  <a:schemeClr val="bg1"/>
+                </a:solidFill>
+                <a:ln>
+                  <a:solidFill>
+                    <a:schemeClr val="tx1"/>
+                  </a:solidFill>
+                </a:ln>
+              </p:spPr>
+              <p:style>
+                <a:lnRef idx="2">
+                  <a:schemeClr val="accent1">
+                    <a:lumMod val="75000"/>
+                  </a:schemeClr>
+                </a:lnRef>
+                <a:fillRef idx="1">
+                  <a:schemeClr val="accent1"/>
+                </a:fillRef>
+                <a:effectRef idx="0">
+                  <a:srgbClr val="FFFFFF"/>
+                </a:effectRef>
+                <a:fontRef idx="minor">
+                  <a:schemeClr val="lt1"/>
+                </a:fontRef>
+              </p:style>
+              <p:txBody>
+                <a:bodyPr rtlCol="0" anchor="ctr"/>
+                <a:p>
+                  <a:pPr algn="ctr"/>
+                  <a:endParaRPr lang="es-MX" altLang="en-US" u="sng"/>
+                </a:p>
+              </p:txBody>
+            </p:sp>
+            <p:sp>
+              <p:nvSpPr>
+                <p:cNvPr id="78" name="Óvalo 77"/>
+                <p:cNvSpPr/>
+                <p:nvPr/>
+              </p:nvSpPr>
+              <p:spPr>
+                <a:xfrm>
+                  <a:off x="3914" y="5261"/>
+                  <a:ext cx="276" cy="277"/>
+                </a:xfrm>
+                <a:prstGeom prst="ellipse">
+                  <a:avLst/>
+                </a:prstGeom>
+                <a:solidFill>
+                  <a:schemeClr val="bg1"/>
+                </a:solidFill>
+                <a:ln>
+                  <a:solidFill>
+                    <a:schemeClr val="tx1"/>
+                  </a:solidFill>
+                </a:ln>
+              </p:spPr>
+              <p:style>
+                <a:lnRef idx="2">
+                  <a:schemeClr val="accent1">
+                    <a:lumMod val="75000"/>
+                  </a:schemeClr>
+                </a:lnRef>
+                <a:fillRef idx="1">
+                  <a:schemeClr val="accent1"/>
+                </a:fillRef>
+                <a:effectRef idx="0">
+                  <a:srgbClr val="FFFFFF"/>
+                </a:effectRef>
+                <a:fontRef idx="minor">
+                  <a:schemeClr val="lt1"/>
+                </a:fontRef>
+              </p:style>
+              <p:txBody>
+                <a:bodyPr rtlCol="0" anchor="ctr"/>
+                <a:p>
+                  <a:pPr algn="ctr"/>
+                  <a:endParaRPr lang="es-MX" altLang="en-US" u="sng"/>
+                </a:p>
+              </p:txBody>
+            </p:sp>
+            <p:sp>
+              <p:nvSpPr>
+                <p:cNvPr id="79" name="Óvalo 78"/>
+                <p:cNvSpPr/>
+                <p:nvPr/>
+              </p:nvSpPr>
+              <p:spPr>
+                <a:xfrm>
+                  <a:off x="3914" y="957"/>
+                  <a:ext cx="276" cy="277"/>
+                </a:xfrm>
+                <a:prstGeom prst="ellipse">
+                  <a:avLst/>
+                </a:prstGeom>
+                <a:solidFill>
+                  <a:schemeClr val="bg1"/>
+                </a:solidFill>
+                <a:ln>
+                  <a:solidFill>
+                    <a:schemeClr val="tx1"/>
+                  </a:solidFill>
+                </a:ln>
+              </p:spPr>
+              <p:style>
+                <a:lnRef idx="2">
+                  <a:schemeClr val="accent1">
+                    <a:lumMod val="75000"/>
+                  </a:schemeClr>
+                </a:lnRef>
+                <a:fillRef idx="1">
+                  <a:schemeClr val="accent1"/>
+                </a:fillRef>
+                <a:effectRef idx="0">
+                  <a:srgbClr val="FFFFFF"/>
+                </a:effectRef>
+                <a:fontRef idx="minor">
+                  <a:schemeClr val="lt1"/>
+                </a:fontRef>
+              </p:style>
+              <p:txBody>
+                <a:bodyPr rtlCol="0" anchor="ctr"/>
+                <a:p>
+                  <a:pPr algn="ctr"/>
+                  <a:endParaRPr lang="es-MX" altLang="en-US" u="sng"/>
+                </a:p>
+              </p:txBody>
+            </p:sp>
+            <p:sp>
+              <p:nvSpPr>
+                <p:cNvPr id="80" name="Óvalo 79"/>
+                <p:cNvSpPr/>
+                <p:nvPr/>
+              </p:nvSpPr>
+              <p:spPr>
+                <a:xfrm>
+                  <a:off x="4354" y="5261"/>
+                  <a:ext cx="276" cy="277"/>
+                </a:xfrm>
+                <a:prstGeom prst="ellipse">
+                  <a:avLst/>
+                </a:prstGeom>
+                <a:solidFill>
+                  <a:schemeClr val="bg1"/>
+                </a:solidFill>
+                <a:ln>
+                  <a:solidFill>
+                    <a:schemeClr val="tx1"/>
+                  </a:solidFill>
+                </a:ln>
+              </p:spPr>
+              <p:style>
+                <a:lnRef idx="2">
+                  <a:schemeClr val="accent1">
+                    <a:lumMod val="75000"/>
+                  </a:schemeClr>
+                </a:lnRef>
+                <a:fillRef idx="1">
+                  <a:schemeClr val="accent1"/>
+                </a:fillRef>
+                <a:effectRef idx="0">
+                  <a:srgbClr val="FFFFFF"/>
+                </a:effectRef>
+                <a:fontRef idx="minor">
+                  <a:schemeClr val="lt1"/>
+                </a:fontRef>
+              </p:style>
+              <p:txBody>
+                <a:bodyPr rtlCol="0" anchor="ctr"/>
+                <a:p>
+                  <a:pPr algn="ctr"/>
+                  <a:endParaRPr lang="es-MX" altLang="en-US" u="sng"/>
+                </a:p>
+              </p:txBody>
+            </p:sp>
+            <p:sp>
+              <p:nvSpPr>
+                <p:cNvPr id="81" name="Óvalo 80"/>
+                <p:cNvSpPr/>
+                <p:nvPr/>
+              </p:nvSpPr>
+              <p:spPr>
+                <a:xfrm>
+                  <a:off x="4354" y="957"/>
+                  <a:ext cx="276" cy="277"/>
+                </a:xfrm>
+                <a:prstGeom prst="ellipse">
+                  <a:avLst/>
+                </a:prstGeom>
+                <a:solidFill>
+                  <a:schemeClr val="bg1"/>
+                </a:solidFill>
+                <a:ln>
+                  <a:solidFill>
+                    <a:schemeClr val="tx1"/>
+                  </a:solidFill>
+                </a:ln>
+              </p:spPr>
+              <p:style>
+                <a:lnRef idx="2">
+                  <a:schemeClr val="accent1">
+                    <a:lumMod val="75000"/>
+                  </a:schemeClr>
+                </a:lnRef>
+                <a:fillRef idx="1">
+                  <a:schemeClr val="accent1"/>
+                </a:fillRef>
+                <a:effectRef idx="0">
+                  <a:srgbClr val="FFFFFF"/>
+                </a:effectRef>
+                <a:fontRef idx="minor">
+                  <a:schemeClr val="lt1"/>
+                </a:fontRef>
+              </p:style>
+              <p:txBody>
+                <a:bodyPr rtlCol="0" anchor="ctr"/>
+                <a:p>
+                  <a:pPr algn="ctr"/>
+                  <a:endParaRPr lang="es-MX" altLang="en-US" u="sng"/>
+                </a:p>
+              </p:txBody>
+            </p:sp>
+            <p:sp>
+              <p:nvSpPr>
+                <p:cNvPr id="82" name="Óvalo 81"/>
+                <p:cNvSpPr/>
+                <p:nvPr/>
+              </p:nvSpPr>
+              <p:spPr>
+                <a:xfrm>
+                  <a:off x="4794" y="5261"/>
+                  <a:ext cx="276" cy="277"/>
+                </a:xfrm>
+                <a:prstGeom prst="ellipse">
+                  <a:avLst/>
+                </a:prstGeom>
+                <a:solidFill>
+                  <a:schemeClr val="bg1"/>
+                </a:solidFill>
+                <a:ln>
+                  <a:solidFill>
+                    <a:schemeClr val="tx1"/>
+                  </a:solidFill>
+                </a:ln>
+              </p:spPr>
+              <p:style>
+                <a:lnRef idx="2">
+                  <a:schemeClr val="accent1">
+                    <a:lumMod val="75000"/>
+                  </a:schemeClr>
+                </a:lnRef>
+                <a:fillRef idx="1">
+                  <a:schemeClr val="accent1"/>
+                </a:fillRef>
+                <a:effectRef idx="0">
+                  <a:srgbClr val="FFFFFF"/>
+                </a:effectRef>
+                <a:fontRef idx="minor">
+                  <a:schemeClr val="lt1"/>
+                </a:fontRef>
+              </p:style>
+              <p:txBody>
+                <a:bodyPr rtlCol="0" anchor="ctr"/>
+                <a:p>
+                  <a:pPr algn="ctr"/>
+                  <a:endParaRPr lang="es-MX" altLang="en-US" u="sng"/>
+                </a:p>
+              </p:txBody>
+            </p:sp>
+            <p:sp>
+              <p:nvSpPr>
+                <p:cNvPr id="83" name="Óvalo 82"/>
+                <p:cNvSpPr/>
+                <p:nvPr/>
+              </p:nvSpPr>
+              <p:spPr>
+                <a:xfrm>
+                  <a:off x="4794" y="957"/>
+                  <a:ext cx="276" cy="277"/>
+                </a:xfrm>
+                <a:prstGeom prst="ellipse">
+                  <a:avLst/>
+                </a:prstGeom>
+                <a:solidFill>
+                  <a:schemeClr val="bg1"/>
+                </a:solidFill>
+                <a:ln>
+                  <a:solidFill>
+                    <a:schemeClr val="tx1"/>
+                  </a:solidFill>
+                </a:ln>
+              </p:spPr>
+              <p:style>
+                <a:lnRef idx="2">
+                  <a:schemeClr val="accent1">
+                    <a:lumMod val="75000"/>
+                  </a:schemeClr>
+                </a:lnRef>
+                <a:fillRef idx="1">
+                  <a:schemeClr val="accent1"/>
+                </a:fillRef>
+                <a:effectRef idx="0">
+                  <a:srgbClr val="FFFFFF"/>
+                </a:effectRef>
+                <a:fontRef idx="minor">
+                  <a:schemeClr val="lt1"/>
+                </a:fontRef>
+              </p:style>
+              <p:txBody>
+                <a:bodyPr rtlCol="0" anchor="ctr"/>
+                <a:p>
+                  <a:pPr algn="ctr"/>
+                  <a:endParaRPr lang="es-MX" altLang="en-US" u="sng"/>
+                </a:p>
+              </p:txBody>
+            </p:sp>
+            <p:sp>
+              <p:nvSpPr>
+                <p:cNvPr id="84" name="Óvalo 83"/>
+                <p:cNvSpPr/>
+                <p:nvPr/>
+              </p:nvSpPr>
+              <p:spPr>
+                <a:xfrm>
+                  <a:off x="5234" y="5261"/>
+                  <a:ext cx="276" cy="277"/>
+                </a:xfrm>
+                <a:prstGeom prst="ellipse">
+                  <a:avLst/>
+                </a:prstGeom>
+                <a:solidFill>
+                  <a:schemeClr val="bg1"/>
+                </a:solidFill>
+                <a:ln>
+                  <a:solidFill>
+                    <a:schemeClr val="tx1"/>
+                  </a:solidFill>
+                </a:ln>
+              </p:spPr>
+              <p:style>
+                <a:lnRef idx="2">
+                  <a:schemeClr val="accent1">
+                    <a:lumMod val="75000"/>
+                  </a:schemeClr>
+                </a:lnRef>
+                <a:fillRef idx="1">
+                  <a:schemeClr val="accent1"/>
+                </a:fillRef>
+                <a:effectRef idx="0">
+                  <a:srgbClr val="FFFFFF"/>
+                </a:effectRef>
+                <a:fontRef idx="minor">
+                  <a:schemeClr val="lt1"/>
+                </a:fontRef>
+              </p:style>
+              <p:txBody>
+                <a:bodyPr rtlCol="0" anchor="ctr"/>
+                <a:p>
+                  <a:pPr algn="ctr"/>
+                  <a:endParaRPr lang="es-MX" altLang="en-US" u="sng"/>
+                </a:p>
+              </p:txBody>
+            </p:sp>
+            <p:sp>
+              <p:nvSpPr>
+                <p:cNvPr id="85" name="Óvalo 84"/>
+                <p:cNvSpPr/>
+                <p:nvPr/>
+              </p:nvSpPr>
+              <p:spPr>
+                <a:xfrm>
+                  <a:off x="5234" y="957"/>
+                  <a:ext cx="276" cy="277"/>
+                </a:xfrm>
+                <a:prstGeom prst="ellipse">
+                  <a:avLst/>
+                </a:prstGeom>
+                <a:solidFill>
+                  <a:schemeClr val="bg1"/>
+                </a:solidFill>
+                <a:ln>
+                  <a:solidFill>
+                    <a:schemeClr val="tx1"/>
+                  </a:solidFill>
+                </a:ln>
+              </p:spPr>
+              <p:style>
+                <a:lnRef idx="2">
+                  <a:schemeClr val="accent1">
+                    <a:lumMod val="75000"/>
+                  </a:schemeClr>
+                </a:lnRef>
+                <a:fillRef idx="1">
+                  <a:schemeClr val="accent1"/>
+                </a:fillRef>
+                <a:effectRef idx="0">
+                  <a:srgbClr val="FFFFFF"/>
+                </a:effectRef>
+                <a:fontRef idx="minor">
+                  <a:schemeClr val="lt1"/>
+                </a:fontRef>
+              </p:style>
+              <p:txBody>
+                <a:bodyPr rtlCol="0" anchor="ctr"/>
+                <a:p>
+                  <a:pPr algn="ctr"/>
+                  <a:endParaRPr lang="es-MX" altLang="en-US" u="sng"/>
+                </a:p>
+              </p:txBody>
+            </p:sp>
+            <p:sp>
+              <p:nvSpPr>
+                <p:cNvPr id="86" name="Óvalo 85"/>
+                <p:cNvSpPr/>
+                <p:nvPr/>
+              </p:nvSpPr>
+              <p:spPr>
+                <a:xfrm>
+                  <a:off x="5642" y="5261"/>
+                  <a:ext cx="276" cy="277"/>
+                </a:xfrm>
+                <a:prstGeom prst="ellipse">
+                  <a:avLst/>
+                </a:prstGeom>
+                <a:solidFill>
+                  <a:schemeClr val="bg1"/>
+                </a:solidFill>
+                <a:ln>
+                  <a:solidFill>
+                    <a:schemeClr val="tx1"/>
+                  </a:solidFill>
+                </a:ln>
+              </p:spPr>
+              <p:style>
+                <a:lnRef idx="2">
+                  <a:schemeClr val="accent1">
+                    <a:lumMod val="75000"/>
+                  </a:schemeClr>
+                </a:lnRef>
+                <a:fillRef idx="1">
+                  <a:schemeClr val="accent1"/>
+                </a:fillRef>
+                <a:effectRef idx="0">
+                  <a:srgbClr val="FFFFFF"/>
+                </a:effectRef>
+                <a:fontRef idx="minor">
+                  <a:schemeClr val="lt1"/>
+                </a:fontRef>
+              </p:style>
+              <p:txBody>
+                <a:bodyPr rtlCol="0" anchor="ctr"/>
+                <a:p>
+                  <a:pPr algn="ctr"/>
+                  <a:endParaRPr lang="es-MX" altLang="en-US" u="sng"/>
+                </a:p>
+              </p:txBody>
+            </p:sp>
+            <p:sp>
+              <p:nvSpPr>
+                <p:cNvPr id="87" name="Óvalo 86"/>
+                <p:cNvSpPr/>
+                <p:nvPr/>
+              </p:nvSpPr>
+              <p:spPr>
+                <a:xfrm>
+                  <a:off x="5642" y="957"/>
+                  <a:ext cx="276" cy="277"/>
+                </a:xfrm>
+                <a:prstGeom prst="ellipse">
+                  <a:avLst/>
+                </a:prstGeom>
+                <a:solidFill>
+                  <a:schemeClr val="bg1"/>
+                </a:solidFill>
+                <a:ln>
+                  <a:solidFill>
+                    <a:schemeClr val="tx1"/>
+                  </a:solidFill>
+                </a:ln>
+              </p:spPr>
+              <p:style>
+                <a:lnRef idx="2">
+                  <a:schemeClr val="accent1">
+                    <a:lumMod val="75000"/>
+                  </a:schemeClr>
+                </a:lnRef>
+                <a:fillRef idx="1">
+                  <a:schemeClr val="accent1"/>
+                </a:fillRef>
+                <a:effectRef idx="0">
+                  <a:srgbClr val="FFFFFF"/>
+                </a:effectRef>
+                <a:fontRef idx="minor">
+                  <a:schemeClr val="lt1"/>
+                </a:fontRef>
+              </p:style>
+              <p:txBody>
+                <a:bodyPr rtlCol="0" anchor="ctr"/>
+                <a:p>
+                  <a:pPr algn="ctr"/>
+                  <a:endParaRPr lang="es-MX" altLang="en-US" u="sng"/>
+                </a:p>
+              </p:txBody>
+            </p:sp>
+            <p:sp>
+              <p:nvSpPr>
+                <p:cNvPr id="88" name="Óvalo 87"/>
+                <p:cNvSpPr/>
+                <p:nvPr/>
+              </p:nvSpPr>
+              <p:spPr>
+                <a:xfrm>
+                  <a:off x="6082" y="5261"/>
+                  <a:ext cx="276" cy="277"/>
+                </a:xfrm>
+                <a:prstGeom prst="ellipse">
+                  <a:avLst/>
+                </a:prstGeom>
+                <a:solidFill>
+                  <a:schemeClr val="bg1"/>
+                </a:solidFill>
+                <a:ln>
+                  <a:solidFill>
+                    <a:schemeClr val="tx1"/>
+                  </a:solidFill>
+                </a:ln>
+              </p:spPr>
+              <p:style>
+                <a:lnRef idx="2">
+                  <a:schemeClr val="accent1">
+                    <a:lumMod val="75000"/>
+                  </a:schemeClr>
+                </a:lnRef>
+                <a:fillRef idx="1">
+                  <a:schemeClr val="accent1"/>
+                </a:fillRef>
+                <a:effectRef idx="0">
+                  <a:srgbClr val="FFFFFF"/>
+                </a:effectRef>
+                <a:fontRef idx="minor">
+                  <a:schemeClr val="lt1"/>
+                </a:fontRef>
+              </p:style>
+              <p:txBody>
+                <a:bodyPr rtlCol="0" anchor="ctr"/>
+                <a:p>
+                  <a:pPr algn="ctr"/>
+                  <a:endParaRPr lang="es-MX" altLang="en-US" u="sng"/>
+                </a:p>
+              </p:txBody>
+            </p:sp>
+            <p:sp>
+              <p:nvSpPr>
+                <p:cNvPr id="89" name="Óvalo 88"/>
+                <p:cNvSpPr/>
+                <p:nvPr/>
+              </p:nvSpPr>
+              <p:spPr>
+                <a:xfrm>
+                  <a:off x="6082" y="957"/>
+                  <a:ext cx="276" cy="277"/>
+                </a:xfrm>
+                <a:prstGeom prst="ellipse">
+                  <a:avLst/>
+                </a:prstGeom>
+                <a:solidFill>
+                  <a:schemeClr val="bg1"/>
+                </a:solidFill>
+                <a:ln>
+                  <a:solidFill>
+                    <a:schemeClr val="tx1"/>
+                  </a:solidFill>
+                </a:ln>
+              </p:spPr>
+              <p:style>
+                <a:lnRef idx="2">
+                  <a:schemeClr val="accent1">
+                    <a:lumMod val="75000"/>
+                  </a:schemeClr>
+                </a:lnRef>
+                <a:fillRef idx="1">
+                  <a:schemeClr val="accent1"/>
+                </a:fillRef>
+                <a:effectRef idx="0">
+                  <a:srgbClr val="FFFFFF"/>
+                </a:effectRef>
+                <a:fontRef idx="minor">
+                  <a:schemeClr val="lt1"/>
+                </a:fontRef>
+              </p:style>
+              <p:txBody>
+                <a:bodyPr rtlCol="0" anchor="ctr"/>
+                <a:p>
+                  <a:pPr algn="ctr"/>
+                  <a:endParaRPr lang="es-MX" altLang="en-US" u="sng"/>
+                </a:p>
+              </p:txBody>
+            </p:sp>
+            <p:sp>
+              <p:nvSpPr>
+                <p:cNvPr id="90" name="Óvalo 89"/>
+                <p:cNvSpPr/>
+                <p:nvPr/>
+              </p:nvSpPr>
+              <p:spPr>
+                <a:xfrm>
+                  <a:off x="6522" y="5261"/>
+                  <a:ext cx="276" cy="277"/>
+                </a:xfrm>
+                <a:prstGeom prst="ellipse">
+                  <a:avLst/>
+                </a:prstGeom>
+                <a:solidFill>
+                  <a:schemeClr val="bg1"/>
+                </a:solidFill>
+                <a:ln>
+                  <a:solidFill>
+                    <a:schemeClr val="tx1"/>
+                  </a:solidFill>
+                </a:ln>
+              </p:spPr>
+              <p:style>
+                <a:lnRef idx="2">
+                  <a:schemeClr val="accent1">
+                    <a:lumMod val="75000"/>
+                  </a:schemeClr>
+                </a:lnRef>
+                <a:fillRef idx="1">
+                  <a:schemeClr val="accent1"/>
+                </a:fillRef>
+                <a:effectRef idx="0">
+                  <a:srgbClr val="FFFFFF"/>
+                </a:effectRef>
+                <a:fontRef idx="minor">
+                  <a:schemeClr val="lt1"/>
+                </a:fontRef>
+              </p:style>
+              <p:txBody>
+                <a:bodyPr rtlCol="0" anchor="ctr"/>
+                <a:p>
+                  <a:pPr algn="ctr"/>
+                  <a:endParaRPr lang="es-MX" altLang="en-US" u="sng"/>
+                </a:p>
+              </p:txBody>
+            </p:sp>
+            <p:sp>
+              <p:nvSpPr>
+                <p:cNvPr id="91" name="Óvalo 90"/>
+                <p:cNvSpPr/>
+                <p:nvPr/>
+              </p:nvSpPr>
+              <p:spPr>
+                <a:xfrm>
+                  <a:off x="6522" y="957"/>
+                  <a:ext cx="276" cy="277"/>
+                </a:xfrm>
+                <a:prstGeom prst="ellipse">
+                  <a:avLst/>
+                </a:prstGeom>
+                <a:solidFill>
+                  <a:schemeClr val="bg1"/>
+                </a:solidFill>
+                <a:ln>
+                  <a:solidFill>
+                    <a:schemeClr val="tx1"/>
+                  </a:solidFill>
+                </a:ln>
+              </p:spPr>
+              <p:style>
+                <a:lnRef idx="2">
+                  <a:schemeClr val="accent1">
+                    <a:lumMod val="75000"/>
+                  </a:schemeClr>
+                </a:lnRef>
+                <a:fillRef idx="1">
+                  <a:schemeClr val="accent1"/>
+                </a:fillRef>
+                <a:effectRef idx="0">
+                  <a:srgbClr val="FFFFFF"/>
+                </a:effectRef>
+                <a:fontRef idx="minor">
+                  <a:schemeClr val="lt1"/>
+                </a:fontRef>
+              </p:style>
+              <p:txBody>
+                <a:bodyPr rtlCol="0" anchor="ctr"/>
+                <a:p>
+                  <a:pPr algn="ctr"/>
+                  <a:endParaRPr lang="es-MX" altLang="en-US" u="sng"/>
+                </a:p>
+              </p:txBody>
+            </p:sp>
+            <p:sp>
+              <p:nvSpPr>
+                <p:cNvPr id="92" name="Óvalo 91"/>
+                <p:cNvSpPr/>
+                <p:nvPr/>
+              </p:nvSpPr>
+              <p:spPr>
+                <a:xfrm>
+                  <a:off x="6953" y="5261"/>
+                  <a:ext cx="276" cy="277"/>
+                </a:xfrm>
+                <a:prstGeom prst="ellipse">
+                  <a:avLst/>
+                </a:prstGeom>
+                <a:solidFill>
+                  <a:schemeClr val="bg1"/>
+                </a:solidFill>
+                <a:ln>
+                  <a:solidFill>
+                    <a:schemeClr val="tx1"/>
+                  </a:solidFill>
+                </a:ln>
+              </p:spPr>
+              <p:style>
+                <a:lnRef idx="2">
+                  <a:schemeClr val="accent1">
+                    <a:lumMod val="75000"/>
+                  </a:schemeClr>
+                </a:lnRef>
+                <a:fillRef idx="1">
+                  <a:schemeClr val="accent1"/>
+                </a:fillRef>
+                <a:effectRef idx="0">
+                  <a:srgbClr val="FFFFFF"/>
+                </a:effectRef>
+                <a:fontRef idx="minor">
+                  <a:schemeClr val="lt1"/>
+                </a:fontRef>
+              </p:style>
+              <p:txBody>
+                <a:bodyPr rtlCol="0" anchor="ctr"/>
+                <a:p>
+                  <a:pPr algn="ctr"/>
+                  <a:endParaRPr lang="es-MX" altLang="en-US" u="sng"/>
+                </a:p>
+              </p:txBody>
+            </p:sp>
+            <p:sp>
+              <p:nvSpPr>
+                <p:cNvPr id="93" name="Óvalo 92"/>
+                <p:cNvSpPr/>
+                <p:nvPr/>
+              </p:nvSpPr>
+              <p:spPr>
+                <a:xfrm>
+                  <a:off x="6953" y="957"/>
+                  <a:ext cx="276" cy="277"/>
+                </a:xfrm>
+                <a:prstGeom prst="ellipse">
+                  <a:avLst/>
+                </a:prstGeom>
+                <a:solidFill>
+                  <a:schemeClr val="bg1"/>
+                </a:solidFill>
+                <a:ln>
+                  <a:solidFill>
+                    <a:schemeClr val="tx1"/>
+                  </a:solidFill>
+                </a:ln>
+              </p:spPr>
+              <p:style>
+                <a:lnRef idx="2">
+                  <a:schemeClr val="accent1">
+                    <a:lumMod val="75000"/>
+                  </a:schemeClr>
+                </a:lnRef>
+                <a:fillRef idx="1">
+                  <a:schemeClr val="accent1"/>
+                </a:fillRef>
+                <a:effectRef idx="0">
+                  <a:srgbClr val="FFFFFF"/>
+                </a:effectRef>
+                <a:fontRef idx="minor">
+                  <a:schemeClr val="lt1"/>
+                </a:fontRef>
+              </p:style>
+              <p:txBody>
+                <a:bodyPr rtlCol="0" anchor="ctr"/>
+                <a:p>
+                  <a:pPr algn="ctr"/>
+                  <a:endParaRPr lang="es-MX" altLang="en-US" u="sng"/>
+                </a:p>
+              </p:txBody>
+            </p:sp>
+            <p:sp>
+              <p:nvSpPr>
+                <p:cNvPr id="94" name="Óvalo 93"/>
+                <p:cNvSpPr/>
+                <p:nvPr/>
+              </p:nvSpPr>
+              <p:spPr>
+                <a:xfrm>
+                  <a:off x="7370" y="5261"/>
+                  <a:ext cx="276" cy="277"/>
+                </a:xfrm>
+                <a:prstGeom prst="ellipse">
+                  <a:avLst/>
+                </a:prstGeom>
+                <a:solidFill>
+                  <a:schemeClr val="bg1"/>
+                </a:solidFill>
+                <a:ln>
+                  <a:solidFill>
+                    <a:schemeClr val="tx1"/>
+                  </a:solidFill>
+                </a:ln>
+              </p:spPr>
+              <p:style>
+                <a:lnRef idx="2">
+                  <a:schemeClr val="accent1">
+                    <a:lumMod val="75000"/>
+                  </a:schemeClr>
+                </a:lnRef>
+                <a:fillRef idx="1">
+                  <a:schemeClr val="accent1"/>
+                </a:fillRef>
+                <a:effectRef idx="0">
+                  <a:srgbClr val="FFFFFF"/>
+                </a:effectRef>
+                <a:fontRef idx="minor">
+                  <a:schemeClr val="lt1"/>
+                </a:fontRef>
+              </p:style>
+              <p:txBody>
+                <a:bodyPr rtlCol="0" anchor="ctr"/>
+                <a:p>
+                  <a:pPr algn="ctr"/>
+                  <a:endParaRPr lang="es-MX" altLang="en-US" u="sng"/>
+                </a:p>
+              </p:txBody>
+            </p:sp>
+            <p:sp>
+              <p:nvSpPr>
+                <p:cNvPr id="95" name="Óvalo 94"/>
+                <p:cNvSpPr/>
+                <p:nvPr/>
+              </p:nvSpPr>
+              <p:spPr>
+                <a:xfrm>
+                  <a:off x="7370" y="957"/>
+                  <a:ext cx="276" cy="277"/>
+                </a:xfrm>
+                <a:prstGeom prst="ellipse">
+                  <a:avLst/>
+                </a:prstGeom>
+                <a:solidFill>
+                  <a:schemeClr val="bg1"/>
+                </a:solidFill>
+                <a:ln>
+                  <a:solidFill>
+                    <a:schemeClr val="tx1"/>
+                  </a:solidFill>
+                </a:ln>
+              </p:spPr>
+              <p:style>
+                <a:lnRef idx="2">
+                  <a:schemeClr val="accent1">
+                    <a:lumMod val="75000"/>
+                  </a:schemeClr>
+                </a:lnRef>
+                <a:fillRef idx="1">
+                  <a:schemeClr val="accent1"/>
+                </a:fillRef>
+                <a:effectRef idx="0">
+                  <a:srgbClr val="FFFFFF"/>
+                </a:effectRef>
+                <a:fontRef idx="minor">
+                  <a:schemeClr val="lt1"/>
+                </a:fontRef>
+              </p:style>
+              <p:txBody>
+                <a:bodyPr rtlCol="0" anchor="ctr"/>
+                <a:p>
+                  <a:pPr algn="ctr"/>
+                  <a:endParaRPr lang="es-MX" altLang="en-US" u="sng"/>
+                </a:p>
+              </p:txBody>
+            </p:sp>
+            <p:sp>
+              <p:nvSpPr>
+                <p:cNvPr id="96" name="Óvalo 95"/>
+                <p:cNvSpPr/>
+                <p:nvPr/>
+              </p:nvSpPr>
+              <p:spPr>
+                <a:xfrm>
+                  <a:off x="7792" y="5261"/>
+                  <a:ext cx="276" cy="277"/>
+                </a:xfrm>
+                <a:prstGeom prst="ellipse">
+                  <a:avLst/>
+                </a:prstGeom>
+                <a:solidFill>
+                  <a:schemeClr val="bg1"/>
+                </a:solidFill>
+                <a:ln>
+                  <a:solidFill>
+                    <a:schemeClr val="tx1"/>
+                  </a:solidFill>
+                </a:ln>
+              </p:spPr>
+              <p:style>
+                <a:lnRef idx="2">
+                  <a:schemeClr val="accent1">
+                    <a:lumMod val="75000"/>
+                  </a:schemeClr>
+                </a:lnRef>
+                <a:fillRef idx="1">
+                  <a:schemeClr val="accent1"/>
+                </a:fillRef>
+                <a:effectRef idx="0">
+                  <a:srgbClr val="FFFFFF"/>
+                </a:effectRef>
+                <a:fontRef idx="minor">
+                  <a:schemeClr val="lt1"/>
+                </a:fontRef>
+              </p:style>
+              <p:txBody>
+                <a:bodyPr rtlCol="0" anchor="ctr"/>
+                <a:p>
+                  <a:pPr algn="ctr"/>
+                  <a:endParaRPr lang="es-MX" altLang="en-US" u="sng"/>
+                </a:p>
+              </p:txBody>
+            </p:sp>
+            <p:sp>
+              <p:nvSpPr>
+                <p:cNvPr id="97" name="Óvalo 96"/>
+                <p:cNvSpPr/>
+                <p:nvPr/>
+              </p:nvSpPr>
+              <p:spPr>
+                <a:xfrm>
+                  <a:off x="7792" y="957"/>
+                  <a:ext cx="276" cy="277"/>
+                </a:xfrm>
+                <a:prstGeom prst="ellipse">
+                  <a:avLst/>
+                </a:prstGeom>
+                <a:solidFill>
+                  <a:schemeClr val="bg1"/>
+                </a:solidFill>
+                <a:ln>
+                  <a:solidFill>
+                    <a:schemeClr val="tx1"/>
+                  </a:solidFill>
+                </a:ln>
+              </p:spPr>
+              <p:style>
+                <a:lnRef idx="2">
+                  <a:schemeClr val="accent1">
+                    <a:lumMod val="75000"/>
+                  </a:schemeClr>
+                </a:lnRef>
+                <a:fillRef idx="1">
+                  <a:schemeClr val="accent1"/>
+                </a:fillRef>
+                <a:effectRef idx="0">
+                  <a:srgbClr val="FFFFFF"/>
+                </a:effectRef>
+                <a:fontRef idx="minor">
+                  <a:schemeClr val="lt1"/>
+                </a:fontRef>
+              </p:style>
+              <p:txBody>
+                <a:bodyPr rtlCol="0" anchor="ctr"/>
+                <a:p>
+                  <a:pPr algn="ctr"/>
+                  <a:endParaRPr lang="es-MX" altLang="en-US" u="sng"/>
+                </a:p>
+              </p:txBody>
+            </p:sp>
+            <p:sp>
+              <p:nvSpPr>
+                <p:cNvPr id="98" name="Óvalo 97"/>
+                <p:cNvSpPr/>
+                <p:nvPr/>
+              </p:nvSpPr>
+              <p:spPr>
+                <a:xfrm>
+                  <a:off x="8232" y="5261"/>
+                  <a:ext cx="276" cy="277"/>
+                </a:xfrm>
+                <a:prstGeom prst="ellipse">
+                  <a:avLst/>
+                </a:prstGeom>
+                <a:solidFill>
+                  <a:schemeClr val="bg1"/>
+                </a:solidFill>
+                <a:ln>
+                  <a:solidFill>
+                    <a:schemeClr val="tx1"/>
+                  </a:solidFill>
+                </a:ln>
+              </p:spPr>
+              <p:style>
+                <a:lnRef idx="2">
+                  <a:schemeClr val="accent1">
+                    <a:lumMod val="75000"/>
+                  </a:schemeClr>
+                </a:lnRef>
+                <a:fillRef idx="1">
+                  <a:schemeClr val="accent1"/>
+                </a:fillRef>
+                <a:effectRef idx="0">
+                  <a:srgbClr val="FFFFFF"/>
+                </a:effectRef>
+                <a:fontRef idx="minor">
+                  <a:schemeClr val="lt1"/>
+                </a:fontRef>
+              </p:style>
+              <p:txBody>
+                <a:bodyPr rtlCol="0" anchor="ctr"/>
+                <a:p>
+                  <a:pPr algn="ctr"/>
+                  <a:endParaRPr lang="es-MX" altLang="en-US" u="sng"/>
+                </a:p>
+              </p:txBody>
+            </p:sp>
+            <p:sp>
+              <p:nvSpPr>
+                <p:cNvPr id="99" name="Óvalo 98"/>
+                <p:cNvSpPr/>
+                <p:nvPr/>
+              </p:nvSpPr>
+              <p:spPr>
+                <a:xfrm>
+                  <a:off x="8232" y="957"/>
+                  <a:ext cx="276" cy="277"/>
+                </a:xfrm>
+                <a:prstGeom prst="ellipse">
+                  <a:avLst/>
+                </a:prstGeom>
+                <a:solidFill>
+                  <a:schemeClr val="bg1"/>
+                </a:solidFill>
+                <a:ln>
+                  <a:solidFill>
+                    <a:schemeClr val="tx1"/>
+                  </a:solidFill>
+                </a:ln>
+              </p:spPr>
+              <p:style>
+                <a:lnRef idx="2">
+                  <a:schemeClr val="accent1">
+                    <a:lumMod val="75000"/>
+                  </a:schemeClr>
+                </a:lnRef>
+                <a:fillRef idx="1">
+                  <a:schemeClr val="accent1"/>
+                </a:fillRef>
+                <a:effectRef idx="0">
+                  <a:srgbClr val="FFFFFF"/>
+                </a:effectRef>
+                <a:fontRef idx="minor">
+                  <a:schemeClr val="lt1"/>
+                </a:fontRef>
+              </p:style>
+              <p:txBody>
+                <a:bodyPr rtlCol="0" anchor="ctr"/>
+                <a:p>
+                  <a:pPr algn="ctr"/>
+                  <a:endParaRPr lang="es-MX" altLang="en-US" u="sng"/>
+                </a:p>
+              </p:txBody>
+            </p:sp>
+          </p:grpSp>
+          <p:cxnSp>
+            <p:nvCxnSpPr>
+              <p:cNvPr id="102" name="Conector angular 101"/>
+              <p:cNvCxnSpPr>
+                <a:stCxn id="82" idx="4"/>
+                <a:endCxn id="60" idx="4"/>
+              </p:cNvCxnSpPr>
+              <p:nvPr/>
+            </p:nvCxnSpPr>
+            <p:spPr>
+              <a:xfrm rot="5400000" flipV="1">
+                <a:off x="5999" y="4485"/>
+                <a:ext cx="2245" cy="4553"/>
+              </a:xfrm>
+              <a:prstGeom prst="bentConnector3">
+                <a:avLst>
+                  <a:gd name="adj1" fmla="val 38084"/>
+                </a:avLst>
+              </a:prstGeom>
+              <a:ln w="28575">
+                <a:solidFill>
+                  <a:srgbClr val="FFFF00"/>
+                </a:solidFill>
+              </a:ln>
+            </p:spPr>
+            <p:style>
+              <a:lnRef idx="2">
+                <a:schemeClr val="accent1"/>
+              </a:lnRef>
+              <a:fillRef idx="0">
+                <a:srgbClr val="FFFFFF"/>
+              </a:fillRef>
+              <a:effectRef idx="0">
+                <a:srgbClr val="FFFFFF"/>
+              </a:effectRef>
+              <a:fontRef idx="minor">
+                <a:schemeClr val="tx1"/>
+              </a:fontRef>
+            </p:style>
+          </p:cxnSp>
+          <p:cxnSp>
+            <p:nvCxnSpPr>
+              <p:cNvPr id="103" name="Conector angular 102"/>
+              <p:cNvCxnSpPr>
+                <a:stCxn id="72" idx="4"/>
+                <a:endCxn id="61" idx="4"/>
+              </p:cNvCxnSpPr>
+              <p:nvPr/>
+            </p:nvCxnSpPr>
+            <p:spPr>
+              <a:xfrm rot="5400000" flipV="1">
+                <a:off x="5053" y="3263"/>
+                <a:ext cx="2245" cy="6997"/>
+              </a:xfrm>
+              <a:prstGeom prst="bentConnector3">
+                <a:avLst>
+                  <a:gd name="adj1" fmla="val 59866"/>
+                </a:avLst>
+              </a:prstGeom>
+              <a:ln w="28575">
+                <a:solidFill>
+                  <a:schemeClr val="tx1"/>
+                </a:solidFill>
+              </a:ln>
+            </p:spPr>
+            <p:style>
+              <a:lnRef idx="2">
+                <a:schemeClr val="accent1"/>
+              </a:lnRef>
+              <a:fillRef idx="0">
+                <a:srgbClr val="FFFFFF"/>
+              </a:fillRef>
+              <a:effectRef idx="0">
+                <a:srgbClr val="FFFFFF"/>
+              </a:effectRef>
+              <a:fontRef idx="minor">
+                <a:schemeClr val="tx1"/>
+              </a:fontRef>
+            </p:style>
+          </p:cxnSp>
+          <p:cxnSp>
+            <p:nvCxnSpPr>
+              <p:cNvPr id="104" name="Conector angular 103"/>
+              <p:cNvCxnSpPr>
+                <a:stCxn id="73" idx="0"/>
+                <a:endCxn id="2" idx="2"/>
+              </p:cNvCxnSpPr>
+              <p:nvPr/>
+            </p:nvCxnSpPr>
+            <p:spPr>
+              <a:xfrm rot="16200000" flipH="1">
+                <a:off x="6521" y="-2785"/>
+                <a:ext cx="774" cy="8463"/>
+              </a:xfrm>
+              <a:prstGeom prst="bentConnector4">
+                <a:avLst>
+                  <a:gd name="adj1" fmla="val -97739"/>
+                  <a:gd name="adj2" fmla="val 83274"/>
+                </a:avLst>
+              </a:prstGeom>
+              <a:ln w="28575">
+                <a:solidFill>
+                  <a:schemeClr val="tx1"/>
+                </a:solidFill>
+              </a:ln>
+            </p:spPr>
+            <p:style>
+              <a:lnRef idx="2">
+                <a:schemeClr val="accent1"/>
+              </a:lnRef>
+              <a:fillRef idx="0">
+                <a:srgbClr val="FFFFFF"/>
+              </a:fillRef>
+              <a:effectRef idx="0">
+                <a:srgbClr val="FFFFFF"/>
+              </a:effectRef>
+              <a:fontRef idx="minor">
+                <a:schemeClr val="tx1"/>
+              </a:fontRef>
+            </p:style>
+          </p:cxnSp>
+          <p:cxnSp>
+            <p:nvCxnSpPr>
+              <p:cNvPr id="106" name="Conector angular 105"/>
+              <p:cNvCxnSpPr>
+                <a:stCxn id="96" idx="4"/>
+                <a:endCxn id="9" idx="2"/>
+              </p:cNvCxnSpPr>
+              <p:nvPr/>
+            </p:nvCxnSpPr>
+            <p:spPr>
+              <a:xfrm rot="5400000" flipH="1" flipV="1">
+                <a:off x="8025" y="2524"/>
+                <a:ext cx="2933" cy="3297"/>
+              </a:xfrm>
+              <a:prstGeom prst="bentConnector4">
+                <a:avLst>
+                  <a:gd name="adj1" fmla="val -21445"/>
+                  <a:gd name="adj2" fmla="val 59811"/>
+                </a:avLst>
+              </a:prstGeom>
+              <a:ln w="28575">
+                <a:solidFill>
+                  <a:srgbClr val="92D050"/>
+                </a:solidFill>
+              </a:ln>
+            </p:spPr>
+            <p:style>
+              <a:lnRef idx="2">
+                <a:schemeClr val="accent1"/>
+              </a:lnRef>
+              <a:fillRef idx="0">
+                <a:srgbClr val="FFFFFF"/>
+              </a:fillRef>
+              <a:effectRef idx="0">
+                <a:srgbClr val="FFFFFF"/>
+              </a:effectRef>
+              <a:fontRef idx="minor">
+                <a:schemeClr val="tx1"/>
+              </a:fontRef>
+            </p:style>
+          </p:cxnSp>
+          <p:cxnSp>
+            <p:nvCxnSpPr>
+              <p:cNvPr id="107" name="Conector angular 106"/>
+              <p:cNvCxnSpPr>
+                <a:stCxn id="90" idx="3"/>
+              </p:cNvCxnSpPr>
+              <p:nvPr/>
+            </p:nvCxnSpPr>
+            <p:spPr>
+              <a:xfrm rot="5400000" flipH="1" flipV="1">
+                <a:off x="7215" y="1674"/>
+                <a:ext cx="3184" cy="4665"/>
+              </a:xfrm>
+              <a:prstGeom prst="bentConnector4">
+                <a:avLst>
+                  <a:gd name="adj1" fmla="val -13050"/>
+                  <a:gd name="adj2" fmla="val 64640"/>
+                </a:avLst>
+              </a:prstGeom>
+              <a:ln w="28575">
+                <a:solidFill>
+                  <a:srgbClr val="0000FE"/>
+                </a:solidFill>
+              </a:ln>
+            </p:spPr>
+            <p:style>
+              <a:lnRef idx="2">
+                <a:schemeClr val="accent1"/>
+              </a:lnRef>
+              <a:fillRef idx="0">
+                <a:srgbClr val="FFFFFF"/>
+              </a:fillRef>
+              <a:effectRef idx="0">
+                <a:srgbClr val="FFFFFF"/>
+              </a:effectRef>
+              <a:fontRef idx="minor">
+                <a:schemeClr val="tx1"/>
+              </a:fontRef>
+            </p:style>
+          </p:cxnSp>
+        </p:grpSp>
+      </p:grpSp>
+      <p:grpSp>
+        <p:nvGrpSpPr>
           <p:cNvPr id="14" name="Grupo 13"/>
           <p:cNvGrpSpPr/>
           <p:nvPr/>
         </p:nvGrpSpPr>
         <p:grpSpPr>
-          <a:xfrm rot="16200000">
-            <a:off x="9715500" y="732790"/>
+          <a:xfrm rot="10800000">
+            <a:off x="9037955" y="3013710"/>
             <a:ext cx="3154045" cy="1798320"/>
             <a:chOff x="13896" y="5984"/>
             <a:chExt cx="4967" cy="2832"/>
@@ -3713,7 +5992,7 @@
             <p:nvPr/>
           </p:nvPicPr>
           <p:blipFill>
-            <a:blip r:embed="rId1"/>
+            <a:blip r:embed="rId5"/>
             <a:srcRect l="17593" t="42333" r="37667" b="31444"/>
             <a:stretch>
               <a:fillRect/>
@@ -3826,90 +6105,49 @@
       </p:grpSp>
       <p:grpSp>
         <p:nvGrpSpPr>
-          <p:cNvPr id="108" name="Grupo 107"/>
+          <p:cNvPr id="29" name="Grupo 28"/>
           <p:cNvGrpSpPr/>
           <p:nvPr/>
         </p:nvGrpSpPr>
         <p:grpSpPr>
-          <a:xfrm>
-            <a:off x="95250" y="140970"/>
-            <a:ext cx="9587865" cy="6144260"/>
-            <a:chOff x="150" y="222"/>
-            <a:chExt cx="20588" cy="13194"/>
+          <a:xfrm rot="0">
+            <a:off x="6583680" y="6632575"/>
+            <a:ext cx="1750060" cy="730250"/>
+            <a:chOff x="8675" y="6641"/>
+            <a:chExt cx="2756" cy="1150"/>
           </a:xfrm>
         </p:grpSpPr>
-        <p:cxnSp>
-          <p:nvCxnSpPr>
-            <p:cNvPr id="105" name="Conector angular 104"/>
-            <p:cNvCxnSpPr>
-              <a:stCxn id="70" idx="4"/>
-              <a:endCxn id="3" idx="2"/>
-            </p:cNvCxnSpPr>
-            <p:nvPr/>
-          </p:nvCxnSpPr>
-          <p:spPr>
-            <a:xfrm rot="5400000" flipH="1" flipV="1">
-              <a:off x="4930" y="-570"/>
-              <a:ext cx="3516" cy="8903"/>
-            </a:xfrm>
-            <a:prstGeom prst="bentConnector4">
-              <a:avLst>
-                <a:gd name="adj1" fmla="val -46345"/>
-                <a:gd name="adj2" fmla="val 95299"/>
-              </a:avLst>
-            </a:prstGeom>
-            <a:ln w="28575">
-              <a:solidFill>
-                <a:srgbClr val="FF0000"/>
-              </a:solidFill>
-            </a:ln>
-          </p:spPr>
-          <p:style>
-            <a:lnRef idx="2">
-              <a:schemeClr val="accent1"/>
-            </a:lnRef>
-            <a:fillRef idx="0">
-              <a:srgbClr val="FFFFFF"/>
-            </a:fillRef>
-            <a:effectRef idx="0">
-              <a:srgbClr val="FFFFFF"/>
-            </a:effectRef>
-            <a:fontRef idx="minor">
-              <a:schemeClr val="tx1"/>
-            </a:fontRef>
-          </p:style>
-        </p:cxnSp>
         <p:grpSp>
           <p:nvGrpSpPr>
-            <p:cNvPr id="11" name="Grupo 10"/>
+            <p:cNvPr id="22" name="Grupo 21"/>
             <p:cNvGrpSpPr/>
             <p:nvPr/>
           </p:nvGrpSpPr>
           <p:grpSpPr>
             <a:xfrm>
-              <a:off x="11140" y="222"/>
-              <a:ext cx="9599" cy="4254"/>
-              <a:chOff x="10467" y="448"/>
-              <a:chExt cx="9599" cy="4254"/>
+              <a:off x="8675" y="6641"/>
+              <a:ext cx="2757" cy="1150"/>
+              <a:chOff x="8675" y="6641"/>
+              <a:chExt cx="2757" cy="1150"/>
             </a:xfrm>
           </p:grpSpPr>
           <p:pic>
             <p:nvPicPr>
-              <p:cNvPr id="7" name="Imagen 6"/>
+              <p:cNvPr id="15" name="Imagen 14"/>
               <p:cNvPicPr/>
               <p:nvPr/>
             </p:nvPicPr>
             <p:blipFill>
-              <a:blip r:embed="rId2"/>
-              <a:srcRect l="5889" t="6926" r="6852" b="53685"/>
+              <a:blip r:embed="rId6"/>
+              <a:srcRect l="43984" t="32542" r="40877" b="14275"/>
               <a:stretch>
                 <a:fillRect/>
               </a:stretch>
             </p:blipFill>
             <p:spPr>
-              <a:xfrm>
-                <a:off x="10642" y="448"/>
-                <a:ext cx="9424" cy="4254"/>
+              <a:xfrm rot="5400000">
+                <a:off x="9478" y="5838"/>
+                <a:ext cx="1150" cy="2757"/>
               </a:xfrm>
               <a:prstGeom prst="rect">
                 <a:avLst/>
@@ -3918,13 +6156,13 @@
           </p:pic>
           <p:sp>
             <p:nvSpPr>
-              <p:cNvPr id="2" name="Óvalo 1"/>
+              <p:cNvPr id="16" name="Óvalo 15"/>
               <p:cNvSpPr/>
               <p:nvPr/>
             </p:nvSpPr>
             <p:spPr>
-              <a:xfrm>
-                <a:off x="10467" y="1920"/>
+              <a:xfrm rot="10800000">
+                <a:off x="11156" y="6709"/>
                 <a:ext cx="276" cy="277"/>
               </a:xfrm>
               <a:prstGeom prst="ellipse">
@@ -3965,13 +6203,13 @@
           </p:sp>
           <p:sp>
             <p:nvSpPr>
-              <p:cNvPr id="3" name="Óvalo 2"/>
+              <p:cNvPr id="17" name="Óvalo 16"/>
               <p:cNvSpPr/>
               <p:nvPr/>
             </p:nvSpPr>
             <p:spPr>
-              <a:xfrm>
-                <a:off x="10467" y="2211"/>
+              <a:xfrm rot="10800000">
+                <a:off x="11156" y="7037"/>
                 <a:ext cx="276" cy="277"/>
               </a:xfrm>
               <a:prstGeom prst="ellipse">
@@ -4012,13 +6250,13 @@
           </p:sp>
           <p:sp>
             <p:nvSpPr>
-              <p:cNvPr id="4" name="Óvalo 3"/>
+              <p:cNvPr id="18" name="Óvalo 17"/>
               <p:cNvSpPr/>
               <p:nvPr/>
             </p:nvSpPr>
             <p:spPr>
-              <a:xfrm>
-                <a:off x="10467" y="2502"/>
+              <a:xfrm rot="10800000">
+                <a:off x="11156" y="7391"/>
                 <a:ext cx="276" cy="277"/>
               </a:xfrm>
               <a:prstGeom prst="ellipse">
@@ -4059,124 +6297,13 @@
           </p:sp>
           <p:sp>
             <p:nvSpPr>
-              <p:cNvPr id="9" name="Óvalo 8"/>
+              <p:cNvPr id="19" name="Óvalo 18"/>
               <p:cNvSpPr/>
               <p:nvPr/>
             </p:nvSpPr>
             <p:spPr>
-              <a:xfrm>
-                <a:off x="10467" y="2794"/>
-                <a:ext cx="276" cy="277"/>
-              </a:xfrm>
-              <a:prstGeom prst="ellipse">
-                <a:avLst/>
-              </a:prstGeom>
-              <a:solidFill>
-                <a:schemeClr val="bg1"/>
-              </a:solidFill>
-              <a:ln>
-                <a:solidFill>
-                  <a:schemeClr val="tx1"/>
-                </a:solidFill>
-              </a:ln>
-            </p:spPr>
-            <p:style>
-              <a:lnRef idx="2">
-                <a:schemeClr val="accent1">
-                  <a:lumMod val="75000"/>
-                </a:schemeClr>
-              </a:lnRef>
-              <a:fillRef idx="1">
-                <a:schemeClr val="accent1"/>
-              </a:fillRef>
-              <a:effectRef idx="0">
-                <a:srgbClr val="FFFFFF"/>
-              </a:effectRef>
-              <a:fontRef idx="minor">
-                <a:schemeClr val="lt1"/>
-              </a:fontRef>
-            </p:style>
-            <p:txBody>
-              <a:bodyPr rtlCol="0" anchor="ctr"/>
-              <a:p>
-                <a:pPr algn="ctr"/>
-                <a:endParaRPr lang="es-MX" altLang="en-US" u="sng"/>
-              </a:p>
-            </p:txBody>
-          </p:sp>
-        </p:grpSp>
-        <p:grpSp>
-          <p:nvGrpSpPr>
-            <p:cNvPr id="66" name="Grupo 65"/>
-            <p:cNvGrpSpPr/>
-            <p:nvPr/>
-          </p:nvGrpSpPr>
-          <p:grpSpPr>
-            <a:xfrm rot="10800000">
-              <a:off x="8426" y="7794"/>
-              <a:ext cx="2336" cy="5623"/>
-              <a:chOff x="5564" y="1119"/>
-              <a:chExt cx="2336" cy="5623"/>
-            </a:xfrm>
-          </p:grpSpPr>
-          <p:pic>
-            <p:nvPicPr>
-              <p:cNvPr id="6" name="Imagen 5"/>
-              <p:cNvPicPr>
-                <a:picLocks noChangeAspect="1"/>
-              </p:cNvPicPr>
-              <p:nvPr/>
-            </p:nvPicPr>
-            <p:blipFill>
-              <a:blip r:embed="rId3"/>
-              <a:srcRect l="35387" t="16187" r="33467" b="15120"/>
-              <a:stretch>
-                <a:fillRect/>
-              </a:stretch>
-            </p:blipFill>
-            <p:spPr>
               <a:xfrm rot="10800000">
-                <a:off x="5564" y="1119"/>
-                <a:ext cx="2336" cy="5152"/>
-              </a:xfrm>
-              <a:prstGeom prst="rect">
-                <a:avLst/>
-              </a:prstGeom>
-            </p:spPr>
-          </p:pic>
-          <p:pic>
-            <p:nvPicPr>
-              <p:cNvPr id="57" name="Imagen 56"/>
-              <p:cNvPicPr>
-                <a:picLocks noChangeAspect="1"/>
-              </p:cNvPicPr>
-              <p:nvPr/>
-            </p:nvPicPr>
-            <p:blipFill>
-              <a:blip r:embed="rId4"/>
-              <a:stretch>
-                <a:fillRect/>
-              </a:stretch>
-            </p:blipFill>
-            <p:spPr>
-              <a:xfrm rot="16200000">
-                <a:off x="5743" y="4585"/>
-                <a:ext cx="2098" cy="2216"/>
-              </a:xfrm>
-              <a:prstGeom prst="rect">
-                <a:avLst/>
-              </a:prstGeom>
-            </p:spPr>
-          </p:pic>
-          <p:sp>
-            <p:nvSpPr>
-              <p:cNvPr id="58" name="Óvalo 57"/>
-              <p:cNvSpPr/>
-              <p:nvPr/>
-            </p:nvSpPr>
-            <p:spPr>
-              <a:xfrm>
-                <a:off x="7342" y="6374"/>
+                <a:off x="8699" y="6709"/>
                 <a:ext cx="276" cy="277"/>
               </a:xfrm>
               <a:prstGeom prst="ellipse">
@@ -4217,13 +6344,13 @@
           </p:sp>
           <p:sp>
             <p:nvSpPr>
-              <p:cNvPr id="59" name="Óvalo 58"/>
+              <p:cNvPr id="20" name="Óvalo 19"/>
               <p:cNvSpPr/>
               <p:nvPr/>
             </p:nvSpPr>
             <p:spPr>
-              <a:xfrm>
-                <a:off x="7066" y="6374"/>
+              <a:xfrm rot="10800000">
+                <a:off x="8699" y="7037"/>
                 <a:ext cx="276" cy="277"/>
               </a:xfrm>
               <a:prstGeom prst="ellipse">
@@ -4264,60 +6391,13 @@
           </p:sp>
           <p:sp>
             <p:nvSpPr>
-              <p:cNvPr id="60" name="Óvalo 59"/>
+              <p:cNvPr id="21" name="Óvalo 20"/>
               <p:cNvSpPr/>
               <p:nvPr/>
             </p:nvSpPr>
             <p:spPr>
-              <a:xfrm>
-                <a:off x="6790" y="6374"/>
-                <a:ext cx="276" cy="277"/>
-              </a:xfrm>
-              <a:prstGeom prst="ellipse">
-                <a:avLst/>
-              </a:prstGeom>
-              <a:solidFill>
-                <a:schemeClr val="bg1"/>
-              </a:solidFill>
-              <a:ln>
-                <a:solidFill>
-                  <a:schemeClr val="tx1"/>
-                </a:solidFill>
-              </a:ln>
-            </p:spPr>
-            <p:style>
-              <a:lnRef idx="2">
-                <a:schemeClr val="accent1">
-                  <a:lumMod val="75000"/>
-                </a:schemeClr>
-              </a:lnRef>
-              <a:fillRef idx="1">
-                <a:schemeClr val="accent1"/>
-              </a:fillRef>
-              <a:effectRef idx="0">
-                <a:srgbClr val="FFFFFF"/>
-              </a:effectRef>
-              <a:fontRef idx="minor">
-                <a:schemeClr val="lt1"/>
-              </a:fontRef>
-            </p:style>
-            <p:txBody>
-              <a:bodyPr rtlCol="0" anchor="ctr"/>
-              <a:p>
-                <a:pPr algn="ctr"/>
-                <a:endParaRPr lang="es-MX" altLang="en-US" u="sng"/>
-              </a:p>
-            </p:txBody>
-          </p:sp>
-          <p:sp>
-            <p:nvSpPr>
-              <p:cNvPr id="61" name="Óvalo 60"/>
-              <p:cNvSpPr/>
-              <p:nvPr/>
-            </p:nvSpPr>
-            <p:spPr>
-              <a:xfrm>
-                <a:off x="6514" y="6374"/>
+              <a:xfrm rot="10800000">
+                <a:off x="8699" y="7391"/>
                 <a:ext cx="276" cy="277"/>
               </a:xfrm>
               <a:prstGeom prst="ellipse">
@@ -4357,1594 +6437,497 @@
             </p:txBody>
           </p:sp>
         </p:grpSp>
-        <p:cxnSp>
-          <p:nvCxnSpPr>
-            <p:cNvPr id="67" name="Conector angular 66"/>
-            <p:cNvCxnSpPr>
-              <a:stCxn id="70" idx="4"/>
-              <a:endCxn id="58" idx="4"/>
-            </p:cNvCxnSpPr>
+        <p:sp>
+          <p:nvSpPr>
+            <p:cNvPr id="23" name="Cuadro de texto 22"/>
+            <p:cNvSpPr txBox="1"/>
             <p:nvPr/>
-          </p:nvCxnSpPr>
+          </p:nvSpPr>
           <p:spPr>
-            <a:xfrm rot="5400000" flipV="1">
-              <a:off x="4419" y="3457"/>
-              <a:ext cx="2245" cy="6609"/>
+            <a:xfrm>
+              <a:off x="10635" y="7328"/>
+              <a:ext cx="521" cy="340"/>
             </a:xfrm>
-            <a:prstGeom prst="bentConnector3">
-              <a:avLst>
-                <a:gd name="adj1" fmla="val 73140"/>
-              </a:avLst>
+            <a:prstGeom prst="rect">
+              <a:avLst/>
             </a:prstGeom>
-            <a:ln w="28575">
+            <a:solidFill>
+              <a:schemeClr val="bg1"/>
+            </a:solidFill>
+            <a:ln>
               <a:solidFill>
-                <a:srgbClr val="FF0000"/>
+                <a:schemeClr val="tx1"/>
               </a:solidFill>
             </a:ln>
           </p:spPr>
-          <p:style>
-            <a:lnRef idx="2">
-              <a:schemeClr val="accent1"/>
-            </a:lnRef>
-            <a:fillRef idx="0">
-              <a:srgbClr val="FFFFFF"/>
-            </a:fillRef>
-            <a:effectRef idx="0">
-              <a:srgbClr val="FFFFFF"/>
-            </a:effectRef>
-            <a:fontRef idx="minor">
-              <a:schemeClr val="tx1"/>
-            </a:fontRef>
-          </p:style>
-        </p:cxnSp>
-        <p:cxnSp>
-          <p:nvCxnSpPr>
-            <p:cNvPr id="68" name="Conector angular 67"/>
-            <p:cNvCxnSpPr>
-              <a:stCxn id="80" idx="4"/>
-              <a:endCxn id="59" idx="4"/>
-            </p:cNvCxnSpPr>
+          <p:txBody>
+            <a:bodyPr wrap="square" rtlCol="0">
+              <a:noAutofit/>
+            </a:bodyPr>
+            <a:p>
+              <a:pPr algn="ctr"/>
+              <a:r>
+                <a:rPr lang="es-MX" altLang="en-US" sz="800" b="1"/>
+                <a:t>NO</a:t>
+              </a:r>
+              <a:endParaRPr lang="es-MX" altLang="en-US" sz="800" b="1"/>
+            </a:p>
+          </p:txBody>
+        </p:sp>
+        <p:sp>
+          <p:nvSpPr>
+            <p:cNvPr id="24" name="Cuadro de texto 23"/>
+            <p:cNvSpPr txBox="1"/>
             <p:nvPr/>
-          </p:nvCxnSpPr>
+          </p:nvSpPr>
           <p:spPr>
-            <a:xfrm rot="5400000" flipV="1">
-              <a:off x="5641" y="4403"/>
-              <a:ext cx="2245" cy="4717"/>
+            <a:xfrm>
+              <a:off x="10491" y="7037"/>
+              <a:ext cx="665" cy="340"/>
             </a:xfrm>
-            <a:prstGeom prst="bentConnector3">
-              <a:avLst>
-                <a:gd name="adj1" fmla="val 50022"/>
-              </a:avLst>
+            <a:prstGeom prst="rect">
+              <a:avLst/>
             </a:prstGeom>
-            <a:ln w="28575">
+            <a:solidFill>
+              <a:schemeClr val="bg1"/>
+            </a:solidFill>
+            <a:ln>
               <a:solidFill>
-                <a:schemeClr val="accent4"/>
+                <a:schemeClr val="tx1"/>
               </a:solidFill>
             </a:ln>
           </p:spPr>
-          <p:style>
-            <a:lnRef idx="2">
-              <a:schemeClr val="accent1"/>
-            </a:lnRef>
-            <a:fillRef idx="0">
-              <a:srgbClr val="FFFFFF"/>
-            </a:fillRef>
-            <a:effectRef idx="0">
-              <a:srgbClr val="FFFFFF"/>
-            </a:effectRef>
-            <a:fontRef idx="minor">
-              <a:schemeClr val="tx1"/>
-            </a:fontRef>
-          </p:style>
-        </p:cxnSp>
-        <p:grpSp>
-          <p:nvGrpSpPr>
-            <p:cNvPr id="101" name="Grupo 100"/>
-            <p:cNvGrpSpPr/>
+          <p:txBody>
+            <a:bodyPr wrap="square" rtlCol="0">
+              <a:noAutofit/>
+            </a:bodyPr>
+            <a:p>
+              <a:pPr algn="ctr"/>
+              <a:r>
+                <a:rPr lang="es-MX" altLang="en-US" sz="800" b="1"/>
+                <a:t>COM</a:t>
+              </a:r>
+              <a:endParaRPr lang="es-MX" altLang="en-US" sz="800" b="1"/>
+            </a:p>
+          </p:txBody>
+        </p:sp>
+        <p:sp>
+          <p:nvSpPr>
+            <p:cNvPr id="25" name="Cuadro de texto 24"/>
+            <p:cNvSpPr txBox="1"/>
             <p:nvPr/>
-          </p:nvGrpSpPr>
-          <p:grpSpPr>
+          </p:nvSpPr>
+          <p:spPr>
             <a:xfrm>
-              <a:off x="150" y="957"/>
-              <a:ext cx="9182" cy="4744"/>
-              <a:chOff x="237" y="855"/>
-              <a:chExt cx="9182" cy="4744"/>
+              <a:off x="10635" y="6697"/>
+              <a:ext cx="521" cy="340"/>
             </a:xfrm>
-          </p:grpSpPr>
-          <p:pic>
-            <p:nvPicPr>
-              <p:cNvPr id="69" name="Imagen 68"/>
-              <p:cNvPicPr/>
-              <p:nvPr/>
-            </p:nvPicPr>
-            <p:blipFill>
-              <a:blip r:embed="rId5"/>
-              <a:srcRect l="24356" t="7898" r="12971" b="7083"/>
-              <a:stretch>
-                <a:fillRect/>
-              </a:stretch>
-            </p:blipFill>
-            <p:spPr>
-              <a:xfrm rot="5400000">
-                <a:off x="2456" y="-1364"/>
-                <a:ext cx="4745" cy="9182"/>
-              </a:xfrm>
-              <a:prstGeom prst="rect">
-                <a:avLst/>
-              </a:prstGeom>
-            </p:spPr>
-          </p:pic>
-          <p:sp>
-            <p:nvSpPr>
-              <p:cNvPr id="70" name="Óvalo 69"/>
-              <p:cNvSpPr/>
-              <p:nvPr/>
-            </p:nvSpPr>
-            <p:spPr>
-              <a:xfrm>
-                <a:off x="2186" y="5261"/>
-                <a:ext cx="276" cy="277"/>
-              </a:xfrm>
-              <a:prstGeom prst="ellipse">
-                <a:avLst/>
-              </a:prstGeom>
+            <a:prstGeom prst="rect">
+              <a:avLst/>
+            </a:prstGeom>
+            <a:solidFill>
+              <a:schemeClr val="bg1"/>
+            </a:solidFill>
+            <a:ln>
               <a:solidFill>
-                <a:schemeClr val="bg1"/>
-              </a:solidFill>
-              <a:ln>
-                <a:solidFill>
-                  <a:schemeClr val="tx1"/>
-                </a:solidFill>
-              </a:ln>
-            </p:spPr>
-            <p:style>
-              <a:lnRef idx="2">
-                <a:schemeClr val="accent1">
-                  <a:lumMod val="75000"/>
-                </a:schemeClr>
-              </a:lnRef>
-              <a:fillRef idx="1">
-                <a:schemeClr val="accent1"/>
-              </a:fillRef>
-              <a:effectRef idx="0">
-                <a:srgbClr val="FFFFFF"/>
-              </a:effectRef>
-              <a:fontRef idx="minor">
-                <a:schemeClr val="lt1"/>
-              </a:fontRef>
-            </p:style>
-            <p:txBody>
-              <a:bodyPr rtlCol="0" anchor="ctr"/>
-              <a:p>
-                <a:pPr algn="ctr"/>
-                <a:endParaRPr lang="es-MX" altLang="en-US" u="sng"/>
-              </a:p>
-            </p:txBody>
-          </p:sp>
-          <p:sp>
-            <p:nvSpPr>
-              <p:cNvPr id="71" name="Óvalo 70"/>
-              <p:cNvSpPr/>
-              <p:nvPr/>
-            </p:nvSpPr>
-            <p:spPr>
-              <a:xfrm>
-                <a:off x="2186" y="957"/>
-                <a:ext cx="276" cy="277"/>
-              </a:xfrm>
-              <a:prstGeom prst="ellipse">
-                <a:avLst/>
-              </a:prstGeom>
-              <a:solidFill>
-                <a:schemeClr val="bg1"/>
-              </a:solidFill>
-              <a:ln>
-                <a:solidFill>
-                  <a:schemeClr val="tx1"/>
-                </a:solidFill>
-              </a:ln>
-            </p:spPr>
-            <p:style>
-              <a:lnRef idx="2">
-                <a:schemeClr val="accent1">
-                  <a:lumMod val="75000"/>
-                </a:schemeClr>
-              </a:lnRef>
-              <a:fillRef idx="1">
-                <a:schemeClr val="accent1"/>
-              </a:fillRef>
-              <a:effectRef idx="0">
-                <a:srgbClr val="FFFFFF"/>
-              </a:effectRef>
-              <a:fontRef idx="minor">
-                <a:schemeClr val="lt1"/>
-              </a:fontRef>
-            </p:style>
-            <p:txBody>
-              <a:bodyPr rtlCol="0" anchor="ctr"/>
-              <a:p>
-                <a:pPr algn="ctr"/>
-                <a:endParaRPr lang="es-MX" altLang="en-US" u="sng"/>
-              </a:p>
-            </p:txBody>
-          </p:sp>
-          <p:sp>
-            <p:nvSpPr>
-              <p:cNvPr id="72" name="Óvalo 71"/>
-              <p:cNvSpPr/>
-              <p:nvPr/>
-            </p:nvSpPr>
-            <p:spPr>
-              <a:xfrm>
-                <a:off x="2626" y="5261"/>
-                <a:ext cx="276" cy="277"/>
-              </a:xfrm>
-              <a:prstGeom prst="ellipse">
-                <a:avLst/>
-              </a:prstGeom>
-              <a:solidFill>
-                <a:schemeClr val="bg1"/>
-              </a:solidFill>
-              <a:ln>
-                <a:solidFill>
-                  <a:schemeClr val="tx1"/>
-                </a:solidFill>
-              </a:ln>
-            </p:spPr>
-            <p:style>
-              <a:lnRef idx="2">
-                <a:schemeClr val="accent1">
-                  <a:lumMod val="75000"/>
-                </a:schemeClr>
-              </a:lnRef>
-              <a:fillRef idx="1">
-                <a:schemeClr val="accent1"/>
-              </a:fillRef>
-              <a:effectRef idx="0">
-                <a:srgbClr val="FFFFFF"/>
-              </a:effectRef>
-              <a:fontRef idx="minor">
-                <a:schemeClr val="lt1"/>
-              </a:fontRef>
-            </p:style>
-            <p:txBody>
-              <a:bodyPr rtlCol="0" anchor="ctr"/>
-              <a:p>
-                <a:pPr algn="ctr"/>
-                <a:endParaRPr lang="es-MX" altLang="en-US" u="sng"/>
-              </a:p>
-            </p:txBody>
-          </p:sp>
-          <p:sp>
-            <p:nvSpPr>
-              <p:cNvPr id="73" name="Óvalo 72"/>
-              <p:cNvSpPr/>
-              <p:nvPr/>
-            </p:nvSpPr>
-            <p:spPr>
-              <a:xfrm>
-                <a:off x="2626" y="957"/>
-                <a:ext cx="276" cy="277"/>
-              </a:xfrm>
-              <a:prstGeom prst="ellipse">
-                <a:avLst/>
-              </a:prstGeom>
-              <a:solidFill>
-                <a:schemeClr val="bg1"/>
-              </a:solidFill>
-              <a:ln>
-                <a:solidFill>
-                  <a:schemeClr val="tx1"/>
-                </a:solidFill>
-              </a:ln>
-            </p:spPr>
-            <p:style>
-              <a:lnRef idx="2">
-                <a:schemeClr val="accent1">
-                  <a:lumMod val="75000"/>
-                </a:schemeClr>
-              </a:lnRef>
-              <a:fillRef idx="1">
-                <a:schemeClr val="accent1"/>
-              </a:fillRef>
-              <a:effectRef idx="0">
-                <a:srgbClr val="FFFFFF"/>
-              </a:effectRef>
-              <a:fontRef idx="minor">
-                <a:schemeClr val="lt1"/>
-              </a:fontRef>
-            </p:style>
-            <p:txBody>
-              <a:bodyPr rtlCol="0" anchor="ctr"/>
-              <a:p>
-                <a:pPr algn="ctr"/>
-                <a:endParaRPr lang="es-MX" altLang="en-US" u="sng"/>
-              </a:p>
-            </p:txBody>
-          </p:sp>
-          <p:sp>
-            <p:nvSpPr>
-              <p:cNvPr id="74" name="Óvalo 73"/>
-              <p:cNvSpPr/>
-              <p:nvPr/>
-            </p:nvSpPr>
-            <p:spPr>
-              <a:xfrm>
-                <a:off x="3066" y="5261"/>
-                <a:ext cx="276" cy="277"/>
-              </a:xfrm>
-              <a:prstGeom prst="ellipse">
-                <a:avLst/>
-              </a:prstGeom>
-              <a:solidFill>
-                <a:schemeClr val="bg1"/>
-              </a:solidFill>
-              <a:ln>
-                <a:solidFill>
-                  <a:schemeClr val="tx1"/>
-                </a:solidFill>
-              </a:ln>
-            </p:spPr>
-            <p:style>
-              <a:lnRef idx="2">
-                <a:schemeClr val="accent1">
-                  <a:lumMod val="75000"/>
-                </a:schemeClr>
-              </a:lnRef>
-              <a:fillRef idx="1">
-                <a:schemeClr val="accent1"/>
-              </a:fillRef>
-              <a:effectRef idx="0">
-                <a:srgbClr val="FFFFFF"/>
-              </a:effectRef>
-              <a:fontRef idx="minor">
-                <a:schemeClr val="lt1"/>
-              </a:fontRef>
-            </p:style>
-            <p:txBody>
-              <a:bodyPr rtlCol="0" anchor="ctr"/>
-              <a:p>
-                <a:pPr algn="ctr"/>
-                <a:endParaRPr lang="es-MX" altLang="en-US" u="sng"/>
-              </a:p>
-            </p:txBody>
-          </p:sp>
-          <p:sp>
-            <p:nvSpPr>
-              <p:cNvPr id="75" name="Óvalo 74"/>
-              <p:cNvSpPr/>
-              <p:nvPr/>
-            </p:nvSpPr>
-            <p:spPr>
-              <a:xfrm>
-                <a:off x="3066" y="957"/>
-                <a:ext cx="276" cy="277"/>
-              </a:xfrm>
-              <a:prstGeom prst="ellipse">
-                <a:avLst/>
-              </a:prstGeom>
-              <a:solidFill>
-                <a:schemeClr val="bg1"/>
-              </a:solidFill>
-              <a:ln>
-                <a:solidFill>
-                  <a:schemeClr val="tx1"/>
-                </a:solidFill>
-              </a:ln>
-            </p:spPr>
-            <p:style>
-              <a:lnRef idx="2">
-                <a:schemeClr val="accent1">
-                  <a:lumMod val="75000"/>
-                </a:schemeClr>
-              </a:lnRef>
-              <a:fillRef idx="1">
-                <a:schemeClr val="accent1"/>
-              </a:fillRef>
-              <a:effectRef idx="0">
-                <a:srgbClr val="FFFFFF"/>
-              </a:effectRef>
-              <a:fontRef idx="minor">
-                <a:schemeClr val="lt1"/>
-              </a:fontRef>
-            </p:style>
-            <p:txBody>
-              <a:bodyPr rtlCol="0" anchor="ctr"/>
-              <a:p>
-                <a:pPr algn="ctr"/>
-                <a:endParaRPr lang="es-MX" altLang="en-US" u="sng"/>
-              </a:p>
-            </p:txBody>
-          </p:sp>
-          <p:sp>
-            <p:nvSpPr>
-              <p:cNvPr id="76" name="Óvalo 75"/>
-              <p:cNvSpPr/>
-              <p:nvPr/>
-            </p:nvSpPr>
-            <p:spPr>
-              <a:xfrm>
-                <a:off x="3506" y="5261"/>
-                <a:ext cx="276" cy="277"/>
-              </a:xfrm>
-              <a:prstGeom prst="ellipse">
-                <a:avLst/>
-              </a:prstGeom>
-              <a:solidFill>
-                <a:schemeClr val="bg1"/>
-              </a:solidFill>
-              <a:ln>
-                <a:solidFill>
-                  <a:schemeClr val="tx1"/>
-                </a:solidFill>
-              </a:ln>
-            </p:spPr>
-            <p:style>
-              <a:lnRef idx="2">
-                <a:schemeClr val="accent1">
-                  <a:lumMod val="75000"/>
-                </a:schemeClr>
-              </a:lnRef>
-              <a:fillRef idx="1">
-                <a:schemeClr val="accent1"/>
-              </a:fillRef>
-              <a:effectRef idx="0">
-                <a:srgbClr val="FFFFFF"/>
-              </a:effectRef>
-              <a:fontRef idx="minor">
-                <a:schemeClr val="lt1"/>
-              </a:fontRef>
-            </p:style>
-            <p:txBody>
-              <a:bodyPr rtlCol="0" anchor="ctr"/>
-              <a:p>
-                <a:pPr algn="ctr"/>
-                <a:endParaRPr lang="es-MX" altLang="en-US" u="sng"/>
-              </a:p>
-            </p:txBody>
-          </p:sp>
-          <p:sp>
-            <p:nvSpPr>
-              <p:cNvPr id="77" name="Óvalo 76"/>
-              <p:cNvSpPr/>
-              <p:nvPr/>
-            </p:nvSpPr>
-            <p:spPr>
-              <a:xfrm>
-                <a:off x="3506" y="957"/>
-                <a:ext cx="276" cy="277"/>
-              </a:xfrm>
-              <a:prstGeom prst="ellipse">
-                <a:avLst/>
-              </a:prstGeom>
-              <a:solidFill>
-                <a:schemeClr val="bg1"/>
-              </a:solidFill>
-              <a:ln>
-                <a:solidFill>
-                  <a:schemeClr val="tx1"/>
-                </a:solidFill>
-              </a:ln>
-            </p:spPr>
-            <p:style>
-              <a:lnRef idx="2">
-                <a:schemeClr val="accent1">
-                  <a:lumMod val="75000"/>
-                </a:schemeClr>
-              </a:lnRef>
-              <a:fillRef idx="1">
-                <a:schemeClr val="accent1"/>
-              </a:fillRef>
-              <a:effectRef idx="0">
-                <a:srgbClr val="FFFFFF"/>
-              </a:effectRef>
-              <a:fontRef idx="minor">
-                <a:schemeClr val="lt1"/>
-              </a:fontRef>
-            </p:style>
-            <p:txBody>
-              <a:bodyPr rtlCol="0" anchor="ctr"/>
-              <a:p>
-                <a:pPr algn="ctr"/>
-                <a:endParaRPr lang="es-MX" altLang="en-US" u="sng"/>
-              </a:p>
-            </p:txBody>
-          </p:sp>
-          <p:sp>
-            <p:nvSpPr>
-              <p:cNvPr id="78" name="Óvalo 77"/>
-              <p:cNvSpPr/>
-              <p:nvPr/>
-            </p:nvSpPr>
-            <p:spPr>
-              <a:xfrm>
-                <a:off x="3914" y="5261"/>
-                <a:ext cx="276" cy="277"/>
-              </a:xfrm>
-              <a:prstGeom prst="ellipse">
-                <a:avLst/>
-              </a:prstGeom>
-              <a:solidFill>
-                <a:schemeClr val="bg1"/>
-              </a:solidFill>
-              <a:ln>
-                <a:solidFill>
-                  <a:schemeClr val="tx1"/>
-                </a:solidFill>
-              </a:ln>
-            </p:spPr>
-            <p:style>
-              <a:lnRef idx="2">
-                <a:schemeClr val="accent1">
-                  <a:lumMod val="75000"/>
-                </a:schemeClr>
-              </a:lnRef>
-              <a:fillRef idx="1">
-                <a:schemeClr val="accent1"/>
-              </a:fillRef>
-              <a:effectRef idx="0">
-                <a:srgbClr val="FFFFFF"/>
-              </a:effectRef>
-              <a:fontRef idx="minor">
-                <a:schemeClr val="lt1"/>
-              </a:fontRef>
-            </p:style>
-            <p:txBody>
-              <a:bodyPr rtlCol="0" anchor="ctr"/>
-              <a:p>
-                <a:pPr algn="ctr"/>
-                <a:endParaRPr lang="es-MX" altLang="en-US" u="sng"/>
-              </a:p>
-            </p:txBody>
-          </p:sp>
-          <p:sp>
-            <p:nvSpPr>
-              <p:cNvPr id="79" name="Óvalo 78"/>
-              <p:cNvSpPr/>
-              <p:nvPr/>
-            </p:nvSpPr>
-            <p:spPr>
-              <a:xfrm>
-                <a:off x="3914" y="957"/>
-                <a:ext cx="276" cy="277"/>
-              </a:xfrm>
-              <a:prstGeom prst="ellipse">
-                <a:avLst/>
-              </a:prstGeom>
-              <a:solidFill>
-                <a:schemeClr val="bg1"/>
-              </a:solidFill>
-              <a:ln>
-                <a:solidFill>
-                  <a:schemeClr val="tx1"/>
-                </a:solidFill>
-              </a:ln>
-            </p:spPr>
-            <p:style>
-              <a:lnRef idx="2">
-                <a:schemeClr val="accent1">
-                  <a:lumMod val="75000"/>
-                </a:schemeClr>
-              </a:lnRef>
-              <a:fillRef idx="1">
-                <a:schemeClr val="accent1"/>
-              </a:fillRef>
-              <a:effectRef idx="0">
-                <a:srgbClr val="FFFFFF"/>
-              </a:effectRef>
-              <a:fontRef idx="minor">
-                <a:schemeClr val="lt1"/>
-              </a:fontRef>
-            </p:style>
-            <p:txBody>
-              <a:bodyPr rtlCol="0" anchor="ctr"/>
-              <a:p>
-                <a:pPr algn="ctr"/>
-                <a:endParaRPr lang="es-MX" altLang="en-US" u="sng"/>
-              </a:p>
-            </p:txBody>
-          </p:sp>
-          <p:sp>
-            <p:nvSpPr>
-              <p:cNvPr id="80" name="Óvalo 79"/>
-              <p:cNvSpPr/>
-              <p:nvPr/>
-            </p:nvSpPr>
-            <p:spPr>
-              <a:xfrm>
-                <a:off x="4354" y="5261"/>
-                <a:ext cx="276" cy="277"/>
-              </a:xfrm>
-              <a:prstGeom prst="ellipse">
-                <a:avLst/>
-              </a:prstGeom>
-              <a:solidFill>
-                <a:schemeClr val="bg1"/>
-              </a:solidFill>
-              <a:ln>
-                <a:solidFill>
-                  <a:schemeClr val="tx1"/>
-                </a:solidFill>
-              </a:ln>
-            </p:spPr>
-            <p:style>
-              <a:lnRef idx="2">
-                <a:schemeClr val="accent1">
-                  <a:lumMod val="75000"/>
-                </a:schemeClr>
-              </a:lnRef>
-              <a:fillRef idx="1">
-                <a:schemeClr val="accent1"/>
-              </a:fillRef>
-              <a:effectRef idx="0">
-                <a:srgbClr val="FFFFFF"/>
-              </a:effectRef>
-              <a:fontRef idx="minor">
-                <a:schemeClr val="lt1"/>
-              </a:fontRef>
-            </p:style>
-            <p:txBody>
-              <a:bodyPr rtlCol="0" anchor="ctr"/>
-              <a:p>
-                <a:pPr algn="ctr"/>
-                <a:endParaRPr lang="es-MX" altLang="en-US" u="sng"/>
-              </a:p>
-            </p:txBody>
-          </p:sp>
-          <p:sp>
-            <p:nvSpPr>
-              <p:cNvPr id="81" name="Óvalo 80"/>
-              <p:cNvSpPr/>
-              <p:nvPr/>
-            </p:nvSpPr>
-            <p:spPr>
-              <a:xfrm>
-                <a:off x="4354" y="957"/>
-                <a:ext cx="276" cy="277"/>
-              </a:xfrm>
-              <a:prstGeom prst="ellipse">
-                <a:avLst/>
-              </a:prstGeom>
-              <a:solidFill>
-                <a:schemeClr val="bg1"/>
-              </a:solidFill>
-              <a:ln>
-                <a:solidFill>
-                  <a:schemeClr val="tx1"/>
-                </a:solidFill>
-              </a:ln>
-            </p:spPr>
-            <p:style>
-              <a:lnRef idx="2">
-                <a:schemeClr val="accent1">
-                  <a:lumMod val="75000"/>
-                </a:schemeClr>
-              </a:lnRef>
-              <a:fillRef idx="1">
-                <a:schemeClr val="accent1"/>
-              </a:fillRef>
-              <a:effectRef idx="0">
-                <a:srgbClr val="FFFFFF"/>
-              </a:effectRef>
-              <a:fontRef idx="minor">
-                <a:schemeClr val="lt1"/>
-              </a:fontRef>
-            </p:style>
-            <p:txBody>
-              <a:bodyPr rtlCol="0" anchor="ctr"/>
-              <a:p>
-                <a:pPr algn="ctr"/>
-                <a:endParaRPr lang="es-MX" altLang="en-US" u="sng"/>
-              </a:p>
-            </p:txBody>
-          </p:sp>
-          <p:sp>
-            <p:nvSpPr>
-              <p:cNvPr id="82" name="Óvalo 81"/>
-              <p:cNvSpPr/>
-              <p:nvPr/>
-            </p:nvSpPr>
-            <p:spPr>
-              <a:xfrm>
-                <a:off x="4794" y="5261"/>
-                <a:ext cx="276" cy="277"/>
-              </a:xfrm>
-              <a:prstGeom prst="ellipse">
-                <a:avLst/>
-              </a:prstGeom>
-              <a:solidFill>
-                <a:schemeClr val="bg1"/>
-              </a:solidFill>
-              <a:ln>
-                <a:solidFill>
-                  <a:schemeClr val="tx1"/>
-                </a:solidFill>
-              </a:ln>
-            </p:spPr>
-            <p:style>
-              <a:lnRef idx="2">
-                <a:schemeClr val="accent1">
-                  <a:lumMod val="75000"/>
-                </a:schemeClr>
-              </a:lnRef>
-              <a:fillRef idx="1">
-                <a:schemeClr val="accent1"/>
-              </a:fillRef>
-              <a:effectRef idx="0">
-                <a:srgbClr val="FFFFFF"/>
-              </a:effectRef>
-              <a:fontRef idx="minor">
-                <a:schemeClr val="lt1"/>
-              </a:fontRef>
-            </p:style>
-            <p:txBody>
-              <a:bodyPr rtlCol="0" anchor="ctr"/>
-              <a:p>
-                <a:pPr algn="ctr"/>
-                <a:endParaRPr lang="es-MX" altLang="en-US" u="sng"/>
-              </a:p>
-            </p:txBody>
-          </p:sp>
-          <p:sp>
-            <p:nvSpPr>
-              <p:cNvPr id="83" name="Óvalo 82"/>
-              <p:cNvSpPr/>
-              <p:nvPr/>
-            </p:nvSpPr>
-            <p:spPr>
-              <a:xfrm>
-                <a:off x="4794" y="957"/>
-                <a:ext cx="276" cy="277"/>
-              </a:xfrm>
-              <a:prstGeom prst="ellipse">
-                <a:avLst/>
-              </a:prstGeom>
-              <a:solidFill>
-                <a:schemeClr val="bg1"/>
-              </a:solidFill>
-              <a:ln>
-                <a:solidFill>
-                  <a:schemeClr val="tx1"/>
-                </a:solidFill>
-              </a:ln>
-            </p:spPr>
-            <p:style>
-              <a:lnRef idx="2">
-                <a:schemeClr val="accent1">
-                  <a:lumMod val="75000"/>
-                </a:schemeClr>
-              </a:lnRef>
-              <a:fillRef idx="1">
-                <a:schemeClr val="accent1"/>
-              </a:fillRef>
-              <a:effectRef idx="0">
-                <a:srgbClr val="FFFFFF"/>
-              </a:effectRef>
-              <a:fontRef idx="minor">
-                <a:schemeClr val="lt1"/>
-              </a:fontRef>
-            </p:style>
-            <p:txBody>
-              <a:bodyPr rtlCol="0" anchor="ctr"/>
-              <a:p>
-                <a:pPr algn="ctr"/>
-                <a:endParaRPr lang="es-MX" altLang="en-US" u="sng"/>
-              </a:p>
-            </p:txBody>
-          </p:sp>
-          <p:sp>
-            <p:nvSpPr>
-              <p:cNvPr id="84" name="Óvalo 83"/>
-              <p:cNvSpPr/>
-              <p:nvPr/>
-            </p:nvSpPr>
-            <p:spPr>
-              <a:xfrm>
-                <a:off x="5234" y="5261"/>
-                <a:ext cx="276" cy="277"/>
-              </a:xfrm>
-              <a:prstGeom prst="ellipse">
-                <a:avLst/>
-              </a:prstGeom>
-              <a:solidFill>
-                <a:schemeClr val="bg1"/>
-              </a:solidFill>
-              <a:ln>
-                <a:solidFill>
-                  <a:schemeClr val="tx1"/>
-                </a:solidFill>
-              </a:ln>
-            </p:spPr>
-            <p:style>
-              <a:lnRef idx="2">
-                <a:schemeClr val="accent1">
-                  <a:lumMod val="75000"/>
-                </a:schemeClr>
-              </a:lnRef>
-              <a:fillRef idx="1">
-                <a:schemeClr val="accent1"/>
-              </a:fillRef>
-              <a:effectRef idx="0">
-                <a:srgbClr val="FFFFFF"/>
-              </a:effectRef>
-              <a:fontRef idx="minor">
-                <a:schemeClr val="lt1"/>
-              </a:fontRef>
-            </p:style>
-            <p:txBody>
-              <a:bodyPr rtlCol="0" anchor="ctr"/>
-              <a:p>
-                <a:pPr algn="ctr"/>
-                <a:endParaRPr lang="es-MX" altLang="en-US" u="sng"/>
-              </a:p>
-            </p:txBody>
-          </p:sp>
-          <p:sp>
-            <p:nvSpPr>
-              <p:cNvPr id="85" name="Óvalo 84"/>
-              <p:cNvSpPr/>
-              <p:nvPr/>
-            </p:nvSpPr>
-            <p:spPr>
-              <a:xfrm>
-                <a:off x="5234" y="957"/>
-                <a:ext cx="276" cy="277"/>
-              </a:xfrm>
-              <a:prstGeom prst="ellipse">
-                <a:avLst/>
-              </a:prstGeom>
-              <a:solidFill>
-                <a:schemeClr val="bg1"/>
-              </a:solidFill>
-              <a:ln>
-                <a:solidFill>
-                  <a:schemeClr val="tx1"/>
-                </a:solidFill>
-              </a:ln>
-            </p:spPr>
-            <p:style>
-              <a:lnRef idx="2">
-                <a:schemeClr val="accent1">
-                  <a:lumMod val="75000"/>
-                </a:schemeClr>
-              </a:lnRef>
-              <a:fillRef idx="1">
-                <a:schemeClr val="accent1"/>
-              </a:fillRef>
-              <a:effectRef idx="0">
-                <a:srgbClr val="FFFFFF"/>
-              </a:effectRef>
-              <a:fontRef idx="minor">
-                <a:schemeClr val="lt1"/>
-              </a:fontRef>
-            </p:style>
-            <p:txBody>
-              <a:bodyPr rtlCol="0" anchor="ctr"/>
-              <a:p>
-                <a:pPr algn="ctr"/>
-                <a:endParaRPr lang="es-MX" altLang="en-US" u="sng"/>
-              </a:p>
-            </p:txBody>
-          </p:sp>
-          <p:sp>
-            <p:nvSpPr>
-              <p:cNvPr id="86" name="Óvalo 85"/>
-              <p:cNvSpPr/>
-              <p:nvPr/>
-            </p:nvSpPr>
-            <p:spPr>
-              <a:xfrm>
-                <a:off x="5642" y="5261"/>
-                <a:ext cx="276" cy="277"/>
-              </a:xfrm>
-              <a:prstGeom prst="ellipse">
-                <a:avLst/>
-              </a:prstGeom>
-              <a:solidFill>
-                <a:schemeClr val="bg1"/>
-              </a:solidFill>
-              <a:ln>
-                <a:solidFill>
-                  <a:schemeClr val="tx1"/>
-                </a:solidFill>
-              </a:ln>
-            </p:spPr>
-            <p:style>
-              <a:lnRef idx="2">
-                <a:schemeClr val="accent1">
-                  <a:lumMod val="75000"/>
-                </a:schemeClr>
-              </a:lnRef>
-              <a:fillRef idx="1">
-                <a:schemeClr val="accent1"/>
-              </a:fillRef>
-              <a:effectRef idx="0">
-                <a:srgbClr val="FFFFFF"/>
-              </a:effectRef>
-              <a:fontRef idx="minor">
-                <a:schemeClr val="lt1"/>
-              </a:fontRef>
-            </p:style>
-            <p:txBody>
-              <a:bodyPr rtlCol="0" anchor="ctr"/>
-              <a:p>
-                <a:pPr algn="ctr"/>
-                <a:endParaRPr lang="es-MX" altLang="en-US" u="sng"/>
-              </a:p>
-            </p:txBody>
-          </p:sp>
-          <p:sp>
-            <p:nvSpPr>
-              <p:cNvPr id="87" name="Óvalo 86"/>
-              <p:cNvSpPr/>
-              <p:nvPr/>
-            </p:nvSpPr>
-            <p:spPr>
-              <a:xfrm>
-                <a:off x="5642" y="957"/>
-                <a:ext cx="276" cy="277"/>
-              </a:xfrm>
-              <a:prstGeom prst="ellipse">
-                <a:avLst/>
-              </a:prstGeom>
-              <a:solidFill>
-                <a:schemeClr val="bg1"/>
-              </a:solidFill>
-              <a:ln>
-                <a:solidFill>
-                  <a:schemeClr val="tx1"/>
-                </a:solidFill>
-              </a:ln>
-            </p:spPr>
-            <p:style>
-              <a:lnRef idx="2">
-                <a:schemeClr val="accent1">
-                  <a:lumMod val="75000"/>
-                </a:schemeClr>
-              </a:lnRef>
-              <a:fillRef idx="1">
-                <a:schemeClr val="accent1"/>
-              </a:fillRef>
-              <a:effectRef idx="0">
-                <a:srgbClr val="FFFFFF"/>
-              </a:effectRef>
-              <a:fontRef idx="minor">
-                <a:schemeClr val="lt1"/>
-              </a:fontRef>
-            </p:style>
-            <p:txBody>
-              <a:bodyPr rtlCol="0" anchor="ctr"/>
-              <a:p>
-                <a:pPr algn="ctr"/>
-                <a:endParaRPr lang="es-MX" altLang="en-US" u="sng"/>
-              </a:p>
-            </p:txBody>
-          </p:sp>
-          <p:sp>
-            <p:nvSpPr>
-              <p:cNvPr id="88" name="Óvalo 87"/>
-              <p:cNvSpPr/>
-              <p:nvPr/>
-            </p:nvSpPr>
-            <p:spPr>
-              <a:xfrm>
-                <a:off x="6082" y="5261"/>
-                <a:ext cx="276" cy="277"/>
-              </a:xfrm>
-              <a:prstGeom prst="ellipse">
-                <a:avLst/>
-              </a:prstGeom>
-              <a:solidFill>
-                <a:schemeClr val="bg1"/>
-              </a:solidFill>
-              <a:ln>
-                <a:solidFill>
-                  <a:schemeClr val="tx1"/>
-                </a:solidFill>
-              </a:ln>
-            </p:spPr>
-            <p:style>
-              <a:lnRef idx="2">
-                <a:schemeClr val="accent1">
-                  <a:lumMod val="75000"/>
-                </a:schemeClr>
-              </a:lnRef>
-              <a:fillRef idx="1">
-                <a:schemeClr val="accent1"/>
-              </a:fillRef>
-              <a:effectRef idx="0">
-                <a:srgbClr val="FFFFFF"/>
-              </a:effectRef>
-              <a:fontRef idx="minor">
-                <a:schemeClr val="lt1"/>
-              </a:fontRef>
-            </p:style>
-            <p:txBody>
-              <a:bodyPr rtlCol="0" anchor="ctr"/>
-              <a:p>
-                <a:pPr algn="ctr"/>
-                <a:endParaRPr lang="es-MX" altLang="en-US" u="sng"/>
-              </a:p>
-            </p:txBody>
-          </p:sp>
-          <p:sp>
-            <p:nvSpPr>
-              <p:cNvPr id="89" name="Óvalo 88"/>
-              <p:cNvSpPr/>
-              <p:nvPr/>
-            </p:nvSpPr>
-            <p:spPr>
-              <a:xfrm>
-                <a:off x="6082" y="957"/>
-                <a:ext cx="276" cy="277"/>
-              </a:xfrm>
-              <a:prstGeom prst="ellipse">
-                <a:avLst/>
-              </a:prstGeom>
-              <a:solidFill>
-                <a:schemeClr val="bg1"/>
-              </a:solidFill>
-              <a:ln>
-                <a:solidFill>
-                  <a:schemeClr val="tx1"/>
-                </a:solidFill>
-              </a:ln>
-            </p:spPr>
-            <p:style>
-              <a:lnRef idx="2">
-                <a:schemeClr val="accent1">
-                  <a:lumMod val="75000"/>
-                </a:schemeClr>
-              </a:lnRef>
-              <a:fillRef idx="1">
-                <a:schemeClr val="accent1"/>
-              </a:fillRef>
-              <a:effectRef idx="0">
-                <a:srgbClr val="FFFFFF"/>
-              </a:effectRef>
-              <a:fontRef idx="minor">
-                <a:schemeClr val="lt1"/>
-              </a:fontRef>
-            </p:style>
-            <p:txBody>
-              <a:bodyPr rtlCol="0" anchor="ctr"/>
-              <a:p>
-                <a:pPr algn="ctr"/>
-                <a:endParaRPr lang="es-MX" altLang="en-US" u="sng"/>
-              </a:p>
-            </p:txBody>
-          </p:sp>
-          <p:sp>
-            <p:nvSpPr>
-              <p:cNvPr id="90" name="Óvalo 89"/>
-              <p:cNvSpPr/>
-              <p:nvPr/>
-            </p:nvSpPr>
-            <p:spPr>
-              <a:xfrm>
-                <a:off x="6522" y="5261"/>
-                <a:ext cx="276" cy="277"/>
-              </a:xfrm>
-              <a:prstGeom prst="ellipse">
-                <a:avLst/>
-              </a:prstGeom>
-              <a:solidFill>
-                <a:schemeClr val="bg1"/>
-              </a:solidFill>
-              <a:ln>
-                <a:solidFill>
-                  <a:schemeClr val="tx1"/>
-                </a:solidFill>
-              </a:ln>
-            </p:spPr>
-            <p:style>
-              <a:lnRef idx="2">
-                <a:schemeClr val="accent1">
-                  <a:lumMod val="75000"/>
-                </a:schemeClr>
-              </a:lnRef>
-              <a:fillRef idx="1">
-                <a:schemeClr val="accent1"/>
-              </a:fillRef>
-              <a:effectRef idx="0">
-                <a:srgbClr val="FFFFFF"/>
-              </a:effectRef>
-              <a:fontRef idx="minor">
-                <a:schemeClr val="lt1"/>
-              </a:fontRef>
-            </p:style>
-            <p:txBody>
-              <a:bodyPr rtlCol="0" anchor="ctr"/>
-              <a:p>
-                <a:pPr algn="ctr"/>
-                <a:endParaRPr lang="es-MX" altLang="en-US" u="sng"/>
-              </a:p>
-            </p:txBody>
-          </p:sp>
-          <p:sp>
-            <p:nvSpPr>
-              <p:cNvPr id="91" name="Óvalo 90"/>
-              <p:cNvSpPr/>
-              <p:nvPr/>
-            </p:nvSpPr>
-            <p:spPr>
-              <a:xfrm>
-                <a:off x="6522" y="957"/>
-                <a:ext cx="276" cy="277"/>
-              </a:xfrm>
-              <a:prstGeom prst="ellipse">
-                <a:avLst/>
-              </a:prstGeom>
-              <a:solidFill>
-                <a:schemeClr val="bg1"/>
-              </a:solidFill>
-              <a:ln>
-                <a:solidFill>
-                  <a:schemeClr val="tx1"/>
-                </a:solidFill>
-              </a:ln>
-            </p:spPr>
-            <p:style>
-              <a:lnRef idx="2">
-                <a:schemeClr val="accent1">
-                  <a:lumMod val="75000"/>
-                </a:schemeClr>
-              </a:lnRef>
-              <a:fillRef idx="1">
-                <a:schemeClr val="accent1"/>
-              </a:fillRef>
-              <a:effectRef idx="0">
-                <a:srgbClr val="FFFFFF"/>
-              </a:effectRef>
-              <a:fontRef idx="minor">
-                <a:schemeClr val="lt1"/>
-              </a:fontRef>
-            </p:style>
-            <p:txBody>
-              <a:bodyPr rtlCol="0" anchor="ctr"/>
-              <a:p>
-                <a:pPr algn="ctr"/>
-                <a:endParaRPr lang="es-MX" altLang="en-US" u="sng"/>
-              </a:p>
-            </p:txBody>
-          </p:sp>
-          <p:sp>
-            <p:nvSpPr>
-              <p:cNvPr id="92" name="Óvalo 91"/>
-              <p:cNvSpPr/>
-              <p:nvPr/>
-            </p:nvSpPr>
-            <p:spPr>
-              <a:xfrm>
-                <a:off x="6953" y="5261"/>
-                <a:ext cx="276" cy="277"/>
-              </a:xfrm>
-              <a:prstGeom prst="ellipse">
-                <a:avLst/>
-              </a:prstGeom>
-              <a:solidFill>
-                <a:schemeClr val="bg1"/>
-              </a:solidFill>
-              <a:ln>
-                <a:solidFill>
-                  <a:schemeClr val="tx1"/>
-                </a:solidFill>
-              </a:ln>
-            </p:spPr>
-            <p:style>
-              <a:lnRef idx="2">
-                <a:schemeClr val="accent1">
-                  <a:lumMod val="75000"/>
-                </a:schemeClr>
-              </a:lnRef>
-              <a:fillRef idx="1">
-                <a:schemeClr val="accent1"/>
-              </a:fillRef>
-              <a:effectRef idx="0">
-                <a:srgbClr val="FFFFFF"/>
-              </a:effectRef>
-              <a:fontRef idx="minor">
-                <a:schemeClr val="lt1"/>
-              </a:fontRef>
-            </p:style>
-            <p:txBody>
-              <a:bodyPr rtlCol="0" anchor="ctr"/>
-              <a:p>
-                <a:pPr algn="ctr"/>
-                <a:endParaRPr lang="es-MX" altLang="en-US" u="sng"/>
-              </a:p>
-            </p:txBody>
-          </p:sp>
-          <p:sp>
-            <p:nvSpPr>
-              <p:cNvPr id="93" name="Óvalo 92"/>
-              <p:cNvSpPr/>
-              <p:nvPr/>
-            </p:nvSpPr>
-            <p:spPr>
-              <a:xfrm>
-                <a:off x="6953" y="957"/>
-                <a:ext cx="276" cy="277"/>
-              </a:xfrm>
-              <a:prstGeom prst="ellipse">
-                <a:avLst/>
-              </a:prstGeom>
-              <a:solidFill>
-                <a:schemeClr val="bg1"/>
-              </a:solidFill>
-              <a:ln>
-                <a:solidFill>
-                  <a:schemeClr val="tx1"/>
-                </a:solidFill>
-              </a:ln>
-            </p:spPr>
-            <p:style>
-              <a:lnRef idx="2">
-                <a:schemeClr val="accent1">
-                  <a:lumMod val="75000"/>
-                </a:schemeClr>
-              </a:lnRef>
-              <a:fillRef idx="1">
-                <a:schemeClr val="accent1"/>
-              </a:fillRef>
-              <a:effectRef idx="0">
-                <a:srgbClr val="FFFFFF"/>
-              </a:effectRef>
-              <a:fontRef idx="minor">
-                <a:schemeClr val="lt1"/>
-              </a:fontRef>
-            </p:style>
-            <p:txBody>
-              <a:bodyPr rtlCol="0" anchor="ctr"/>
-              <a:p>
-                <a:pPr algn="ctr"/>
-                <a:endParaRPr lang="es-MX" altLang="en-US" u="sng"/>
-              </a:p>
-            </p:txBody>
-          </p:sp>
-          <p:sp>
-            <p:nvSpPr>
-              <p:cNvPr id="94" name="Óvalo 93"/>
-              <p:cNvSpPr/>
-              <p:nvPr/>
-            </p:nvSpPr>
-            <p:spPr>
-              <a:xfrm>
-                <a:off x="7370" y="5261"/>
-                <a:ext cx="276" cy="277"/>
-              </a:xfrm>
-              <a:prstGeom prst="ellipse">
-                <a:avLst/>
-              </a:prstGeom>
-              <a:solidFill>
-                <a:schemeClr val="bg1"/>
-              </a:solidFill>
-              <a:ln>
-                <a:solidFill>
-                  <a:schemeClr val="tx1"/>
-                </a:solidFill>
-              </a:ln>
-            </p:spPr>
-            <p:style>
-              <a:lnRef idx="2">
-                <a:schemeClr val="accent1">
-                  <a:lumMod val="75000"/>
-                </a:schemeClr>
-              </a:lnRef>
-              <a:fillRef idx="1">
-                <a:schemeClr val="accent1"/>
-              </a:fillRef>
-              <a:effectRef idx="0">
-                <a:srgbClr val="FFFFFF"/>
-              </a:effectRef>
-              <a:fontRef idx="minor">
-                <a:schemeClr val="lt1"/>
-              </a:fontRef>
-            </p:style>
-            <p:txBody>
-              <a:bodyPr rtlCol="0" anchor="ctr"/>
-              <a:p>
-                <a:pPr algn="ctr"/>
-                <a:endParaRPr lang="es-MX" altLang="en-US" u="sng"/>
-              </a:p>
-            </p:txBody>
-          </p:sp>
-          <p:sp>
-            <p:nvSpPr>
-              <p:cNvPr id="95" name="Óvalo 94"/>
-              <p:cNvSpPr/>
-              <p:nvPr/>
-            </p:nvSpPr>
-            <p:spPr>
-              <a:xfrm>
-                <a:off x="7370" y="957"/>
-                <a:ext cx="276" cy="277"/>
-              </a:xfrm>
-              <a:prstGeom prst="ellipse">
-                <a:avLst/>
-              </a:prstGeom>
-              <a:solidFill>
-                <a:schemeClr val="bg1"/>
-              </a:solidFill>
-              <a:ln>
-                <a:solidFill>
-                  <a:schemeClr val="tx1"/>
-                </a:solidFill>
-              </a:ln>
-            </p:spPr>
-            <p:style>
-              <a:lnRef idx="2">
-                <a:schemeClr val="accent1">
-                  <a:lumMod val="75000"/>
-                </a:schemeClr>
-              </a:lnRef>
-              <a:fillRef idx="1">
-                <a:schemeClr val="accent1"/>
-              </a:fillRef>
-              <a:effectRef idx="0">
-                <a:srgbClr val="FFFFFF"/>
-              </a:effectRef>
-              <a:fontRef idx="minor">
-                <a:schemeClr val="lt1"/>
-              </a:fontRef>
-            </p:style>
-            <p:txBody>
-              <a:bodyPr rtlCol="0" anchor="ctr"/>
-              <a:p>
-                <a:pPr algn="ctr"/>
-                <a:endParaRPr lang="es-MX" altLang="en-US" u="sng"/>
-              </a:p>
-            </p:txBody>
-          </p:sp>
-          <p:sp>
-            <p:nvSpPr>
-              <p:cNvPr id="96" name="Óvalo 95"/>
-              <p:cNvSpPr/>
-              <p:nvPr/>
-            </p:nvSpPr>
-            <p:spPr>
-              <a:xfrm>
-                <a:off x="7792" y="5261"/>
-                <a:ext cx="276" cy="277"/>
-              </a:xfrm>
-              <a:prstGeom prst="ellipse">
-                <a:avLst/>
-              </a:prstGeom>
-              <a:solidFill>
-                <a:schemeClr val="bg1"/>
-              </a:solidFill>
-              <a:ln>
-                <a:solidFill>
-                  <a:schemeClr val="tx1"/>
-                </a:solidFill>
-              </a:ln>
-            </p:spPr>
-            <p:style>
-              <a:lnRef idx="2">
-                <a:schemeClr val="accent1">
-                  <a:lumMod val="75000"/>
-                </a:schemeClr>
-              </a:lnRef>
-              <a:fillRef idx="1">
-                <a:schemeClr val="accent1"/>
-              </a:fillRef>
-              <a:effectRef idx="0">
-                <a:srgbClr val="FFFFFF"/>
-              </a:effectRef>
-              <a:fontRef idx="minor">
-                <a:schemeClr val="lt1"/>
-              </a:fontRef>
-            </p:style>
-            <p:txBody>
-              <a:bodyPr rtlCol="0" anchor="ctr"/>
-              <a:p>
-                <a:pPr algn="ctr"/>
-                <a:endParaRPr lang="es-MX" altLang="en-US" u="sng"/>
-              </a:p>
-            </p:txBody>
-          </p:sp>
-          <p:sp>
-            <p:nvSpPr>
-              <p:cNvPr id="97" name="Óvalo 96"/>
-              <p:cNvSpPr/>
-              <p:nvPr/>
-            </p:nvSpPr>
-            <p:spPr>
-              <a:xfrm>
-                <a:off x="7792" y="957"/>
-                <a:ext cx="276" cy="277"/>
-              </a:xfrm>
-              <a:prstGeom prst="ellipse">
-                <a:avLst/>
-              </a:prstGeom>
-              <a:solidFill>
-                <a:schemeClr val="bg1"/>
-              </a:solidFill>
-              <a:ln>
-                <a:solidFill>
-                  <a:schemeClr val="tx1"/>
-                </a:solidFill>
-              </a:ln>
-            </p:spPr>
-            <p:style>
-              <a:lnRef idx="2">
-                <a:schemeClr val="accent1">
-                  <a:lumMod val="75000"/>
-                </a:schemeClr>
-              </a:lnRef>
-              <a:fillRef idx="1">
-                <a:schemeClr val="accent1"/>
-              </a:fillRef>
-              <a:effectRef idx="0">
-                <a:srgbClr val="FFFFFF"/>
-              </a:effectRef>
-              <a:fontRef idx="minor">
-                <a:schemeClr val="lt1"/>
-              </a:fontRef>
-            </p:style>
-            <p:txBody>
-              <a:bodyPr rtlCol="0" anchor="ctr"/>
-              <a:p>
-                <a:pPr algn="ctr"/>
-                <a:endParaRPr lang="es-MX" altLang="en-US" u="sng"/>
-              </a:p>
-            </p:txBody>
-          </p:sp>
-          <p:sp>
-            <p:nvSpPr>
-              <p:cNvPr id="98" name="Óvalo 97"/>
-              <p:cNvSpPr/>
-              <p:nvPr/>
-            </p:nvSpPr>
-            <p:spPr>
-              <a:xfrm>
-                <a:off x="8232" y="5261"/>
-                <a:ext cx="276" cy="277"/>
-              </a:xfrm>
-              <a:prstGeom prst="ellipse">
-                <a:avLst/>
-              </a:prstGeom>
-              <a:solidFill>
-                <a:schemeClr val="bg1"/>
-              </a:solidFill>
-              <a:ln>
-                <a:solidFill>
-                  <a:schemeClr val="tx1"/>
-                </a:solidFill>
-              </a:ln>
-            </p:spPr>
-            <p:style>
-              <a:lnRef idx="2">
-                <a:schemeClr val="accent1">
-                  <a:lumMod val="75000"/>
-                </a:schemeClr>
-              </a:lnRef>
-              <a:fillRef idx="1">
-                <a:schemeClr val="accent1"/>
-              </a:fillRef>
-              <a:effectRef idx="0">
-                <a:srgbClr val="FFFFFF"/>
-              </a:effectRef>
-              <a:fontRef idx="minor">
-                <a:schemeClr val="lt1"/>
-              </a:fontRef>
-            </p:style>
-            <p:txBody>
-              <a:bodyPr rtlCol="0" anchor="ctr"/>
-              <a:p>
-                <a:pPr algn="ctr"/>
-                <a:endParaRPr lang="es-MX" altLang="en-US" u="sng"/>
-              </a:p>
-            </p:txBody>
-          </p:sp>
-          <p:sp>
-            <p:nvSpPr>
-              <p:cNvPr id="99" name="Óvalo 98"/>
-              <p:cNvSpPr/>
-              <p:nvPr/>
-            </p:nvSpPr>
-            <p:spPr>
-              <a:xfrm>
-                <a:off x="8232" y="957"/>
-                <a:ext cx="276" cy="277"/>
-              </a:xfrm>
-              <a:prstGeom prst="ellipse">
-                <a:avLst/>
-              </a:prstGeom>
-              <a:solidFill>
-                <a:schemeClr val="bg1"/>
-              </a:solidFill>
-              <a:ln>
-                <a:solidFill>
-                  <a:schemeClr val="tx1"/>
-                </a:solidFill>
-              </a:ln>
-            </p:spPr>
-            <p:style>
-              <a:lnRef idx="2">
-                <a:schemeClr val="accent1">
-                  <a:lumMod val="75000"/>
-                </a:schemeClr>
-              </a:lnRef>
-              <a:fillRef idx="1">
-                <a:schemeClr val="accent1"/>
-              </a:fillRef>
-              <a:effectRef idx="0">
-                <a:srgbClr val="FFFFFF"/>
-              </a:effectRef>
-              <a:fontRef idx="minor">
-                <a:schemeClr val="lt1"/>
-              </a:fontRef>
-            </p:style>
-            <p:txBody>
-              <a:bodyPr rtlCol="0" anchor="ctr"/>
-              <a:p>
-                <a:pPr algn="ctr"/>
-                <a:endParaRPr lang="es-MX" altLang="en-US" u="sng"/>
-              </a:p>
-            </p:txBody>
-          </p:sp>
-        </p:grpSp>
-        <p:cxnSp>
-          <p:nvCxnSpPr>
-            <p:cNvPr id="102" name="Conector angular 101"/>
-            <p:cNvCxnSpPr>
-              <a:stCxn id="82" idx="4"/>
-              <a:endCxn id="60" idx="4"/>
-            </p:cNvCxnSpPr>
-            <p:nvPr/>
-          </p:nvCxnSpPr>
-          <p:spPr>
-            <a:xfrm rot="5400000" flipV="1">
-              <a:off x="5999" y="4485"/>
-              <a:ext cx="2245" cy="4553"/>
-            </a:xfrm>
-            <a:prstGeom prst="bentConnector3">
-              <a:avLst>
-                <a:gd name="adj1" fmla="val 38084"/>
-              </a:avLst>
-            </a:prstGeom>
-            <a:ln w="28575">
-              <a:solidFill>
-                <a:srgbClr val="FFFF00"/>
+                <a:schemeClr val="tx1"/>
               </a:solidFill>
             </a:ln>
           </p:spPr>
-          <p:style>
-            <a:lnRef idx="2">
-              <a:schemeClr val="accent1"/>
-            </a:lnRef>
-            <a:fillRef idx="0">
-              <a:srgbClr val="FFFFFF"/>
-            </a:fillRef>
-            <a:effectRef idx="0">
-              <a:srgbClr val="FFFFFF"/>
-            </a:effectRef>
-            <a:fontRef idx="minor">
+          <p:txBody>
+            <a:bodyPr wrap="square" rtlCol="0">
+              <a:noAutofit/>
+            </a:bodyPr>
+            <a:p>
+              <a:pPr algn="ctr"/>
+              <a:r>
+                <a:rPr lang="es-MX" altLang="en-US" sz="800" b="1"/>
+                <a:t>NC</a:t>
+              </a:r>
+              <a:endParaRPr lang="es-MX" altLang="en-US" sz="800" b="1"/>
+            </a:p>
+          </p:txBody>
+        </p:sp>
+        <p:sp>
+          <p:nvSpPr>
+            <p:cNvPr id="26" name="Cuadro de texto 25"/>
+            <p:cNvSpPr txBox="1"/>
+            <p:nvPr/>
+          </p:nvSpPr>
+          <p:spPr>
+            <a:xfrm>
+              <a:off x="9051" y="6697"/>
+              <a:ext cx="266" cy="262"/>
+            </a:xfrm>
+            <a:prstGeom prst="rect">
+              <a:avLst/>
+            </a:prstGeom>
+            <a:solidFill>
+              <a:schemeClr val="bg1"/>
+            </a:solidFill>
+            <a:ln>
+              <a:solidFill>
+                <a:schemeClr val="tx1"/>
+              </a:solidFill>
+            </a:ln>
+          </p:spPr>
+          <p:txBody>
+            <a:bodyPr wrap="square" rtlCol="0">
+              <a:noAutofit/>
+            </a:bodyPr>
+            <a:p>
+              <a:pPr algn="ctr">
+                <a:lnSpc>
+                  <a:spcPct val="80000"/>
+                </a:lnSpc>
+              </a:pPr>
+              <a:r>
+                <a:rPr lang="es-MX" altLang="en-US" sz="800" b="1"/>
+                <a:t>S</a:t>
+              </a:r>
+              <a:endParaRPr lang="es-MX" altLang="en-US" sz="800" b="1"/>
+            </a:p>
+          </p:txBody>
+        </p:sp>
+        <p:sp>
+          <p:nvSpPr>
+            <p:cNvPr id="27" name="Cuadro de texto 26"/>
+            <p:cNvSpPr txBox="1"/>
+            <p:nvPr/>
+          </p:nvSpPr>
+          <p:spPr>
+            <a:xfrm>
+              <a:off x="9051" y="7061"/>
+              <a:ext cx="266" cy="262"/>
+            </a:xfrm>
+            <a:prstGeom prst="rect">
+              <a:avLst/>
+            </a:prstGeom>
+            <a:solidFill>
+              <a:schemeClr val="bg1"/>
+            </a:solidFill>
+            <a:ln>
+              <a:solidFill>
+                <a:schemeClr val="tx1"/>
+              </a:solidFill>
+            </a:ln>
+          </p:spPr>
+          <p:txBody>
+            <a:bodyPr wrap="square" rtlCol="0">
+              <a:noAutofit/>
+            </a:bodyPr>
+            <a:p>
+              <a:pPr algn="ctr">
+                <a:lnSpc>
+                  <a:spcPct val="80000"/>
+                </a:lnSpc>
+              </a:pPr>
+              <a:r>
+                <a:rPr lang="es-MX" altLang="en-US" sz="800" b="1"/>
+                <a:t>+</a:t>
+              </a:r>
+              <a:endParaRPr lang="es-MX" altLang="en-US" sz="800" b="1"/>
+            </a:p>
+          </p:txBody>
+        </p:sp>
+        <p:sp>
+          <p:nvSpPr>
+            <p:cNvPr id="28" name="Cuadro de texto 27"/>
+            <p:cNvSpPr txBox="1"/>
+            <p:nvPr/>
+          </p:nvSpPr>
+          <p:spPr>
+            <a:xfrm>
+              <a:off x="9051" y="7406"/>
+              <a:ext cx="266" cy="262"/>
+            </a:xfrm>
+            <a:prstGeom prst="rect">
+              <a:avLst/>
+            </a:prstGeom>
+            <a:solidFill>
+              <a:schemeClr val="bg1"/>
+            </a:solidFill>
+            <a:ln>
+              <a:solidFill>
+                <a:schemeClr val="tx1"/>
+              </a:solidFill>
+            </a:ln>
+          </p:spPr>
+          <p:txBody>
+            <a:bodyPr wrap="square" rtlCol="0">
+              <a:noAutofit/>
+            </a:bodyPr>
+            <a:p>
+              <a:pPr algn="ctr">
+                <a:lnSpc>
+                  <a:spcPct val="80000"/>
+                </a:lnSpc>
+              </a:pPr>
+              <a:r>
+                <a:rPr lang="es-MX" altLang="en-US" sz="800" b="1"/>
+                <a:t>-</a:t>
+              </a:r>
+              <a:endParaRPr lang="es-MX" altLang="en-US" sz="800" b="1"/>
+            </a:p>
+          </p:txBody>
+        </p:sp>
+      </p:grpSp>
+      <p:cxnSp>
+        <p:nvCxnSpPr>
+          <p:cNvPr id="36" name="Conector angular 35"/>
+          <p:cNvCxnSpPr>
+            <a:stCxn id="13" idx="6"/>
+            <a:endCxn id="33" idx="4"/>
+          </p:cNvCxnSpPr>
+          <p:nvPr/>
+        </p:nvCxnSpPr>
+        <p:spPr>
+          <a:xfrm rot="10800000" flipV="1">
+            <a:off x="2142490" y="3912870"/>
+            <a:ext cx="6895465" cy="2813050"/>
+          </a:xfrm>
+          <a:prstGeom prst="bentConnector3">
+            <a:avLst>
+              <a:gd name="adj1" fmla="val 49995"/>
+            </a:avLst>
+          </a:prstGeom>
+          <a:ln w="28575">
+            <a:solidFill>
               <a:schemeClr val="tx1"/>
-            </a:fontRef>
-          </p:style>
-        </p:cxnSp>
-        <p:cxnSp>
-          <p:nvCxnSpPr>
-            <p:cNvPr id="103" name="Conector angular 102"/>
-            <p:cNvCxnSpPr>
-              <a:stCxn id="72" idx="4"/>
-              <a:endCxn id="61" idx="4"/>
-            </p:cNvCxnSpPr>
+            </a:solidFill>
+          </a:ln>
+        </p:spPr>
+        <p:style>
+          <a:lnRef idx="2">
+            <a:schemeClr val="accent1"/>
+          </a:lnRef>
+          <a:fillRef idx="0">
+            <a:srgbClr val="FFFFFF"/>
+          </a:fillRef>
+          <a:effectRef idx="0">
+            <a:srgbClr val="FFFFFF"/>
+          </a:effectRef>
+          <a:fontRef idx="minor">
+            <a:schemeClr val="tx1"/>
+          </a:fontRef>
+        </p:style>
+      </p:cxnSp>
+      <p:cxnSp>
+        <p:nvCxnSpPr>
+          <p:cNvPr id="37" name="Conector angular 36"/>
+          <p:cNvCxnSpPr>
+            <a:stCxn id="17" idx="2"/>
+            <a:endCxn id="32" idx="4"/>
+          </p:cNvCxnSpPr>
+          <p:nvPr/>
+        </p:nvCxnSpPr>
+        <p:spPr>
+          <a:xfrm flipH="1" flipV="1">
+            <a:off x="2142490" y="6341745"/>
+            <a:ext cx="6191885" cy="629920"/>
+          </a:xfrm>
+          <a:prstGeom prst="bentConnector3">
+            <a:avLst>
+              <a:gd name="adj1" fmla="val -3846"/>
+            </a:avLst>
+          </a:prstGeom>
+          <a:ln w="28575">
+            <a:solidFill>
+              <a:srgbClr val="FF0000"/>
+            </a:solidFill>
+          </a:ln>
+        </p:spPr>
+        <p:style>
+          <a:lnRef idx="2">
+            <a:schemeClr val="accent1"/>
+          </a:lnRef>
+          <a:fillRef idx="0">
+            <a:srgbClr val="FFFFFF"/>
+          </a:fillRef>
+          <a:effectRef idx="0">
+            <a:srgbClr val="FFFFFF"/>
+          </a:effectRef>
+          <a:fontRef idx="minor">
+            <a:schemeClr val="tx1"/>
+          </a:fontRef>
+        </p:style>
+      </p:cxnSp>
+      <p:cxnSp>
+        <p:nvCxnSpPr>
+          <p:cNvPr id="38" name="Conector angular 37"/>
+          <p:cNvCxnSpPr>
+            <a:stCxn id="18" idx="2"/>
+            <a:endCxn id="12" idx="6"/>
+          </p:cNvCxnSpPr>
+          <p:nvPr/>
+        </p:nvCxnSpPr>
+        <p:spPr>
+          <a:xfrm flipV="1">
+            <a:off x="8334375" y="3574415"/>
+            <a:ext cx="703580" cy="3622040"/>
+          </a:xfrm>
+          <a:prstGeom prst="bentConnector3">
+            <a:avLst>
+              <a:gd name="adj1" fmla="val 50000"/>
+            </a:avLst>
+          </a:prstGeom>
+          <a:ln w="28575">
+            <a:solidFill>
+              <a:srgbClr val="FF0000"/>
+            </a:solidFill>
+          </a:ln>
+        </p:spPr>
+        <p:style>
+          <a:lnRef idx="2">
+            <a:schemeClr val="accent1"/>
+          </a:lnRef>
+          <a:fillRef idx="0">
+            <a:srgbClr val="FFFFFF"/>
+          </a:fillRef>
+          <a:effectRef idx="0">
+            <a:srgbClr val="FFFFFF"/>
+          </a:effectRef>
+          <a:fontRef idx="minor">
+            <a:schemeClr val="tx1"/>
+          </a:fontRef>
+        </p:style>
+      </p:cxnSp>
+      <p:cxnSp>
+        <p:nvCxnSpPr>
+          <p:cNvPr id="39" name="Conector angular 38"/>
+          <p:cNvCxnSpPr/>
+          <p:nvPr/>
+        </p:nvCxnSpPr>
+        <p:spPr>
+          <a:xfrm rot="10800000">
+            <a:off x="1112520" y="549910"/>
+            <a:ext cx="5486400" cy="6422390"/>
+          </a:xfrm>
+          <a:prstGeom prst="bentConnector4">
+            <a:avLst>
+              <a:gd name="adj1" fmla="val 137349"/>
+              <a:gd name="adj2" fmla="val 105981"/>
+            </a:avLst>
+          </a:prstGeom>
+          <a:ln w="28575">
+            <a:solidFill>
+              <a:srgbClr val="FF0000"/>
+            </a:solidFill>
+          </a:ln>
+        </p:spPr>
+        <p:style>
+          <a:lnRef idx="2">
+            <a:schemeClr val="accent1"/>
+          </a:lnRef>
+          <a:fillRef idx="0">
+            <a:srgbClr val="FFFFFF"/>
+          </a:fillRef>
+          <a:effectRef idx="0">
+            <a:srgbClr val="FFFFFF"/>
+          </a:effectRef>
+          <a:fontRef idx="minor">
+            <a:schemeClr val="tx1"/>
+          </a:fontRef>
+        </p:style>
+      </p:cxnSp>
+      <p:cxnSp>
+        <p:nvCxnSpPr>
+          <p:cNvPr id="40" name="Conector angular 39"/>
+          <p:cNvCxnSpPr>
+            <a:stCxn id="21" idx="6"/>
+            <a:endCxn id="73" idx="1"/>
+          </p:cNvCxnSpPr>
+          <p:nvPr/>
+        </p:nvCxnSpPr>
+        <p:spPr>
+          <a:xfrm rot="10800000">
+            <a:off x="1226820" y="549910"/>
+            <a:ext cx="5372100" cy="6647180"/>
+          </a:xfrm>
+          <a:prstGeom prst="bentConnector4">
+            <a:avLst>
+              <a:gd name="adj1" fmla="val 148475"/>
+              <a:gd name="adj2" fmla="val 108712"/>
+            </a:avLst>
+          </a:prstGeom>
+          <a:ln w="28575">
+            <a:solidFill>
+              <a:schemeClr val="tx1"/>
+            </a:solidFill>
+          </a:ln>
+        </p:spPr>
+        <p:style>
+          <a:lnRef idx="2">
+            <a:schemeClr val="accent1"/>
+          </a:lnRef>
+          <a:fillRef idx="0">
+            <a:srgbClr val="FFFFFF"/>
+          </a:fillRef>
+          <a:effectRef idx="0">
+            <a:srgbClr val="FFFFFF"/>
+          </a:effectRef>
+          <a:fontRef idx="minor">
+            <a:schemeClr val="tx1"/>
+          </a:fontRef>
+        </p:style>
+      </p:cxnSp>
+      <p:grpSp>
+        <p:nvGrpSpPr>
+          <p:cNvPr id="35" name="Grupo 34"/>
+          <p:cNvGrpSpPr/>
+          <p:nvPr/>
+        </p:nvGrpSpPr>
+        <p:grpSpPr>
+          <a:xfrm rot="5400000">
+            <a:off x="628333" y="5586413"/>
+            <a:ext cx="1177290" cy="1850390"/>
+            <a:chOff x="10635" y="8107"/>
+            <a:chExt cx="1854" cy="2914"/>
+          </a:xfrm>
+        </p:grpSpPr>
+        <p:pic>
+          <p:nvPicPr>
+            <p:cNvPr id="31" name="Imagen 30"/>
+            <p:cNvPicPr>
+              <a:picLocks noChangeAspect="1"/>
+            </p:cNvPicPr>
             <p:nvPr/>
-          </p:nvCxnSpPr>
+          </p:nvPicPr>
+          <p:blipFill>
+            <a:blip r:embed="rId7"/>
+            <a:srcRect l="15778" t="28976" r="51413" b="26881"/>
+            <a:stretch>
+              <a:fillRect/>
+            </a:stretch>
+          </p:blipFill>
           <p:spPr>
-            <a:xfrm rot="5400000" flipV="1">
-              <a:off x="5053" y="3263"/>
-              <a:ext cx="2245" cy="6997"/>
+            <a:xfrm rot="5400000">
+              <a:off x="10186" y="8718"/>
+              <a:ext cx="2751" cy="1854"/>
             </a:xfrm>
-            <a:prstGeom prst="bentConnector3">
-              <a:avLst>
-                <a:gd name="adj1" fmla="val 59866"/>
-              </a:avLst>
+            <a:prstGeom prst="rect">
+              <a:avLst/>
             </a:prstGeom>
-            <a:ln w="28575">
+          </p:spPr>
+        </p:pic>
+        <p:sp>
+          <p:nvSpPr>
+            <p:cNvPr id="32" name="Óvalo 31"/>
+            <p:cNvSpPr/>
+            <p:nvPr/>
+          </p:nvSpPr>
+          <p:spPr>
+            <a:xfrm rot="10800000">
+              <a:off x="11156" y="8107"/>
+              <a:ext cx="276" cy="277"/>
+            </a:xfrm>
+            <a:prstGeom prst="ellipse">
+              <a:avLst/>
+            </a:prstGeom>
+            <a:solidFill>
+              <a:schemeClr val="bg1"/>
+            </a:solidFill>
+            <a:ln>
               <a:solidFill>
                 <a:schemeClr val="tx1"/>
               </a:solidFill>
@@ -5952,40 +6935,46 @@
           </p:spPr>
           <p:style>
             <a:lnRef idx="2">
+              <a:schemeClr val="accent1">
+                <a:lumMod val="75000"/>
+              </a:schemeClr>
+            </a:lnRef>
+            <a:fillRef idx="1">
               <a:schemeClr val="accent1"/>
-            </a:lnRef>
-            <a:fillRef idx="0">
-              <a:srgbClr val="FFFFFF"/>
             </a:fillRef>
             <a:effectRef idx="0">
               <a:srgbClr val="FFFFFF"/>
             </a:effectRef>
             <a:fontRef idx="minor">
-              <a:schemeClr val="tx1"/>
+              <a:schemeClr val="lt1"/>
             </a:fontRef>
           </p:style>
-        </p:cxnSp>
-        <p:cxnSp>
-          <p:nvCxnSpPr>
-            <p:cNvPr id="104" name="Conector angular 103"/>
-            <p:cNvCxnSpPr>
-              <a:stCxn id="73" idx="0"/>
-              <a:endCxn id="2" idx="2"/>
-            </p:cNvCxnSpPr>
+          <p:txBody>
+            <a:bodyPr rtlCol="0" anchor="ctr"/>
+            <a:p>
+              <a:pPr algn="ctr"/>
+              <a:endParaRPr lang="es-MX" altLang="en-US" u="sng"/>
+            </a:p>
+          </p:txBody>
+        </p:sp>
+        <p:sp>
+          <p:nvSpPr>
+            <p:cNvPr id="33" name="Óvalo 32"/>
+            <p:cNvSpPr/>
             <p:nvPr/>
-          </p:nvCxnSpPr>
+          </p:nvSpPr>
           <p:spPr>
-            <a:xfrm rot="16200000" flipH="1">
-              <a:off x="6521" y="-2785"/>
-              <a:ext cx="774" cy="8463"/>
+            <a:xfrm rot="10800000">
+              <a:off x="11761" y="8107"/>
+              <a:ext cx="276" cy="277"/>
             </a:xfrm>
-            <a:prstGeom prst="bentConnector4">
-              <a:avLst>
-                <a:gd name="adj1" fmla="val -97739"/>
-                <a:gd name="adj2" fmla="val 83274"/>
-              </a:avLst>
+            <a:prstGeom prst="ellipse">
+              <a:avLst/>
             </a:prstGeom>
-            <a:ln w="28575">
+            <a:solidFill>
+              <a:schemeClr val="bg1"/>
+            </a:solidFill>
+            <a:ln>
               <a:solidFill>
                 <a:schemeClr val="tx1"/>
               </a:solidFill>
@@ -5993,101 +6982,129 @@
           </p:spPr>
           <p:style>
             <a:lnRef idx="2">
+              <a:schemeClr val="accent1">
+                <a:lumMod val="75000"/>
+              </a:schemeClr>
+            </a:lnRef>
+            <a:fillRef idx="1">
               <a:schemeClr val="accent1"/>
-            </a:lnRef>
-            <a:fillRef idx="0">
-              <a:srgbClr val="FFFFFF"/>
             </a:fillRef>
             <a:effectRef idx="0">
               <a:srgbClr val="FFFFFF"/>
             </a:effectRef>
             <a:fontRef idx="minor">
-              <a:schemeClr val="tx1"/>
+              <a:schemeClr val="lt1"/>
             </a:fontRef>
           </p:style>
-        </p:cxnSp>
-        <p:cxnSp>
-          <p:nvCxnSpPr>
-            <p:cNvPr id="106" name="Conector angular 105"/>
-            <p:cNvCxnSpPr>
-              <a:stCxn id="96" idx="4"/>
-              <a:endCxn id="9" idx="2"/>
-            </p:cNvCxnSpPr>
+          <p:txBody>
+            <a:bodyPr rtlCol="0" anchor="ctr"/>
+            <a:p>
+              <a:pPr algn="ctr"/>
+              <a:endParaRPr lang="es-MX" altLang="en-US" u="sng"/>
+            </a:p>
+          </p:txBody>
+        </p:sp>
+        <p:sp>
+          <p:nvSpPr>
+            <p:cNvPr id="34" name="Óvalo 33"/>
+            <p:cNvSpPr/>
             <p:nvPr/>
-          </p:nvCxnSpPr>
+          </p:nvSpPr>
           <p:spPr>
-            <a:xfrm rot="5400000" flipH="1" flipV="1">
-              <a:off x="8025" y="2524"/>
-              <a:ext cx="2933" cy="3297"/>
+            <a:xfrm rot="16200000">
+              <a:off x="11157" y="8632"/>
+              <a:ext cx="934" cy="938"/>
             </a:xfrm>
-            <a:prstGeom prst="bentConnector4">
-              <a:avLst>
-                <a:gd name="adj1" fmla="val -21445"/>
-                <a:gd name="adj2" fmla="val 59811"/>
-              </a:avLst>
+            <a:prstGeom prst="ellipse">
+              <a:avLst/>
             </a:prstGeom>
-            <a:ln w="28575">
+            <a:solidFill>
+              <a:schemeClr val="bg1"/>
+            </a:solidFill>
+            <a:ln>
               <a:solidFill>
-                <a:srgbClr val="92D050"/>
+                <a:schemeClr val="tx1"/>
               </a:solidFill>
             </a:ln>
           </p:spPr>
           <p:style>
             <a:lnRef idx="2">
+              <a:schemeClr val="accent1">
+                <a:lumMod val="75000"/>
+              </a:schemeClr>
+            </a:lnRef>
+            <a:fillRef idx="1">
               <a:schemeClr val="accent1"/>
-            </a:lnRef>
-            <a:fillRef idx="0">
-              <a:srgbClr val="FFFFFF"/>
             </a:fillRef>
             <a:effectRef idx="0">
               <a:srgbClr val="FFFFFF"/>
             </a:effectRef>
             <a:fontRef idx="minor">
-              <a:schemeClr val="tx1"/>
+              <a:schemeClr val="lt1"/>
             </a:fontRef>
           </p:style>
-        </p:cxnSp>
-        <p:cxnSp>
-          <p:nvCxnSpPr>
-            <p:cNvPr id="107" name="Conector angular 106"/>
-            <p:cNvCxnSpPr>
-              <a:stCxn id="90" idx="3"/>
-            </p:cNvCxnSpPr>
-            <p:nvPr/>
-          </p:nvCxnSpPr>
-          <p:spPr>
-            <a:xfrm rot="5400000" flipH="1" flipV="1">
-              <a:off x="7215" y="1674"/>
-              <a:ext cx="3184" cy="4665"/>
-            </a:xfrm>
-            <a:prstGeom prst="bentConnector4">
-              <a:avLst>
-                <a:gd name="adj1" fmla="val -13050"/>
-                <a:gd name="adj2" fmla="val 64640"/>
-              </a:avLst>
-            </a:prstGeom>
-            <a:ln w="28575">
-              <a:solidFill>
-                <a:srgbClr val="0000FE"/>
-              </a:solidFill>
-            </a:ln>
-          </p:spPr>
-          <p:style>
-            <a:lnRef idx="2">
-              <a:schemeClr val="accent1"/>
-            </a:lnRef>
-            <a:fillRef idx="0">
-              <a:srgbClr val="FFFFFF"/>
-            </a:fillRef>
-            <a:effectRef idx="0">
-              <a:srgbClr val="FFFFFF"/>
-            </a:effectRef>
-            <a:fontRef idx="minor">
-              <a:schemeClr val="tx1"/>
-            </a:fontRef>
-          </p:style>
-        </p:cxnSp>
+          <p:txBody>
+            <a:bodyPr lIns="0" tIns="0" rIns="0" bIns="0" rtlCol="0" anchor="ctr"/>
+            <a:p>
+              <a:pPr algn="ctr"/>
+              <a:r>
+                <a:rPr lang="es-MX" altLang="en-US" sz="1600" b="1">
+                  <a:solidFill>
+                    <a:srgbClr val="FF0000"/>
+                  </a:solidFill>
+                </a:rPr>
+                <a:t>12V</a:t>
+              </a:r>
+              <a:endParaRPr lang="es-MX" altLang="en-US" sz="1600" b="1">
+                <a:solidFill>
+                  <a:srgbClr val="FF0000"/>
+                </a:solidFill>
+              </a:endParaRPr>
+            </a:p>
+          </p:txBody>
+        </p:sp>
       </p:grpSp>
+      <p:cxnSp>
+        <p:nvCxnSpPr>
+          <p:cNvPr id="41" name="Conector angular 40"/>
+          <p:cNvCxnSpPr>
+            <a:stCxn id="19" idx="6"/>
+            <a:endCxn id="85" idx="0"/>
+          </p:cNvCxnSpPr>
+          <p:nvPr/>
+        </p:nvCxnSpPr>
+        <p:spPr>
+          <a:xfrm rot="10800000">
+            <a:off x="2486660" y="530860"/>
+            <a:ext cx="4112260" cy="6233160"/>
+          </a:xfrm>
+          <a:prstGeom prst="bentConnector4">
+            <a:avLst>
+              <a:gd name="adj1" fmla="val 176374"/>
+              <a:gd name="adj2" fmla="val 112337"/>
+            </a:avLst>
+          </a:prstGeom>
+          <a:ln w="28575">
+            <a:solidFill>
+              <a:srgbClr val="FE00DE"/>
+            </a:solidFill>
+          </a:ln>
+        </p:spPr>
+        <p:style>
+          <a:lnRef idx="2">
+            <a:schemeClr val="accent1"/>
+          </a:lnRef>
+          <a:fillRef idx="0">
+            <a:srgbClr val="FFFFFF"/>
+          </a:fillRef>
+          <a:effectRef idx="0">
+            <a:srgbClr val="FFFFFF"/>
+          </a:effectRef>
+          <a:fontRef idx="minor">
+            <a:schemeClr val="tx1"/>
+          </a:fontRef>
+        </p:style>
+      </p:cxnSp>
     </p:spTree>
   </p:cSld>
   <p:clrMapOvr>

--- a/Diagrama.pptx
+++ b/Diagrama.pptx
@@ -135,7 +135,7 @@
       </p:grpSpPr>
       <p:sp>
         <p:nvSpPr>
-          <p:cNvPr id="2134427020" name="Header Placeholder 1"/>
+          <p:cNvPr id="922710685" name="Header Placeholder 1"/>
           <p:cNvSpPr>
             <a:spLocks noGrp="1"/>
           </p:cNvSpPr>
@@ -169,7 +169,7 @@
       </p:sp>
       <p:sp>
         <p:nvSpPr>
-          <p:cNvPr id="1183125866" name="Slide Number Placeholder 2"/>
+          <p:cNvPr id="701816180" name="Slide Number Placeholder 2"/>
           <p:cNvSpPr>
             <a:spLocks noGrp="1"/>
           </p:cNvSpPr>
@@ -207,7 +207,7 @@
       </p:sp>
       <p:sp>
         <p:nvSpPr>
-          <p:cNvPr id="1387284277" name="Slide Image Placehoder 3"/>
+          <p:cNvPr id="704919007" name="Slide Image Placehoder 3"/>
           <p:cNvSpPr>
             <a:spLocks noChangeAspect="1" noGrp="1" noRot="1"/>
           </p:cNvSpPr>
@@ -243,7 +243,7 @@
       </p:sp>
       <p:sp>
         <p:nvSpPr>
-          <p:cNvPr id="678858238" name="Note Placeholder 4"/>
+          <p:cNvPr id="2087970083" name="Note Placeholder 4"/>
           <p:cNvSpPr>
             <a:spLocks noGrp="1"/>
           </p:cNvSpPr>
@@ -317,7 +317,7 @@
       </p:sp>
       <p:sp>
         <p:nvSpPr>
-          <p:cNvPr id="720027915" name="Footer Placeholder 5"/>
+          <p:cNvPr id="343018602" name="Footer Placeholder 5"/>
           <p:cNvSpPr>
             <a:spLocks noGrp="1"/>
           </p:cNvSpPr>
@@ -351,7 +351,7 @@
       </p:sp>
       <p:sp>
         <p:nvSpPr>
-          <p:cNvPr id="1813060906" name="Slide Number Placeholder 6"/>
+          <p:cNvPr id="8799818" name="Slide Number Placeholder 6"/>
           <p:cNvSpPr>
             <a:spLocks noGrp="1"/>
           </p:cNvSpPr>
@@ -504,7 +504,7 @@
       </p:grpSpPr>
       <p:sp>
         <p:nvSpPr>
-          <p:cNvPr id="2" name="Slide Image Placeholder 1"/>
+          <p:cNvPr id="1469708269" name="Slide Image Placeholder 1"/>
           <p:cNvSpPr>
             <a:spLocks noChangeAspect="1" noGrp="1" noRot="1"/>
           </p:cNvSpPr>
@@ -516,7 +516,7 @@
       </p:sp>
       <p:sp>
         <p:nvSpPr>
-          <p:cNvPr id="3" name="Notes Placeholder 2"/>
+          <p:cNvPr id="612299012" name="Notes Placeholder 2"/>
           <p:cNvSpPr>
             <a:spLocks noGrp="1"/>
           </p:cNvSpPr>
@@ -538,7 +538,7 @@
       </p:sp>
       <p:sp>
         <p:nvSpPr>
-          <p:cNvPr id="4" name="Slide Number Placeholder 3"/>
+          <p:cNvPr id="320637433" name="Slide Number Placeholder 3"/>
           <p:cNvSpPr>
             <a:spLocks noGrp="1"/>
           </p:cNvSpPr>
@@ -589,7 +589,7 @@
       </p:grpSpPr>
       <p:sp>
         <p:nvSpPr>
-          <p:cNvPr id="2" name="Slide Image Placeholder 1"/>
+          <p:cNvPr id="171425577" name="Slide Image Placeholder 1"/>
           <p:cNvSpPr>
             <a:spLocks noChangeAspect="1" noGrp="1" noRot="1"/>
           </p:cNvSpPr>
@@ -601,7 +601,7 @@
       </p:sp>
       <p:sp>
         <p:nvSpPr>
-          <p:cNvPr id="3" name="Notes Placeholder 2"/>
+          <p:cNvPr id="1711574350" name="Notes Placeholder 2"/>
           <p:cNvSpPr>
             <a:spLocks noGrp="1"/>
           </p:cNvSpPr>
@@ -623,7 +623,7 @@
       </p:sp>
       <p:sp>
         <p:nvSpPr>
-          <p:cNvPr id="4" name="Slide Number Placeholder 3"/>
+          <p:cNvPr id="1166583299" name="Slide Number Placeholder 3"/>
           <p:cNvSpPr>
             <a:spLocks noGrp="1"/>
           </p:cNvSpPr>
@@ -674,7 +674,7 @@
       </p:grpSpPr>
       <p:sp>
         <p:nvSpPr>
-          <p:cNvPr id="995326243" name="Title 1"/>
+          <p:cNvPr id="804340906" name="Title 1"/>
           <p:cNvSpPr>
             <a:spLocks noGrp="1"/>
           </p:cNvSpPr>
@@ -716,7 +716,7 @@
       </p:sp>
       <p:sp>
         <p:nvSpPr>
-          <p:cNvPr id="998665222" name="Date Placeholder  3"/>
+          <p:cNvPr id="1509603274" name="Date Placeholder  3"/>
           <p:cNvSpPr>
             <a:spLocks noGrp="1"/>
           </p:cNvSpPr>
@@ -742,7 +742,7 @@
       </p:sp>
       <p:sp>
         <p:nvSpPr>
-          <p:cNvPr id="407144868" name="Footer Placeholder 4"/>
+          <p:cNvPr id="316200211" name="Footer Placeholder 4"/>
           <p:cNvSpPr>
             <a:spLocks noGrp="1"/>
           </p:cNvSpPr>
@@ -764,7 +764,7 @@
       </p:sp>
       <p:sp>
         <p:nvSpPr>
-          <p:cNvPr id="1861937046" name="Slide Number Placeholder 5"/>
+          <p:cNvPr id="434529149" name="Slide Number Placeholder 5"/>
           <p:cNvSpPr>
             <a:spLocks noGrp="1"/>
           </p:cNvSpPr>
@@ -790,7 +790,7 @@
       </p:sp>
       <p:sp>
         <p:nvSpPr>
-          <p:cNvPr id="1975132455" name="Subtitle 2"/>
+          <p:cNvPr id="562085891" name="Subtitle 2"/>
           <p:cNvSpPr>
             <a:spLocks noGrp="1"/>
           </p:cNvSpPr>
@@ -894,7 +894,7 @@
       </p:grpSpPr>
       <p:sp>
         <p:nvSpPr>
-          <p:cNvPr id="126232771" name="Date Placeholder 2"/>
+          <p:cNvPr id="1581616305" name="Date Placeholder 2"/>
           <p:cNvSpPr>
             <a:spLocks noGrp="1"/>
           </p:cNvSpPr>
@@ -920,7 +920,7 @@
       </p:sp>
       <p:sp>
         <p:nvSpPr>
-          <p:cNvPr id="1935204894" name="Footer Placeholder 3"/>
+          <p:cNvPr id="1423146079" name="Footer Placeholder 3"/>
           <p:cNvSpPr>
             <a:spLocks noGrp="1"/>
           </p:cNvSpPr>
@@ -942,7 +942,7 @@
       </p:sp>
       <p:sp>
         <p:nvSpPr>
-          <p:cNvPr id="723864146" name="Slide Number Placeholder 4"/>
+          <p:cNvPr id="293344749" name="Slide Number Placeholder 4"/>
           <p:cNvSpPr>
             <a:spLocks noGrp="1"/>
           </p:cNvSpPr>
@@ -968,7 +968,7 @@
       </p:sp>
       <p:sp>
         <p:nvSpPr>
-          <p:cNvPr id="246108184" name="Content Placeholder 6"/>
+          <p:cNvPr id="964452036" name="Content Placeholder 6"/>
           <p:cNvSpPr>
             <a:spLocks noGrp="1"/>
           </p:cNvSpPr>
@@ -1064,7 +1064,7 @@
       </p:grpSpPr>
       <p:sp>
         <p:nvSpPr>
-          <p:cNvPr id="1273017849" name="Título 1"/>
+          <p:cNvPr id="1440241388" name="Título 1"/>
           <p:cNvSpPr>
             <a:spLocks noGrp="1"/>
           </p:cNvSpPr>
@@ -1090,7 +1090,7 @@
       </p:sp>
       <p:sp>
         <p:nvSpPr>
-          <p:cNvPr id="260702490" name="Marcador de texto 2"/>
+          <p:cNvPr id="1537748091" name="Marcador de texto 2"/>
           <p:cNvSpPr>
             <a:spLocks noGrp="1"/>
           </p:cNvSpPr>
@@ -1156,7 +1156,7 @@
       </p:sp>
       <p:sp>
         <p:nvSpPr>
-          <p:cNvPr id="700637900" name="Marcador de fecha 3"/>
+          <p:cNvPr id="328163186" name="Marcador de fecha 3"/>
           <p:cNvSpPr>
             <a:spLocks noGrp="1"/>
           </p:cNvSpPr>
@@ -1182,7 +1182,7 @@
       </p:sp>
       <p:sp>
         <p:nvSpPr>
-          <p:cNvPr id="312266939" name="Marcador de pie de página 4"/>
+          <p:cNvPr id="1793918160" name="Marcador de pie de página 4"/>
           <p:cNvSpPr>
             <a:spLocks noGrp="1"/>
           </p:cNvSpPr>
@@ -1204,7 +1204,7 @@
       </p:sp>
       <p:sp>
         <p:nvSpPr>
-          <p:cNvPr id="1960436502" name="Marcador de número de diapositiva 5"/>
+          <p:cNvPr id="1150906073" name="Marcador de número de diapositiva 5"/>
           <p:cNvSpPr>
             <a:spLocks noGrp="1"/>
           </p:cNvSpPr>
@@ -1255,7 +1255,7 @@
       </p:grpSpPr>
       <p:sp>
         <p:nvSpPr>
-          <p:cNvPr id="1465921594" name="Title 1"/>
+          <p:cNvPr id="1911312395" name="Title 1"/>
           <p:cNvSpPr>
             <a:spLocks noGrp="1"/>
           </p:cNvSpPr>
@@ -1294,7 +1294,7 @@
       </p:sp>
       <p:sp>
         <p:nvSpPr>
-          <p:cNvPr id="1436963756" name="Content Placeholder 2"/>
+          <p:cNvPr id="1007394956" name="Content Placeholder 2"/>
           <p:cNvSpPr>
             <a:spLocks noGrp="1"/>
           </p:cNvSpPr>
@@ -1428,7 +1428,7 @@
       </p:sp>
       <p:sp>
         <p:nvSpPr>
-          <p:cNvPr id="2022272705" name="Date Placeholder 3"/>
+          <p:cNvPr id="1559084967" name="Date Placeholder 3"/>
           <p:cNvSpPr>
             <a:spLocks noGrp="1"/>
           </p:cNvSpPr>
@@ -1454,7 +1454,7 @@
       </p:sp>
       <p:sp>
         <p:nvSpPr>
-          <p:cNvPr id="2025037665" name="Footer Placeholder 4"/>
+          <p:cNvPr id="1633423014" name="Footer Placeholder 4"/>
           <p:cNvSpPr>
             <a:spLocks noGrp="1"/>
           </p:cNvSpPr>
@@ -1476,7 +1476,7 @@
       </p:sp>
       <p:sp>
         <p:nvSpPr>
-          <p:cNvPr id="83664423" name="Slide Number Placeholder  5"/>
+          <p:cNvPr id="1965876216" name="Slide Number Placeholder  5"/>
           <p:cNvSpPr>
             <a:spLocks noGrp="1"/>
           </p:cNvSpPr>
@@ -1527,7 +1527,7 @@
       </p:grpSpPr>
       <p:sp>
         <p:nvSpPr>
-          <p:cNvPr id="1003622837" name="Title 1"/>
+          <p:cNvPr id="2024385694" name="Title 1"/>
           <p:cNvSpPr>
             <a:spLocks noGrp="1"/>
           </p:cNvSpPr>
@@ -1564,7 +1564,7 @@
       </p:sp>
       <p:sp>
         <p:nvSpPr>
-          <p:cNvPr id="675439495" name="Text Placeholder 2"/>
+          <p:cNvPr id="1177143551" name="Text Placeholder 2"/>
           <p:cNvSpPr>
             <a:spLocks noGrp="1"/>
           </p:cNvSpPr>
@@ -1688,7 +1688,7 @@
       </p:sp>
       <p:sp>
         <p:nvSpPr>
-          <p:cNvPr id="1217017568" name="Slide Number Placeholder 3"/>
+          <p:cNvPr id="1081094880" name="Slide Number Placeholder 3"/>
           <p:cNvSpPr>
             <a:spLocks noGrp="1"/>
           </p:cNvSpPr>
@@ -1714,7 +1714,7 @@
       </p:sp>
       <p:sp>
         <p:nvSpPr>
-          <p:cNvPr id="865785042" name="Footer Placeholder 4"/>
+          <p:cNvPr id="628433761" name="Footer Placeholder 4"/>
           <p:cNvSpPr>
             <a:spLocks noGrp="1"/>
           </p:cNvSpPr>
@@ -1736,7 +1736,7 @@
       </p:sp>
       <p:sp>
         <p:nvSpPr>
-          <p:cNvPr id="1875696579" name="Slide Number Placeholder 5"/>
+          <p:cNvPr id="1175257494" name="Slide Number Placeholder 5"/>
           <p:cNvSpPr>
             <a:spLocks noGrp="1"/>
           </p:cNvSpPr>
@@ -1787,7 +1787,7 @@
       </p:grpSpPr>
       <p:sp>
         <p:nvSpPr>
-          <p:cNvPr id="1772841500" name="Title 1"/>
+          <p:cNvPr id="1132681049" name="Title 1"/>
           <p:cNvSpPr>
             <a:spLocks noGrp="1"/>
           </p:cNvSpPr>
@@ -1824,7 +1824,7 @@
       </p:sp>
       <p:sp>
         <p:nvSpPr>
-          <p:cNvPr id="108378613" name="Content Placeholder 2"/>
+          <p:cNvPr id="959134673" name="Content Placeholder 2"/>
           <p:cNvSpPr>
             <a:spLocks noGrp="1"/>
           </p:cNvSpPr>
@@ -1973,7 +1973,7 @@
       </p:sp>
       <p:sp>
         <p:nvSpPr>
-          <p:cNvPr id="680751787" name="Content Placeholder 3"/>
+          <p:cNvPr id="471812102" name="Content Placeholder 3"/>
           <p:cNvSpPr>
             <a:spLocks noGrp="1"/>
           </p:cNvSpPr>
@@ -2115,7 +2115,7 @@
       </p:sp>
       <p:sp>
         <p:nvSpPr>
-          <p:cNvPr id="674537470" name="Date Placeholder 4"/>
+          <p:cNvPr id="520441787" name="Date Placeholder 4"/>
           <p:cNvSpPr>
             <a:spLocks noGrp="1"/>
           </p:cNvSpPr>
@@ -2141,7 +2141,7 @@
       </p:sp>
       <p:sp>
         <p:nvSpPr>
-          <p:cNvPr id="1483343463" name="Footer Placeholder 5"/>
+          <p:cNvPr id="912471280" name="Footer Placeholder 5"/>
           <p:cNvSpPr>
             <a:spLocks noGrp="1"/>
           </p:cNvSpPr>
@@ -2163,7 +2163,7 @@
       </p:sp>
       <p:sp>
         <p:nvSpPr>
-          <p:cNvPr id="420619224" name="Slide Number Placeholder 6"/>
+          <p:cNvPr id="1607708302" name="Slide Number Placeholder 6"/>
           <p:cNvSpPr>
             <a:spLocks noGrp="1"/>
           </p:cNvSpPr>
@@ -2214,7 +2214,7 @@
       </p:grpSpPr>
       <p:sp>
         <p:nvSpPr>
-          <p:cNvPr id="1009431977" name="Title 1"/>
+          <p:cNvPr id="2092893779" name="Title 1"/>
           <p:cNvSpPr>
             <a:spLocks noGrp="1"/>
           </p:cNvSpPr>
@@ -2249,7 +2249,7 @@
       </p:sp>
       <p:sp>
         <p:nvSpPr>
-          <p:cNvPr id="567703389" name="Text Placeholder 2"/>
+          <p:cNvPr id="756284731" name="Text Placeholder 2"/>
           <p:cNvSpPr>
             <a:spLocks noGrp="1"/>
           </p:cNvSpPr>
@@ -2320,7 +2320,7 @@
       </p:sp>
       <p:sp>
         <p:nvSpPr>
-          <p:cNvPr id="2066694074" name="Content Placeholder 3"/>
+          <p:cNvPr id="1867669030" name="Content Placeholder 3"/>
           <p:cNvSpPr>
             <a:spLocks noGrp="1"/>
           </p:cNvSpPr>
@@ -2391,7 +2391,7 @@
       </p:sp>
       <p:sp>
         <p:nvSpPr>
-          <p:cNvPr id="903464799" name="文本占位符 4"/>
+          <p:cNvPr id="934794953" name="文本占位符 4"/>
           <p:cNvSpPr>
             <a:spLocks noGrp="1"/>
           </p:cNvSpPr>
@@ -2462,7 +2462,7 @@
       </p:sp>
       <p:sp>
         <p:nvSpPr>
-          <p:cNvPr id="568762751" name="内容占位符 5"/>
+          <p:cNvPr id="846428974" name="内容占位符 5"/>
           <p:cNvSpPr>
             <a:spLocks noGrp="1"/>
           </p:cNvSpPr>
@@ -2533,7 +2533,7 @@
       </p:sp>
       <p:sp>
         <p:nvSpPr>
-          <p:cNvPr id="1410522405" name="Date Placeholder 6"/>
+          <p:cNvPr id="1223554330" name="Date Placeholder 6"/>
           <p:cNvSpPr>
             <a:spLocks noGrp="1"/>
           </p:cNvSpPr>
@@ -2559,7 +2559,7 @@
       </p:sp>
       <p:sp>
         <p:nvSpPr>
-          <p:cNvPr id="529202368" name="Footer Placeholder 7"/>
+          <p:cNvPr id="1628862456" name="Footer Placeholder 7"/>
           <p:cNvSpPr>
             <a:spLocks noGrp="1"/>
           </p:cNvSpPr>
@@ -2581,7 +2581,7 @@
       </p:sp>
       <p:sp>
         <p:nvSpPr>
-          <p:cNvPr id="1587929988" name="Slide Number Placeholder 8"/>
+          <p:cNvPr id="1212807467" name="Slide Number Placeholder 8"/>
           <p:cNvSpPr>
             <a:spLocks noGrp="1"/>
           </p:cNvSpPr>
@@ -2632,7 +2632,7 @@
       </p:grpSpPr>
       <p:sp>
         <p:nvSpPr>
-          <p:cNvPr id="1412659440" name="Title 1"/>
+          <p:cNvPr id="107314623" name="Title 1"/>
           <p:cNvSpPr>
             <a:spLocks noGrp="1"/>
           </p:cNvSpPr>
@@ -2672,7 +2672,7 @@
       </p:sp>
       <p:sp>
         <p:nvSpPr>
-          <p:cNvPr id="1653307492" name="Date Placeholder 2"/>
+          <p:cNvPr id="1487992148" name="Date Placeholder 2"/>
           <p:cNvSpPr>
             <a:spLocks noGrp="1"/>
           </p:cNvSpPr>
@@ -2698,7 +2698,7 @@
       </p:sp>
       <p:sp>
         <p:nvSpPr>
-          <p:cNvPr id="1069350493" name="Footer Placeholder 3"/>
+          <p:cNvPr id="1339219267" name="Footer Placeholder 3"/>
           <p:cNvSpPr>
             <a:spLocks noGrp="1"/>
           </p:cNvSpPr>
@@ -2720,7 +2720,7 @@
       </p:sp>
       <p:sp>
         <p:nvSpPr>
-          <p:cNvPr id="711197217" name="Slide Number Placeholder 4"/>
+          <p:cNvPr id="1899797325" name="Slide Number Placeholder 4"/>
           <p:cNvSpPr>
             <a:spLocks noGrp="1"/>
           </p:cNvSpPr>
@@ -2771,7 +2771,7 @@
       </p:grpSpPr>
       <p:sp>
         <p:nvSpPr>
-          <p:cNvPr id="763767578" name="Date Placeholder 1"/>
+          <p:cNvPr id="177539028" name="Date Placeholder 1"/>
           <p:cNvSpPr>
             <a:spLocks noGrp="1"/>
           </p:cNvSpPr>
@@ -2797,7 +2797,7 @@
       </p:sp>
       <p:sp>
         <p:nvSpPr>
-          <p:cNvPr id="1523391144" name="Footer Placeholder 2"/>
+          <p:cNvPr id="298461540" name="Footer Placeholder 2"/>
           <p:cNvSpPr>
             <a:spLocks noGrp="1"/>
           </p:cNvSpPr>
@@ -2819,7 +2819,7 @@
       </p:sp>
       <p:sp>
         <p:nvSpPr>
-          <p:cNvPr id="683470264" name="Slide Number Placeholder 3"/>
+          <p:cNvPr id="1727117662" name="Slide Number Placeholder 3"/>
           <p:cNvSpPr>
             <a:spLocks noGrp="1"/>
           </p:cNvSpPr>
@@ -2870,7 +2870,7 @@
       </p:grpSpPr>
       <p:sp>
         <p:nvSpPr>
-          <p:cNvPr id="1009860628" name="Title 1"/>
+          <p:cNvPr id="1802615411" name="Title 1"/>
           <p:cNvSpPr>
             <a:spLocks noGrp="1"/>
           </p:cNvSpPr>
@@ -2910,7 +2910,7 @@
       </p:sp>
       <p:sp>
         <p:nvSpPr>
-          <p:cNvPr id="1070605056" name="Picture Placeholder 2"/>
+          <p:cNvPr id="749756888" name="Picture Placeholder 2"/>
           <p:cNvSpPr>
             <a:spLocks noChangeAspect="1" noGrp="1"/>
           </p:cNvSpPr>
@@ -2974,7 +2974,7 @@
       </p:sp>
       <p:sp>
         <p:nvSpPr>
-          <p:cNvPr id="51726971" name="Text Placeholder 3"/>
+          <p:cNvPr id="435956526" name="Text Placeholder 3"/>
           <p:cNvSpPr>
             <a:spLocks noGrp="1"/>
           </p:cNvSpPr>
@@ -3047,7 +3047,7 @@
       </p:sp>
       <p:sp>
         <p:nvSpPr>
-          <p:cNvPr id="1764403398" name="Date Placeholder 4"/>
+          <p:cNvPr id="1833798849" name="Date Placeholder 4"/>
           <p:cNvSpPr>
             <a:spLocks noGrp="1"/>
           </p:cNvSpPr>
@@ -3073,7 +3073,7 @@
       </p:sp>
       <p:sp>
         <p:nvSpPr>
-          <p:cNvPr id="1049709571" name="Footer Placeholder 5"/>
+          <p:cNvPr id="1057495058" name="Footer Placeholder 5"/>
           <p:cNvSpPr>
             <a:spLocks noGrp="1"/>
           </p:cNvSpPr>
@@ -3095,7 +3095,7 @@
       </p:sp>
       <p:sp>
         <p:nvSpPr>
-          <p:cNvPr id="994504747" name="Slide Number Placeholder 6"/>
+          <p:cNvPr id="2069497754" name="Slide Number Placeholder 6"/>
           <p:cNvSpPr>
             <a:spLocks noGrp="1"/>
           </p:cNvSpPr>
@@ -3146,7 +3146,7 @@
       </p:grpSpPr>
       <p:sp>
         <p:nvSpPr>
-          <p:cNvPr id="711615242" name="Vertical Title 1"/>
+          <p:cNvPr id="1842285554" name="Vertical Title 1"/>
           <p:cNvSpPr>
             <a:spLocks noGrp="1"/>
           </p:cNvSpPr>
@@ -3183,7 +3183,7 @@
       </p:sp>
       <p:sp>
         <p:nvSpPr>
-          <p:cNvPr id="91598525" name="Vertical Text Placeholder 2"/>
+          <p:cNvPr id="490814523" name="Vertical Text Placeholder 2"/>
           <p:cNvSpPr>
             <a:spLocks noGrp="1"/>
           </p:cNvSpPr>
@@ -3254,7 +3254,7 @@
       </p:sp>
       <p:sp>
         <p:nvSpPr>
-          <p:cNvPr id="232194623" name="Date Placeholder 3"/>
+          <p:cNvPr id="1781582526" name="Date Placeholder 3"/>
           <p:cNvSpPr>
             <a:spLocks noGrp="1"/>
           </p:cNvSpPr>
@@ -3280,7 +3280,7 @@
       </p:sp>
       <p:sp>
         <p:nvSpPr>
-          <p:cNvPr id="81176900" name="Footer Placeholder 4"/>
+          <p:cNvPr id="1335331136" name="Footer Placeholder 4"/>
           <p:cNvSpPr>
             <a:spLocks noGrp="1"/>
           </p:cNvSpPr>
@@ -3302,7 +3302,7 @@
       </p:sp>
       <p:sp>
         <p:nvSpPr>
-          <p:cNvPr id="1540614924" name="Slide Number Placeholder 5"/>
+          <p:cNvPr id="1353893013" name="Slide Number Placeholder 5"/>
           <p:cNvSpPr>
             <a:spLocks noGrp="1"/>
           </p:cNvSpPr>
@@ -3360,7 +3360,7 @@
       </p:grpSpPr>
       <p:sp>
         <p:nvSpPr>
-          <p:cNvPr id="2098827398" name="Title Placeholder 1"/>
+          <p:cNvPr id="1261741353" name="Title Placeholder 1"/>
           <p:cNvSpPr>
             <a:spLocks noGrp="1"/>
           </p:cNvSpPr>
@@ -3396,7 +3396,7 @@
       </p:sp>
       <p:sp>
         <p:nvSpPr>
-          <p:cNvPr id="1250737247" name="Text Placeholder 2"/>
+          <p:cNvPr id="1851529360" name="Text Placeholder 2"/>
           <p:cNvSpPr>
             <a:spLocks noGrp="1"/>
           </p:cNvSpPr>
@@ -3485,7 +3485,7 @@
       </p:sp>
       <p:sp>
         <p:nvSpPr>
-          <p:cNvPr id="751693601" name="Date Placeholder 3"/>
+          <p:cNvPr id="591062017" name="Date Placeholder 3"/>
           <p:cNvSpPr>
             <a:spLocks noGrp="1"/>
           </p:cNvSpPr>
@@ -3531,7 +3531,7 @@
       </p:sp>
       <p:sp>
         <p:nvSpPr>
-          <p:cNvPr id="913671885" name="Footer Placeholder 4"/>
+          <p:cNvPr id="1315482869" name="Footer Placeholder 4"/>
           <p:cNvSpPr>
             <a:spLocks noGrp="1"/>
           </p:cNvSpPr>
@@ -3575,7 +3575,7 @@
       </p:sp>
       <p:sp>
         <p:nvSpPr>
-          <p:cNvPr id="693765489" name="Slide Number Placeholder 5"/>
+          <p:cNvPr id="1396640400" name="Slide Number Placeholder 5"/>
           <p:cNvSpPr>
             <a:spLocks noGrp="1"/>
           </p:cNvSpPr>
@@ -3944,131 +3944,2613 @@
       </p:grpSpPr>
       <p:grpSp>
         <p:nvGrpSpPr>
-          <p:cNvPr id="944879061" name=""/>
+          <p:cNvPr id="1197848942" name=""/>
           <p:cNvGrpSpPr/>
           <p:nvPr/>
         </p:nvGrpSpPr>
         <p:grpSpPr bwMode="auto">
           <a:xfrm>
-            <a:off x="95249" y="140969"/>
-            <a:ext cx="12096749" cy="7221854"/>
+            <a:off x="-1869750" y="-825499"/>
+            <a:ext cx="14573249" cy="8794749"/>
             <a:chOff x="0" y="0"/>
-            <a:chExt cx="12096749" cy="7221854"/>
+            <a:chExt cx="14573249" cy="8794749"/>
           </a:xfrm>
         </p:grpSpPr>
+        <p:sp>
+          <p:nvSpPr>
+            <p:cNvPr id="1178038940" name=""/>
+            <p:cNvSpPr/>
+            <p:nvPr/>
+          </p:nvSpPr>
+          <p:spPr bwMode="auto">
+            <a:xfrm rot="0" flipH="0" flipV="0">
+              <a:off x="0" y="0"/>
+              <a:ext cx="14573249" cy="8794749"/>
+            </a:xfrm>
+            <a:prstGeom prst="rect">
+              <a:avLst/>
+            </a:prstGeom>
+            <a:solidFill>
+              <a:schemeClr val="bg1"/>
+            </a:solidFill>
+            <a:ln w="12700" cap="flat" cmpd="sng" algn="ctr">
+              <a:solidFill>
+                <a:schemeClr val="bg1"/>
+              </a:solidFill>
+              <a:prstDash val="solid"/>
+              <a:miter lim="800000"/>
+            </a:ln>
+          </p:spPr>
+          <p:style>
+            <a:lnRef idx="2">
+              <a:schemeClr val="accent1">
+                <a:shade val="50000"/>
+              </a:schemeClr>
+            </a:lnRef>
+            <a:fillRef idx="1">
+              <a:schemeClr val="accent1"/>
+            </a:fillRef>
+            <a:effectRef idx="0">
+              <a:schemeClr val="accent1"/>
+            </a:effectRef>
+            <a:fontRef idx="minor">
+              <a:schemeClr val="lt1"/>
+            </a:fontRef>
+          </p:style>
+        </p:sp>
         <p:grpSp>
           <p:nvGrpSpPr>
-            <p:cNvPr id="1983899375" name="Grupo 9"/>
+            <p:cNvPr id="1494084536" name=""/>
             <p:cNvGrpSpPr/>
             <p:nvPr/>
           </p:nvGrpSpPr>
           <p:grpSpPr bwMode="auto">
             <a:xfrm>
-              <a:off x="0" y="0"/>
-              <a:ext cx="9505950" cy="6144894"/>
-              <a:chOff x="150" y="222"/>
-              <a:chExt cx="14970" cy="9677"/>
+              <a:off x="1964998" y="966468"/>
+              <a:ext cx="12096749" cy="7221854"/>
+              <a:chOff x="0" y="0"/>
+              <a:chExt cx="12096749" cy="7221854"/>
             </a:xfrm>
           </p:grpSpPr>
-          <p:pic>
-            <p:nvPicPr>
-              <p:cNvPr id="5" name="Imagen 4"/>
-              <p:cNvPicPr/>
-              <p:nvPr/>
-            </p:nvPicPr>
-            <p:blipFill rotWithShape="1">
-              <a:blip r:embed="rId3"/>
-              <a:srcRect l="5889" t="6926" r="6852" b="53685"/>
-              <a:stretch/>
-            </p:blipFill>
-            <p:spPr bwMode="auto">
-              <a:xfrm rot="10800000">
-                <a:off x="8210" y="222"/>
-                <a:ext cx="6911" cy="3120"/>
-              </a:xfrm>
-              <a:prstGeom prst="rect">
-                <a:avLst/>
-              </a:prstGeom>
-            </p:spPr>
-          </p:pic>
           <p:grpSp>
             <p:nvGrpSpPr>
-              <p:cNvPr id="108" name="Grupo 107"/>
+              <p:cNvPr id="1983899375" name="Grupo 9"/>
               <p:cNvGrpSpPr/>
               <p:nvPr/>
             </p:nvGrpSpPr>
             <p:grpSpPr bwMode="auto">
               <a:xfrm>
-                <a:off x="150" y="761"/>
-                <a:ext cx="8262" cy="9138"/>
-                <a:chOff x="150" y="957"/>
-                <a:chExt cx="11266" cy="12460"/>
+                <a:off x="0" y="0"/>
+                <a:ext cx="9505950" cy="6144894"/>
+                <a:chOff x="150" y="222"/>
+                <a:chExt cx="14970" cy="9677"/>
               </a:xfrm>
             </p:grpSpPr>
-            <p:cxnSp>
-              <p:nvCxnSpPr>
-                <p:cNvPr id="105" name="Conector angular 104"/>
-                <p:cNvCxnSpPr>
-                  <a:stCxn id="71" idx="7"/>
-                  <a:endCxn id="3" idx="2"/>
-                </p:cNvCxnSpPr>
+            <p:pic>
+              <p:nvPicPr>
+                <p:cNvPr id="5" name="Imagen 4"/>
+                <p:cNvPicPr/>
                 <p:nvPr/>
-              </p:nvCxnSpPr>
+              </p:nvPicPr>
+              <p:blipFill rotWithShape="1">
+                <a:blip r:embed="rId3"/>
+                <a:srcRect l="5889" t="6926" r="6852" b="53685"/>
+                <a:stretch/>
+              </p:blipFill>
               <p:spPr bwMode="auto">
-                <a:xfrm rot="16199999" flipH="1">
-                  <a:off x="6226" y="-2791"/>
-                  <a:ext cx="1023" cy="8806"/>
+                <a:xfrm rot="10800000">
+                  <a:off x="8210" y="222"/>
+                  <a:ext cx="6911" cy="3120"/>
                 </a:xfrm>
-                <a:prstGeom prst="bentConnector4">
-                  <a:avLst>
-                    <a:gd name="adj1" fmla="val -54000"/>
-                    <a:gd name="adj2" fmla="val 93244"/>
-                  </a:avLst>
+                <a:prstGeom prst="rect">
+                  <a:avLst/>
                 </a:prstGeom>
-                <a:ln w="28575">
+              </p:spPr>
+            </p:pic>
+            <p:grpSp>
+              <p:nvGrpSpPr>
+                <p:cNvPr id="108" name="Grupo 107"/>
+                <p:cNvGrpSpPr/>
+                <p:nvPr/>
+              </p:nvGrpSpPr>
+              <p:grpSpPr bwMode="auto">
+                <a:xfrm>
+                  <a:off x="150" y="761"/>
+                  <a:ext cx="8262" cy="9138"/>
+                  <a:chOff x="150" y="957"/>
+                  <a:chExt cx="11266" cy="12460"/>
+                </a:xfrm>
+              </p:grpSpPr>
+              <p:cxnSp>
+                <p:nvCxnSpPr>
+                  <p:cNvPr id="105" name="Conector angular 104"/>
+                  <p:cNvCxnSpPr>
+                    <a:stCxn id="71" idx="7"/>
+                    <a:endCxn id="3" idx="2"/>
+                  </p:cNvCxnSpPr>
+                  <p:nvPr/>
+                </p:nvCxnSpPr>
+                <p:spPr bwMode="auto">
+                  <a:xfrm rot="16199998" flipH="1">
+                    <a:off x="6226" y="-2791"/>
+                    <a:ext cx="1023" cy="8806"/>
+                  </a:xfrm>
+                  <a:prstGeom prst="bentConnector4">
+                    <a:avLst>
+                      <a:gd name="adj1" fmla="val -54000"/>
+                      <a:gd name="adj2" fmla="val 93244"/>
+                    </a:avLst>
+                  </a:prstGeom>
+                  <a:ln w="28575">
+                    <a:solidFill>
+                      <a:srgbClr val="FF0000"/>
+                    </a:solidFill>
+                  </a:ln>
+                </p:spPr>
+                <p:style>
+                  <a:lnRef idx="2">
+                    <a:schemeClr val="accent1"/>
+                  </a:lnRef>
+                  <a:fillRef idx="0">
+                    <a:srgbClr val="FFFFFF"/>
+                  </a:fillRef>
+                  <a:effectRef idx="0">
+                    <a:srgbClr val="FFFFFF"/>
+                  </a:effectRef>
+                  <a:fontRef idx="minor">
+                    <a:schemeClr val="tx1"/>
+                  </a:fontRef>
+                </p:style>
+              </p:cxnSp>
+              <p:grpSp>
+                <p:nvGrpSpPr>
+                  <p:cNvPr id="11" name="Grupo 10"/>
+                  <p:cNvGrpSpPr/>
+                  <p:nvPr/>
+                </p:nvGrpSpPr>
+                <p:grpSpPr bwMode="auto">
+                  <a:xfrm>
+                    <a:off x="11140" y="1694"/>
+                    <a:ext cx="276" cy="1151"/>
+                    <a:chOff x="10467" y="1920"/>
+                    <a:chExt cx="276" cy="1151"/>
+                  </a:xfrm>
+                </p:grpSpPr>
+                <p:sp>
+                  <p:nvSpPr>
+                    <p:cNvPr id="2" name="Óvalo 1"/>
+                    <p:cNvSpPr/>
+                    <p:nvPr/>
+                  </p:nvSpPr>
+                  <p:spPr bwMode="auto">
+                    <a:xfrm>
+                      <a:off x="10467" y="1920"/>
+                      <a:ext cx="276" cy="277"/>
+                    </a:xfrm>
+                    <a:prstGeom prst="ellipse">
+                      <a:avLst/>
+                    </a:prstGeom>
+                    <a:solidFill>
+                      <a:schemeClr val="bg1"/>
+                    </a:solidFill>
+                    <a:ln>
+                      <a:solidFill>
+                        <a:schemeClr val="tx1"/>
+                      </a:solidFill>
+                    </a:ln>
+                  </p:spPr>
+                  <p:style>
+                    <a:lnRef idx="2">
+                      <a:schemeClr val="accent1">
+                        <a:lumMod val="75000"/>
+                      </a:schemeClr>
+                    </a:lnRef>
+                    <a:fillRef idx="1">
+                      <a:schemeClr val="accent1"/>
+                    </a:fillRef>
+                    <a:effectRef idx="0">
+                      <a:srgbClr val="FFFFFF"/>
+                    </a:effectRef>
+                    <a:fontRef idx="minor">
+                      <a:schemeClr val="lt1"/>
+                    </a:fontRef>
+                  </p:style>
+                  <p:txBody>
+                    <a:bodyPr rtlCol="0" anchor="ctr"/>
+                    <a:p>
+                      <a:pPr algn="ctr">
+                        <a:defRPr/>
+                      </a:pPr>
+                      <a:endParaRPr lang="es-MX" u="sng"/>
+                    </a:p>
+                  </p:txBody>
+                </p:sp>
+                <p:sp>
+                  <p:nvSpPr>
+                    <p:cNvPr id="3" name="Óvalo 2"/>
+                    <p:cNvSpPr/>
+                    <p:nvPr/>
+                  </p:nvSpPr>
+                  <p:spPr bwMode="auto">
+                    <a:xfrm>
+                      <a:off x="10467" y="2211"/>
+                      <a:ext cx="276" cy="277"/>
+                    </a:xfrm>
+                    <a:prstGeom prst="ellipse">
+                      <a:avLst/>
+                    </a:prstGeom>
+                    <a:solidFill>
+                      <a:schemeClr val="bg1"/>
+                    </a:solidFill>
+                    <a:ln>
+                      <a:solidFill>
+                        <a:schemeClr val="tx1"/>
+                      </a:solidFill>
+                    </a:ln>
+                  </p:spPr>
+                  <p:style>
+                    <a:lnRef idx="2">
+                      <a:schemeClr val="accent1">
+                        <a:lumMod val="75000"/>
+                      </a:schemeClr>
+                    </a:lnRef>
+                    <a:fillRef idx="1">
+                      <a:schemeClr val="accent1"/>
+                    </a:fillRef>
+                    <a:effectRef idx="0">
+                      <a:srgbClr val="FFFFFF"/>
+                    </a:effectRef>
+                    <a:fontRef idx="minor">
+                      <a:schemeClr val="lt1"/>
+                    </a:fontRef>
+                  </p:style>
+                  <p:txBody>
+                    <a:bodyPr rtlCol="0" anchor="ctr"/>
+                    <a:p>
+                      <a:pPr algn="ctr">
+                        <a:defRPr/>
+                      </a:pPr>
+                      <a:endParaRPr lang="es-MX" u="sng"/>
+                    </a:p>
+                  </p:txBody>
+                </p:sp>
+                <p:sp>
+                  <p:nvSpPr>
+                    <p:cNvPr id="4" name="Óvalo 3"/>
+                    <p:cNvSpPr/>
+                    <p:nvPr/>
+                  </p:nvSpPr>
+                  <p:spPr bwMode="auto">
+                    <a:xfrm>
+                      <a:off x="10467" y="2502"/>
+                      <a:ext cx="276" cy="277"/>
+                    </a:xfrm>
+                    <a:prstGeom prst="ellipse">
+                      <a:avLst/>
+                    </a:prstGeom>
+                    <a:solidFill>
+                      <a:schemeClr val="bg1"/>
+                    </a:solidFill>
+                    <a:ln>
+                      <a:solidFill>
+                        <a:schemeClr val="tx1"/>
+                      </a:solidFill>
+                    </a:ln>
+                  </p:spPr>
+                  <p:style>
+                    <a:lnRef idx="2">
+                      <a:schemeClr val="accent1">
+                        <a:lumMod val="75000"/>
+                      </a:schemeClr>
+                    </a:lnRef>
+                    <a:fillRef idx="1">
+                      <a:schemeClr val="accent1"/>
+                    </a:fillRef>
+                    <a:effectRef idx="0">
+                      <a:srgbClr val="FFFFFF"/>
+                    </a:effectRef>
+                    <a:fontRef idx="minor">
+                      <a:schemeClr val="lt1"/>
+                    </a:fontRef>
+                  </p:style>
+                  <p:txBody>
+                    <a:bodyPr rtlCol="0" anchor="ctr"/>
+                    <a:p>
+                      <a:pPr algn="ctr">
+                        <a:defRPr/>
+                      </a:pPr>
+                      <a:endParaRPr lang="es-MX" u="sng"/>
+                    </a:p>
+                  </p:txBody>
+                </p:sp>
+                <p:sp>
+                  <p:nvSpPr>
+                    <p:cNvPr id="9" name="Óvalo 8"/>
+                    <p:cNvSpPr/>
+                    <p:nvPr/>
+                  </p:nvSpPr>
+                  <p:spPr bwMode="auto">
+                    <a:xfrm>
+                      <a:off x="10467" y="2794"/>
+                      <a:ext cx="276" cy="277"/>
+                    </a:xfrm>
+                    <a:prstGeom prst="ellipse">
+                      <a:avLst/>
+                    </a:prstGeom>
+                    <a:solidFill>
+                      <a:schemeClr val="bg1"/>
+                    </a:solidFill>
+                    <a:ln>
+                      <a:solidFill>
+                        <a:schemeClr val="tx1"/>
+                      </a:solidFill>
+                    </a:ln>
+                  </p:spPr>
+                  <p:style>
+                    <a:lnRef idx="2">
+                      <a:schemeClr val="accent1">
+                        <a:lumMod val="75000"/>
+                      </a:schemeClr>
+                    </a:lnRef>
+                    <a:fillRef idx="1">
+                      <a:schemeClr val="accent1"/>
+                    </a:fillRef>
+                    <a:effectRef idx="0">
+                      <a:srgbClr val="FFFFFF"/>
+                    </a:effectRef>
+                    <a:fontRef idx="minor">
+                      <a:schemeClr val="lt1"/>
+                    </a:fontRef>
+                  </p:style>
+                  <p:txBody>
+                    <a:bodyPr rtlCol="0" anchor="ctr"/>
+                    <a:p>
+                      <a:pPr algn="ctr">
+                        <a:defRPr/>
+                      </a:pPr>
+                      <a:endParaRPr lang="es-MX" u="sng"/>
+                    </a:p>
+                  </p:txBody>
+                </p:sp>
+              </p:grpSp>
+              <p:grpSp>
+                <p:nvGrpSpPr>
+                  <p:cNvPr id="66" name="Grupo 65"/>
+                  <p:cNvGrpSpPr/>
+                  <p:nvPr/>
+                </p:nvGrpSpPr>
+                <p:grpSpPr bwMode="auto">
+                  <a:xfrm rot="10800000">
+                    <a:off x="8426" y="7794"/>
+                    <a:ext cx="2336" cy="5623"/>
+                    <a:chOff x="5564" y="1119"/>
+                    <a:chExt cx="2336" cy="5623"/>
+                  </a:xfrm>
+                </p:grpSpPr>
+                <p:pic>
+                  <p:nvPicPr>
+                    <p:cNvPr id="6" name="Imagen 5"/>
+                    <p:cNvPicPr>
+                      <a:picLocks noChangeAspect="1"/>
+                    </p:cNvPicPr>
+                    <p:nvPr/>
+                  </p:nvPicPr>
+                  <p:blipFill rotWithShape="1">
+                    <a:blip r:embed="rId4"/>
+                    <a:srcRect l="35387" t="16187" r="33467" b="15120"/>
+                    <a:stretch/>
+                  </p:blipFill>
+                  <p:spPr bwMode="auto">
+                    <a:xfrm rot="10800000">
+                      <a:off x="5564" y="1119"/>
+                      <a:ext cx="2336" cy="5152"/>
+                    </a:xfrm>
+                    <a:prstGeom prst="rect">
+                      <a:avLst/>
+                    </a:prstGeom>
+                  </p:spPr>
+                </p:pic>
+                <p:pic>
+                  <p:nvPicPr>
+                    <p:cNvPr id="57" name="Imagen 56"/>
+                    <p:cNvPicPr>
+                      <a:picLocks noChangeAspect="1"/>
+                    </p:cNvPicPr>
+                    <p:nvPr/>
+                  </p:nvPicPr>
+                  <p:blipFill rotWithShape="1">
+                    <a:blip r:embed="rId5"/>
+                    <a:stretch/>
+                  </p:blipFill>
+                  <p:spPr bwMode="auto">
+                    <a:xfrm rot="16199998">
+                      <a:off x="5743" y="4585"/>
+                      <a:ext cx="2098" cy="2216"/>
+                    </a:xfrm>
+                    <a:prstGeom prst="rect">
+                      <a:avLst/>
+                    </a:prstGeom>
+                  </p:spPr>
+                </p:pic>
+                <p:sp>
+                  <p:nvSpPr>
+                    <p:cNvPr id="58" name="Óvalo 57"/>
+                    <p:cNvSpPr/>
+                    <p:nvPr/>
+                  </p:nvSpPr>
+                  <p:spPr bwMode="auto">
+                    <a:xfrm>
+                      <a:off x="7342" y="6374"/>
+                      <a:ext cx="276" cy="277"/>
+                    </a:xfrm>
+                    <a:prstGeom prst="ellipse">
+                      <a:avLst/>
+                    </a:prstGeom>
+                    <a:solidFill>
+                      <a:schemeClr val="bg1"/>
+                    </a:solidFill>
+                    <a:ln>
+                      <a:solidFill>
+                        <a:schemeClr val="tx1"/>
+                      </a:solidFill>
+                    </a:ln>
+                  </p:spPr>
+                  <p:style>
+                    <a:lnRef idx="2">
+                      <a:schemeClr val="accent1">
+                        <a:lumMod val="75000"/>
+                      </a:schemeClr>
+                    </a:lnRef>
+                    <a:fillRef idx="1">
+                      <a:schemeClr val="accent1"/>
+                    </a:fillRef>
+                    <a:effectRef idx="0">
+                      <a:srgbClr val="FFFFFF"/>
+                    </a:effectRef>
+                    <a:fontRef idx="minor">
+                      <a:schemeClr val="lt1"/>
+                    </a:fontRef>
+                  </p:style>
+                  <p:txBody>
+                    <a:bodyPr rtlCol="0" anchor="ctr"/>
+                    <a:p>
+                      <a:pPr algn="ctr">
+                        <a:defRPr/>
+                      </a:pPr>
+                      <a:endParaRPr lang="es-MX" u="sng"/>
+                    </a:p>
+                  </p:txBody>
+                </p:sp>
+                <p:sp>
+                  <p:nvSpPr>
+                    <p:cNvPr id="59" name="Óvalo 58"/>
+                    <p:cNvSpPr/>
+                    <p:nvPr/>
+                  </p:nvSpPr>
+                  <p:spPr bwMode="auto">
+                    <a:xfrm>
+                      <a:off x="7066" y="6374"/>
+                      <a:ext cx="276" cy="277"/>
+                    </a:xfrm>
+                    <a:prstGeom prst="ellipse">
+                      <a:avLst/>
+                    </a:prstGeom>
+                    <a:solidFill>
+                      <a:schemeClr val="bg1"/>
+                    </a:solidFill>
+                    <a:ln>
+                      <a:solidFill>
+                        <a:schemeClr val="tx1"/>
+                      </a:solidFill>
+                    </a:ln>
+                  </p:spPr>
+                  <p:style>
+                    <a:lnRef idx="2">
+                      <a:schemeClr val="accent1">
+                        <a:lumMod val="75000"/>
+                      </a:schemeClr>
+                    </a:lnRef>
+                    <a:fillRef idx="1">
+                      <a:schemeClr val="accent1"/>
+                    </a:fillRef>
+                    <a:effectRef idx="0">
+                      <a:srgbClr val="FFFFFF"/>
+                    </a:effectRef>
+                    <a:fontRef idx="minor">
+                      <a:schemeClr val="lt1"/>
+                    </a:fontRef>
+                  </p:style>
+                  <p:txBody>
+                    <a:bodyPr rtlCol="0" anchor="ctr"/>
+                    <a:p>
+                      <a:pPr algn="ctr">
+                        <a:defRPr/>
+                      </a:pPr>
+                      <a:endParaRPr lang="es-MX" u="sng"/>
+                    </a:p>
+                  </p:txBody>
+                </p:sp>
+                <p:sp>
+                  <p:nvSpPr>
+                    <p:cNvPr id="60" name="Óvalo 59"/>
+                    <p:cNvSpPr/>
+                    <p:nvPr/>
+                  </p:nvSpPr>
+                  <p:spPr bwMode="auto">
+                    <a:xfrm>
+                      <a:off x="6790" y="6374"/>
+                      <a:ext cx="276" cy="277"/>
+                    </a:xfrm>
+                    <a:prstGeom prst="ellipse">
+                      <a:avLst/>
+                    </a:prstGeom>
+                    <a:solidFill>
+                      <a:schemeClr val="bg1"/>
+                    </a:solidFill>
+                    <a:ln>
+                      <a:solidFill>
+                        <a:schemeClr val="tx1"/>
+                      </a:solidFill>
+                    </a:ln>
+                  </p:spPr>
+                  <p:style>
+                    <a:lnRef idx="2">
+                      <a:schemeClr val="accent1">
+                        <a:lumMod val="75000"/>
+                      </a:schemeClr>
+                    </a:lnRef>
+                    <a:fillRef idx="1">
+                      <a:schemeClr val="accent1"/>
+                    </a:fillRef>
+                    <a:effectRef idx="0">
+                      <a:srgbClr val="FFFFFF"/>
+                    </a:effectRef>
+                    <a:fontRef idx="minor">
+                      <a:schemeClr val="lt1"/>
+                    </a:fontRef>
+                  </p:style>
+                  <p:txBody>
+                    <a:bodyPr rtlCol="0" anchor="ctr"/>
+                    <a:p>
+                      <a:pPr algn="ctr">
+                        <a:defRPr/>
+                      </a:pPr>
+                      <a:endParaRPr lang="es-MX" u="sng"/>
+                    </a:p>
+                  </p:txBody>
+                </p:sp>
+                <p:sp>
+                  <p:nvSpPr>
+                    <p:cNvPr id="61" name="Óvalo 60"/>
+                    <p:cNvSpPr/>
+                    <p:nvPr/>
+                  </p:nvSpPr>
+                  <p:spPr bwMode="auto">
+                    <a:xfrm>
+                      <a:off x="6514" y="6374"/>
+                      <a:ext cx="276" cy="277"/>
+                    </a:xfrm>
+                    <a:prstGeom prst="ellipse">
+                      <a:avLst/>
+                    </a:prstGeom>
+                    <a:solidFill>
+                      <a:schemeClr val="bg1"/>
+                    </a:solidFill>
+                    <a:ln>
+                      <a:solidFill>
+                        <a:schemeClr val="tx1"/>
+                      </a:solidFill>
+                    </a:ln>
+                  </p:spPr>
+                  <p:style>
+                    <a:lnRef idx="2">
+                      <a:schemeClr val="accent1">
+                        <a:lumMod val="75000"/>
+                      </a:schemeClr>
+                    </a:lnRef>
+                    <a:fillRef idx="1">
+                      <a:schemeClr val="accent1"/>
+                    </a:fillRef>
+                    <a:effectRef idx="0">
+                      <a:srgbClr val="FFFFFF"/>
+                    </a:effectRef>
+                    <a:fontRef idx="minor">
+                      <a:schemeClr val="lt1"/>
+                    </a:fontRef>
+                  </p:style>
+                  <p:txBody>
+                    <a:bodyPr rtlCol="0" anchor="ctr"/>
+                    <a:p>
+                      <a:pPr algn="ctr">
+                        <a:defRPr/>
+                      </a:pPr>
+                      <a:endParaRPr lang="es-MX" u="sng"/>
+                    </a:p>
+                  </p:txBody>
+                </p:sp>
+              </p:grpSp>
+              <p:cxnSp>
+                <p:nvCxnSpPr>
+                  <p:cNvPr id="67" name="Conector angular 66"/>
+                  <p:cNvCxnSpPr>
+                    <a:stCxn id="70" idx="4"/>
+                    <a:endCxn id="58" idx="4"/>
+                  </p:cNvCxnSpPr>
+                  <p:nvPr/>
+                </p:nvCxnSpPr>
+                <p:spPr bwMode="auto">
+                  <a:xfrm rot="5400000" flipV="1">
+                    <a:off x="4419" y="3457"/>
+                    <a:ext cx="2245" cy="6608"/>
+                  </a:xfrm>
+                  <a:prstGeom prst="bentConnector3">
+                    <a:avLst>
+                      <a:gd name="adj1" fmla="val 73140"/>
+                    </a:avLst>
+                  </a:prstGeom>
+                  <a:ln w="28575">
+                    <a:solidFill>
+                      <a:srgbClr val="FF0000"/>
+                    </a:solidFill>
+                  </a:ln>
+                </p:spPr>
+                <p:style>
+                  <a:lnRef idx="2">
+                    <a:schemeClr val="accent1"/>
+                  </a:lnRef>
+                  <a:fillRef idx="0">
+                    <a:srgbClr val="FFFFFF"/>
+                  </a:fillRef>
+                  <a:effectRef idx="0">
+                    <a:srgbClr val="FFFFFF"/>
+                  </a:effectRef>
+                  <a:fontRef idx="minor">
+                    <a:schemeClr val="tx1"/>
+                  </a:fontRef>
+                </p:style>
+              </p:cxnSp>
+              <p:cxnSp>
+                <p:nvCxnSpPr>
+                  <p:cNvPr id="68" name="Conector angular 67"/>
+                  <p:cNvCxnSpPr>
+                    <a:stCxn id="80" idx="4"/>
+                    <a:endCxn id="59" idx="4"/>
+                  </p:cNvCxnSpPr>
+                  <p:nvPr/>
+                </p:nvCxnSpPr>
+                <p:spPr bwMode="auto">
+                  <a:xfrm rot="5400000" flipV="1">
+                    <a:off x="5641" y="4403"/>
+                    <a:ext cx="2245" cy="4717"/>
+                  </a:xfrm>
+                  <a:prstGeom prst="bentConnector3">
+                    <a:avLst>
+                      <a:gd name="adj1" fmla="val 50022"/>
+                    </a:avLst>
+                  </a:prstGeom>
+                  <a:ln w="28575">
+                    <a:solidFill>
+                      <a:schemeClr val="accent4"/>
+                    </a:solidFill>
+                  </a:ln>
+                </p:spPr>
+                <p:style>
+                  <a:lnRef idx="2">
+                    <a:schemeClr val="accent1"/>
+                  </a:lnRef>
+                  <a:fillRef idx="0">
+                    <a:srgbClr val="FFFFFF"/>
+                  </a:fillRef>
+                  <a:effectRef idx="0">
+                    <a:srgbClr val="FFFFFF"/>
+                  </a:effectRef>
+                  <a:fontRef idx="minor">
+                    <a:schemeClr val="tx1"/>
+                  </a:fontRef>
+                </p:style>
+              </p:cxnSp>
+              <p:grpSp>
+                <p:nvGrpSpPr>
+                  <p:cNvPr id="101" name="Grupo 100"/>
+                  <p:cNvGrpSpPr/>
+                  <p:nvPr/>
+                </p:nvGrpSpPr>
+                <p:grpSpPr bwMode="auto">
+                  <a:xfrm>
+                    <a:off x="150" y="957"/>
+                    <a:ext cx="9182" cy="4744"/>
+                    <a:chOff x="237" y="855"/>
+                    <a:chExt cx="9182" cy="4744"/>
+                  </a:xfrm>
+                </p:grpSpPr>
+                <p:pic>
+                  <p:nvPicPr>
+                    <p:cNvPr id="69" name="Imagen 68"/>
+                    <p:cNvPicPr/>
+                    <p:nvPr/>
+                  </p:nvPicPr>
+                  <p:blipFill rotWithShape="1">
+                    <a:blip r:embed="rId6"/>
+                    <a:srcRect l="24356" t="7898" r="12971" b="7081"/>
+                    <a:stretch/>
+                  </p:blipFill>
+                  <p:spPr bwMode="auto">
+                    <a:xfrm rot="5400000">
+                      <a:off x="2456" y="-1364"/>
+                      <a:ext cx="4745" cy="9182"/>
+                    </a:xfrm>
+                    <a:prstGeom prst="rect">
+                      <a:avLst/>
+                    </a:prstGeom>
+                  </p:spPr>
+                </p:pic>
+                <p:sp>
+                  <p:nvSpPr>
+                    <p:cNvPr id="70" name="Óvalo 69"/>
+                    <p:cNvSpPr/>
+                    <p:nvPr/>
+                  </p:nvSpPr>
+                  <p:spPr bwMode="auto">
+                    <a:xfrm>
+                      <a:off x="2186" y="5261"/>
+                      <a:ext cx="276" cy="277"/>
+                    </a:xfrm>
+                    <a:prstGeom prst="ellipse">
+                      <a:avLst/>
+                    </a:prstGeom>
+                    <a:solidFill>
+                      <a:schemeClr val="bg1"/>
+                    </a:solidFill>
+                    <a:ln>
+                      <a:solidFill>
+                        <a:schemeClr val="tx1"/>
+                      </a:solidFill>
+                    </a:ln>
+                  </p:spPr>
+                  <p:style>
+                    <a:lnRef idx="2">
+                      <a:schemeClr val="accent1">
+                        <a:lumMod val="75000"/>
+                      </a:schemeClr>
+                    </a:lnRef>
+                    <a:fillRef idx="1">
+                      <a:schemeClr val="accent1"/>
+                    </a:fillRef>
+                    <a:effectRef idx="0">
+                      <a:srgbClr val="FFFFFF"/>
+                    </a:effectRef>
+                    <a:fontRef idx="minor">
+                      <a:schemeClr val="lt1"/>
+                    </a:fontRef>
+                  </p:style>
+                  <p:txBody>
+                    <a:bodyPr rtlCol="0" anchor="ctr"/>
+                    <a:p>
+                      <a:pPr algn="ctr">
+                        <a:defRPr/>
+                      </a:pPr>
+                      <a:endParaRPr lang="es-MX" u="sng"/>
+                    </a:p>
+                  </p:txBody>
+                </p:sp>
+                <p:sp>
+                  <p:nvSpPr>
+                    <p:cNvPr id="71" name="Óvalo 70"/>
+                    <p:cNvSpPr/>
+                    <p:nvPr/>
+                  </p:nvSpPr>
+                  <p:spPr bwMode="auto">
+                    <a:xfrm>
+                      <a:off x="2186" y="957"/>
+                      <a:ext cx="276" cy="277"/>
+                    </a:xfrm>
+                    <a:prstGeom prst="ellipse">
+                      <a:avLst/>
+                    </a:prstGeom>
+                    <a:solidFill>
+                      <a:schemeClr val="bg1"/>
+                    </a:solidFill>
+                    <a:ln>
+                      <a:solidFill>
+                        <a:schemeClr val="tx1"/>
+                      </a:solidFill>
+                    </a:ln>
+                  </p:spPr>
+                  <p:style>
+                    <a:lnRef idx="2">
+                      <a:schemeClr val="accent1">
+                        <a:lumMod val="75000"/>
+                      </a:schemeClr>
+                    </a:lnRef>
+                    <a:fillRef idx="1">
+                      <a:schemeClr val="accent1"/>
+                    </a:fillRef>
+                    <a:effectRef idx="0">
+                      <a:srgbClr val="FFFFFF"/>
+                    </a:effectRef>
+                    <a:fontRef idx="minor">
+                      <a:schemeClr val="lt1"/>
+                    </a:fontRef>
+                  </p:style>
+                  <p:txBody>
+                    <a:bodyPr rtlCol="0" anchor="ctr"/>
+                    <a:p>
+                      <a:pPr algn="ctr">
+                        <a:defRPr/>
+                      </a:pPr>
+                      <a:endParaRPr lang="es-MX" u="sng"/>
+                    </a:p>
+                  </p:txBody>
+                </p:sp>
+                <p:sp>
+                  <p:nvSpPr>
+                    <p:cNvPr id="72" name="Óvalo 71"/>
+                    <p:cNvSpPr/>
+                    <p:nvPr/>
+                  </p:nvSpPr>
+                  <p:spPr bwMode="auto">
+                    <a:xfrm>
+                      <a:off x="2626" y="5261"/>
+                      <a:ext cx="276" cy="277"/>
+                    </a:xfrm>
+                    <a:prstGeom prst="ellipse">
+                      <a:avLst/>
+                    </a:prstGeom>
+                    <a:solidFill>
+                      <a:schemeClr val="bg1"/>
+                    </a:solidFill>
+                    <a:ln>
+                      <a:solidFill>
+                        <a:schemeClr val="tx1"/>
+                      </a:solidFill>
+                    </a:ln>
+                  </p:spPr>
+                  <p:style>
+                    <a:lnRef idx="2">
+                      <a:schemeClr val="accent1">
+                        <a:lumMod val="75000"/>
+                      </a:schemeClr>
+                    </a:lnRef>
+                    <a:fillRef idx="1">
+                      <a:schemeClr val="accent1"/>
+                    </a:fillRef>
+                    <a:effectRef idx="0">
+                      <a:srgbClr val="FFFFFF"/>
+                    </a:effectRef>
+                    <a:fontRef idx="minor">
+                      <a:schemeClr val="lt1"/>
+                    </a:fontRef>
+                  </p:style>
+                  <p:txBody>
+                    <a:bodyPr rtlCol="0" anchor="ctr"/>
+                    <a:p>
+                      <a:pPr algn="ctr">
+                        <a:defRPr/>
+                      </a:pPr>
+                      <a:endParaRPr lang="es-MX" u="sng"/>
+                    </a:p>
+                  </p:txBody>
+                </p:sp>
+                <p:sp>
+                  <p:nvSpPr>
+                    <p:cNvPr id="73" name="Óvalo 72"/>
+                    <p:cNvSpPr/>
+                    <p:nvPr/>
+                  </p:nvSpPr>
+                  <p:spPr bwMode="auto">
+                    <a:xfrm>
+                      <a:off x="2626" y="957"/>
+                      <a:ext cx="276" cy="277"/>
+                    </a:xfrm>
+                    <a:prstGeom prst="ellipse">
+                      <a:avLst/>
+                    </a:prstGeom>
+                    <a:solidFill>
+                      <a:schemeClr val="bg1"/>
+                    </a:solidFill>
+                    <a:ln>
+                      <a:solidFill>
+                        <a:schemeClr val="tx1"/>
+                      </a:solidFill>
+                    </a:ln>
+                  </p:spPr>
+                  <p:style>
+                    <a:lnRef idx="2">
+                      <a:schemeClr val="accent1">
+                        <a:lumMod val="75000"/>
+                      </a:schemeClr>
+                    </a:lnRef>
+                    <a:fillRef idx="1">
+                      <a:schemeClr val="accent1"/>
+                    </a:fillRef>
+                    <a:effectRef idx="0">
+                      <a:srgbClr val="FFFFFF"/>
+                    </a:effectRef>
+                    <a:fontRef idx="minor">
+                      <a:schemeClr val="lt1"/>
+                    </a:fontRef>
+                  </p:style>
+                  <p:txBody>
+                    <a:bodyPr rtlCol="0" anchor="ctr"/>
+                    <a:p>
+                      <a:pPr algn="ctr">
+                        <a:defRPr/>
+                      </a:pPr>
+                      <a:endParaRPr lang="es-MX" u="sng"/>
+                    </a:p>
+                  </p:txBody>
+                </p:sp>
+                <p:sp>
+                  <p:nvSpPr>
+                    <p:cNvPr id="74" name="Óvalo 73"/>
+                    <p:cNvSpPr/>
+                    <p:nvPr/>
+                  </p:nvSpPr>
+                  <p:spPr bwMode="auto">
+                    <a:xfrm>
+                      <a:off x="3066" y="5261"/>
+                      <a:ext cx="276" cy="277"/>
+                    </a:xfrm>
+                    <a:prstGeom prst="ellipse">
+                      <a:avLst/>
+                    </a:prstGeom>
+                    <a:solidFill>
+                      <a:schemeClr val="bg1"/>
+                    </a:solidFill>
+                    <a:ln>
+                      <a:solidFill>
+                        <a:schemeClr val="tx1"/>
+                      </a:solidFill>
+                    </a:ln>
+                  </p:spPr>
+                  <p:style>
+                    <a:lnRef idx="2">
+                      <a:schemeClr val="accent1">
+                        <a:lumMod val="75000"/>
+                      </a:schemeClr>
+                    </a:lnRef>
+                    <a:fillRef idx="1">
+                      <a:schemeClr val="accent1"/>
+                    </a:fillRef>
+                    <a:effectRef idx="0">
+                      <a:srgbClr val="FFFFFF"/>
+                    </a:effectRef>
+                    <a:fontRef idx="minor">
+                      <a:schemeClr val="lt1"/>
+                    </a:fontRef>
+                  </p:style>
+                  <p:txBody>
+                    <a:bodyPr rtlCol="0" anchor="ctr"/>
+                    <a:p>
+                      <a:pPr algn="ctr">
+                        <a:defRPr/>
+                      </a:pPr>
+                      <a:endParaRPr lang="es-MX" u="sng"/>
+                    </a:p>
+                  </p:txBody>
+                </p:sp>
+                <p:sp>
+                  <p:nvSpPr>
+                    <p:cNvPr id="75" name="Óvalo 74"/>
+                    <p:cNvSpPr/>
+                    <p:nvPr/>
+                  </p:nvSpPr>
+                  <p:spPr bwMode="auto">
+                    <a:xfrm>
+                      <a:off x="3066" y="957"/>
+                      <a:ext cx="276" cy="277"/>
+                    </a:xfrm>
+                    <a:prstGeom prst="ellipse">
+                      <a:avLst/>
+                    </a:prstGeom>
+                    <a:solidFill>
+                      <a:schemeClr val="bg1"/>
+                    </a:solidFill>
+                    <a:ln>
+                      <a:solidFill>
+                        <a:schemeClr val="tx1"/>
+                      </a:solidFill>
+                    </a:ln>
+                  </p:spPr>
+                  <p:style>
+                    <a:lnRef idx="2">
+                      <a:schemeClr val="accent1">
+                        <a:lumMod val="75000"/>
+                      </a:schemeClr>
+                    </a:lnRef>
+                    <a:fillRef idx="1">
+                      <a:schemeClr val="accent1"/>
+                    </a:fillRef>
+                    <a:effectRef idx="0">
+                      <a:srgbClr val="FFFFFF"/>
+                    </a:effectRef>
+                    <a:fontRef idx="minor">
+                      <a:schemeClr val="lt1"/>
+                    </a:fontRef>
+                  </p:style>
+                  <p:txBody>
+                    <a:bodyPr rtlCol="0" anchor="ctr"/>
+                    <a:p>
+                      <a:pPr algn="ctr">
+                        <a:defRPr/>
+                      </a:pPr>
+                      <a:endParaRPr lang="es-MX" u="sng"/>
+                    </a:p>
+                  </p:txBody>
+                </p:sp>
+                <p:sp>
+                  <p:nvSpPr>
+                    <p:cNvPr id="76" name="Óvalo 75"/>
+                    <p:cNvSpPr/>
+                    <p:nvPr/>
+                  </p:nvSpPr>
+                  <p:spPr bwMode="auto">
+                    <a:xfrm>
+                      <a:off x="3506" y="5261"/>
+                      <a:ext cx="276" cy="277"/>
+                    </a:xfrm>
+                    <a:prstGeom prst="ellipse">
+                      <a:avLst/>
+                    </a:prstGeom>
+                    <a:solidFill>
+                      <a:schemeClr val="bg1"/>
+                    </a:solidFill>
+                    <a:ln>
+                      <a:solidFill>
+                        <a:schemeClr val="tx1"/>
+                      </a:solidFill>
+                    </a:ln>
+                  </p:spPr>
+                  <p:style>
+                    <a:lnRef idx="2">
+                      <a:schemeClr val="accent1">
+                        <a:lumMod val="75000"/>
+                      </a:schemeClr>
+                    </a:lnRef>
+                    <a:fillRef idx="1">
+                      <a:schemeClr val="accent1"/>
+                    </a:fillRef>
+                    <a:effectRef idx="0">
+                      <a:srgbClr val="FFFFFF"/>
+                    </a:effectRef>
+                    <a:fontRef idx="minor">
+                      <a:schemeClr val="lt1"/>
+                    </a:fontRef>
+                  </p:style>
+                  <p:txBody>
+                    <a:bodyPr rtlCol="0" anchor="ctr"/>
+                    <a:p>
+                      <a:pPr algn="ctr">
+                        <a:defRPr/>
+                      </a:pPr>
+                      <a:endParaRPr lang="es-MX" u="sng"/>
+                    </a:p>
+                  </p:txBody>
+                </p:sp>
+                <p:sp>
+                  <p:nvSpPr>
+                    <p:cNvPr id="77" name="Óvalo 76"/>
+                    <p:cNvSpPr/>
+                    <p:nvPr/>
+                  </p:nvSpPr>
+                  <p:spPr bwMode="auto">
+                    <a:xfrm>
+                      <a:off x="3506" y="957"/>
+                      <a:ext cx="276" cy="277"/>
+                    </a:xfrm>
+                    <a:prstGeom prst="ellipse">
+                      <a:avLst/>
+                    </a:prstGeom>
+                    <a:solidFill>
+                      <a:schemeClr val="bg1"/>
+                    </a:solidFill>
+                    <a:ln>
+                      <a:solidFill>
+                        <a:schemeClr val="tx1"/>
+                      </a:solidFill>
+                    </a:ln>
+                  </p:spPr>
+                  <p:style>
+                    <a:lnRef idx="2">
+                      <a:schemeClr val="accent1">
+                        <a:lumMod val="75000"/>
+                      </a:schemeClr>
+                    </a:lnRef>
+                    <a:fillRef idx="1">
+                      <a:schemeClr val="accent1"/>
+                    </a:fillRef>
+                    <a:effectRef idx="0">
+                      <a:srgbClr val="FFFFFF"/>
+                    </a:effectRef>
+                    <a:fontRef idx="minor">
+                      <a:schemeClr val="lt1"/>
+                    </a:fontRef>
+                  </p:style>
+                  <p:txBody>
+                    <a:bodyPr rtlCol="0" anchor="ctr"/>
+                    <a:p>
+                      <a:pPr algn="ctr">
+                        <a:defRPr/>
+                      </a:pPr>
+                      <a:endParaRPr lang="es-MX" u="sng"/>
+                    </a:p>
+                  </p:txBody>
+                </p:sp>
+                <p:sp>
+                  <p:nvSpPr>
+                    <p:cNvPr id="78" name="Óvalo 77"/>
+                    <p:cNvSpPr/>
+                    <p:nvPr/>
+                  </p:nvSpPr>
+                  <p:spPr bwMode="auto">
+                    <a:xfrm>
+                      <a:off x="3914" y="5261"/>
+                      <a:ext cx="276" cy="277"/>
+                    </a:xfrm>
+                    <a:prstGeom prst="ellipse">
+                      <a:avLst/>
+                    </a:prstGeom>
+                    <a:solidFill>
+                      <a:schemeClr val="bg1"/>
+                    </a:solidFill>
+                    <a:ln>
+                      <a:solidFill>
+                        <a:schemeClr val="tx1"/>
+                      </a:solidFill>
+                    </a:ln>
+                  </p:spPr>
+                  <p:style>
+                    <a:lnRef idx="2">
+                      <a:schemeClr val="accent1">
+                        <a:lumMod val="75000"/>
+                      </a:schemeClr>
+                    </a:lnRef>
+                    <a:fillRef idx="1">
+                      <a:schemeClr val="accent1"/>
+                    </a:fillRef>
+                    <a:effectRef idx="0">
+                      <a:srgbClr val="FFFFFF"/>
+                    </a:effectRef>
+                    <a:fontRef idx="minor">
+                      <a:schemeClr val="lt1"/>
+                    </a:fontRef>
+                  </p:style>
+                  <p:txBody>
+                    <a:bodyPr rtlCol="0" anchor="ctr"/>
+                    <a:p>
+                      <a:pPr algn="ctr">
+                        <a:defRPr/>
+                      </a:pPr>
+                      <a:endParaRPr lang="es-MX" u="sng"/>
+                    </a:p>
+                  </p:txBody>
+                </p:sp>
+                <p:sp>
+                  <p:nvSpPr>
+                    <p:cNvPr id="79" name="Óvalo 78"/>
+                    <p:cNvSpPr/>
+                    <p:nvPr/>
+                  </p:nvSpPr>
+                  <p:spPr bwMode="auto">
+                    <a:xfrm>
+                      <a:off x="3914" y="957"/>
+                      <a:ext cx="276" cy="277"/>
+                    </a:xfrm>
+                    <a:prstGeom prst="ellipse">
+                      <a:avLst/>
+                    </a:prstGeom>
+                    <a:solidFill>
+                      <a:schemeClr val="bg1"/>
+                    </a:solidFill>
+                    <a:ln>
+                      <a:solidFill>
+                        <a:schemeClr val="tx1"/>
+                      </a:solidFill>
+                    </a:ln>
+                  </p:spPr>
+                  <p:style>
+                    <a:lnRef idx="2">
+                      <a:schemeClr val="accent1">
+                        <a:lumMod val="75000"/>
+                      </a:schemeClr>
+                    </a:lnRef>
+                    <a:fillRef idx="1">
+                      <a:schemeClr val="accent1"/>
+                    </a:fillRef>
+                    <a:effectRef idx="0">
+                      <a:srgbClr val="FFFFFF"/>
+                    </a:effectRef>
+                    <a:fontRef idx="minor">
+                      <a:schemeClr val="lt1"/>
+                    </a:fontRef>
+                  </p:style>
+                  <p:txBody>
+                    <a:bodyPr rtlCol="0" anchor="ctr"/>
+                    <a:p>
+                      <a:pPr algn="ctr">
+                        <a:defRPr/>
+                      </a:pPr>
+                      <a:endParaRPr lang="es-MX" u="sng"/>
+                    </a:p>
+                  </p:txBody>
+                </p:sp>
+                <p:sp>
+                  <p:nvSpPr>
+                    <p:cNvPr id="80" name="Óvalo 79"/>
+                    <p:cNvSpPr/>
+                    <p:nvPr/>
+                  </p:nvSpPr>
+                  <p:spPr bwMode="auto">
+                    <a:xfrm>
+                      <a:off x="4354" y="5261"/>
+                      <a:ext cx="276" cy="277"/>
+                    </a:xfrm>
+                    <a:prstGeom prst="ellipse">
+                      <a:avLst/>
+                    </a:prstGeom>
+                    <a:solidFill>
+                      <a:schemeClr val="bg1"/>
+                    </a:solidFill>
+                    <a:ln>
+                      <a:solidFill>
+                        <a:schemeClr val="tx1"/>
+                      </a:solidFill>
+                    </a:ln>
+                  </p:spPr>
+                  <p:style>
+                    <a:lnRef idx="2">
+                      <a:schemeClr val="accent1">
+                        <a:lumMod val="75000"/>
+                      </a:schemeClr>
+                    </a:lnRef>
+                    <a:fillRef idx="1">
+                      <a:schemeClr val="accent1"/>
+                    </a:fillRef>
+                    <a:effectRef idx="0">
+                      <a:srgbClr val="FFFFFF"/>
+                    </a:effectRef>
+                    <a:fontRef idx="minor">
+                      <a:schemeClr val="lt1"/>
+                    </a:fontRef>
+                  </p:style>
+                  <p:txBody>
+                    <a:bodyPr rtlCol="0" anchor="ctr"/>
+                    <a:p>
+                      <a:pPr algn="ctr">
+                        <a:defRPr/>
+                      </a:pPr>
+                      <a:endParaRPr lang="es-MX" u="sng"/>
+                    </a:p>
+                  </p:txBody>
+                </p:sp>
+                <p:sp>
+                  <p:nvSpPr>
+                    <p:cNvPr id="81" name="Óvalo 80"/>
+                    <p:cNvSpPr/>
+                    <p:nvPr/>
+                  </p:nvSpPr>
+                  <p:spPr bwMode="auto">
+                    <a:xfrm>
+                      <a:off x="4354" y="957"/>
+                      <a:ext cx="276" cy="277"/>
+                    </a:xfrm>
+                    <a:prstGeom prst="ellipse">
+                      <a:avLst/>
+                    </a:prstGeom>
+                    <a:solidFill>
+                      <a:schemeClr val="bg1"/>
+                    </a:solidFill>
+                    <a:ln>
+                      <a:solidFill>
+                        <a:schemeClr val="tx1"/>
+                      </a:solidFill>
+                    </a:ln>
+                  </p:spPr>
+                  <p:style>
+                    <a:lnRef idx="2">
+                      <a:schemeClr val="accent1">
+                        <a:lumMod val="75000"/>
+                      </a:schemeClr>
+                    </a:lnRef>
+                    <a:fillRef idx="1">
+                      <a:schemeClr val="accent1"/>
+                    </a:fillRef>
+                    <a:effectRef idx="0">
+                      <a:srgbClr val="FFFFFF"/>
+                    </a:effectRef>
+                    <a:fontRef idx="minor">
+                      <a:schemeClr val="lt1"/>
+                    </a:fontRef>
+                  </p:style>
+                  <p:txBody>
+                    <a:bodyPr rtlCol="0" anchor="ctr"/>
+                    <a:p>
+                      <a:pPr algn="ctr">
+                        <a:defRPr/>
+                      </a:pPr>
+                      <a:endParaRPr lang="es-MX" u="sng"/>
+                    </a:p>
+                  </p:txBody>
+                </p:sp>
+                <p:sp>
+                  <p:nvSpPr>
+                    <p:cNvPr id="82" name="Óvalo 81"/>
+                    <p:cNvSpPr/>
+                    <p:nvPr/>
+                  </p:nvSpPr>
+                  <p:spPr bwMode="auto">
+                    <a:xfrm>
+                      <a:off x="4794" y="5261"/>
+                      <a:ext cx="276" cy="277"/>
+                    </a:xfrm>
+                    <a:prstGeom prst="ellipse">
+                      <a:avLst/>
+                    </a:prstGeom>
+                    <a:solidFill>
+                      <a:schemeClr val="bg1"/>
+                    </a:solidFill>
+                    <a:ln>
+                      <a:solidFill>
+                        <a:schemeClr val="tx1"/>
+                      </a:solidFill>
+                    </a:ln>
+                  </p:spPr>
+                  <p:style>
+                    <a:lnRef idx="2">
+                      <a:schemeClr val="accent1">
+                        <a:lumMod val="75000"/>
+                      </a:schemeClr>
+                    </a:lnRef>
+                    <a:fillRef idx="1">
+                      <a:schemeClr val="accent1"/>
+                    </a:fillRef>
+                    <a:effectRef idx="0">
+                      <a:srgbClr val="FFFFFF"/>
+                    </a:effectRef>
+                    <a:fontRef idx="minor">
+                      <a:schemeClr val="lt1"/>
+                    </a:fontRef>
+                  </p:style>
+                  <p:txBody>
+                    <a:bodyPr rtlCol="0" anchor="ctr"/>
+                    <a:p>
+                      <a:pPr algn="ctr">
+                        <a:defRPr/>
+                      </a:pPr>
+                      <a:endParaRPr lang="es-MX" u="sng"/>
+                    </a:p>
+                  </p:txBody>
+                </p:sp>
+                <p:sp>
+                  <p:nvSpPr>
+                    <p:cNvPr id="83" name="Óvalo 82"/>
+                    <p:cNvSpPr/>
+                    <p:nvPr/>
+                  </p:nvSpPr>
+                  <p:spPr bwMode="auto">
+                    <a:xfrm>
+                      <a:off x="4794" y="957"/>
+                      <a:ext cx="276" cy="277"/>
+                    </a:xfrm>
+                    <a:prstGeom prst="ellipse">
+                      <a:avLst/>
+                    </a:prstGeom>
+                    <a:solidFill>
+                      <a:schemeClr val="bg1"/>
+                    </a:solidFill>
+                    <a:ln>
+                      <a:solidFill>
+                        <a:schemeClr val="tx1"/>
+                      </a:solidFill>
+                    </a:ln>
+                  </p:spPr>
+                  <p:style>
+                    <a:lnRef idx="2">
+                      <a:schemeClr val="accent1">
+                        <a:lumMod val="75000"/>
+                      </a:schemeClr>
+                    </a:lnRef>
+                    <a:fillRef idx="1">
+                      <a:schemeClr val="accent1"/>
+                    </a:fillRef>
+                    <a:effectRef idx="0">
+                      <a:srgbClr val="FFFFFF"/>
+                    </a:effectRef>
+                    <a:fontRef idx="minor">
+                      <a:schemeClr val="lt1"/>
+                    </a:fontRef>
+                  </p:style>
+                  <p:txBody>
+                    <a:bodyPr rtlCol="0" anchor="ctr"/>
+                    <a:p>
+                      <a:pPr algn="ctr">
+                        <a:defRPr/>
+                      </a:pPr>
+                      <a:endParaRPr lang="es-MX" u="sng"/>
+                    </a:p>
+                  </p:txBody>
+                </p:sp>
+                <p:sp>
+                  <p:nvSpPr>
+                    <p:cNvPr id="84" name="Óvalo 83"/>
+                    <p:cNvSpPr/>
+                    <p:nvPr/>
+                  </p:nvSpPr>
+                  <p:spPr bwMode="auto">
+                    <a:xfrm>
+                      <a:off x="5234" y="5261"/>
+                      <a:ext cx="276" cy="277"/>
+                    </a:xfrm>
+                    <a:prstGeom prst="ellipse">
+                      <a:avLst/>
+                    </a:prstGeom>
+                    <a:solidFill>
+                      <a:schemeClr val="bg1"/>
+                    </a:solidFill>
+                    <a:ln>
+                      <a:solidFill>
+                        <a:schemeClr val="tx1"/>
+                      </a:solidFill>
+                    </a:ln>
+                  </p:spPr>
+                  <p:style>
+                    <a:lnRef idx="2">
+                      <a:schemeClr val="accent1">
+                        <a:lumMod val="75000"/>
+                      </a:schemeClr>
+                    </a:lnRef>
+                    <a:fillRef idx="1">
+                      <a:schemeClr val="accent1"/>
+                    </a:fillRef>
+                    <a:effectRef idx="0">
+                      <a:srgbClr val="FFFFFF"/>
+                    </a:effectRef>
+                    <a:fontRef idx="minor">
+                      <a:schemeClr val="lt1"/>
+                    </a:fontRef>
+                  </p:style>
+                  <p:txBody>
+                    <a:bodyPr rtlCol="0" anchor="ctr"/>
+                    <a:p>
+                      <a:pPr algn="ctr">
+                        <a:defRPr/>
+                      </a:pPr>
+                      <a:endParaRPr lang="es-MX" u="sng"/>
+                    </a:p>
+                  </p:txBody>
+                </p:sp>
+                <p:sp>
+                  <p:nvSpPr>
+                    <p:cNvPr id="85" name="Óvalo 84"/>
+                    <p:cNvSpPr/>
+                    <p:nvPr/>
+                  </p:nvSpPr>
+                  <p:spPr bwMode="auto">
+                    <a:xfrm>
+                      <a:off x="5234" y="957"/>
+                      <a:ext cx="276" cy="277"/>
+                    </a:xfrm>
+                    <a:prstGeom prst="ellipse">
+                      <a:avLst/>
+                    </a:prstGeom>
+                    <a:solidFill>
+                      <a:schemeClr val="bg1"/>
+                    </a:solidFill>
+                    <a:ln>
+                      <a:solidFill>
+                        <a:schemeClr val="tx1"/>
+                      </a:solidFill>
+                    </a:ln>
+                  </p:spPr>
+                  <p:style>
+                    <a:lnRef idx="2">
+                      <a:schemeClr val="accent1">
+                        <a:lumMod val="75000"/>
+                      </a:schemeClr>
+                    </a:lnRef>
+                    <a:fillRef idx="1">
+                      <a:schemeClr val="accent1"/>
+                    </a:fillRef>
+                    <a:effectRef idx="0">
+                      <a:srgbClr val="FFFFFF"/>
+                    </a:effectRef>
+                    <a:fontRef idx="minor">
+                      <a:schemeClr val="lt1"/>
+                    </a:fontRef>
+                  </p:style>
+                  <p:txBody>
+                    <a:bodyPr rtlCol="0" anchor="ctr"/>
+                    <a:p>
+                      <a:pPr algn="ctr">
+                        <a:defRPr/>
+                      </a:pPr>
+                      <a:endParaRPr lang="es-MX" u="sng"/>
+                    </a:p>
+                  </p:txBody>
+                </p:sp>
+                <p:sp>
+                  <p:nvSpPr>
+                    <p:cNvPr id="86" name="Óvalo 85"/>
+                    <p:cNvSpPr/>
+                    <p:nvPr/>
+                  </p:nvSpPr>
+                  <p:spPr bwMode="auto">
+                    <a:xfrm>
+                      <a:off x="5642" y="5261"/>
+                      <a:ext cx="276" cy="277"/>
+                    </a:xfrm>
+                    <a:prstGeom prst="ellipse">
+                      <a:avLst/>
+                    </a:prstGeom>
+                    <a:solidFill>
+                      <a:schemeClr val="bg1"/>
+                    </a:solidFill>
+                    <a:ln>
+                      <a:solidFill>
+                        <a:schemeClr val="tx1"/>
+                      </a:solidFill>
+                    </a:ln>
+                  </p:spPr>
+                  <p:style>
+                    <a:lnRef idx="2">
+                      <a:schemeClr val="accent1">
+                        <a:lumMod val="75000"/>
+                      </a:schemeClr>
+                    </a:lnRef>
+                    <a:fillRef idx="1">
+                      <a:schemeClr val="accent1"/>
+                    </a:fillRef>
+                    <a:effectRef idx="0">
+                      <a:srgbClr val="FFFFFF"/>
+                    </a:effectRef>
+                    <a:fontRef idx="minor">
+                      <a:schemeClr val="lt1"/>
+                    </a:fontRef>
+                  </p:style>
+                  <p:txBody>
+                    <a:bodyPr rtlCol="0" anchor="ctr"/>
+                    <a:p>
+                      <a:pPr algn="ctr">
+                        <a:defRPr/>
+                      </a:pPr>
+                      <a:endParaRPr lang="es-MX" u="sng"/>
+                    </a:p>
+                  </p:txBody>
+                </p:sp>
+                <p:sp>
+                  <p:nvSpPr>
+                    <p:cNvPr id="87" name="Óvalo 86"/>
+                    <p:cNvSpPr/>
+                    <p:nvPr/>
+                  </p:nvSpPr>
+                  <p:spPr bwMode="auto">
+                    <a:xfrm>
+                      <a:off x="5642" y="957"/>
+                      <a:ext cx="276" cy="277"/>
+                    </a:xfrm>
+                    <a:prstGeom prst="ellipse">
+                      <a:avLst/>
+                    </a:prstGeom>
+                    <a:solidFill>
+                      <a:schemeClr val="bg1"/>
+                    </a:solidFill>
+                    <a:ln>
+                      <a:solidFill>
+                        <a:schemeClr val="tx1"/>
+                      </a:solidFill>
+                    </a:ln>
+                  </p:spPr>
+                  <p:style>
+                    <a:lnRef idx="2">
+                      <a:schemeClr val="accent1">
+                        <a:lumMod val="75000"/>
+                      </a:schemeClr>
+                    </a:lnRef>
+                    <a:fillRef idx="1">
+                      <a:schemeClr val="accent1"/>
+                    </a:fillRef>
+                    <a:effectRef idx="0">
+                      <a:srgbClr val="FFFFFF"/>
+                    </a:effectRef>
+                    <a:fontRef idx="minor">
+                      <a:schemeClr val="lt1"/>
+                    </a:fontRef>
+                  </p:style>
+                  <p:txBody>
+                    <a:bodyPr rtlCol="0" anchor="ctr"/>
+                    <a:p>
+                      <a:pPr algn="ctr">
+                        <a:defRPr/>
+                      </a:pPr>
+                      <a:endParaRPr lang="es-MX" u="sng"/>
+                    </a:p>
+                  </p:txBody>
+                </p:sp>
+                <p:sp>
+                  <p:nvSpPr>
+                    <p:cNvPr id="88" name="Óvalo 87"/>
+                    <p:cNvSpPr/>
+                    <p:nvPr/>
+                  </p:nvSpPr>
+                  <p:spPr bwMode="auto">
+                    <a:xfrm>
+                      <a:off x="6082" y="5261"/>
+                      <a:ext cx="276" cy="277"/>
+                    </a:xfrm>
+                    <a:prstGeom prst="ellipse">
+                      <a:avLst/>
+                    </a:prstGeom>
+                    <a:solidFill>
+                      <a:schemeClr val="bg1"/>
+                    </a:solidFill>
+                    <a:ln>
+                      <a:solidFill>
+                        <a:schemeClr val="tx1"/>
+                      </a:solidFill>
+                    </a:ln>
+                  </p:spPr>
+                  <p:style>
+                    <a:lnRef idx="2">
+                      <a:schemeClr val="accent1">
+                        <a:lumMod val="75000"/>
+                      </a:schemeClr>
+                    </a:lnRef>
+                    <a:fillRef idx="1">
+                      <a:schemeClr val="accent1"/>
+                    </a:fillRef>
+                    <a:effectRef idx="0">
+                      <a:srgbClr val="FFFFFF"/>
+                    </a:effectRef>
+                    <a:fontRef idx="minor">
+                      <a:schemeClr val="lt1"/>
+                    </a:fontRef>
+                  </p:style>
+                  <p:txBody>
+                    <a:bodyPr rtlCol="0" anchor="ctr"/>
+                    <a:p>
+                      <a:pPr algn="ctr">
+                        <a:defRPr/>
+                      </a:pPr>
+                      <a:endParaRPr lang="es-MX" u="sng"/>
+                    </a:p>
+                  </p:txBody>
+                </p:sp>
+                <p:sp>
+                  <p:nvSpPr>
+                    <p:cNvPr id="89" name="Óvalo 88"/>
+                    <p:cNvSpPr/>
+                    <p:nvPr/>
+                  </p:nvSpPr>
+                  <p:spPr bwMode="auto">
+                    <a:xfrm>
+                      <a:off x="6082" y="957"/>
+                      <a:ext cx="276" cy="277"/>
+                    </a:xfrm>
+                    <a:prstGeom prst="ellipse">
+                      <a:avLst/>
+                    </a:prstGeom>
+                    <a:solidFill>
+                      <a:schemeClr val="bg1"/>
+                    </a:solidFill>
+                    <a:ln>
+                      <a:solidFill>
+                        <a:schemeClr val="tx1"/>
+                      </a:solidFill>
+                    </a:ln>
+                  </p:spPr>
+                  <p:style>
+                    <a:lnRef idx="2">
+                      <a:schemeClr val="accent1">
+                        <a:lumMod val="75000"/>
+                      </a:schemeClr>
+                    </a:lnRef>
+                    <a:fillRef idx="1">
+                      <a:schemeClr val="accent1"/>
+                    </a:fillRef>
+                    <a:effectRef idx="0">
+                      <a:srgbClr val="FFFFFF"/>
+                    </a:effectRef>
+                    <a:fontRef idx="minor">
+                      <a:schemeClr val="lt1"/>
+                    </a:fontRef>
+                  </p:style>
+                  <p:txBody>
+                    <a:bodyPr rtlCol="0" anchor="ctr"/>
+                    <a:p>
+                      <a:pPr algn="ctr">
+                        <a:defRPr/>
+                      </a:pPr>
+                      <a:endParaRPr lang="es-MX" u="sng"/>
+                    </a:p>
+                  </p:txBody>
+                </p:sp>
+                <p:sp>
+                  <p:nvSpPr>
+                    <p:cNvPr id="90" name="Óvalo 89"/>
+                    <p:cNvSpPr/>
+                    <p:nvPr/>
+                  </p:nvSpPr>
+                  <p:spPr bwMode="auto">
+                    <a:xfrm>
+                      <a:off x="6522" y="5261"/>
+                      <a:ext cx="276" cy="277"/>
+                    </a:xfrm>
+                    <a:prstGeom prst="ellipse">
+                      <a:avLst/>
+                    </a:prstGeom>
+                    <a:solidFill>
+                      <a:schemeClr val="bg1"/>
+                    </a:solidFill>
+                    <a:ln>
+                      <a:solidFill>
+                        <a:schemeClr val="tx1"/>
+                      </a:solidFill>
+                    </a:ln>
+                  </p:spPr>
+                  <p:style>
+                    <a:lnRef idx="2">
+                      <a:schemeClr val="accent1">
+                        <a:lumMod val="75000"/>
+                      </a:schemeClr>
+                    </a:lnRef>
+                    <a:fillRef idx="1">
+                      <a:schemeClr val="accent1"/>
+                    </a:fillRef>
+                    <a:effectRef idx="0">
+                      <a:srgbClr val="FFFFFF"/>
+                    </a:effectRef>
+                    <a:fontRef idx="minor">
+                      <a:schemeClr val="lt1"/>
+                    </a:fontRef>
+                  </p:style>
+                  <p:txBody>
+                    <a:bodyPr rtlCol="0" anchor="ctr"/>
+                    <a:p>
+                      <a:pPr algn="ctr">
+                        <a:defRPr/>
+                      </a:pPr>
+                      <a:endParaRPr lang="es-MX" u="sng"/>
+                    </a:p>
+                  </p:txBody>
+                </p:sp>
+                <p:sp>
+                  <p:nvSpPr>
+                    <p:cNvPr id="91" name="Óvalo 90"/>
+                    <p:cNvSpPr/>
+                    <p:nvPr/>
+                  </p:nvSpPr>
+                  <p:spPr bwMode="auto">
+                    <a:xfrm>
+                      <a:off x="6522" y="957"/>
+                      <a:ext cx="276" cy="277"/>
+                    </a:xfrm>
+                    <a:prstGeom prst="ellipse">
+                      <a:avLst/>
+                    </a:prstGeom>
+                    <a:solidFill>
+                      <a:schemeClr val="bg1"/>
+                    </a:solidFill>
+                    <a:ln>
+                      <a:solidFill>
+                        <a:schemeClr val="tx1"/>
+                      </a:solidFill>
+                    </a:ln>
+                  </p:spPr>
+                  <p:style>
+                    <a:lnRef idx="2">
+                      <a:schemeClr val="accent1">
+                        <a:lumMod val="75000"/>
+                      </a:schemeClr>
+                    </a:lnRef>
+                    <a:fillRef idx="1">
+                      <a:schemeClr val="accent1"/>
+                    </a:fillRef>
+                    <a:effectRef idx="0">
+                      <a:srgbClr val="FFFFFF"/>
+                    </a:effectRef>
+                    <a:fontRef idx="minor">
+                      <a:schemeClr val="lt1"/>
+                    </a:fontRef>
+                  </p:style>
+                  <p:txBody>
+                    <a:bodyPr rtlCol="0" anchor="ctr"/>
+                    <a:p>
+                      <a:pPr algn="ctr">
+                        <a:defRPr/>
+                      </a:pPr>
+                      <a:endParaRPr lang="es-MX" u="sng"/>
+                    </a:p>
+                  </p:txBody>
+                </p:sp>
+                <p:sp>
+                  <p:nvSpPr>
+                    <p:cNvPr id="92" name="Óvalo 91"/>
+                    <p:cNvSpPr/>
+                    <p:nvPr/>
+                  </p:nvSpPr>
+                  <p:spPr bwMode="auto">
+                    <a:xfrm>
+                      <a:off x="6953" y="5261"/>
+                      <a:ext cx="276" cy="277"/>
+                    </a:xfrm>
+                    <a:prstGeom prst="ellipse">
+                      <a:avLst/>
+                    </a:prstGeom>
+                    <a:solidFill>
+                      <a:schemeClr val="bg1"/>
+                    </a:solidFill>
+                    <a:ln>
+                      <a:solidFill>
+                        <a:schemeClr val="tx1"/>
+                      </a:solidFill>
+                    </a:ln>
+                  </p:spPr>
+                  <p:style>
+                    <a:lnRef idx="2">
+                      <a:schemeClr val="accent1">
+                        <a:lumMod val="75000"/>
+                      </a:schemeClr>
+                    </a:lnRef>
+                    <a:fillRef idx="1">
+                      <a:schemeClr val="accent1"/>
+                    </a:fillRef>
+                    <a:effectRef idx="0">
+                      <a:srgbClr val="FFFFFF"/>
+                    </a:effectRef>
+                    <a:fontRef idx="minor">
+                      <a:schemeClr val="lt1"/>
+                    </a:fontRef>
+                  </p:style>
+                  <p:txBody>
+                    <a:bodyPr rtlCol="0" anchor="ctr"/>
+                    <a:p>
+                      <a:pPr algn="ctr">
+                        <a:defRPr/>
+                      </a:pPr>
+                      <a:endParaRPr lang="es-MX" u="sng"/>
+                    </a:p>
+                  </p:txBody>
+                </p:sp>
+                <p:sp>
+                  <p:nvSpPr>
+                    <p:cNvPr id="93" name="Óvalo 92"/>
+                    <p:cNvSpPr/>
+                    <p:nvPr/>
+                  </p:nvSpPr>
+                  <p:spPr bwMode="auto">
+                    <a:xfrm>
+                      <a:off x="6953" y="957"/>
+                      <a:ext cx="276" cy="277"/>
+                    </a:xfrm>
+                    <a:prstGeom prst="ellipse">
+                      <a:avLst/>
+                    </a:prstGeom>
+                    <a:solidFill>
+                      <a:schemeClr val="bg1"/>
+                    </a:solidFill>
+                    <a:ln>
+                      <a:solidFill>
+                        <a:schemeClr val="tx1"/>
+                      </a:solidFill>
+                    </a:ln>
+                  </p:spPr>
+                  <p:style>
+                    <a:lnRef idx="2">
+                      <a:schemeClr val="accent1">
+                        <a:lumMod val="75000"/>
+                      </a:schemeClr>
+                    </a:lnRef>
+                    <a:fillRef idx="1">
+                      <a:schemeClr val="accent1"/>
+                    </a:fillRef>
+                    <a:effectRef idx="0">
+                      <a:srgbClr val="FFFFFF"/>
+                    </a:effectRef>
+                    <a:fontRef idx="minor">
+                      <a:schemeClr val="lt1"/>
+                    </a:fontRef>
+                  </p:style>
+                  <p:txBody>
+                    <a:bodyPr rtlCol="0" anchor="ctr"/>
+                    <a:p>
+                      <a:pPr algn="ctr">
+                        <a:defRPr/>
+                      </a:pPr>
+                      <a:endParaRPr lang="es-MX" u="sng"/>
+                    </a:p>
+                  </p:txBody>
+                </p:sp>
+                <p:sp>
+                  <p:nvSpPr>
+                    <p:cNvPr id="94" name="Óvalo 93"/>
+                    <p:cNvSpPr/>
+                    <p:nvPr/>
+                  </p:nvSpPr>
+                  <p:spPr bwMode="auto">
+                    <a:xfrm>
+                      <a:off x="7370" y="5261"/>
+                      <a:ext cx="276" cy="277"/>
+                    </a:xfrm>
+                    <a:prstGeom prst="ellipse">
+                      <a:avLst/>
+                    </a:prstGeom>
+                    <a:solidFill>
+                      <a:schemeClr val="bg1"/>
+                    </a:solidFill>
+                    <a:ln>
+                      <a:solidFill>
+                        <a:schemeClr val="tx1"/>
+                      </a:solidFill>
+                    </a:ln>
+                  </p:spPr>
+                  <p:style>
+                    <a:lnRef idx="2">
+                      <a:schemeClr val="accent1">
+                        <a:lumMod val="75000"/>
+                      </a:schemeClr>
+                    </a:lnRef>
+                    <a:fillRef idx="1">
+                      <a:schemeClr val="accent1"/>
+                    </a:fillRef>
+                    <a:effectRef idx="0">
+                      <a:srgbClr val="FFFFFF"/>
+                    </a:effectRef>
+                    <a:fontRef idx="minor">
+                      <a:schemeClr val="lt1"/>
+                    </a:fontRef>
+                  </p:style>
+                  <p:txBody>
+                    <a:bodyPr rtlCol="0" anchor="ctr"/>
+                    <a:p>
+                      <a:pPr algn="ctr">
+                        <a:defRPr/>
+                      </a:pPr>
+                      <a:endParaRPr lang="es-MX" u="sng"/>
+                    </a:p>
+                  </p:txBody>
+                </p:sp>
+                <p:sp>
+                  <p:nvSpPr>
+                    <p:cNvPr id="95" name="Óvalo 94"/>
+                    <p:cNvSpPr/>
+                    <p:nvPr/>
+                  </p:nvSpPr>
+                  <p:spPr bwMode="auto">
+                    <a:xfrm>
+                      <a:off x="7370" y="957"/>
+                      <a:ext cx="276" cy="277"/>
+                    </a:xfrm>
+                    <a:prstGeom prst="ellipse">
+                      <a:avLst/>
+                    </a:prstGeom>
+                    <a:solidFill>
+                      <a:schemeClr val="bg1"/>
+                    </a:solidFill>
+                    <a:ln>
+                      <a:solidFill>
+                        <a:schemeClr val="tx1"/>
+                      </a:solidFill>
+                    </a:ln>
+                  </p:spPr>
+                  <p:style>
+                    <a:lnRef idx="2">
+                      <a:schemeClr val="accent1">
+                        <a:lumMod val="75000"/>
+                      </a:schemeClr>
+                    </a:lnRef>
+                    <a:fillRef idx="1">
+                      <a:schemeClr val="accent1"/>
+                    </a:fillRef>
+                    <a:effectRef idx="0">
+                      <a:srgbClr val="FFFFFF"/>
+                    </a:effectRef>
+                    <a:fontRef idx="minor">
+                      <a:schemeClr val="lt1"/>
+                    </a:fontRef>
+                  </p:style>
+                  <p:txBody>
+                    <a:bodyPr rtlCol="0" anchor="ctr"/>
+                    <a:p>
+                      <a:pPr algn="ctr">
+                        <a:defRPr/>
+                      </a:pPr>
+                      <a:endParaRPr lang="es-MX" u="sng"/>
+                    </a:p>
+                  </p:txBody>
+                </p:sp>
+                <p:sp>
+                  <p:nvSpPr>
+                    <p:cNvPr id="96" name="Óvalo 95"/>
+                    <p:cNvSpPr/>
+                    <p:nvPr/>
+                  </p:nvSpPr>
+                  <p:spPr bwMode="auto">
+                    <a:xfrm>
+                      <a:off x="7792" y="5261"/>
+                      <a:ext cx="276" cy="277"/>
+                    </a:xfrm>
+                    <a:prstGeom prst="ellipse">
+                      <a:avLst/>
+                    </a:prstGeom>
+                    <a:solidFill>
+                      <a:schemeClr val="bg1"/>
+                    </a:solidFill>
+                    <a:ln>
+                      <a:solidFill>
+                        <a:schemeClr val="tx1"/>
+                      </a:solidFill>
+                    </a:ln>
+                  </p:spPr>
+                  <p:style>
+                    <a:lnRef idx="2">
+                      <a:schemeClr val="accent1">
+                        <a:lumMod val="75000"/>
+                      </a:schemeClr>
+                    </a:lnRef>
+                    <a:fillRef idx="1">
+                      <a:schemeClr val="accent1"/>
+                    </a:fillRef>
+                    <a:effectRef idx="0">
+                      <a:srgbClr val="FFFFFF"/>
+                    </a:effectRef>
+                    <a:fontRef idx="minor">
+                      <a:schemeClr val="lt1"/>
+                    </a:fontRef>
+                  </p:style>
+                  <p:txBody>
+                    <a:bodyPr rtlCol="0" anchor="ctr"/>
+                    <a:p>
+                      <a:pPr algn="ctr">
+                        <a:defRPr/>
+                      </a:pPr>
+                      <a:endParaRPr lang="es-MX" u="sng"/>
+                    </a:p>
+                  </p:txBody>
+                </p:sp>
+                <p:sp>
+                  <p:nvSpPr>
+                    <p:cNvPr id="97" name="Óvalo 96"/>
+                    <p:cNvSpPr/>
+                    <p:nvPr/>
+                  </p:nvSpPr>
+                  <p:spPr bwMode="auto">
+                    <a:xfrm>
+                      <a:off x="7792" y="957"/>
+                      <a:ext cx="276" cy="277"/>
+                    </a:xfrm>
+                    <a:prstGeom prst="ellipse">
+                      <a:avLst/>
+                    </a:prstGeom>
+                    <a:solidFill>
+                      <a:schemeClr val="bg1"/>
+                    </a:solidFill>
+                    <a:ln>
+                      <a:solidFill>
+                        <a:schemeClr val="tx1"/>
+                      </a:solidFill>
+                    </a:ln>
+                  </p:spPr>
+                  <p:style>
+                    <a:lnRef idx="2">
+                      <a:schemeClr val="accent1">
+                        <a:lumMod val="75000"/>
+                      </a:schemeClr>
+                    </a:lnRef>
+                    <a:fillRef idx="1">
+                      <a:schemeClr val="accent1"/>
+                    </a:fillRef>
+                    <a:effectRef idx="0">
+                      <a:srgbClr val="FFFFFF"/>
+                    </a:effectRef>
+                    <a:fontRef idx="minor">
+                      <a:schemeClr val="lt1"/>
+                    </a:fontRef>
+                  </p:style>
+                  <p:txBody>
+                    <a:bodyPr rtlCol="0" anchor="ctr"/>
+                    <a:p>
+                      <a:pPr algn="ctr">
+                        <a:defRPr/>
+                      </a:pPr>
+                      <a:endParaRPr lang="es-MX" u="sng"/>
+                    </a:p>
+                  </p:txBody>
+                </p:sp>
+                <p:sp>
+                  <p:nvSpPr>
+                    <p:cNvPr id="98" name="Óvalo 97"/>
+                    <p:cNvSpPr/>
+                    <p:nvPr/>
+                  </p:nvSpPr>
+                  <p:spPr bwMode="auto">
+                    <a:xfrm>
+                      <a:off x="8232" y="5261"/>
+                      <a:ext cx="276" cy="277"/>
+                    </a:xfrm>
+                    <a:prstGeom prst="ellipse">
+                      <a:avLst/>
+                    </a:prstGeom>
+                    <a:solidFill>
+                      <a:schemeClr val="bg1"/>
+                    </a:solidFill>
+                    <a:ln>
+                      <a:solidFill>
+                        <a:schemeClr val="tx1"/>
+                      </a:solidFill>
+                    </a:ln>
+                  </p:spPr>
+                  <p:style>
+                    <a:lnRef idx="2">
+                      <a:schemeClr val="accent1">
+                        <a:lumMod val="75000"/>
+                      </a:schemeClr>
+                    </a:lnRef>
+                    <a:fillRef idx="1">
+                      <a:schemeClr val="accent1"/>
+                    </a:fillRef>
+                    <a:effectRef idx="0">
+                      <a:srgbClr val="FFFFFF"/>
+                    </a:effectRef>
+                    <a:fontRef idx="minor">
+                      <a:schemeClr val="lt1"/>
+                    </a:fontRef>
+                  </p:style>
+                  <p:txBody>
+                    <a:bodyPr rtlCol="0" anchor="ctr"/>
+                    <a:p>
+                      <a:pPr algn="ctr">
+                        <a:defRPr/>
+                      </a:pPr>
+                      <a:endParaRPr lang="es-MX" u="sng"/>
+                    </a:p>
+                  </p:txBody>
+                </p:sp>
+                <p:sp>
+                  <p:nvSpPr>
+                    <p:cNvPr id="99" name="Óvalo 98"/>
+                    <p:cNvSpPr/>
+                    <p:nvPr/>
+                  </p:nvSpPr>
+                  <p:spPr bwMode="auto">
+                    <a:xfrm>
+                      <a:off x="8232" y="957"/>
+                      <a:ext cx="276" cy="277"/>
+                    </a:xfrm>
+                    <a:prstGeom prst="ellipse">
+                      <a:avLst/>
+                    </a:prstGeom>
+                    <a:solidFill>
+                      <a:schemeClr val="bg1"/>
+                    </a:solidFill>
+                    <a:ln>
+                      <a:solidFill>
+                        <a:schemeClr val="tx1"/>
+                      </a:solidFill>
+                    </a:ln>
+                  </p:spPr>
+                  <p:style>
+                    <a:lnRef idx="2">
+                      <a:schemeClr val="accent1">
+                        <a:lumMod val="75000"/>
+                      </a:schemeClr>
+                    </a:lnRef>
+                    <a:fillRef idx="1">
+                      <a:schemeClr val="accent1"/>
+                    </a:fillRef>
+                    <a:effectRef idx="0">
+                      <a:srgbClr val="FFFFFF"/>
+                    </a:effectRef>
+                    <a:fontRef idx="minor">
+                      <a:schemeClr val="lt1"/>
+                    </a:fontRef>
+                  </p:style>
+                  <p:txBody>
+                    <a:bodyPr rtlCol="0" anchor="ctr"/>
+                    <a:p>
+                      <a:pPr algn="ctr">
+                        <a:defRPr/>
+                      </a:pPr>
+                      <a:endParaRPr lang="es-MX" u="sng"/>
+                    </a:p>
+                  </p:txBody>
+                </p:sp>
+              </p:grpSp>
+              <p:cxnSp>
+                <p:nvCxnSpPr>
+                  <p:cNvPr id="102" name="Conector angular 101"/>
+                  <p:cNvCxnSpPr>
+                    <a:stCxn id="82" idx="4"/>
+                    <a:endCxn id="60" idx="4"/>
+                  </p:cNvCxnSpPr>
+                  <p:nvPr/>
+                </p:nvCxnSpPr>
+                <p:spPr bwMode="auto">
+                  <a:xfrm rot="5400000" flipV="1">
+                    <a:off x="5999" y="4485"/>
+                    <a:ext cx="2245" cy="4553"/>
+                  </a:xfrm>
+                  <a:prstGeom prst="bentConnector3">
+                    <a:avLst>
+                      <a:gd name="adj1" fmla="val 38084"/>
+                    </a:avLst>
+                  </a:prstGeom>
+                  <a:ln w="28575">
+                    <a:solidFill>
+                      <a:srgbClr val="FFFF00"/>
+                    </a:solidFill>
+                  </a:ln>
+                </p:spPr>
+                <p:style>
+                  <a:lnRef idx="2">
+                    <a:schemeClr val="accent1"/>
+                  </a:lnRef>
+                  <a:fillRef idx="0">
+                    <a:srgbClr val="FFFFFF"/>
+                  </a:fillRef>
+                  <a:effectRef idx="0">
+                    <a:srgbClr val="FFFFFF"/>
+                  </a:effectRef>
+                  <a:fontRef idx="minor">
+                    <a:schemeClr val="tx1"/>
+                  </a:fontRef>
+                </p:style>
+              </p:cxnSp>
+              <p:cxnSp>
+                <p:nvCxnSpPr>
+                  <p:cNvPr id="103" name="Conector angular 102"/>
+                  <p:cNvCxnSpPr>
+                    <a:stCxn id="72" idx="4"/>
+                    <a:endCxn id="61" idx="4"/>
+                  </p:cNvCxnSpPr>
+                  <p:nvPr/>
+                </p:nvCxnSpPr>
+                <p:spPr bwMode="auto">
+                  <a:xfrm rot="5400000" flipV="1">
+                    <a:off x="5053" y="3263"/>
+                    <a:ext cx="2245" cy="6997"/>
+                  </a:xfrm>
+                  <a:prstGeom prst="bentConnector3">
+                    <a:avLst>
+                      <a:gd name="adj1" fmla="val 59866"/>
+                    </a:avLst>
+                  </a:prstGeom>
+                  <a:ln w="28575">
+                    <a:solidFill>
+                      <a:schemeClr val="tx1"/>
+                    </a:solidFill>
+                  </a:ln>
+                </p:spPr>
+                <p:style>
+                  <a:lnRef idx="2">
+                    <a:schemeClr val="accent1"/>
+                  </a:lnRef>
+                  <a:fillRef idx="0">
+                    <a:srgbClr val="FFFFFF"/>
+                  </a:fillRef>
+                  <a:effectRef idx="0">
+                    <a:srgbClr val="FFFFFF"/>
+                  </a:effectRef>
+                  <a:fontRef idx="minor">
+                    <a:schemeClr val="tx1"/>
+                  </a:fontRef>
+                </p:style>
+              </p:cxnSp>
+              <p:cxnSp>
+                <p:nvCxnSpPr>
+                  <p:cNvPr id="104" name="Conector angular 103"/>
+                  <p:cNvCxnSpPr>
+                    <a:stCxn id="73" idx="0"/>
+                    <a:endCxn id="2" idx="2"/>
+                  </p:cNvCxnSpPr>
+                  <p:nvPr/>
+                </p:nvCxnSpPr>
+                <p:spPr bwMode="auto">
+                  <a:xfrm rot="16199998" flipH="1">
+                    <a:off x="6521" y="-2785"/>
+                    <a:ext cx="773" cy="8463"/>
+                  </a:xfrm>
+                  <a:prstGeom prst="bentConnector4">
+                    <a:avLst>
+                      <a:gd name="adj1" fmla="val -97739"/>
+                      <a:gd name="adj2" fmla="val 83274"/>
+                    </a:avLst>
+                  </a:prstGeom>
+                  <a:ln w="28575">
+                    <a:solidFill>
+                      <a:schemeClr val="tx1"/>
+                    </a:solidFill>
+                  </a:ln>
+                </p:spPr>
+                <p:style>
+                  <a:lnRef idx="2">
+                    <a:schemeClr val="accent1"/>
+                  </a:lnRef>
+                  <a:fillRef idx="0">
+                    <a:srgbClr val="FFFFFF"/>
+                  </a:fillRef>
+                  <a:effectRef idx="0">
+                    <a:srgbClr val="FFFFFF"/>
+                  </a:effectRef>
+                  <a:fontRef idx="minor">
+                    <a:schemeClr val="tx1"/>
+                  </a:fontRef>
+                </p:style>
+              </p:cxnSp>
+              <p:cxnSp>
+                <p:nvCxnSpPr>
+                  <p:cNvPr id="106" name="Conector angular 105"/>
+                  <p:cNvCxnSpPr>
+                    <a:stCxn id="96" idx="4"/>
+                    <a:endCxn id="9" idx="2"/>
+                  </p:cNvCxnSpPr>
+                  <p:nvPr/>
+                </p:nvCxnSpPr>
+                <p:spPr bwMode="auto">
+                  <a:xfrm rot="5400000" flipH="1" flipV="1">
+                    <a:off x="8025" y="2524"/>
+                    <a:ext cx="2933" cy="3297"/>
+                  </a:xfrm>
+                  <a:prstGeom prst="bentConnector4">
+                    <a:avLst>
+                      <a:gd name="adj1" fmla="val -21445"/>
+                      <a:gd name="adj2" fmla="val 59811"/>
+                    </a:avLst>
+                  </a:prstGeom>
+                  <a:ln w="28575">
+                    <a:solidFill>
+                      <a:srgbClr val="92D050"/>
+                    </a:solidFill>
+                  </a:ln>
+                </p:spPr>
+                <p:style>
+                  <a:lnRef idx="2">
+                    <a:schemeClr val="accent1"/>
+                  </a:lnRef>
+                  <a:fillRef idx="0">
+                    <a:srgbClr val="FFFFFF"/>
+                  </a:fillRef>
+                  <a:effectRef idx="0">
+                    <a:srgbClr val="FFFFFF"/>
+                  </a:effectRef>
+                  <a:fontRef idx="minor">
+                    <a:schemeClr val="tx1"/>
+                  </a:fontRef>
+                </p:style>
+              </p:cxnSp>
+              <p:cxnSp>
+                <p:nvCxnSpPr>
+                  <p:cNvPr id="107" name="Conector angular 106"/>
+                  <p:cNvCxnSpPr>
+                    <a:stCxn id="90" idx="3"/>
+                  </p:cNvCxnSpPr>
+                  <p:nvPr/>
+                </p:nvCxnSpPr>
+                <p:spPr bwMode="auto">
+                  <a:xfrm rot="5400000" flipH="1" flipV="1">
+                    <a:off x="7215" y="1674"/>
+                    <a:ext cx="3184" cy="4665"/>
+                  </a:xfrm>
+                  <a:prstGeom prst="bentConnector4">
+                    <a:avLst>
+                      <a:gd name="adj1" fmla="val -13050"/>
+                      <a:gd name="adj2" fmla="val 64640"/>
+                    </a:avLst>
+                  </a:prstGeom>
+                  <a:ln w="28575">
+                    <a:solidFill>
+                      <a:srgbClr val="0000FE"/>
+                    </a:solidFill>
+                  </a:ln>
+                </p:spPr>
+                <p:style>
+                  <a:lnRef idx="2">
+                    <a:schemeClr val="accent1"/>
+                  </a:lnRef>
+                  <a:fillRef idx="0">
+                    <a:srgbClr val="FFFFFF"/>
+                  </a:fillRef>
+                  <a:effectRef idx="0">
+                    <a:srgbClr val="FFFFFF"/>
+                  </a:effectRef>
+                  <a:fontRef idx="minor">
+                    <a:schemeClr val="tx1"/>
+                  </a:fontRef>
+                </p:style>
+              </p:cxnSp>
+            </p:grpSp>
+          </p:grpSp>
+          <p:grpSp>
+            <p:nvGrpSpPr>
+              <p:cNvPr id="1164147346" name="Grupo 13"/>
+              <p:cNvGrpSpPr/>
+              <p:nvPr/>
+            </p:nvGrpSpPr>
+            <p:grpSpPr bwMode="auto">
+              <a:xfrm rot="10800000">
+                <a:off x="8942704" y="2872739"/>
+                <a:ext cx="3154045" cy="1798320"/>
+                <a:chOff x="13896" y="5984"/>
+                <a:chExt cx="4967" cy="2832"/>
+              </a:xfrm>
+            </p:grpSpPr>
+            <p:pic>
+              <p:nvPicPr>
+                <p:cNvPr id="8" name="Imagen 7"/>
+                <p:cNvPicPr/>
+                <p:nvPr/>
+              </p:nvPicPr>
+              <p:blipFill rotWithShape="1">
+                <a:blip r:embed="rId7"/>
+                <a:srcRect l="17593" t="42333" r="37667" b="31444"/>
+                <a:stretch/>
+              </p:blipFill>
+              <p:spPr bwMode="auto">
+                <a:xfrm>
+                  <a:off x="13896" y="5984"/>
+                  <a:ext cx="4832" cy="2832"/>
+                </a:xfrm>
+                <a:prstGeom prst="rect">
+                  <a:avLst/>
+                </a:prstGeom>
+              </p:spPr>
+            </p:pic>
+            <p:sp>
+              <p:nvSpPr>
+                <p:cNvPr id="12" name="Óvalo 11"/>
+                <p:cNvSpPr/>
+                <p:nvPr/>
+              </p:nvSpPr>
+              <p:spPr bwMode="auto">
+                <a:xfrm>
+                  <a:off x="18587" y="7794"/>
+                  <a:ext cx="276" cy="277"/>
+                </a:xfrm>
+                <a:prstGeom prst="ellipse">
+                  <a:avLst/>
+                </a:prstGeom>
+                <a:solidFill>
+                  <a:schemeClr val="bg1"/>
+                </a:solidFill>
+                <a:ln>
                   <a:solidFill>
-                    <a:srgbClr val="FF0000"/>
+                    <a:schemeClr val="tx1"/>
                   </a:solidFill>
                 </a:ln>
               </p:spPr>
               <p:style>
                 <a:lnRef idx="2">
+                  <a:schemeClr val="accent1">
+                    <a:lumMod val="75000"/>
+                  </a:schemeClr>
+                </a:lnRef>
+                <a:fillRef idx="1">
                   <a:schemeClr val="accent1"/>
-                </a:lnRef>
-                <a:fillRef idx="0">
-                  <a:srgbClr val="FFFFFF"/>
                 </a:fillRef>
                 <a:effectRef idx="0">
                   <a:srgbClr val="FFFFFF"/>
                 </a:effectRef>
                 <a:fontRef idx="minor">
-                  <a:schemeClr val="tx1"/>
+                  <a:schemeClr val="lt1"/>
                 </a:fontRef>
               </p:style>
-            </p:cxnSp>
+              <p:txBody>
+                <a:bodyPr rtlCol="0" anchor="ctr"/>
+                <a:p>
+                  <a:pPr algn="ctr">
+                    <a:defRPr/>
+                  </a:pPr>
+                  <a:endParaRPr lang="es-MX" u="sng"/>
+                </a:p>
+              </p:txBody>
+            </p:sp>
+            <p:sp>
+              <p:nvSpPr>
+                <p:cNvPr id="13" name="Óvalo 12"/>
+                <p:cNvSpPr/>
+                <p:nvPr/>
+              </p:nvSpPr>
+              <p:spPr bwMode="auto">
+                <a:xfrm>
+                  <a:off x="18587" y="7261"/>
+                  <a:ext cx="276" cy="277"/>
+                </a:xfrm>
+                <a:prstGeom prst="ellipse">
+                  <a:avLst/>
+                </a:prstGeom>
+                <a:solidFill>
+                  <a:schemeClr val="bg1"/>
+                </a:solidFill>
+                <a:ln>
+                  <a:solidFill>
+                    <a:schemeClr val="tx1"/>
+                  </a:solidFill>
+                </a:ln>
+              </p:spPr>
+              <p:style>
+                <a:lnRef idx="2">
+                  <a:schemeClr val="accent1">
+                    <a:lumMod val="75000"/>
+                  </a:schemeClr>
+                </a:lnRef>
+                <a:fillRef idx="1">
+                  <a:schemeClr val="accent1"/>
+                </a:fillRef>
+                <a:effectRef idx="0">
+                  <a:srgbClr val="FFFFFF"/>
+                </a:effectRef>
+                <a:fontRef idx="minor">
+                  <a:schemeClr val="lt1"/>
+                </a:fontRef>
+              </p:style>
+              <p:txBody>
+                <a:bodyPr rtlCol="0" anchor="ctr"/>
+                <a:p>
+                  <a:pPr algn="ctr">
+                    <a:defRPr/>
+                  </a:pPr>
+                  <a:endParaRPr lang="es-MX" u="sng"/>
+                </a:p>
+              </p:txBody>
+            </p:sp>
+          </p:grpSp>
+          <p:grpSp>
+            <p:nvGrpSpPr>
+              <p:cNvPr id="32913961" name="Grupo 28"/>
+              <p:cNvGrpSpPr/>
+              <p:nvPr/>
+            </p:nvGrpSpPr>
+            <p:grpSpPr bwMode="auto">
+              <a:xfrm rot="0">
+                <a:off x="6488429" y="6491604"/>
+                <a:ext cx="1750060" cy="730250"/>
+                <a:chOff x="8675" y="6641"/>
+                <a:chExt cx="2756" cy="1150"/>
+              </a:xfrm>
+            </p:grpSpPr>
             <p:grpSp>
               <p:nvGrpSpPr>
-                <p:cNvPr id="11" name="Grupo 10"/>
+                <p:cNvPr id="22" name="Grupo 21"/>
                 <p:cNvGrpSpPr/>
                 <p:nvPr/>
               </p:nvGrpSpPr>
               <p:grpSpPr bwMode="auto">
                 <a:xfrm>
-                  <a:off x="11140" y="1694"/>
-                  <a:ext cx="276" cy="1151"/>
-                  <a:chOff x="10467" y="1920"/>
-                  <a:chExt cx="276" cy="1151"/>
+                  <a:off x="8675" y="6641"/>
+                  <a:ext cx="2757" cy="1150"/>
+                  <a:chOff x="8675" y="6641"/>
+                  <a:chExt cx="2757" cy="1150"/>
                 </a:xfrm>
               </p:grpSpPr>
+              <p:pic>
+                <p:nvPicPr>
+                  <p:cNvPr id="15" name="Imagen 14"/>
+                  <p:cNvPicPr/>
+                  <p:nvPr/>
+                </p:nvPicPr>
+                <p:blipFill rotWithShape="1">
+                  <a:blip r:embed="rId8"/>
+                  <a:srcRect l="43984" t="32542" r="40877" b="14275"/>
+                  <a:stretch/>
+                </p:blipFill>
+                <p:spPr bwMode="auto">
+                  <a:xfrm rot="5400000">
+                    <a:off x="9478" y="5837"/>
+                    <a:ext cx="1150" cy="2757"/>
+                  </a:xfrm>
+                  <a:prstGeom prst="rect">
+                    <a:avLst/>
+                  </a:prstGeom>
+                </p:spPr>
+              </p:pic>
               <p:sp>
                 <p:nvSpPr>
-                  <p:cNvPr id="2" name="Óvalo 1"/>
+                  <p:cNvPr id="16" name="Óvalo 15"/>
                   <p:cNvSpPr/>
                   <p:nvPr/>
                 </p:nvSpPr>
                 <p:spPr bwMode="auto">
-                  <a:xfrm>
-                    <a:off x="10467" y="1920"/>
+                  <a:xfrm rot="10800000">
+                    <a:off x="11156" y="6709"/>
                     <a:ext cx="276" cy="277"/>
                   </a:xfrm>
                   <a:prstGeom prst="ellipse">
@@ -4111,13 +6593,13 @@
               </p:sp>
               <p:sp>
                 <p:nvSpPr>
-                  <p:cNvPr id="3" name="Óvalo 2"/>
+                  <p:cNvPr id="17" name="Óvalo 16"/>
                   <p:cNvSpPr/>
                   <p:nvPr/>
                 </p:nvSpPr>
                 <p:spPr bwMode="auto">
-                  <a:xfrm>
-                    <a:off x="10467" y="2211"/>
+                  <a:xfrm rot="10800000">
+                    <a:off x="11156" y="7037"/>
                     <a:ext cx="276" cy="277"/>
                   </a:xfrm>
                   <a:prstGeom prst="ellipse">
@@ -4160,13 +6642,13 @@
               </p:sp>
               <p:sp>
                 <p:nvSpPr>
-                  <p:cNvPr id="4" name="Óvalo 3"/>
+                  <p:cNvPr id="18" name="Óvalo 17"/>
                   <p:cNvSpPr/>
                   <p:nvPr/>
                 </p:nvSpPr>
                 <p:spPr bwMode="auto">
-                  <a:xfrm>
-                    <a:off x="10467" y="2502"/>
+                  <a:xfrm rot="10800000">
+                    <a:off x="11156" y="7391"/>
                     <a:ext cx="276" cy="277"/>
                   </a:xfrm>
                   <a:prstGeom prst="ellipse">
@@ -4209,122 +6691,13 @@
               </p:sp>
               <p:sp>
                 <p:nvSpPr>
-                  <p:cNvPr id="9" name="Óvalo 8"/>
+                  <p:cNvPr id="19" name="Óvalo 18"/>
                   <p:cNvSpPr/>
                   <p:nvPr/>
                 </p:nvSpPr>
                 <p:spPr bwMode="auto">
-                  <a:xfrm>
-                    <a:off x="10467" y="2794"/>
-                    <a:ext cx="276" cy="277"/>
-                  </a:xfrm>
-                  <a:prstGeom prst="ellipse">
-                    <a:avLst/>
-                  </a:prstGeom>
-                  <a:solidFill>
-                    <a:schemeClr val="bg1"/>
-                  </a:solidFill>
-                  <a:ln>
-                    <a:solidFill>
-                      <a:schemeClr val="tx1"/>
-                    </a:solidFill>
-                  </a:ln>
-                </p:spPr>
-                <p:style>
-                  <a:lnRef idx="2">
-                    <a:schemeClr val="accent1">
-                      <a:lumMod val="75000"/>
-                    </a:schemeClr>
-                  </a:lnRef>
-                  <a:fillRef idx="1">
-                    <a:schemeClr val="accent1"/>
-                  </a:fillRef>
-                  <a:effectRef idx="0">
-                    <a:srgbClr val="FFFFFF"/>
-                  </a:effectRef>
-                  <a:fontRef idx="minor">
-                    <a:schemeClr val="lt1"/>
-                  </a:fontRef>
-                </p:style>
-                <p:txBody>
-                  <a:bodyPr rtlCol="0" anchor="ctr"/>
-                  <a:p>
-                    <a:pPr algn="ctr">
-                      <a:defRPr/>
-                    </a:pPr>
-                    <a:endParaRPr lang="es-MX" u="sng"/>
-                  </a:p>
-                </p:txBody>
-              </p:sp>
-            </p:grpSp>
-            <p:grpSp>
-              <p:nvGrpSpPr>
-                <p:cNvPr id="66" name="Grupo 65"/>
-                <p:cNvGrpSpPr/>
-                <p:nvPr/>
-              </p:nvGrpSpPr>
-              <p:grpSpPr bwMode="auto">
-                <a:xfrm rot="10800000">
-                  <a:off x="8426" y="7794"/>
-                  <a:ext cx="2336" cy="5623"/>
-                  <a:chOff x="5564" y="1119"/>
-                  <a:chExt cx="2336" cy="5623"/>
-                </a:xfrm>
-              </p:grpSpPr>
-              <p:pic>
-                <p:nvPicPr>
-                  <p:cNvPr id="6" name="Imagen 5"/>
-                  <p:cNvPicPr>
-                    <a:picLocks noChangeAspect="1"/>
-                  </p:cNvPicPr>
-                  <p:nvPr/>
-                </p:nvPicPr>
-                <p:blipFill rotWithShape="1">
-                  <a:blip r:embed="rId4"/>
-                  <a:srcRect l="35387" t="16187" r="33467" b="15120"/>
-                  <a:stretch/>
-                </p:blipFill>
-                <p:spPr bwMode="auto">
                   <a:xfrm rot="10800000">
-                    <a:off x="5564" y="1119"/>
-                    <a:ext cx="2336" cy="5152"/>
-                  </a:xfrm>
-                  <a:prstGeom prst="rect">
-                    <a:avLst/>
-                  </a:prstGeom>
-                </p:spPr>
-              </p:pic>
-              <p:pic>
-                <p:nvPicPr>
-                  <p:cNvPr id="57" name="Imagen 56"/>
-                  <p:cNvPicPr>
-                    <a:picLocks noChangeAspect="1"/>
-                  </p:cNvPicPr>
-                  <p:nvPr/>
-                </p:nvPicPr>
-                <p:blipFill rotWithShape="1">
-                  <a:blip r:embed="rId5"/>
-                  <a:stretch/>
-                </p:blipFill>
-                <p:spPr bwMode="auto">
-                  <a:xfrm rot="16199999">
-                    <a:off x="5743" y="4585"/>
-                    <a:ext cx="2098" cy="2216"/>
-                  </a:xfrm>
-                  <a:prstGeom prst="rect">
-                    <a:avLst/>
-                  </a:prstGeom>
-                </p:spPr>
-              </p:pic>
-              <p:sp>
-                <p:nvSpPr>
-                  <p:cNvPr id="58" name="Óvalo 57"/>
-                  <p:cNvSpPr/>
-                  <p:nvPr/>
-                </p:nvSpPr>
-                <p:spPr bwMode="auto">
-                  <a:xfrm>
-                    <a:off x="7342" y="6374"/>
+                    <a:off x="8699" y="6709"/>
                     <a:ext cx="276" cy="277"/>
                   </a:xfrm>
                   <a:prstGeom prst="ellipse">
@@ -4367,13 +6740,13 @@
               </p:sp>
               <p:sp>
                 <p:nvSpPr>
-                  <p:cNvPr id="59" name="Óvalo 58"/>
+                  <p:cNvPr id="20" name="Óvalo 19"/>
                   <p:cNvSpPr/>
                   <p:nvPr/>
                 </p:nvSpPr>
                 <p:spPr bwMode="auto">
-                  <a:xfrm>
-                    <a:off x="7066" y="6374"/>
+                  <a:xfrm rot="10800000">
+                    <a:off x="8699" y="7037"/>
                     <a:ext cx="276" cy="277"/>
                   </a:xfrm>
                   <a:prstGeom prst="ellipse">
@@ -4416,62 +6789,13 @@
               </p:sp>
               <p:sp>
                 <p:nvSpPr>
-                  <p:cNvPr id="60" name="Óvalo 59"/>
+                  <p:cNvPr id="21" name="Óvalo 20"/>
                   <p:cNvSpPr/>
                   <p:nvPr/>
                 </p:nvSpPr>
                 <p:spPr bwMode="auto">
-                  <a:xfrm>
-                    <a:off x="6790" y="6374"/>
-                    <a:ext cx="276" cy="277"/>
-                  </a:xfrm>
-                  <a:prstGeom prst="ellipse">
-                    <a:avLst/>
-                  </a:prstGeom>
-                  <a:solidFill>
-                    <a:schemeClr val="bg1"/>
-                  </a:solidFill>
-                  <a:ln>
-                    <a:solidFill>
-                      <a:schemeClr val="tx1"/>
-                    </a:solidFill>
-                  </a:ln>
-                </p:spPr>
-                <p:style>
-                  <a:lnRef idx="2">
-                    <a:schemeClr val="accent1">
-                      <a:lumMod val="75000"/>
-                    </a:schemeClr>
-                  </a:lnRef>
-                  <a:fillRef idx="1">
-                    <a:schemeClr val="accent1"/>
-                  </a:fillRef>
-                  <a:effectRef idx="0">
-                    <a:srgbClr val="FFFFFF"/>
-                  </a:effectRef>
-                  <a:fontRef idx="minor">
-                    <a:schemeClr val="lt1"/>
-                  </a:fontRef>
-                </p:style>
-                <p:txBody>
-                  <a:bodyPr rtlCol="0" anchor="ctr"/>
-                  <a:p>
-                    <a:pPr algn="ctr">
-                      <a:defRPr/>
-                    </a:pPr>
-                    <a:endParaRPr lang="es-MX" u="sng"/>
-                  </a:p>
-                </p:txBody>
-              </p:sp>
-              <p:sp>
-                <p:nvSpPr>
-                  <p:cNvPr id="61" name="Óvalo 60"/>
-                  <p:cNvSpPr/>
-                  <p:nvPr/>
-                </p:nvSpPr>
-                <p:spPr bwMode="auto">
-                  <a:xfrm>
-                    <a:off x="6514" y="6374"/>
+                  <a:xfrm rot="10800000">
+                    <a:off x="8699" y="7391"/>
                     <a:ext cx="276" cy="277"/>
                   </a:xfrm>
                   <a:prstGeom prst="ellipse">
@@ -4513,1849 +6837,270 @@
                 </p:txBody>
               </p:sp>
             </p:grpSp>
-            <p:cxnSp>
-              <p:nvCxnSpPr>
-                <p:cNvPr id="67" name="Conector angular 66"/>
-                <p:cNvCxnSpPr>
-                  <a:stCxn id="70" idx="4"/>
-                  <a:endCxn id="58" idx="4"/>
-                </p:cNvCxnSpPr>
+            <p:sp>
+              <p:nvSpPr>
+                <p:cNvPr id="23" name="Cuadro de texto 22"/>
+                <p:cNvSpPr txBox="1"/>
                 <p:nvPr/>
-              </p:nvCxnSpPr>
+              </p:nvSpPr>
               <p:spPr bwMode="auto">
-                <a:xfrm rot="5400000" flipV="1">
-                  <a:off x="4419" y="3457"/>
-                  <a:ext cx="2245" cy="6608"/>
+                <a:xfrm>
+                  <a:off x="10635" y="7328"/>
+                  <a:ext cx="521" cy="340"/>
                 </a:xfrm>
-                <a:prstGeom prst="bentConnector3">
-                  <a:avLst>
-                    <a:gd name="adj1" fmla="val 73140"/>
-                  </a:avLst>
+                <a:prstGeom prst="rect">
+                  <a:avLst/>
                 </a:prstGeom>
-                <a:ln w="28575">
-                  <a:solidFill>
-                    <a:srgbClr val="FF0000"/>
-                  </a:solidFill>
-                </a:ln>
-              </p:spPr>
-              <p:style>
-                <a:lnRef idx="2">
-                  <a:schemeClr val="accent1"/>
-                </a:lnRef>
-                <a:fillRef idx="0">
-                  <a:srgbClr val="FFFFFF"/>
-                </a:fillRef>
-                <a:effectRef idx="0">
-                  <a:srgbClr val="FFFFFF"/>
-                </a:effectRef>
-                <a:fontRef idx="minor">
-                  <a:schemeClr val="tx1"/>
-                </a:fontRef>
-              </p:style>
-            </p:cxnSp>
-            <p:cxnSp>
-              <p:nvCxnSpPr>
-                <p:cNvPr id="68" name="Conector angular 67"/>
-                <p:cNvCxnSpPr>
-                  <a:stCxn id="80" idx="4"/>
-                  <a:endCxn id="59" idx="4"/>
-                </p:cNvCxnSpPr>
-                <p:nvPr/>
-              </p:nvCxnSpPr>
-              <p:spPr bwMode="auto">
-                <a:xfrm rot="5400000" flipV="1">
-                  <a:off x="5641" y="4403"/>
-                  <a:ext cx="2245" cy="4717"/>
-                </a:xfrm>
-                <a:prstGeom prst="bentConnector3">
-                  <a:avLst>
-                    <a:gd name="adj1" fmla="val 50022"/>
-                  </a:avLst>
-                </a:prstGeom>
-                <a:ln w="28575">
-                  <a:solidFill>
-                    <a:schemeClr val="accent4"/>
-                  </a:solidFill>
-                </a:ln>
-              </p:spPr>
-              <p:style>
-                <a:lnRef idx="2">
-                  <a:schemeClr val="accent1"/>
-                </a:lnRef>
-                <a:fillRef idx="0">
-                  <a:srgbClr val="FFFFFF"/>
-                </a:fillRef>
-                <a:effectRef idx="0">
-                  <a:srgbClr val="FFFFFF"/>
-                </a:effectRef>
-                <a:fontRef idx="minor">
-                  <a:schemeClr val="tx1"/>
-                </a:fontRef>
-              </p:style>
-            </p:cxnSp>
-            <p:grpSp>
-              <p:nvGrpSpPr>
-                <p:cNvPr id="101" name="Grupo 100"/>
-                <p:cNvGrpSpPr/>
-                <p:nvPr/>
-              </p:nvGrpSpPr>
-              <p:grpSpPr bwMode="auto">
-                <a:xfrm>
-                  <a:off x="150" y="957"/>
-                  <a:ext cx="9182" cy="4744"/>
-                  <a:chOff x="237" y="855"/>
-                  <a:chExt cx="9182" cy="4744"/>
-                </a:xfrm>
-              </p:grpSpPr>
-              <p:pic>
-                <p:nvPicPr>
-                  <p:cNvPr id="69" name="Imagen 68"/>
-                  <p:cNvPicPr/>
-                  <p:nvPr/>
-                </p:nvPicPr>
-                <p:blipFill rotWithShape="1">
-                  <a:blip r:embed="rId6"/>
-                  <a:srcRect l="24356" t="7898" r="12971" b="7082"/>
-                  <a:stretch/>
-                </p:blipFill>
-                <p:spPr bwMode="auto">
-                  <a:xfrm rot="5400000">
-                    <a:off x="2456" y="-1364"/>
-                    <a:ext cx="4745" cy="9182"/>
-                  </a:xfrm>
-                  <a:prstGeom prst="rect">
-                    <a:avLst/>
-                  </a:prstGeom>
-                </p:spPr>
-              </p:pic>
-              <p:sp>
-                <p:nvSpPr>
-                  <p:cNvPr id="70" name="Óvalo 69"/>
-                  <p:cNvSpPr/>
-                  <p:nvPr/>
-                </p:nvSpPr>
-                <p:spPr bwMode="auto">
-                  <a:xfrm>
-                    <a:off x="2186" y="5261"/>
-                    <a:ext cx="276" cy="277"/>
-                  </a:xfrm>
-                  <a:prstGeom prst="ellipse">
-                    <a:avLst/>
-                  </a:prstGeom>
-                  <a:solidFill>
-                    <a:schemeClr val="bg1"/>
-                  </a:solidFill>
-                  <a:ln>
-                    <a:solidFill>
-                      <a:schemeClr val="tx1"/>
-                    </a:solidFill>
-                  </a:ln>
-                </p:spPr>
-                <p:style>
-                  <a:lnRef idx="2">
-                    <a:schemeClr val="accent1">
-                      <a:lumMod val="75000"/>
-                    </a:schemeClr>
-                  </a:lnRef>
-                  <a:fillRef idx="1">
-                    <a:schemeClr val="accent1"/>
-                  </a:fillRef>
-                  <a:effectRef idx="0">
-                    <a:srgbClr val="FFFFFF"/>
-                  </a:effectRef>
-                  <a:fontRef idx="minor">
-                    <a:schemeClr val="lt1"/>
-                  </a:fontRef>
-                </p:style>
-                <p:txBody>
-                  <a:bodyPr rtlCol="0" anchor="ctr"/>
-                  <a:p>
-                    <a:pPr algn="ctr">
-                      <a:defRPr/>
-                    </a:pPr>
-                    <a:endParaRPr lang="es-MX" u="sng"/>
-                  </a:p>
-                </p:txBody>
-              </p:sp>
-              <p:sp>
-                <p:nvSpPr>
-                  <p:cNvPr id="71" name="Óvalo 70"/>
-                  <p:cNvSpPr/>
-                  <p:nvPr/>
-                </p:nvSpPr>
-                <p:spPr bwMode="auto">
-                  <a:xfrm>
-                    <a:off x="2186" y="957"/>
-                    <a:ext cx="276" cy="277"/>
-                  </a:xfrm>
-                  <a:prstGeom prst="ellipse">
-                    <a:avLst/>
-                  </a:prstGeom>
-                  <a:solidFill>
-                    <a:schemeClr val="bg1"/>
-                  </a:solidFill>
-                  <a:ln>
-                    <a:solidFill>
-                      <a:schemeClr val="tx1"/>
-                    </a:solidFill>
-                  </a:ln>
-                </p:spPr>
-                <p:style>
-                  <a:lnRef idx="2">
-                    <a:schemeClr val="accent1">
-                      <a:lumMod val="75000"/>
-                    </a:schemeClr>
-                  </a:lnRef>
-                  <a:fillRef idx="1">
-                    <a:schemeClr val="accent1"/>
-                  </a:fillRef>
-                  <a:effectRef idx="0">
-                    <a:srgbClr val="FFFFFF"/>
-                  </a:effectRef>
-                  <a:fontRef idx="minor">
-                    <a:schemeClr val="lt1"/>
-                  </a:fontRef>
-                </p:style>
-                <p:txBody>
-                  <a:bodyPr rtlCol="0" anchor="ctr"/>
-                  <a:p>
-                    <a:pPr algn="ctr">
-                      <a:defRPr/>
-                    </a:pPr>
-                    <a:endParaRPr lang="es-MX" u="sng"/>
-                  </a:p>
-                </p:txBody>
-              </p:sp>
-              <p:sp>
-                <p:nvSpPr>
-                  <p:cNvPr id="72" name="Óvalo 71"/>
-                  <p:cNvSpPr/>
-                  <p:nvPr/>
-                </p:nvSpPr>
-                <p:spPr bwMode="auto">
-                  <a:xfrm>
-                    <a:off x="2626" y="5261"/>
-                    <a:ext cx="276" cy="277"/>
-                  </a:xfrm>
-                  <a:prstGeom prst="ellipse">
-                    <a:avLst/>
-                  </a:prstGeom>
-                  <a:solidFill>
-                    <a:schemeClr val="bg1"/>
-                  </a:solidFill>
-                  <a:ln>
-                    <a:solidFill>
-                      <a:schemeClr val="tx1"/>
-                    </a:solidFill>
-                  </a:ln>
-                </p:spPr>
-                <p:style>
-                  <a:lnRef idx="2">
-                    <a:schemeClr val="accent1">
-                      <a:lumMod val="75000"/>
-                    </a:schemeClr>
-                  </a:lnRef>
-                  <a:fillRef idx="1">
-                    <a:schemeClr val="accent1"/>
-                  </a:fillRef>
-                  <a:effectRef idx="0">
-                    <a:srgbClr val="FFFFFF"/>
-                  </a:effectRef>
-                  <a:fontRef idx="minor">
-                    <a:schemeClr val="lt1"/>
-                  </a:fontRef>
-                </p:style>
-                <p:txBody>
-                  <a:bodyPr rtlCol="0" anchor="ctr"/>
-                  <a:p>
-                    <a:pPr algn="ctr">
-                      <a:defRPr/>
-                    </a:pPr>
-                    <a:endParaRPr lang="es-MX" u="sng"/>
-                  </a:p>
-                </p:txBody>
-              </p:sp>
-              <p:sp>
-                <p:nvSpPr>
-                  <p:cNvPr id="73" name="Óvalo 72"/>
-                  <p:cNvSpPr/>
-                  <p:nvPr/>
-                </p:nvSpPr>
-                <p:spPr bwMode="auto">
-                  <a:xfrm>
-                    <a:off x="2626" y="957"/>
-                    <a:ext cx="276" cy="277"/>
-                  </a:xfrm>
-                  <a:prstGeom prst="ellipse">
-                    <a:avLst/>
-                  </a:prstGeom>
-                  <a:solidFill>
-                    <a:schemeClr val="bg1"/>
-                  </a:solidFill>
-                  <a:ln>
-                    <a:solidFill>
-                      <a:schemeClr val="tx1"/>
-                    </a:solidFill>
-                  </a:ln>
-                </p:spPr>
-                <p:style>
-                  <a:lnRef idx="2">
-                    <a:schemeClr val="accent1">
-                      <a:lumMod val="75000"/>
-                    </a:schemeClr>
-                  </a:lnRef>
-                  <a:fillRef idx="1">
-                    <a:schemeClr val="accent1"/>
-                  </a:fillRef>
-                  <a:effectRef idx="0">
-                    <a:srgbClr val="FFFFFF"/>
-                  </a:effectRef>
-                  <a:fontRef idx="minor">
-                    <a:schemeClr val="lt1"/>
-                  </a:fontRef>
-                </p:style>
-                <p:txBody>
-                  <a:bodyPr rtlCol="0" anchor="ctr"/>
-                  <a:p>
-                    <a:pPr algn="ctr">
-                      <a:defRPr/>
-                    </a:pPr>
-                    <a:endParaRPr lang="es-MX" u="sng"/>
-                  </a:p>
-                </p:txBody>
-              </p:sp>
-              <p:sp>
-                <p:nvSpPr>
-                  <p:cNvPr id="74" name="Óvalo 73"/>
-                  <p:cNvSpPr/>
-                  <p:nvPr/>
-                </p:nvSpPr>
-                <p:spPr bwMode="auto">
-                  <a:xfrm>
-                    <a:off x="3066" y="5261"/>
-                    <a:ext cx="276" cy="277"/>
-                  </a:xfrm>
-                  <a:prstGeom prst="ellipse">
-                    <a:avLst/>
-                  </a:prstGeom>
-                  <a:solidFill>
-                    <a:schemeClr val="bg1"/>
-                  </a:solidFill>
-                  <a:ln>
-                    <a:solidFill>
-                      <a:schemeClr val="tx1"/>
-                    </a:solidFill>
-                  </a:ln>
-                </p:spPr>
-                <p:style>
-                  <a:lnRef idx="2">
-                    <a:schemeClr val="accent1">
-                      <a:lumMod val="75000"/>
-                    </a:schemeClr>
-                  </a:lnRef>
-                  <a:fillRef idx="1">
-                    <a:schemeClr val="accent1"/>
-                  </a:fillRef>
-                  <a:effectRef idx="0">
-                    <a:srgbClr val="FFFFFF"/>
-                  </a:effectRef>
-                  <a:fontRef idx="minor">
-                    <a:schemeClr val="lt1"/>
-                  </a:fontRef>
-                </p:style>
-                <p:txBody>
-                  <a:bodyPr rtlCol="0" anchor="ctr"/>
-                  <a:p>
-                    <a:pPr algn="ctr">
-                      <a:defRPr/>
-                    </a:pPr>
-                    <a:endParaRPr lang="es-MX" u="sng"/>
-                  </a:p>
-                </p:txBody>
-              </p:sp>
-              <p:sp>
-                <p:nvSpPr>
-                  <p:cNvPr id="75" name="Óvalo 74"/>
-                  <p:cNvSpPr/>
-                  <p:nvPr/>
-                </p:nvSpPr>
-                <p:spPr bwMode="auto">
-                  <a:xfrm>
-                    <a:off x="3066" y="957"/>
-                    <a:ext cx="276" cy="277"/>
-                  </a:xfrm>
-                  <a:prstGeom prst="ellipse">
-                    <a:avLst/>
-                  </a:prstGeom>
-                  <a:solidFill>
-                    <a:schemeClr val="bg1"/>
-                  </a:solidFill>
-                  <a:ln>
-                    <a:solidFill>
-                      <a:schemeClr val="tx1"/>
-                    </a:solidFill>
-                  </a:ln>
-                </p:spPr>
-                <p:style>
-                  <a:lnRef idx="2">
-                    <a:schemeClr val="accent1">
-                      <a:lumMod val="75000"/>
-                    </a:schemeClr>
-                  </a:lnRef>
-                  <a:fillRef idx="1">
-                    <a:schemeClr val="accent1"/>
-                  </a:fillRef>
-                  <a:effectRef idx="0">
-                    <a:srgbClr val="FFFFFF"/>
-                  </a:effectRef>
-                  <a:fontRef idx="minor">
-                    <a:schemeClr val="lt1"/>
-                  </a:fontRef>
-                </p:style>
-                <p:txBody>
-                  <a:bodyPr rtlCol="0" anchor="ctr"/>
-                  <a:p>
-                    <a:pPr algn="ctr">
-                      <a:defRPr/>
-                    </a:pPr>
-                    <a:endParaRPr lang="es-MX" u="sng"/>
-                  </a:p>
-                </p:txBody>
-              </p:sp>
-              <p:sp>
-                <p:nvSpPr>
-                  <p:cNvPr id="76" name="Óvalo 75"/>
-                  <p:cNvSpPr/>
-                  <p:nvPr/>
-                </p:nvSpPr>
-                <p:spPr bwMode="auto">
-                  <a:xfrm>
-                    <a:off x="3506" y="5261"/>
-                    <a:ext cx="276" cy="277"/>
-                  </a:xfrm>
-                  <a:prstGeom prst="ellipse">
-                    <a:avLst/>
-                  </a:prstGeom>
-                  <a:solidFill>
-                    <a:schemeClr val="bg1"/>
-                  </a:solidFill>
-                  <a:ln>
-                    <a:solidFill>
-                      <a:schemeClr val="tx1"/>
-                    </a:solidFill>
-                  </a:ln>
-                </p:spPr>
-                <p:style>
-                  <a:lnRef idx="2">
-                    <a:schemeClr val="accent1">
-                      <a:lumMod val="75000"/>
-                    </a:schemeClr>
-                  </a:lnRef>
-                  <a:fillRef idx="1">
-                    <a:schemeClr val="accent1"/>
-                  </a:fillRef>
-                  <a:effectRef idx="0">
-                    <a:srgbClr val="FFFFFF"/>
-                  </a:effectRef>
-                  <a:fontRef idx="minor">
-                    <a:schemeClr val="lt1"/>
-                  </a:fontRef>
-                </p:style>
-                <p:txBody>
-                  <a:bodyPr rtlCol="0" anchor="ctr"/>
-                  <a:p>
-                    <a:pPr algn="ctr">
-                      <a:defRPr/>
-                    </a:pPr>
-                    <a:endParaRPr lang="es-MX" u="sng"/>
-                  </a:p>
-                </p:txBody>
-              </p:sp>
-              <p:sp>
-                <p:nvSpPr>
-                  <p:cNvPr id="77" name="Óvalo 76"/>
-                  <p:cNvSpPr/>
-                  <p:nvPr/>
-                </p:nvSpPr>
-                <p:spPr bwMode="auto">
-                  <a:xfrm>
-                    <a:off x="3506" y="957"/>
-                    <a:ext cx="276" cy="277"/>
-                  </a:xfrm>
-                  <a:prstGeom prst="ellipse">
-                    <a:avLst/>
-                  </a:prstGeom>
-                  <a:solidFill>
-                    <a:schemeClr val="bg1"/>
-                  </a:solidFill>
-                  <a:ln>
-                    <a:solidFill>
-                      <a:schemeClr val="tx1"/>
-                    </a:solidFill>
-                  </a:ln>
-                </p:spPr>
-                <p:style>
-                  <a:lnRef idx="2">
-                    <a:schemeClr val="accent1">
-                      <a:lumMod val="75000"/>
-                    </a:schemeClr>
-                  </a:lnRef>
-                  <a:fillRef idx="1">
-                    <a:schemeClr val="accent1"/>
-                  </a:fillRef>
-                  <a:effectRef idx="0">
-                    <a:srgbClr val="FFFFFF"/>
-                  </a:effectRef>
-                  <a:fontRef idx="minor">
-                    <a:schemeClr val="lt1"/>
-                  </a:fontRef>
-                </p:style>
-                <p:txBody>
-                  <a:bodyPr rtlCol="0" anchor="ctr"/>
-                  <a:p>
-                    <a:pPr algn="ctr">
-                      <a:defRPr/>
-                    </a:pPr>
-                    <a:endParaRPr lang="es-MX" u="sng"/>
-                  </a:p>
-                </p:txBody>
-              </p:sp>
-              <p:sp>
-                <p:nvSpPr>
-                  <p:cNvPr id="78" name="Óvalo 77"/>
-                  <p:cNvSpPr/>
-                  <p:nvPr/>
-                </p:nvSpPr>
-                <p:spPr bwMode="auto">
-                  <a:xfrm>
-                    <a:off x="3914" y="5261"/>
-                    <a:ext cx="276" cy="277"/>
-                  </a:xfrm>
-                  <a:prstGeom prst="ellipse">
-                    <a:avLst/>
-                  </a:prstGeom>
-                  <a:solidFill>
-                    <a:schemeClr val="bg1"/>
-                  </a:solidFill>
-                  <a:ln>
-                    <a:solidFill>
-                      <a:schemeClr val="tx1"/>
-                    </a:solidFill>
-                  </a:ln>
-                </p:spPr>
-                <p:style>
-                  <a:lnRef idx="2">
-                    <a:schemeClr val="accent1">
-                      <a:lumMod val="75000"/>
-                    </a:schemeClr>
-                  </a:lnRef>
-                  <a:fillRef idx="1">
-                    <a:schemeClr val="accent1"/>
-                  </a:fillRef>
-                  <a:effectRef idx="0">
-                    <a:srgbClr val="FFFFFF"/>
-                  </a:effectRef>
-                  <a:fontRef idx="minor">
-                    <a:schemeClr val="lt1"/>
-                  </a:fontRef>
-                </p:style>
-                <p:txBody>
-                  <a:bodyPr rtlCol="0" anchor="ctr"/>
-                  <a:p>
-                    <a:pPr algn="ctr">
-                      <a:defRPr/>
-                    </a:pPr>
-                    <a:endParaRPr lang="es-MX" u="sng"/>
-                  </a:p>
-                </p:txBody>
-              </p:sp>
-              <p:sp>
-                <p:nvSpPr>
-                  <p:cNvPr id="79" name="Óvalo 78"/>
-                  <p:cNvSpPr/>
-                  <p:nvPr/>
-                </p:nvSpPr>
-                <p:spPr bwMode="auto">
-                  <a:xfrm>
-                    <a:off x="3914" y="957"/>
-                    <a:ext cx="276" cy="277"/>
-                  </a:xfrm>
-                  <a:prstGeom prst="ellipse">
-                    <a:avLst/>
-                  </a:prstGeom>
-                  <a:solidFill>
-                    <a:schemeClr val="bg1"/>
-                  </a:solidFill>
-                  <a:ln>
-                    <a:solidFill>
-                      <a:schemeClr val="tx1"/>
-                    </a:solidFill>
-                  </a:ln>
-                </p:spPr>
-                <p:style>
-                  <a:lnRef idx="2">
-                    <a:schemeClr val="accent1">
-                      <a:lumMod val="75000"/>
-                    </a:schemeClr>
-                  </a:lnRef>
-                  <a:fillRef idx="1">
-                    <a:schemeClr val="accent1"/>
-                  </a:fillRef>
-                  <a:effectRef idx="0">
-                    <a:srgbClr val="FFFFFF"/>
-                  </a:effectRef>
-                  <a:fontRef idx="minor">
-                    <a:schemeClr val="lt1"/>
-                  </a:fontRef>
-                </p:style>
-                <p:txBody>
-                  <a:bodyPr rtlCol="0" anchor="ctr"/>
-                  <a:p>
-                    <a:pPr algn="ctr">
-                      <a:defRPr/>
-                    </a:pPr>
-                    <a:endParaRPr lang="es-MX" u="sng"/>
-                  </a:p>
-                </p:txBody>
-              </p:sp>
-              <p:sp>
-                <p:nvSpPr>
-                  <p:cNvPr id="80" name="Óvalo 79"/>
-                  <p:cNvSpPr/>
-                  <p:nvPr/>
-                </p:nvSpPr>
-                <p:spPr bwMode="auto">
-                  <a:xfrm>
-                    <a:off x="4354" y="5261"/>
-                    <a:ext cx="276" cy="277"/>
-                  </a:xfrm>
-                  <a:prstGeom prst="ellipse">
-                    <a:avLst/>
-                  </a:prstGeom>
-                  <a:solidFill>
-                    <a:schemeClr val="bg1"/>
-                  </a:solidFill>
-                  <a:ln>
-                    <a:solidFill>
-                      <a:schemeClr val="tx1"/>
-                    </a:solidFill>
-                  </a:ln>
-                </p:spPr>
-                <p:style>
-                  <a:lnRef idx="2">
-                    <a:schemeClr val="accent1">
-                      <a:lumMod val="75000"/>
-                    </a:schemeClr>
-                  </a:lnRef>
-                  <a:fillRef idx="1">
-                    <a:schemeClr val="accent1"/>
-                  </a:fillRef>
-                  <a:effectRef idx="0">
-                    <a:srgbClr val="FFFFFF"/>
-                  </a:effectRef>
-                  <a:fontRef idx="minor">
-                    <a:schemeClr val="lt1"/>
-                  </a:fontRef>
-                </p:style>
-                <p:txBody>
-                  <a:bodyPr rtlCol="0" anchor="ctr"/>
-                  <a:p>
-                    <a:pPr algn="ctr">
-                      <a:defRPr/>
-                    </a:pPr>
-                    <a:endParaRPr lang="es-MX" u="sng"/>
-                  </a:p>
-                </p:txBody>
-              </p:sp>
-              <p:sp>
-                <p:nvSpPr>
-                  <p:cNvPr id="81" name="Óvalo 80"/>
-                  <p:cNvSpPr/>
-                  <p:nvPr/>
-                </p:nvSpPr>
-                <p:spPr bwMode="auto">
-                  <a:xfrm>
-                    <a:off x="4354" y="957"/>
-                    <a:ext cx="276" cy="277"/>
-                  </a:xfrm>
-                  <a:prstGeom prst="ellipse">
-                    <a:avLst/>
-                  </a:prstGeom>
-                  <a:solidFill>
-                    <a:schemeClr val="bg1"/>
-                  </a:solidFill>
-                  <a:ln>
-                    <a:solidFill>
-                      <a:schemeClr val="tx1"/>
-                    </a:solidFill>
-                  </a:ln>
-                </p:spPr>
-                <p:style>
-                  <a:lnRef idx="2">
-                    <a:schemeClr val="accent1">
-                      <a:lumMod val="75000"/>
-                    </a:schemeClr>
-                  </a:lnRef>
-                  <a:fillRef idx="1">
-                    <a:schemeClr val="accent1"/>
-                  </a:fillRef>
-                  <a:effectRef idx="0">
-                    <a:srgbClr val="FFFFFF"/>
-                  </a:effectRef>
-                  <a:fontRef idx="minor">
-                    <a:schemeClr val="lt1"/>
-                  </a:fontRef>
-                </p:style>
-                <p:txBody>
-                  <a:bodyPr rtlCol="0" anchor="ctr"/>
-                  <a:p>
-                    <a:pPr algn="ctr">
-                      <a:defRPr/>
-                    </a:pPr>
-                    <a:endParaRPr lang="es-MX" u="sng"/>
-                  </a:p>
-                </p:txBody>
-              </p:sp>
-              <p:sp>
-                <p:nvSpPr>
-                  <p:cNvPr id="82" name="Óvalo 81"/>
-                  <p:cNvSpPr/>
-                  <p:nvPr/>
-                </p:nvSpPr>
-                <p:spPr bwMode="auto">
-                  <a:xfrm>
-                    <a:off x="4794" y="5261"/>
-                    <a:ext cx="276" cy="277"/>
-                  </a:xfrm>
-                  <a:prstGeom prst="ellipse">
-                    <a:avLst/>
-                  </a:prstGeom>
-                  <a:solidFill>
-                    <a:schemeClr val="bg1"/>
-                  </a:solidFill>
-                  <a:ln>
-                    <a:solidFill>
-                      <a:schemeClr val="tx1"/>
-                    </a:solidFill>
-                  </a:ln>
-                </p:spPr>
-                <p:style>
-                  <a:lnRef idx="2">
-                    <a:schemeClr val="accent1">
-                      <a:lumMod val="75000"/>
-                    </a:schemeClr>
-                  </a:lnRef>
-                  <a:fillRef idx="1">
-                    <a:schemeClr val="accent1"/>
-                  </a:fillRef>
-                  <a:effectRef idx="0">
-                    <a:srgbClr val="FFFFFF"/>
-                  </a:effectRef>
-                  <a:fontRef idx="minor">
-                    <a:schemeClr val="lt1"/>
-                  </a:fontRef>
-                </p:style>
-                <p:txBody>
-                  <a:bodyPr rtlCol="0" anchor="ctr"/>
-                  <a:p>
-                    <a:pPr algn="ctr">
-                      <a:defRPr/>
-                    </a:pPr>
-                    <a:endParaRPr lang="es-MX" u="sng"/>
-                  </a:p>
-                </p:txBody>
-              </p:sp>
-              <p:sp>
-                <p:nvSpPr>
-                  <p:cNvPr id="83" name="Óvalo 82"/>
-                  <p:cNvSpPr/>
-                  <p:nvPr/>
-                </p:nvSpPr>
-                <p:spPr bwMode="auto">
-                  <a:xfrm>
-                    <a:off x="4794" y="957"/>
-                    <a:ext cx="276" cy="277"/>
-                  </a:xfrm>
-                  <a:prstGeom prst="ellipse">
-                    <a:avLst/>
-                  </a:prstGeom>
-                  <a:solidFill>
-                    <a:schemeClr val="bg1"/>
-                  </a:solidFill>
-                  <a:ln>
-                    <a:solidFill>
-                      <a:schemeClr val="tx1"/>
-                    </a:solidFill>
-                  </a:ln>
-                </p:spPr>
-                <p:style>
-                  <a:lnRef idx="2">
-                    <a:schemeClr val="accent1">
-                      <a:lumMod val="75000"/>
-                    </a:schemeClr>
-                  </a:lnRef>
-                  <a:fillRef idx="1">
-                    <a:schemeClr val="accent1"/>
-                  </a:fillRef>
-                  <a:effectRef idx="0">
-                    <a:srgbClr val="FFFFFF"/>
-                  </a:effectRef>
-                  <a:fontRef idx="minor">
-                    <a:schemeClr val="lt1"/>
-                  </a:fontRef>
-                </p:style>
-                <p:txBody>
-                  <a:bodyPr rtlCol="0" anchor="ctr"/>
-                  <a:p>
-                    <a:pPr algn="ctr">
-                      <a:defRPr/>
-                    </a:pPr>
-                    <a:endParaRPr lang="es-MX" u="sng"/>
-                  </a:p>
-                </p:txBody>
-              </p:sp>
-              <p:sp>
-                <p:nvSpPr>
-                  <p:cNvPr id="84" name="Óvalo 83"/>
-                  <p:cNvSpPr/>
-                  <p:nvPr/>
-                </p:nvSpPr>
-                <p:spPr bwMode="auto">
-                  <a:xfrm>
-                    <a:off x="5234" y="5261"/>
-                    <a:ext cx="276" cy="277"/>
-                  </a:xfrm>
-                  <a:prstGeom prst="ellipse">
-                    <a:avLst/>
-                  </a:prstGeom>
-                  <a:solidFill>
-                    <a:schemeClr val="bg1"/>
-                  </a:solidFill>
-                  <a:ln>
-                    <a:solidFill>
-                      <a:schemeClr val="tx1"/>
-                    </a:solidFill>
-                  </a:ln>
-                </p:spPr>
-                <p:style>
-                  <a:lnRef idx="2">
-                    <a:schemeClr val="accent1">
-                      <a:lumMod val="75000"/>
-                    </a:schemeClr>
-                  </a:lnRef>
-                  <a:fillRef idx="1">
-                    <a:schemeClr val="accent1"/>
-                  </a:fillRef>
-                  <a:effectRef idx="0">
-                    <a:srgbClr val="FFFFFF"/>
-                  </a:effectRef>
-                  <a:fontRef idx="minor">
-                    <a:schemeClr val="lt1"/>
-                  </a:fontRef>
-                </p:style>
-                <p:txBody>
-                  <a:bodyPr rtlCol="0" anchor="ctr"/>
-                  <a:p>
-                    <a:pPr algn="ctr">
-                      <a:defRPr/>
-                    </a:pPr>
-                    <a:endParaRPr lang="es-MX" u="sng"/>
-                  </a:p>
-                </p:txBody>
-              </p:sp>
-              <p:sp>
-                <p:nvSpPr>
-                  <p:cNvPr id="85" name="Óvalo 84"/>
-                  <p:cNvSpPr/>
-                  <p:nvPr/>
-                </p:nvSpPr>
-                <p:spPr bwMode="auto">
-                  <a:xfrm>
-                    <a:off x="5234" y="957"/>
-                    <a:ext cx="276" cy="277"/>
-                  </a:xfrm>
-                  <a:prstGeom prst="ellipse">
-                    <a:avLst/>
-                  </a:prstGeom>
-                  <a:solidFill>
-                    <a:schemeClr val="bg1"/>
-                  </a:solidFill>
-                  <a:ln>
-                    <a:solidFill>
-                      <a:schemeClr val="tx1"/>
-                    </a:solidFill>
-                  </a:ln>
-                </p:spPr>
-                <p:style>
-                  <a:lnRef idx="2">
-                    <a:schemeClr val="accent1">
-                      <a:lumMod val="75000"/>
-                    </a:schemeClr>
-                  </a:lnRef>
-                  <a:fillRef idx="1">
-                    <a:schemeClr val="accent1"/>
-                  </a:fillRef>
-                  <a:effectRef idx="0">
-                    <a:srgbClr val="FFFFFF"/>
-                  </a:effectRef>
-                  <a:fontRef idx="minor">
-                    <a:schemeClr val="lt1"/>
-                  </a:fontRef>
-                </p:style>
-                <p:txBody>
-                  <a:bodyPr rtlCol="0" anchor="ctr"/>
-                  <a:p>
-                    <a:pPr algn="ctr">
-                      <a:defRPr/>
-                    </a:pPr>
-                    <a:endParaRPr lang="es-MX" u="sng"/>
-                  </a:p>
-                </p:txBody>
-              </p:sp>
-              <p:sp>
-                <p:nvSpPr>
-                  <p:cNvPr id="86" name="Óvalo 85"/>
-                  <p:cNvSpPr/>
-                  <p:nvPr/>
-                </p:nvSpPr>
-                <p:spPr bwMode="auto">
-                  <a:xfrm>
-                    <a:off x="5642" y="5261"/>
-                    <a:ext cx="276" cy="277"/>
-                  </a:xfrm>
-                  <a:prstGeom prst="ellipse">
-                    <a:avLst/>
-                  </a:prstGeom>
-                  <a:solidFill>
-                    <a:schemeClr val="bg1"/>
-                  </a:solidFill>
-                  <a:ln>
-                    <a:solidFill>
-                      <a:schemeClr val="tx1"/>
-                    </a:solidFill>
-                  </a:ln>
-                </p:spPr>
-                <p:style>
-                  <a:lnRef idx="2">
-                    <a:schemeClr val="accent1">
-                      <a:lumMod val="75000"/>
-                    </a:schemeClr>
-                  </a:lnRef>
-                  <a:fillRef idx="1">
-                    <a:schemeClr val="accent1"/>
-                  </a:fillRef>
-                  <a:effectRef idx="0">
-                    <a:srgbClr val="FFFFFF"/>
-                  </a:effectRef>
-                  <a:fontRef idx="minor">
-                    <a:schemeClr val="lt1"/>
-                  </a:fontRef>
-                </p:style>
-                <p:txBody>
-                  <a:bodyPr rtlCol="0" anchor="ctr"/>
-                  <a:p>
-                    <a:pPr algn="ctr">
-                      <a:defRPr/>
-                    </a:pPr>
-                    <a:endParaRPr lang="es-MX" u="sng"/>
-                  </a:p>
-                </p:txBody>
-              </p:sp>
-              <p:sp>
-                <p:nvSpPr>
-                  <p:cNvPr id="87" name="Óvalo 86"/>
-                  <p:cNvSpPr/>
-                  <p:nvPr/>
-                </p:nvSpPr>
-                <p:spPr bwMode="auto">
-                  <a:xfrm>
-                    <a:off x="5642" y="957"/>
-                    <a:ext cx="276" cy="277"/>
-                  </a:xfrm>
-                  <a:prstGeom prst="ellipse">
-                    <a:avLst/>
-                  </a:prstGeom>
-                  <a:solidFill>
-                    <a:schemeClr val="bg1"/>
-                  </a:solidFill>
-                  <a:ln>
-                    <a:solidFill>
-                      <a:schemeClr val="tx1"/>
-                    </a:solidFill>
-                  </a:ln>
-                </p:spPr>
-                <p:style>
-                  <a:lnRef idx="2">
-                    <a:schemeClr val="accent1">
-                      <a:lumMod val="75000"/>
-                    </a:schemeClr>
-                  </a:lnRef>
-                  <a:fillRef idx="1">
-                    <a:schemeClr val="accent1"/>
-                  </a:fillRef>
-                  <a:effectRef idx="0">
-                    <a:srgbClr val="FFFFFF"/>
-                  </a:effectRef>
-                  <a:fontRef idx="minor">
-                    <a:schemeClr val="lt1"/>
-                  </a:fontRef>
-                </p:style>
-                <p:txBody>
-                  <a:bodyPr rtlCol="0" anchor="ctr"/>
-                  <a:p>
-                    <a:pPr algn="ctr">
-                      <a:defRPr/>
-                    </a:pPr>
-                    <a:endParaRPr lang="es-MX" u="sng"/>
-                  </a:p>
-                </p:txBody>
-              </p:sp>
-              <p:sp>
-                <p:nvSpPr>
-                  <p:cNvPr id="88" name="Óvalo 87"/>
-                  <p:cNvSpPr/>
-                  <p:nvPr/>
-                </p:nvSpPr>
-                <p:spPr bwMode="auto">
-                  <a:xfrm>
-                    <a:off x="6082" y="5261"/>
-                    <a:ext cx="276" cy="277"/>
-                  </a:xfrm>
-                  <a:prstGeom prst="ellipse">
-                    <a:avLst/>
-                  </a:prstGeom>
-                  <a:solidFill>
-                    <a:schemeClr val="bg1"/>
-                  </a:solidFill>
-                  <a:ln>
-                    <a:solidFill>
-                      <a:schemeClr val="tx1"/>
-                    </a:solidFill>
-                  </a:ln>
-                </p:spPr>
-                <p:style>
-                  <a:lnRef idx="2">
-                    <a:schemeClr val="accent1">
-                      <a:lumMod val="75000"/>
-                    </a:schemeClr>
-                  </a:lnRef>
-                  <a:fillRef idx="1">
-                    <a:schemeClr val="accent1"/>
-                  </a:fillRef>
-                  <a:effectRef idx="0">
-                    <a:srgbClr val="FFFFFF"/>
-                  </a:effectRef>
-                  <a:fontRef idx="minor">
-                    <a:schemeClr val="lt1"/>
-                  </a:fontRef>
-                </p:style>
-                <p:txBody>
-                  <a:bodyPr rtlCol="0" anchor="ctr"/>
-                  <a:p>
-                    <a:pPr algn="ctr">
-                      <a:defRPr/>
-                    </a:pPr>
-                    <a:endParaRPr lang="es-MX" u="sng"/>
-                  </a:p>
-                </p:txBody>
-              </p:sp>
-              <p:sp>
-                <p:nvSpPr>
-                  <p:cNvPr id="89" name="Óvalo 88"/>
-                  <p:cNvSpPr/>
-                  <p:nvPr/>
-                </p:nvSpPr>
-                <p:spPr bwMode="auto">
-                  <a:xfrm>
-                    <a:off x="6082" y="957"/>
-                    <a:ext cx="276" cy="277"/>
-                  </a:xfrm>
-                  <a:prstGeom prst="ellipse">
-                    <a:avLst/>
-                  </a:prstGeom>
-                  <a:solidFill>
-                    <a:schemeClr val="bg1"/>
-                  </a:solidFill>
-                  <a:ln>
-                    <a:solidFill>
-                      <a:schemeClr val="tx1"/>
-                    </a:solidFill>
-                  </a:ln>
-                </p:spPr>
-                <p:style>
-                  <a:lnRef idx="2">
-                    <a:schemeClr val="accent1">
-                      <a:lumMod val="75000"/>
-                    </a:schemeClr>
-                  </a:lnRef>
-                  <a:fillRef idx="1">
-                    <a:schemeClr val="accent1"/>
-                  </a:fillRef>
-                  <a:effectRef idx="0">
-                    <a:srgbClr val="FFFFFF"/>
-                  </a:effectRef>
-                  <a:fontRef idx="minor">
-                    <a:schemeClr val="lt1"/>
-                  </a:fontRef>
-                </p:style>
-                <p:txBody>
-                  <a:bodyPr rtlCol="0" anchor="ctr"/>
-                  <a:p>
-                    <a:pPr algn="ctr">
-                      <a:defRPr/>
-                    </a:pPr>
-                    <a:endParaRPr lang="es-MX" u="sng"/>
-                  </a:p>
-                </p:txBody>
-              </p:sp>
-              <p:sp>
-                <p:nvSpPr>
-                  <p:cNvPr id="90" name="Óvalo 89"/>
-                  <p:cNvSpPr/>
-                  <p:nvPr/>
-                </p:nvSpPr>
-                <p:spPr bwMode="auto">
-                  <a:xfrm>
-                    <a:off x="6522" y="5261"/>
-                    <a:ext cx="276" cy="277"/>
-                  </a:xfrm>
-                  <a:prstGeom prst="ellipse">
-                    <a:avLst/>
-                  </a:prstGeom>
-                  <a:solidFill>
-                    <a:schemeClr val="bg1"/>
-                  </a:solidFill>
-                  <a:ln>
-                    <a:solidFill>
-                      <a:schemeClr val="tx1"/>
-                    </a:solidFill>
-                  </a:ln>
-                </p:spPr>
-                <p:style>
-                  <a:lnRef idx="2">
-                    <a:schemeClr val="accent1">
-                      <a:lumMod val="75000"/>
-                    </a:schemeClr>
-                  </a:lnRef>
-                  <a:fillRef idx="1">
-                    <a:schemeClr val="accent1"/>
-                  </a:fillRef>
-                  <a:effectRef idx="0">
-                    <a:srgbClr val="FFFFFF"/>
-                  </a:effectRef>
-                  <a:fontRef idx="minor">
-                    <a:schemeClr val="lt1"/>
-                  </a:fontRef>
-                </p:style>
-                <p:txBody>
-                  <a:bodyPr rtlCol="0" anchor="ctr"/>
-                  <a:p>
-                    <a:pPr algn="ctr">
-                      <a:defRPr/>
-                    </a:pPr>
-                    <a:endParaRPr lang="es-MX" u="sng"/>
-                  </a:p>
-                </p:txBody>
-              </p:sp>
-              <p:sp>
-                <p:nvSpPr>
-                  <p:cNvPr id="91" name="Óvalo 90"/>
-                  <p:cNvSpPr/>
-                  <p:nvPr/>
-                </p:nvSpPr>
-                <p:spPr bwMode="auto">
-                  <a:xfrm>
-                    <a:off x="6522" y="957"/>
-                    <a:ext cx="276" cy="277"/>
-                  </a:xfrm>
-                  <a:prstGeom prst="ellipse">
-                    <a:avLst/>
-                  </a:prstGeom>
-                  <a:solidFill>
-                    <a:schemeClr val="bg1"/>
-                  </a:solidFill>
-                  <a:ln>
-                    <a:solidFill>
-                      <a:schemeClr val="tx1"/>
-                    </a:solidFill>
-                  </a:ln>
-                </p:spPr>
-                <p:style>
-                  <a:lnRef idx="2">
-                    <a:schemeClr val="accent1">
-                      <a:lumMod val="75000"/>
-                    </a:schemeClr>
-                  </a:lnRef>
-                  <a:fillRef idx="1">
-                    <a:schemeClr val="accent1"/>
-                  </a:fillRef>
-                  <a:effectRef idx="0">
-                    <a:srgbClr val="FFFFFF"/>
-                  </a:effectRef>
-                  <a:fontRef idx="minor">
-                    <a:schemeClr val="lt1"/>
-                  </a:fontRef>
-                </p:style>
-                <p:txBody>
-                  <a:bodyPr rtlCol="0" anchor="ctr"/>
-                  <a:p>
-                    <a:pPr algn="ctr">
-                      <a:defRPr/>
-                    </a:pPr>
-                    <a:endParaRPr lang="es-MX" u="sng"/>
-                  </a:p>
-                </p:txBody>
-              </p:sp>
-              <p:sp>
-                <p:nvSpPr>
-                  <p:cNvPr id="92" name="Óvalo 91"/>
-                  <p:cNvSpPr/>
-                  <p:nvPr/>
-                </p:nvSpPr>
-                <p:spPr bwMode="auto">
-                  <a:xfrm>
-                    <a:off x="6953" y="5261"/>
-                    <a:ext cx="276" cy="277"/>
-                  </a:xfrm>
-                  <a:prstGeom prst="ellipse">
-                    <a:avLst/>
-                  </a:prstGeom>
-                  <a:solidFill>
-                    <a:schemeClr val="bg1"/>
-                  </a:solidFill>
-                  <a:ln>
-                    <a:solidFill>
-                      <a:schemeClr val="tx1"/>
-                    </a:solidFill>
-                  </a:ln>
-                </p:spPr>
-                <p:style>
-                  <a:lnRef idx="2">
-                    <a:schemeClr val="accent1">
-                      <a:lumMod val="75000"/>
-                    </a:schemeClr>
-                  </a:lnRef>
-                  <a:fillRef idx="1">
-                    <a:schemeClr val="accent1"/>
-                  </a:fillRef>
-                  <a:effectRef idx="0">
-                    <a:srgbClr val="FFFFFF"/>
-                  </a:effectRef>
-                  <a:fontRef idx="minor">
-                    <a:schemeClr val="lt1"/>
-                  </a:fontRef>
-                </p:style>
-                <p:txBody>
-                  <a:bodyPr rtlCol="0" anchor="ctr"/>
-                  <a:p>
-                    <a:pPr algn="ctr">
-                      <a:defRPr/>
-                    </a:pPr>
-                    <a:endParaRPr lang="es-MX" u="sng"/>
-                  </a:p>
-                </p:txBody>
-              </p:sp>
-              <p:sp>
-                <p:nvSpPr>
-                  <p:cNvPr id="93" name="Óvalo 92"/>
-                  <p:cNvSpPr/>
-                  <p:nvPr/>
-                </p:nvSpPr>
-                <p:spPr bwMode="auto">
-                  <a:xfrm>
-                    <a:off x="6953" y="957"/>
-                    <a:ext cx="276" cy="277"/>
-                  </a:xfrm>
-                  <a:prstGeom prst="ellipse">
-                    <a:avLst/>
-                  </a:prstGeom>
-                  <a:solidFill>
-                    <a:schemeClr val="bg1"/>
-                  </a:solidFill>
-                  <a:ln>
-                    <a:solidFill>
-                      <a:schemeClr val="tx1"/>
-                    </a:solidFill>
-                  </a:ln>
-                </p:spPr>
-                <p:style>
-                  <a:lnRef idx="2">
-                    <a:schemeClr val="accent1">
-                      <a:lumMod val="75000"/>
-                    </a:schemeClr>
-                  </a:lnRef>
-                  <a:fillRef idx="1">
-                    <a:schemeClr val="accent1"/>
-                  </a:fillRef>
-                  <a:effectRef idx="0">
-                    <a:srgbClr val="FFFFFF"/>
-                  </a:effectRef>
-                  <a:fontRef idx="minor">
-                    <a:schemeClr val="lt1"/>
-                  </a:fontRef>
-                </p:style>
-                <p:txBody>
-                  <a:bodyPr rtlCol="0" anchor="ctr"/>
-                  <a:p>
-                    <a:pPr algn="ctr">
-                      <a:defRPr/>
-                    </a:pPr>
-                    <a:endParaRPr lang="es-MX" u="sng"/>
-                  </a:p>
-                </p:txBody>
-              </p:sp>
-              <p:sp>
-                <p:nvSpPr>
-                  <p:cNvPr id="94" name="Óvalo 93"/>
-                  <p:cNvSpPr/>
-                  <p:nvPr/>
-                </p:nvSpPr>
-                <p:spPr bwMode="auto">
-                  <a:xfrm>
-                    <a:off x="7370" y="5261"/>
-                    <a:ext cx="276" cy="277"/>
-                  </a:xfrm>
-                  <a:prstGeom prst="ellipse">
-                    <a:avLst/>
-                  </a:prstGeom>
-                  <a:solidFill>
-                    <a:schemeClr val="bg1"/>
-                  </a:solidFill>
-                  <a:ln>
-                    <a:solidFill>
-                      <a:schemeClr val="tx1"/>
-                    </a:solidFill>
-                  </a:ln>
-                </p:spPr>
-                <p:style>
-                  <a:lnRef idx="2">
-                    <a:schemeClr val="accent1">
-                      <a:lumMod val="75000"/>
-                    </a:schemeClr>
-                  </a:lnRef>
-                  <a:fillRef idx="1">
-                    <a:schemeClr val="accent1"/>
-                  </a:fillRef>
-                  <a:effectRef idx="0">
-                    <a:srgbClr val="FFFFFF"/>
-                  </a:effectRef>
-                  <a:fontRef idx="minor">
-                    <a:schemeClr val="lt1"/>
-                  </a:fontRef>
-                </p:style>
-                <p:txBody>
-                  <a:bodyPr rtlCol="0" anchor="ctr"/>
-                  <a:p>
-                    <a:pPr algn="ctr">
-                      <a:defRPr/>
-                    </a:pPr>
-                    <a:endParaRPr lang="es-MX" u="sng"/>
-                  </a:p>
-                </p:txBody>
-              </p:sp>
-              <p:sp>
-                <p:nvSpPr>
-                  <p:cNvPr id="95" name="Óvalo 94"/>
-                  <p:cNvSpPr/>
-                  <p:nvPr/>
-                </p:nvSpPr>
-                <p:spPr bwMode="auto">
-                  <a:xfrm>
-                    <a:off x="7370" y="957"/>
-                    <a:ext cx="276" cy="277"/>
-                  </a:xfrm>
-                  <a:prstGeom prst="ellipse">
-                    <a:avLst/>
-                  </a:prstGeom>
-                  <a:solidFill>
-                    <a:schemeClr val="bg1"/>
-                  </a:solidFill>
-                  <a:ln>
-                    <a:solidFill>
-                      <a:schemeClr val="tx1"/>
-                    </a:solidFill>
-                  </a:ln>
-                </p:spPr>
-                <p:style>
-                  <a:lnRef idx="2">
-                    <a:schemeClr val="accent1">
-                      <a:lumMod val="75000"/>
-                    </a:schemeClr>
-                  </a:lnRef>
-                  <a:fillRef idx="1">
-                    <a:schemeClr val="accent1"/>
-                  </a:fillRef>
-                  <a:effectRef idx="0">
-                    <a:srgbClr val="FFFFFF"/>
-                  </a:effectRef>
-                  <a:fontRef idx="minor">
-                    <a:schemeClr val="lt1"/>
-                  </a:fontRef>
-                </p:style>
-                <p:txBody>
-                  <a:bodyPr rtlCol="0" anchor="ctr"/>
-                  <a:p>
-                    <a:pPr algn="ctr">
-                      <a:defRPr/>
-                    </a:pPr>
-                    <a:endParaRPr lang="es-MX" u="sng"/>
-                  </a:p>
-                </p:txBody>
-              </p:sp>
-              <p:sp>
-                <p:nvSpPr>
-                  <p:cNvPr id="96" name="Óvalo 95"/>
-                  <p:cNvSpPr/>
-                  <p:nvPr/>
-                </p:nvSpPr>
-                <p:spPr bwMode="auto">
-                  <a:xfrm>
-                    <a:off x="7792" y="5261"/>
-                    <a:ext cx="276" cy="277"/>
-                  </a:xfrm>
-                  <a:prstGeom prst="ellipse">
-                    <a:avLst/>
-                  </a:prstGeom>
-                  <a:solidFill>
-                    <a:schemeClr val="bg1"/>
-                  </a:solidFill>
-                  <a:ln>
-                    <a:solidFill>
-                      <a:schemeClr val="tx1"/>
-                    </a:solidFill>
-                  </a:ln>
-                </p:spPr>
-                <p:style>
-                  <a:lnRef idx="2">
-                    <a:schemeClr val="accent1">
-                      <a:lumMod val="75000"/>
-                    </a:schemeClr>
-                  </a:lnRef>
-                  <a:fillRef idx="1">
-                    <a:schemeClr val="accent1"/>
-                  </a:fillRef>
-                  <a:effectRef idx="0">
-                    <a:srgbClr val="FFFFFF"/>
-                  </a:effectRef>
-                  <a:fontRef idx="minor">
-                    <a:schemeClr val="lt1"/>
-                  </a:fontRef>
-                </p:style>
-                <p:txBody>
-                  <a:bodyPr rtlCol="0" anchor="ctr"/>
-                  <a:p>
-                    <a:pPr algn="ctr">
-                      <a:defRPr/>
-                    </a:pPr>
-                    <a:endParaRPr lang="es-MX" u="sng"/>
-                  </a:p>
-                </p:txBody>
-              </p:sp>
-              <p:sp>
-                <p:nvSpPr>
-                  <p:cNvPr id="97" name="Óvalo 96"/>
-                  <p:cNvSpPr/>
-                  <p:nvPr/>
-                </p:nvSpPr>
-                <p:spPr bwMode="auto">
-                  <a:xfrm>
-                    <a:off x="7792" y="957"/>
-                    <a:ext cx="276" cy="277"/>
-                  </a:xfrm>
-                  <a:prstGeom prst="ellipse">
-                    <a:avLst/>
-                  </a:prstGeom>
-                  <a:solidFill>
-                    <a:schemeClr val="bg1"/>
-                  </a:solidFill>
-                  <a:ln>
-                    <a:solidFill>
-                      <a:schemeClr val="tx1"/>
-                    </a:solidFill>
-                  </a:ln>
-                </p:spPr>
-                <p:style>
-                  <a:lnRef idx="2">
-                    <a:schemeClr val="accent1">
-                      <a:lumMod val="75000"/>
-                    </a:schemeClr>
-                  </a:lnRef>
-                  <a:fillRef idx="1">
-                    <a:schemeClr val="accent1"/>
-                  </a:fillRef>
-                  <a:effectRef idx="0">
-                    <a:srgbClr val="FFFFFF"/>
-                  </a:effectRef>
-                  <a:fontRef idx="minor">
-                    <a:schemeClr val="lt1"/>
-                  </a:fontRef>
-                </p:style>
-                <p:txBody>
-                  <a:bodyPr rtlCol="0" anchor="ctr"/>
-                  <a:p>
-                    <a:pPr algn="ctr">
-                      <a:defRPr/>
-                    </a:pPr>
-                    <a:endParaRPr lang="es-MX" u="sng"/>
-                  </a:p>
-                </p:txBody>
-              </p:sp>
-              <p:sp>
-                <p:nvSpPr>
-                  <p:cNvPr id="98" name="Óvalo 97"/>
-                  <p:cNvSpPr/>
-                  <p:nvPr/>
-                </p:nvSpPr>
-                <p:spPr bwMode="auto">
-                  <a:xfrm>
-                    <a:off x="8232" y="5261"/>
-                    <a:ext cx="276" cy="277"/>
-                  </a:xfrm>
-                  <a:prstGeom prst="ellipse">
-                    <a:avLst/>
-                  </a:prstGeom>
-                  <a:solidFill>
-                    <a:schemeClr val="bg1"/>
-                  </a:solidFill>
-                  <a:ln>
-                    <a:solidFill>
-                      <a:schemeClr val="tx1"/>
-                    </a:solidFill>
-                  </a:ln>
-                </p:spPr>
-                <p:style>
-                  <a:lnRef idx="2">
-                    <a:schemeClr val="accent1">
-                      <a:lumMod val="75000"/>
-                    </a:schemeClr>
-                  </a:lnRef>
-                  <a:fillRef idx="1">
-                    <a:schemeClr val="accent1"/>
-                  </a:fillRef>
-                  <a:effectRef idx="0">
-                    <a:srgbClr val="FFFFFF"/>
-                  </a:effectRef>
-                  <a:fontRef idx="minor">
-                    <a:schemeClr val="lt1"/>
-                  </a:fontRef>
-                </p:style>
-                <p:txBody>
-                  <a:bodyPr rtlCol="0" anchor="ctr"/>
-                  <a:p>
-                    <a:pPr algn="ctr">
-                      <a:defRPr/>
-                    </a:pPr>
-                    <a:endParaRPr lang="es-MX" u="sng"/>
-                  </a:p>
-                </p:txBody>
-              </p:sp>
-              <p:sp>
-                <p:nvSpPr>
-                  <p:cNvPr id="99" name="Óvalo 98"/>
-                  <p:cNvSpPr/>
-                  <p:nvPr/>
-                </p:nvSpPr>
-                <p:spPr bwMode="auto">
-                  <a:xfrm>
-                    <a:off x="8232" y="957"/>
-                    <a:ext cx="276" cy="277"/>
-                  </a:xfrm>
-                  <a:prstGeom prst="ellipse">
-                    <a:avLst/>
-                  </a:prstGeom>
-                  <a:solidFill>
-                    <a:schemeClr val="bg1"/>
-                  </a:solidFill>
-                  <a:ln>
-                    <a:solidFill>
-                      <a:schemeClr val="tx1"/>
-                    </a:solidFill>
-                  </a:ln>
-                </p:spPr>
-                <p:style>
-                  <a:lnRef idx="2">
-                    <a:schemeClr val="accent1">
-                      <a:lumMod val="75000"/>
-                    </a:schemeClr>
-                  </a:lnRef>
-                  <a:fillRef idx="1">
-                    <a:schemeClr val="accent1"/>
-                  </a:fillRef>
-                  <a:effectRef idx="0">
-                    <a:srgbClr val="FFFFFF"/>
-                  </a:effectRef>
-                  <a:fontRef idx="minor">
-                    <a:schemeClr val="lt1"/>
-                  </a:fontRef>
-                </p:style>
-                <p:txBody>
-                  <a:bodyPr rtlCol="0" anchor="ctr"/>
-                  <a:p>
-                    <a:pPr algn="ctr">
-                      <a:defRPr/>
-                    </a:pPr>
-                    <a:endParaRPr lang="es-MX" u="sng"/>
-                  </a:p>
-                </p:txBody>
-              </p:sp>
-            </p:grpSp>
-            <p:cxnSp>
-              <p:nvCxnSpPr>
-                <p:cNvPr id="102" name="Conector angular 101"/>
-                <p:cNvCxnSpPr>
-                  <a:stCxn id="82" idx="4"/>
-                  <a:endCxn id="60" idx="4"/>
-                </p:cNvCxnSpPr>
-                <p:nvPr/>
-              </p:nvCxnSpPr>
-              <p:spPr bwMode="auto">
-                <a:xfrm rot="5400000" flipV="1">
-                  <a:off x="5999" y="4485"/>
-                  <a:ext cx="2245" cy="4553"/>
-                </a:xfrm>
-                <a:prstGeom prst="bentConnector3">
-                  <a:avLst>
-                    <a:gd name="adj1" fmla="val 38084"/>
-                  </a:avLst>
-                </a:prstGeom>
-                <a:ln w="28575">
-                  <a:solidFill>
-                    <a:srgbClr val="FFFF00"/>
-                  </a:solidFill>
-                </a:ln>
-              </p:spPr>
-              <p:style>
-                <a:lnRef idx="2">
-                  <a:schemeClr val="accent1"/>
-                </a:lnRef>
-                <a:fillRef idx="0">
-                  <a:srgbClr val="FFFFFF"/>
-                </a:fillRef>
-                <a:effectRef idx="0">
-                  <a:srgbClr val="FFFFFF"/>
-                </a:effectRef>
-                <a:fontRef idx="minor">
-                  <a:schemeClr val="tx1"/>
-                </a:fontRef>
-              </p:style>
-            </p:cxnSp>
-            <p:cxnSp>
-              <p:nvCxnSpPr>
-                <p:cNvPr id="103" name="Conector angular 102"/>
-                <p:cNvCxnSpPr>
-                  <a:stCxn id="72" idx="4"/>
-                  <a:endCxn id="61" idx="4"/>
-                </p:cNvCxnSpPr>
-                <p:nvPr/>
-              </p:nvCxnSpPr>
-              <p:spPr bwMode="auto">
-                <a:xfrm rot="5400000" flipV="1">
-                  <a:off x="5053" y="3263"/>
-                  <a:ext cx="2245" cy="6997"/>
-                </a:xfrm>
-                <a:prstGeom prst="bentConnector3">
-                  <a:avLst>
-                    <a:gd name="adj1" fmla="val 59866"/>
-                  </a:avLst>
-                </a:prstGeom>
-                <a:ln w="28575">
+                <a:solidFill>
+                  <a:schemeClr val="bg1"/>
+                </a:solidFill>
+                <a:ln>
                   <a:solidFill>
                     <a:schemeClr val="tx1"/>
                   </a:solidFill>
                 </a:ln>
               </p:spPr>
-              <p:style>
-                <a:lnRef idx="2">
-                  <a:schemeClr val="accent1"/>
-                </a:lnRef>
-                <a:fillRef idx="0">
-                  <a:srgbClr val="FFFFFF"/>
-                </a:fillRef>
-                <a:effectRef idx="0">
-                  <a:srgbClr val="FFFFFF"/>
-                </a:effectRef>
-                <a:fontRef idx="minor">
-                  <a:schemeClr val="tx1"/>
-                </a:fontRef>
-              </p:style>
-            </p:cxnSp>
-            <p:cxnSp>
-              <p:nvCxnSpPr>
-                <p:cNvPr id="104" name="Conector angular 103"/>
-                <p:cNvCxnSpPr>
-                  <a:stCxn id="73" idx="0"/>
-                  <a:endCxn id="2" idx="2"/>
-                </p:cNvCxnSpPr>
+              <p:txBody>
+                <a:bodyPr wrap="square" rtlCol="0">
+                  <a:noAutofit/>
+                </a:bodyPr>
+                <a:p>
+                  <a:pPr algn="ctr">
+                    <a:defRPr/>
+                  </a:pPr>
+                  <a:r>
+                    <a:rPr lang="es-MX" sz="800" b="1"/>
+                    <a:t>NO</a:t>
+                  </a:r>
+                  <a:endParaRPr lang="es-MX" sz="800" b="1"/>
+                </a:p>
+              </p:txBody>
+            </p:sp>
+            <p:sp>
+              <p:nvSpPr>
+                <p:cNvPr id="24" name="Cuadro de texto 23"/>
+                <p:cNvSpPr txBox="1"/>
                 <p:nvPr/>
-              </p:nvCxnSpPr>
+              </p:nvSpPr>
               <p:spPr bwMode="auto">
-                <a:xfrm rot="16199999" flipH="1">
-                  <a:off x="6521" y="-2785"/>
-                  <a:ext cx="773" cy="8463"/>
+                <a:xfrm>
+                  <a:off x="10491" y="7037"/>
+                  <a:ext cx="665" cy="340"/>
                 </a:xfrm>
-                <a:prstGeom prst="bentConnector4">
-                  <a:avLst>
-                    <a:gd name="adj1" fmla="val -97739"/>
-                    <a:gd name="adj2" fmla="val 83274"/>
-                  </a:avLst>
+                <a:prstGeom prst="rect">
+                  <a:avLst/>
                 </a:prstGeom>
-                <a:ln w="28575">
+                <a:solidFill>
+                  <a:schemeClr val="bg1"/>
+                </a:solidFill>
+                <a:ln>
                   <a:solidFill>
                     <a:schemeClr val="tx1"/>
                   </a:solidFill>
                 </a:ln>
               </p:spPr>
-              <p:style>
-                <a:lnRef idx="2">
-                  <a:schemeClr val="accent1"/>
-                </a:lnRef>
-                <a:fillRef idx="0">
-                  <a:srgbClr val="FFFFFF"/>
-                </a:fillRef>
-                <a:effectRef idx="0">
-                  <a:srgbClr val="FFFFFF"/>
-                </a:effectRef>
-                <a:fontRef idx="minor">
-                  <a:schemeClr val="tx1"/>
-                </a:fontRef>
-              </p:style>
-            </p:cxnSp>
-            <p:cxnSp>
-              <p:nvCxnSpPr>
-                <p:cNvPr id="106" name="Conector angular 105"/>
-                <p:cNvCxnSpPr>
-                  <a:stCxn id="96" idx="4"/>
-                  <a:endCxn id="9" idx="2"/>
-                </p:cNvCxnSpPr>
+              <p:txBody>
+                <a:bodyPr wrap="square" rtlCol="0">
+                  <a:noAutofit/>
+                </a:bodyPr>
+                <a:p>
+                  <a:pPr algn="ctr">
+                    <a:defRPr/>
+                  </a:pPr>
+                  <a:r>
+                    <a:rPr lang="es-MX" sz="800" b="1"/>
+                    <a:t>COM</a:t>
+                  </a:r>
+                  <a:endParaRPr lang="es-MX" sz="800" b="1"/>
+                </a:p>
+              </p:txBody>
+            </p:sp>
+            <p:sp>
+              <p:nvSpPr>
+                <p:cNvPr id="25" name="Cuadro de texto 24"/>
+                <p:cNvSpPr txBox="1"/>
                 <p:nvPr/>
-              </p:nvCxnSpPr>
+              </p:nvSpPr>
               <p:spPr bwMode="auto">
-                <a:xfrm rot="5400000" flipH="1" flipV="1">
-                  <a:off x="8025" y="2524"/>
-                  <a:ext cx="2933" cy="3297"/>
+                <a:xfrm>
+                  <a:off x="10635" y="6696"/>
+                  <a:ext cx="521" cy="340"/>
                 </a:xfrm>
-                <a:prstGeom prst="bentConnector4">
-                  <a:avLst>
-                    <a:gd name="adj1" fmla="val -21445"/>
-                    <a:gd name="adj2" fmla="val 59811"/>
-                  </a:avLst>
+                <a:prstGeom prst="rect">
+                  <a:avLst/>
                 </a:prstGeom>
-                <a:ln w="28575">
+                <a:solidFill>
+                  <a:schemeClr val="bg1"/>
+                </a:solidFill>
+                <a:ln>
                   <a:solidFill>
-                    <a:srgbClr val="92D050"/>
+                    <a:schemeClr val="tx1"/>
                   </a:solidFill>
                 </a:ln>
               </p:spPr>
-              <p:style>
-                <a:lnRef idx="2">
-                  <a:schemeClr val="accent1"/>
-                </a:lnRef>
-                <a:fillRef idx="0">
-                  <a:srgbClr val="FFFFFF"/>
-                </a:fillRef>
-                <a:effectRef idx="0">
-                  <a:srgbClr val="FFFFFF"/>
-                </a:effectRef>
-                <a:fontRef idx="minor">
-                  <a:schemeClr val="tx1"/>
-                </a:fontRef>
-              </p:style>
-            </p:cxnSp>
-            <p:cxnSp>
-              <p:nvCxnSpPr>
-                <p:cNvPr id="107" name="Conector angular 106"/>
-                <p:cNvCxnSpPr>
-                  <a:stCxn id="90" idx="3"/>
-                </p:cNvCxnSpPr>
+              <p:txBody>
+                <a:bodyPr wrap="square" rtlCol="0">
+                  <a:noAutofit/>
+                </a:bodyPr>
+                <a:p>
+                  <a:pPr algn="ctr">
+                    <a:defRPr/>
+                  </a:pPr>
+                  <a:r>
+                    <a:rPr lang="es-MX" sz="800" b="1"/>
+                    <a:t>NC</a:t>
+                  </a:r>
+                  <a:endParaRPr lang="es-MX" sz="800" b="1"/>
+                </a:p>
+              </p:txBody>
+            </p:sp>
+            <p:sp>
+              <p:nvSpPr>
+                <p:cNvPr id="26" name="Cuadro de texto 25"/>
+                <p:cNvSpPr txBox="1"/>
                 <p:nvPr/>
-              </p:nvCxnSpPr>
+              </p:nvSpPr>
               <p:spPr bwMode="auto">
-                <a:xfrm rot="5400000" flipH="1" flipV="1">
-                  <a:off x="7215" y="1674"/>
-                  <a:ext cx="3184" cy="4665"/>
+                <a:xfrm>
+                  <a:off x="9051" y="6696"/>
+                  <a:ext cx="266" cy="262"/>
                 </a:xfrm>
-                <a:prstGeom prst="bentConnector4">
-                  <a:avLst>
-                    <a:gd name="adj1" fmla="val -13050"/>
-                    <a:gd name="adj2" fmla="val 64640"/>
-                  </a:avLst>
+                <a:prstGeom prst="rect">
+                  <a:avLst/>
                 </a:prstGeom>
-                <a:ln w="28575">
+                <a:solidFill>
+                  <a:schemeClr val="bg1"/>
+                </a:solidFill>
+                <a:ln>
                   <a:solidFill>
-                    <a:srgbClr val="0000FE"/>
+                    <a:schemeClr val="tx1"/>
                   </a:solidFill>
                 </a:ln>
               </p:spPr>
-              <p:style>
-                <a:lnRef idx="2">
-                  <a:schemeClr val="accent1"/>
-                </a:lnRef>
-                <a:fillRef idx="0">
-                  <a:srgbClr val="FFFFFF"/>
-                </a:fillRef>
-                <a:effectRef idx="0">
-                  <a:srgbClr val="FFFFFF"/>
-                </a:effectRef>
-                <a:fontRef idx="minor">
-                  <a:schemeClr val="tx1"/>
-                </a:fontRef>
-              </p:style>
-            </p:cxnSp>
+              <p:txBody>
+                <a:bodyPr wrap="square" rtlCol="0">
+                  <a:noAutofit/>
+                </a:bodyPr>
+                <a:p>
+                  <a:pPr algn="ctr">
+                    <a:lnSpc>
+                      <a:spcPct val="80000"/>
+                    </a:lnSpc>
+                    <a:defRPr/>
+                  </a:pPr>
+                  <a:r>
+                    <a:rPr lang="es-MX" sz="800" b="1"/>
+                    <a:t>S</a:t>
+                  </a:r>
+                  <a:endParaRPr lang="es-MX" sz="800" b="1"/>
+                </a:p>
+              </p:txBody>
+            </p:sp>
+            <p:sp>
+              <p:nvSpPr>
+                <p:cNvPr id="27" name="Cuadro de texto 26"/>
+                <p:cNvSpPr txBox="1"/>
+                <p:nvPr/>
+              </p:nvSpPr>
+              <p:spPr bwMode="auto">
+                <a:xfrm>
+                  <a:off x="9051" y="7061"/>
+                  <a:ext cx="266" cy="262"/>
+                </a:xfrm>
+                <a:prstGeom prst="rect">
+                  <a:avLst/>
+                </a:prstGeom>
+                <a:solidFill>
+                  <a:schemeClr val="bg1"/>
+                </a:solidFill>
+                <a:ln>
+                  <a:solidFill>
+                    <a:schemeClr val="tx1"/>
+                  </a:solidFill>
+                </a:ln>
+              </p:spPr>
+              <p:txBody>
+                <a:bodyPr wrap="square" rtlCol="0">
+                  <a:noAutofit/>
+                </a:bodyPr>
+                <a:p>
+                  <a:pPr algn="ctr">
+                    <a:lnSpc>
+                      <a:spcPct val="80000"/>
+                    </a:lnSpc>
+                    <a:defRPr/>
+                  </a:pPr>
+                  <a:r>
+                    <a:rPr lang="es-MX" sz="800" b="1"/>
+                    <a:t>+</a:t>
+                  </a:r>
+                  <a:endParaRPr lang="es-MX" sz="800" b="1"/>
+                </a:p>
+              </p:txBody>
+            </p:sp>
+            <p:sp>
+              <p:nvSpPr>
+                <p:cNvPr id="28" name="Cuadro de texto 27"/>
+                <p:cNvSpPr txBox="1"/>
+                <p:nvPr/>
+              </p:nvSpPr>
+              <p:spPr bwMode="auto">
+                <a:xfrm>
+                  <a:off x="9051" y="7406"/>
+                  <a:ext cx="266" cy="262"/>
+                </a:xfrm>
+                <a:prstGeom prst="rect">
+                  <a:avLst/>
+                </a:prstGeom>
+                <a:solidFill>
+                  <a:schemeClr val="bg1"/>
+                </a:solidFill>
+                <a:ln>
+                  <a:solidFill>
+                    <a:schemeClr val="tx1"/>
+                  </a:solidFill>
+                </a:ln>
+              </p:spPr>
+              <p:txBody>
+                <a:bodyPr wrap="square" rtlCol="0">
+                  <a:noAutofit/>
+                </a:bodyPr>
+                <a:p>
+                  <a:pPr algn="ctr">
+                    <a:lnSpc>
+                      <a:spcPct val="80000"/>
+                    </a:lnSpc>
+                    <a:defRPr/>
+                  </a:pPr>
+                  <a:r>
+                    <a:rPr lang="es-MX" sz="800" b="1"/>
+                    <a:t>-</a:t>
+                  </a:r>
+                  <a:endParaRPr lang="es-MX" sz="800" b="1"/>
+                </a:p>
+              </p:txBody>
+            </p:sp>
           </p:grpSp>
-        </p:grpSp>
-        <p:grpSp>
-          <p:nvGrpSpPr>
-            <p:cNvPr id="1164147346" name="Grupo 13"/>
-            <p:cNvGrpSpPr/>
-            <p:nvPr/>
-          </p:nvGrpSpPr>
-          <p:grpSpPr bwMode="auto">
-            <a:xfrm rot="10800000">
-              <a:off x="8942704" y="2872739"/>
-              <a:ext cx="3154045" cy="1798320"/>
-              <a:chOff x="13896" y="5984"/>
-              <a:chExt cx="4967" cy="2832"/>
-            </a:xfrm>
-          </p:grpSpPr>
-          <p:pic>
-            <p:nvPicPr>
-              <p:cNvPr id="8" name="Imagen 7"/>
-              <p:cNvPicPr/>
+          <p:cxnSp>
+            <p:nvCxnSpPr>
+              <p:cNvPr id="1656503180" name="Conector angular 35"/>
+              <p:cNvCxnSpPr>
+                <a:stCxn id="13" idx="6"/>
+                <a:endCxn id="33" idx="4"/>
+              </p:cNvCxnSpPr>
               <p:nvPr/>
-            </p:nvPicPr>
-            <p:blipFill rotWithShape="1">
-              <a:blip r:embed="rId7"/>
-              <a:srcRect l="17593" t="42333" r="37667" b="31444"/>
-              <a:stretch/>
-            </p:blipFill>
+            </p:nvCxnSpPr>
             <p:spPr bwMode="auto">
-              <a:xfrm>
-                <a:off x="13896" y="5984"/>
-                <a:ext cx="4832" cy="2832"/>
+              <a:xfrm rot="10799989" flipH="0" flipV="1">
+                <a:off x="1875472" y="3772217"/>
+                <a:ext cx="7067231" cy="2493962"/>
               </a:xfrm>
-              <a:prstGeom prst="rect">
-                <a:avLst/>
+              <a:prstGeom prst="bentConnector3">
+                <a:avLst>
+                  <a:gd name="adj1" fmla="val 50000"/>
+                </a:avLst>
               </a:prstGeom>
-            </p:spPr>
-          </p:pic>
-          <p:sp>
-            <p:nvSpPr>
-              <p:cNvPr id="12" name="Óvalo 11"/>
-              <p:cNvSpPr/>
-              <p:nvPr/>
-            </p:nvSpPr>
-            <p:spPr bwMode="auto">
-              <a:xfrm>
-                <a:off x="18587" y="7794"/>
-                <a:ext cx="276" cy="277"/>
-              </a:xfrm>
-              <a:prstGeom prst="ellipse">
-                <a:avLst/>
-              </a:prstGeom>
-              <a:solidFill>
-                <a:schemeClr val="bg1"/>
-              </a:solidFill>
-              <a:ln>
+              <a:ln w="28575">
                 <a:solidFill>
                   <a:schemeClr val="tx1"/>
                 </a:solidFill>
@@ -6363,48 +7108,158 @@
             </p:spPr>
             <p:style>
               <a:lnRef idx="2">
-                <a:schemeClr val="accent1">
-                  <a:lumMod val="75000"/>
-                </a:schemeClr>
+                <a:schemeClr val="accent1"/>
               </a:lnRef>
-              <a:fillRef idx="1">
-                <a:schemeClr val="accent1"/>
+              <a:fillRef idx="0">
+                <a:srgbClr val="FFFFFF"/>
               </a:fillRef>
               <a:effectRef idx="0">
                 <a:srgbClr val="FFFFFF"/>
               </a:effectRef>
               <a:fontRef idx="minor">
-                <a:schemeClr val="lt1"/>
+                <a:schemeClr val="tx1"/>
               </a:fontRef>
             </p:style>
-            <p:txBody>
-              <a:bodyPr rtlCol="0" anchor="ctr"/>
-              <a:p>
-                <a:pPr algn="ctr">
-                  <a:defRPr/>
-                </a:pPr>
-                <a:endParaRPr lang="es-MX" u="sng"/>
-              </a:p>
-            </p:txBody>
-          </p:sp>
-          <p:sp>
-            <p:nvSpPr>
-              <p:cNvPr id="13" name="Óvalo 12"/>
-              <p:cNvSpPr/>
+          </p:cxnSp>
+          <p:cxnSp>
+            <p:nvCxnSpPr>
+              <p:cNvPr id="1977193564" name="Conector angular 36"/>
+              <p:cNvCxnSpPr>
+                <a:stCxn id="17" idx="2"/>
+                <a:endCxn id="32" idx="4"/>
+              </p:cNvCxnSpPr>
               <p:nvPr/>
-            </p:nvSpPr>
+            </p:nvCxnSpPr>
             <p:spPr bwMode="auto">
-              <a:xfrm>
-                <a:off x="18587" y="7261"/>
-                <a:ext cx="276" cy="277"/>
+              <a:xfrm rot="0" flipH="1" flipV="1">
+                <a:off x="1875472" y="5882005"/>
+                <a:ext cx="6363651" cy="949007"/>
               </a:xfrm>
-              <a:prstGeom prst="ellipse">
-                <a:avLst/>
+              <a:prstGeom prst="bentConnector3">
+                <a:avLst>
+                  <a:gd name="adj1" fmla="val -3592"/>
+                </a:avLst>
               </a:prstGeom>
-              <a:solidFill>
-                <a:schemeClr val="bg1"/>
-              </a:solidFill>
-              <a:ln>
+              <a:ln w="28575">
+                <a:solidFill>
+                  <a:srgbClr val="FF0000"/>
+                </a:solidFill>
+              </a:ln>
+            </p:spPr>
+            <p:style>
+              <a:lnRef idx="2">
+                <a:schemeClr val="accent1"/>
+              </a:lnRef>
+              <a:fillRef idx="0">
+                <a:srgbClr val="FFFFFF"/>
+              </a:fillRef>
+              <a:effectRef idx="0">
+                <a:srgbClr val="FFFFFF"/>
+              </a:effectRef>
+              <a:fontRef idx="minor">
+                <a:schemeClr val="tx1"/>
+              </a:fontRef>
+            </p:style>
+          </p:cxnSp>
+          <p:cxnSp>
+            <p:nvCxnSpPr>
+              <p:cNvPr id="1037342482" name="Conector angular 37"/>
+              <p:cNvCxnSpPr>
+                <a:stCxn id="18" idx="2"/>
+                <a:endCxn id="12" idx="6"/>
+              </p:cNvCxnSpPr>
+              <p:nvPr/>
+            </p:nvCxnSpPr>
+            <p:spPr bwMode="auto">
+              <a:xfrm flipV="1">
+                <a:off x="8239124" y="3433444"/>
+                <a:ext cx="703580" cy="3622040"/>
+              </a:xfrm>
+              <a:prstGeom prst="bentConnector3">
+                <a:avLst>
+                  <a:gd name="adj1" fmla="val 50000"/>
+                </a:avLst>
+              </a:prstGeom>
+              <a:ln w="28575">
+                <a:solidFill>
+                  <a:srgbClr val="FF0000"/>
+                </a:solidFill>
+              </a:ln>
+            </p:spPr>
+            <p:style>
+              <a:lnRef idx="2">
+                <a:schemeClr val="accent1"/>
+              </a:lnRef>
+              <a:fillRef idx="0">
+                <a:srgbClr val="FFFFFF"/>
+              </a:fillRef>
+              <a:effectRef idx="0">
+                <a:srgbClr val="FFFFFF"/>
+              </a:effectRef>
+              <a:fontRef idx="minor">
+                <a:schemeClr val="tx1"/>
+              </a:fontRef>
+            </p:style>
+          </p:cxnSp>
+          <p:cxnSp>
+            <p:nvCxnSpPr>
+              <p:cNvPr id="34515072" name="Conector angular 38"/>
+              <p:cNvCxnSpPr/>
+              <p:nvPr/>
+            </p:nvCxnSpPr>
+            <p:spPr bwMode="auto">
+              <a:xfrm rot="10800000">
+                <a:off x="1017270" y="408939"/>
+                <a:ext cx="5486400" cy="6422389"/>
+              </a:xfrm>
+              <a:prstGeom prst="bentConnector4">
+                <a:avLst>
+                  <a:gd name="adj1" fmla="val 137349"/>
+                  <a:gd name="adj2" fmla="val 105981"/>
+                </a:avLst>
+              </a:prstGeom>
+              <a:ln w="28575">
+                <a:solidFill>
+                  <a:srgbClr val="FF0000"/>
+                </a:solidFill>
+              </a:ln>
+            </p:spPr>
+            <p:style>
+              <a:lnRef idx="2">
+                <a:schemeClr val="accent1"/>
+              </a:lnRef>
+              <a:fillRef idx="0">
+                <a:srgbClr val="FFFFFF"/>
+              </a:fillRef>
+              <a:effectRef idx="0">
+                <a:srgbClr val="FFFFFF"/>
+              </a:effectRef>
+              <a:fontRef idx="minor">
+                <a:schemeClr val="tx1"/>
+              </a:fontRef>
+            </p:style>
+          </p:cxnSp>
+          <p:cxnSp>
+            <p:nvCxnSpPr>
+              <p:cNvPr id="348223700" name="Conector angular 39"/>
+              <p:cNvCxnSpPr>
+                <a:stCxn id="21" idx="6"/>
+                <a:endCxn id="73" idx="1"/>
+              </p:cNvCxnSpPr>
+              <p:nvPr/>
+            </p:nvCxnSpPr>
+            <p:spPr bwMode="auto">
+              <a:xfrm rot="10800000">
+                <a:off x="1131570" y="408939"/>
+                <a:ext cx="5372100" cy="6647180"/>
+              </a:xfrm>
+              <a:prstGeom prst="bentConnector4">
+                <a:avLst>
+                  <a:gd name="adj1" fmla="val 148475"/>
+                  <a:gd name="adj2" fmla="val 108712"/>
+                </a:avLst>
+              </a:prstGeom>
+              <a:ln w="28575">
                 <a:solidFill>
                   <a:schemeClr val="tx1"/>
                 </a:solidFill>
@@ -6412,74 +7267,50 @@
             </p:spPr>
             <p:style>
               <a:lnRef idx="2">
-                <a:schemeClr val="accent1">
-                  <a:lumMod val="75000"/>
-                </a:schemeClr>
+                <a:schemeClr val="accent1"/>
               </a:lnRef>
-              <a:fillRef idx="1">
-                <a:schemeClr val="accent1"/>
+              <a:fillRef idx="0">
+                <a:srgbClr val="FFFFFF"/>
               </a:fillRef>
               <a:effectRef idx="0">
                 <a:srgbClr val="FFFFFF"/>
               </a:effectRef>
               <a:fontRef idx="minor">
-                <a:schemeClr val="lt1"/>
+                <a:schemeClr val="tx1"/>
               </a:fontRef>
             </p:style>
-            <p:txBody>
-              <a:bodyPr rtlCol="0" anchor="ctr"/>
-              <a:p>
-                <a:pPr algn="ctr">
-                  <a:defRPr/>
-                </a:pPr>
-                <a:endParaRPr lang="es-MX" u="sng"/>
-              </a:p>
-            </p:txBody>
-          </p:sp>
-        </p:grpSp>
-        <p:grpSp>
-          <p:nvGrpSpPr>
-            <p:cNvPr id="32913961" name="Grupo 28"/>
-            <p:cNvGrpSpPr/>
-            <p:nvPr/>
-          </p:nvGrpSpPr>
-          <p:grpSpPr bwMode="auto">
-            <a:xfrm rot="0">
-              <a:off x="6488429" y="6491604"/>
-              <a:ext cx="1750060" cy="730250"/>
-              <a:chOff x="8675" y="6641"/>
-              <a:chExt cx="2756" cy="1150"/>
-            </a:xfrm>
-          </p:grpSpPr>
+          </p:cxnSp>
           <p:grpSp>
             <p:nvGrpSpPr>
-              <p:cNvPr id="22" name="Grupo 21"/>
+              <p:cNvPr id="2094047646" name="Grupo 34"/>
               <p:cNvGrpSpPr/>
               <p:nvPr/>
             </p:nvGrpSpPr>
             <p:grpSpPr bwMode="auto">
-              <a:xfrm>
-                <a:off x="8675" y="6641"/>
-                <a:ext cx="2757" cy="1150"/>
-                <a:chOff x="8675" y="6641"/>
-                <a:chExt cx="2757" cy="1150"/>
+              <a:xfrm rot="5400000">
+                <a:off x="361632" y="5126990"/>
+                <a:ext cx="1177290" cy="1850390"/>
+                <a:chOff x="10635" y="8107"/>
+                <a:chExt cx="1854" cy="2914"/>
               </a:xfrm>
             </p:grpSpPr>
             <p:pic>
               <p:nvPicPr>
-                <p:cNvPr id="15" name="Imagen 14"/>
-                <p:cNvPicPr/>
+                <p:cNvPr id="31" name="Imagen 30"/>
+                <p:cNvPicPr>
+                  <a:picLocks noChangeAspect="1"/>
+                </p:cNvPicPr>
                 <p:nvPr/>
               </p:nvPicPr>
               <p:blipFill rotWithShape="1">
-                <a:blip r:embed="rId8"/>
-                <a:srcRect l="43984" t="32542" r="40877" b="14275"/>
+                <a:blip r:embed="rId9"/>
+                <a:srcRect l="15778" t="28976" r="51413" b="26881"/>
                 <a:stretch/>
               </p:blipFill>
               <p:spPr bwMode="auto">
                 <a:xfrm rot="5400000">
-                  <a:off x="9478" y="5837"/>
-                  <a:ext cx="1150" cy="2757"/>
+                  <a:off x="10186" y="8718"/>
+                  <a:ext cx="2751" cy="1854"/>
                 </a:xfrm>
                 <a:prstGeom prst="rect">
                   <a:avLst/>
@@ -6488,13 +7319,13 @@
             </p:pic>
             <p:sp>
               <p:nvSpPr>
-                <p:cNvPr id="16" name="Óvalo 15"/>
+                <p:cNvPr id="32" name="Óvalo 31"/>
                 <p:cNvSpPr/>
                 <p:nvPr/>
               </p:nvSpPr>
               <p:spPr bwMode="auto">
                 <a:xfrm rot="10800000">
-                  <a:off x="11156" y="6709"/>
+                  <a:off x="11156" y="8107"/>
                   <a:ext cx="276" cy="277"/>
                 </a:xfrm>
                 <a:prstGeom prst="ellipse">
@@ -6537,13 +7368,13 @@
             </p:sp>
             <p:sp>
               <p:nvSpPr>
-                <p:cNvPr id="17" name="Óvalo 16"/>
+                <p:cNvPr id="33" name="Óvalo 32"/>
                 <p:cNvSpPr/>
                 <p:nvPr/>
               </p:nvSpPr>
               <p:spPr bwMode="auto">
                 <a:xfrm rot="10800000">
-                  <a:off x="11156" y="7037"/>
+                  <a:off x="11761" y="8107"/>
                   <a:ext cx="276" cy="277"/>
                 </a:xfrm>
                 <a:prstGeom prst="ellipse">
@@ -6586,14 +7417,14 @@
             </p:sp>
             <p:sp>
               <p:nvSpPr>
-                <p:cNvPr id="18" name="Óvalo 17"/>
+                <p:cNvPr id="34" name="Óvalo 33"/>
                 <p:cNvSpPr/>
                 <p:nvPr/>
               </p:nvSpPr>
               <p:spPr bwMode="auto">
-                <a:xfrm rot="10800000">
-                  <a:off x="11156" y="7391"/>
-                  <a:ext cx="276" cy="277"/>
+                <a:xfrm rot="16199998">
+                  <a:off x="11157" y="8632"/>
+                  <a:ext cx="934" cy="938"/>
                 </a:xfrm>
                 <a:prstGeom prst="ellipse">
                   <a:avLst/>
@@ -6624,637 +7455,101 @@
                 </a:fontRef>
               </p:style>
               <p:txBody>
-                <a:bodyPr rtlCol="0" anchor="ctr"/>
+                <a:bodyPr lIns="0" tIns="0" rIns="0" bIns="0" rtlCol="0" anchor="ctr"/>
                 <a:p>
                   <a:pPr algn="ctr">
                     <a:defRPr/>
                   </a:pPr>
-                  <a:endParaRPr lang="es-MX" u="sng"/>
-                </a:p>
-              </p:txBody>
-            </p:sp>
-            <p:sp>
-              <p:nvSpPr>
-                <p:cNvPr id="19" name="Óvalo 18"/>
-                <p:cNvSpPr/>
-                <p:nvPr/>
-              </p:nvSpPr>
-              <p:spPr bwMode="auto">
-                <a:xfrm rot="10800000">
-                  <a:off x="8699" y="6709"/>
-                  <a:ext cx="276" cy="277"/>
-                </a:xfrm>
-                <a:prstGeom prst="ellipse">
-                  <a:avLst/>
-                </a:prstGeom>
-                <a:solidFill>
-                  <a:schemeClr val="bg1"/>
-                </a:solidFill>
-                <a:ln>
-                  <a:solidFill>
-                    <a:schemeClr val="tx1"/>
-                  </a:solidFill>
-                </a:ln>
-              </p:spPr>
-              <p:style>
-                <a:lnRef idx="2">
-                  <a:schemeClr val="accent1">
-                    <a:lumMod val="75000"/>
-                  </a:schemeClr>
-                </a:lnRef>
-                <a:fillRef idx="1">
-                  <a:schemeClr val="accent1"/>
-                </a:fillRef>
-                <a:effectRef idx="0">
-                  <a:srgbClr val="FFFFFF"/>
-                </a:effectRef>
-                <a:fontRef idx="minor">
-                  <a:schemeClr val="lt1"/>
-                </a:fontRef>
-              </p:style>
-              <p:txBody>
-                <a:bodyPr rtlCol="0" anchor="ctr"/>
-                <a:p>
-                  <a:pPr algn="ctr">
-                    <a:defRPr/>
-                  </a:pPr>
-                  <a:endParaRPr lang="es-MX" u="sng"/>
-                </a:p>
-              </p:txBody>
-            </p:sp>
-            <p:sp>
-              <p:nvSpPr>
-                <p:cNvPr id="20" name="Óvalo 19"/>
-                <p:cNvSpPr/>
-                <p:nvPr/>
-              </p:nvSpPr>
-              <p:spPr bwMode="auto">
-                <a:xfrm rot="10800000">
-                  <a:off x="8699" y="7037"/>
-                  <a:ext cx="276" cy="277"/>
-                </a:xfrm>
-                <a:prstGeom prst="ellipse">
-                  <a:avLst/>
-                </a:prstGeom>
-                <a:solidFill>
-                  <a:schemeClr val="bg1"/>
-                </a:solidFill>
-                <a:ln>
-                  <a:solidFill>
-                    <a:schemeClr val="tx1"/>
-                  </a:solidFill>
-                </a:ln>
-              </p:spPr>
-              <p:style>
-                <a:lnRef idx="2">
-                  <a:schemeClr val="accent1">
-                    <a:lumMod val="75000"/>
-                  </a:schemeClr>
-                </a:lnRef>
-                <a:fillRef idx="1">
-                  <a:schemeClr val="accent1"/>
-                </a:fillRef>
-                <a:effectRef idx="0">
-                  <a:srgbClr val="FFFFFF"/>
-                </a:effectRef>
-                <a:fontRef idx="minor">
-                  <a:schemeClr val="lt1"/>
-                </a:fontRef>
-              </p:style>
-              <p:txBody>
-                <a:bodyPr rtlCol="0" anchor="ctr"/>
-                <a:p>
-                  <a:pPr algn="ctr">
-                    <a:defRPr/>
-                  </a:pPr>
-                  <a:endParaRPr lang="es-MX" u="sng"/>
-                </a:p>
-              </p:txBody>
-            </p:sp>
-            <p:sp>
-              <p:nvSpPr>
-                <p:cNvPr id="21" name="Óvalo 20"/>
-                <p:cNvSpPr/>
-                <p:nvPr/>
-              </p:nvSpPr>
-              <p:spPr bwMode="auto">
-                <a:xfrm rot="10800000">
-                  <a:off x="8699" y="7391"/>
-                  <a:ext cx="276" cy="277"/>
-                </a:xfrm>
-                <a:prstGeom prst="ellipse">
-                  <a:avLst/>
-                </a:prstGeom>
-                <a:solidFill>
-                  <a:schemeClr val="bg1"/>
-                </a:solidFill>
-                <a:ln>
-                  <a:solidFill>
-                    <a:schemeClr val="tx1"/>
-                  </a:solidFill>
-                </a:ln>
-              </p:spPr>
-              <p:style>
-                <a:lnRef idx="2">
-                  <a:schemeClr val="accent1">
-                    <a:lumMod val="75000"/>
-                  </a:schemeClr>
-                </a:lnRef>
-                <a:fillRef idx="1">
-                  <a:schemeClr val="accent1"/>
-                </a:fillRef>
-                <a:effectRef idx="0">
-                  <a:srgbClr val="FFFFFF"/>
-                </a:effectRef>
-                <a:fontRef idx="minor">
-                  <a:schemeClr val="lt1"/>
-                </a:fontRef>
-              </p:style>
-              <p:txBody>
-                <a:bodyPr rtlCol="0" anchor="ctr"/>
-                <a:p>
-                  <a:pPr algn="ctr">
-                    <a:defRPr/>
-                  </a:pPr>
-                  <a:endParaRPr lang="es-MX" u="sng"/>
+                  <a:r>
+                    <a:rPr lang="es-MX" sz="1600" b="1">
+                      <a:solidFill>
+                        <a:srgbClr val="FF0000"/>
+                      </a:solidFill>
+                    </a:rPr>
+                    <a:t>12V</a:t>
+                  </a:r>
+                  <a:endParaRPr lang="es-MX" sz="1600" b="1">
+                    <a:solidFill>
+                      <a:srgbClr val="FF0000"/>
+                    </a:solidFill>
+                  </a:endParaRPr>
                 </a:p>
               </p:txBody>
             </p:sp>
           </p:grpSp>
-          <p:sp>
-            <p:nvSpPr>
-              <p:cNvPr id="23" name="Cuadro de texto 22"/>
-              <p:cNvSpPr txBox="1"/>
+          <p:cxnSp>
+            <p:nvCxnSpPr>
+              <p:cNvPr id="1269201989" name="Conector angular 40"/>
+              <p:cNvCxnSpPr>
+                <a:stCxn id="19" idx="6"/>
+                <a:endCxn id="85" idx="0"/>
+              </p:cNvCxnSpPr>
               <p:nvPr/>
-            </p:nvSpPr>
+            </p:nvCxnSpPr>
             <p:spPr bwMode="auto">
-              <a:xfrm>
-                <a:off x="10635" y="7328"/>
-                <a:ext cx="521" cy="340"/>
+              <a:xfrm rot="10800000">
+                <a:off x="2391408" y="389889"/>
+                <a:ext cx="4112260" cy="6233160"/>
               </a:xfrm>
-              <a:prstGeom prst="rect">
-                <a:avLst/>
+              <a:prstGeom prst="bentConnector4">
+                <a:avLst>
+                  <a:gd name="adj1" fmla="val 176374"/>
+                  <a:gd name="adj2" fmla="val 112337"/>
+                </a:avLst>
               </a:prstGeom>
-              <a:solidFill>
-                <a:schemeClr val="bg1"/>
-              </a:solidFill>
-              <a:ln>
+              <a:ln w="28575">
                 <a:solidFill>
-                  <a:schemeClr val="tx1"/>
+                  <a:srgbClr val="FE00DE"/>
                 </a:solidFill>
               </a:ln>
             </p:spPr>
-            <p:txBody>
-              <a:bodyPr wrap="square" rtlCol="0">
-                <a:noAutofit/>
-              </a:bodyPr>
-              <a:p>
-                <a:pPr algn="ctr">
-                  <a:defRPr/>
-                </a:pPr>
-                <a:r>
-                  <a:rPr lang="es-MX" sz="800" b="1"/>
-                  <a:t>NO</a:t>
-                </a:r>
-                <a:endParaRPr lang="es-MX" sz="800" b="1"/>
-              </a:p>
-            </p:txBody>
-          </p:sp>
-          <p:sp>
-            <p:nvSpPr>
-              <p:cNvPr id="24" name="Cuadro de texto 23"/>
-              <p:cNvSpPr txBox="1"/>
-              <p:nvPr/>
-            </p:nvSpPr>
-            <p:spPr bwMode="auto">
-              <a:xfrm>
-                <a:off x="10491" y="7037"/>
-                <a:ext cx="665" cy="340"/>
-              </a:xfrm>
-              <a:prstGeom prst="rect">
-                <a:avLst/>
-              </a:prstGeom>
-              <a:solidFill>
-                <a:schemeClr val="bg1"/>
-              </a:solidFill>
-              <a:ln>
-                <a:solidFill>
-                  <a:schemeClr val="tx1"/>
-                </a:solidFill>
-              </a:ln>
-            </p:spPr>
-            <p:txBody>
-              <a:bodyPr wrap="square" rtlCol="0">
-                <a:noAutofit/>
-              </a:bodyPr>
-              <a:p>
-                <a:pPr algn="ctr">
-                  <a:defRPr/>
-                </a:pPr>
-                <a:r>
-                  <a:rPr lang="es-MX" sz="800" b="1"/>
-                  <a:t>COM</a:t>
-                </a:r>
-                <a:endParaRPr lang="es-MX" sz="800" b="1"/>
-              </a:p>
-            </p:txBody>
-          </p:sp>
-          <p:sp>
-            <p:nvSpPr>
-              <p:cNvPr id="25" name="Cuadro de texto 24"/>
-              <p:cNvSpPr txBox="1"/>
-              <p:nvPr/>
-            </p:nvSpPr>
-            <p:spPr bwMode="auto">
-              <a:xfrm>
-                <a:off x="10635" y="6696"/>
-                <a:ext cx="521" cy="340"/>
-              </a:xfrm>
-              <a:prstGeom prst="rect">
-                <a:avLst/>
-              </a:prstGeom>
-              <a:solidFill>
-                <a:schemeClr val="bg1"/>
-              </a:solidFill>
-              <a:ln>
-                <a:solidFill>
-                  <a:schemeClr val="tx1"/>
-                </a:solidFill>
-              </a:ln>
-            </p:spPr>
-            <p:txBody>
-              <a:bodyPr wrap="square" rtlCol="0">
-                <a:noAutofit/>
-              </a:bodyPr>
-              <a:p>
-                <a:pPr algn="ctr">
-                  <a:defRPr/>
-                </a:pPr>
-                <a:r>
-                  <a:rPr lang="es-MX" sz="800" b="1"/>
-                  <a:t>NC</a:t>
-                </a:r>
-                <a:endParaRPr lang="es-MX" sz="800" b="1"/>
-              </a:p>
-            </p:txBody>
-          </p:sp>
-          <p:sp>
-            <p:nvSpPr>
-              <p:cNvPr id="26" name="Cuadro de texto 25"/>
-              <p:cNvSpPr txBox="1"/>
-              <p:nvPr/>
-            </p:nvSpPr>
-            <p:spPr bwMode="auto">
-              <a:xfrm>
-                <a:off x="9051" y="6696"/>
-                <a:ext cx="266" cy="262"/>
-              </a:xfrm>
-              <a:prstGeom prst="rect">
-                <a:avLst/>
-              </a:prstGeom>
-              <a:solidFill>
-                <a:schemeClr val="bg1"/>
-              </a:solidFill>
-              <a:ln>
-                <a:solidFill>
-                  <a:schemeClr val="tx1"/>
-                </a:solidFill>
-              </a:ln>
-            </p:spPr>
-            <p:txBody>
-              <a:bodyPr wrap="square" rtlCol="0">
-                <a:noAutofit/>
-              </a:bodyPr>
-              <a:p>
-                <a:pPr algn="ctr">
-                  <a:lnSpc>
-                    <a:spcPct val="80000"/>
-                  </a:lnSpc>
-                  <a:defRPr/>
-                </a:pPr>
-                <a:r>
-                  <a:rPr lang="es-MX" sz="800" b="1"/>
-                  <a:t>S</a:t>
-                </a:r>
-                <a:endParaRPr lang="es-MX" sz="800" b="1"/>
-              </a:p>
-            </p:txBody>
-          </p:sp>
-          <p:sp>
-            <p:nvSpPr>
-              <p:cNvPr id="27" name="Cuadro de texto 26"/>
-              <p:cNvSpPr txBox="1"/>
-              <p:nvPr/>
-            </p:nvSpPr>
-            <p:spPr bwMode="auto">
-              <a:xfrm>
-                <a:off x="9051" y="7061"/>
-                <a:ext cx="266" cy="262"/>
-              </a:xfrm>
-              <a:prstGeom prst="rect">
-                <a:avLst/>
-              </a:prstGeom>
-              <a:solidFill>
-                <a:schemeClr val="bg1"/>
-              </a:solidFill>
-              <a:ln>
-                <a:solidFill>
-                  <a:schemeClr val="tx1"/>
-                </a:solidFill>
-              </a:ln>
-            </p:spPr>
-            <p:txBody>
-              <a:bodyPr wrap="square" rtlCol="0">
-                <a:noAutofit/>
-              </a:bodyPr>
-              <a:p>
-                <a:pPr algn="ctr">
-                  <a:lnSpc>
-                    <a:spcPct val="80000"/>
-                  </a:lnSpc>
-                  <a:defRPr/>
-                </a:pPr>
-                <a:r>
-                  <a:rPr lang="es-MX" sz="800" b="1"/>
-                  <a:t>+</a:t>
-                </a:r>
-                <a:endParaRPr lang="es-MX" sz="800" b="1"/>
-              </a:p>
-            </p:txBody>
-          </p:sp>
-          <p:sp>
-            <p:nvSpPr>
-              <p:cNvPr id="28" name="Cuadro de texto 27"/>
-              <p:cNvSpPr txBox="1"/>
-              <p:nvPr/>
-            </p:nvSpPr>
-            <p:spPr bwMode="auto">
-              <a:xfrm>
-                <a:off x="9051" y="7406"/>
-                <a:ext cx="266" cy="262"/>
-              </a:xfrm>
-              <a:prstGeom prst="rect">
-                <a:avLst/>
-              </a:prstGeom>
-              <a:solidFill>
-                <a:schemeClr val="bg1"/>
-              </a:solidFill>
-              <a:ln>
-                <a:solidFill>
-                  <a:schemeClr val="tx1"/>
-                </a:solidFill>
-              </a:ln>
-            </p:spPr>
-            <p:txBody>
-              <a:bodyPr wrap="square" rtlCol="0">
-                <a:noAutofit/>
-              </a:bodyPr>
-              <a:p>
-                <a:pPr algn="ctr">
-                  <a:lnSpc>
-                    <a:spcPct val="80000"/>
-                  </a:lnSpc>
-                  <a:defRPr/>
-                </a:pPr>
-                <a:r>
-                  <a:rPr lang="es-MX" sz="800" b="1"/>
-                  <a:t>-</a:t>
-                </a:r>
-                <a:endParaRPr lang="es-MX" sz="800" b="1"/>
-              </a:p>
-            </p:txBody>
-          </p:sp>
+            <p:style>
+              <a:lnRef idx="2">
+                <a:schemeClr val="accent1"/>
+              </a:lnRef>
+              <a:fillRef idx="0">
+                <a:srgbClr val="FFFFFF"/>
+              </a:fillRef>
+              <a:effectRef idx="0">
+                <a:srgbClr val="FFFFFF"/>
+              </a:effectRef>
+              <a:fontRef idx="minor">
+                <a:schemeClr val="tx1"/>
+              </a:fontRef>
+            </p:style>
+          </p:cxnSp>
         </p:grpSp>
-        <p:cxnSp>
-          <p:nvCxnSpPr>
-            <p:cNvPr id="1656503180" name="Conector angular 35"/>
-            <p:cNvCxnSpPr>
-              <a:stCxn id="13" idx="6"/>
-              <a:endCxn id="33" idx="4"/>
-            </p:cNvCxnSpPr>
-            <p:nvPr/>
-          </p:nvCxnSpPr>
-          <p:spPr bwMode="auto">
-            <a:xfrm rot="10799990" flipH="0" flipV="1">
-              <a:off x="1875472" y="3772217"/>
-              <a:ext cx="7067231" cy="2493962"/>
-            </a:xfrm>
-            <a:prstGeom prst="bentConnector3">
-              <a:avLst>
-                <a:gd name="adj1" fmla="val 50000"/>
-              </a:avLst>
-            </a:prstGeom>
-            <a:ln w="28575">
-              <a:solidFill>
-                <a:schemeClr val="tx1"/>
-              </a:solidFill>
-            </a:ln>
-          </p:spPr>
-          <p:style>
-            <a:lnRef idx="2">
-              <a:schemeClr val="accent1"/>
-            </a:lnRef>
-            <a:fillRef idx="0">
-              <a:srgbClr val="FFFFFF"/>
-            </a:fillRef>
-            <a:effectRef idx="0">
-              <a:srgbClr val="FFFFFF"/>
-            </a:effectRef>
-            <a:fontRef idx="minor">
-              <a:schemeClr val="tx1"/>
-            </a:fontRef>
-          </p:style>
-        </p:cxnSp>
-        <p:cxnSp>
-          <p:nvCxnSpPr>
-            <p:cNvPr id="1977193564" name="Conector angular 36"/>
-            <p:cNvCxnSpPr>
-              <a:stCxn id="17" idx="2"/>
-              <a:endCxn id="32" idx="4"/>
-            </p:cNvCxnSpPr>
-            <p:nvPr/>
-          </p:nvCxnSpPr>
-          <p:spPr bwMode="auto">
-            <a:xfrm rot="0" flipH="1" flipV="1">
-              <a:off x="1875472" y="5882005"/>
-              <a:ext cx="6363651" cy="949007"/>
-            </a:xfrm>
-            <a:prstGeom prst="bentConnector3">
-              <a:avLst>
-                <a:gd name="adj1" fmla="val -3592"/>
-              </a:avLst>
-            </a:prstGeom>
-            <a:ln w="28575">
-              <a:solidFill>
-                <a:srgbClr val="FF0000"/>
-              </a:solidFill>
-            </a:ln>
-          </p:spPr>
-          <p:style>
-            <a:lnRef idx="2">
-              <a:schemeClr val="accent1"/>
-            </a:lnRef>
-            <a:fillRef idx="0">
-              <a:srgbClr val="FFFFFF"/>
-            </a:fillRef>
-            <a:effectRef idx="0">
-              <a:srgbClr val="FFFFFF"/>
-            </a:effectRef>
-            <a:fontRef idx="minor">
-              <a:schemeClr val="tx1"/>
-            </a:fontRef>
-          </p:style>
-        </p:cxnSp>
-        <p:cxnSp>
-          <p:nvCxnSpPr>
-            <p:cNvPr id="1037342482" name="Conector angular 37"/>
-            <p:cNvCxnSpPr>
-              <a:stCxn id="18" idx="2"/>
-              <a:endCxn id="12" idx="6"/>
-            </p:cNvCxnSpPr>
-            <p:nvPr/>
-          </p:nvCxnSpPr>
-          <p:spPr bwMode="auto">
-            <a:xfrm flipV="1">
-              <a:off x="8239124" y="3433444"/>
-              <a:ext cx="703580" cy="3622040"/>
-            </a:xfrm>
-            <a:prstGeom prst="bentConnector3">
-              <a:avLst>
-                <a:gd name="adj1" fmla="val 50000"/>
-              </a:avLst>
-            </a:prstGeom>
-            <a:ln w="28575">
-              <a:solidFill>
-                <a:srgbClr val="FF0000"/>
-              </a:solidFill>
-            </a:ln>
-          </p:spPr>
-          <p:style>
-            <a:lnRef idx="2">
-              <a:schemeClr val="accent1"/>
-            </a:lnRef>
-            <a:fillRef idx="0">
-              <a:srgbClr val="FFFFFF"/>
-            </a:fillRef>
-            <a:effectRef idx="0">
-              <a:srgbClr val="FFFFFF"/>
-            </a:effectRef>
-            <a:fontRef idx="minor">
-              <a:schemeClr val="tx1"/>
-            </a:fontRef>
-          </p:style>
-        </p:cxnSp>
-        <p:cxnSp>
-          <p:nvCxnSpPr>
-            <p:cNvPr id="34515072" name="Conector angular 38"/>
-            <p:cNvCxnSpPr/>
-            <p:nvPr/>
-          </p:nvCxnSpPr>
-          <p:spPr bwMode="auto">
-            <a:xfrm rot="10800000">
-              <a:off x="1017270" y="408939"/>
-              <a:ext cx="5486400" cy="6422389"/>
-            </a:xfrm>
-            <a:prstGeom prst="bentConnector4">
-              <a:avLst>
-                <a:gd name="adj1" fmla="val 137349"/>
-                <a:gd name="adj2" fmla="val 105981"/>
-              </a:avLst>
-            </a:prstGeom>
-            <a:ln w="28575">
-              <a:solidFill>
-                <a:srgbClr val="FF0000"/>
-              </a:solidFill>
-            </a:ln>
-          </p:spPr>
-          <p:style>
-            <a:lnRef idx="2">
-              <a:schemeClr val="accent1"/>
-            </a:lnRef>
-            <a:fillRef idx="0">
-              <a:srgbClr val="FFFFFF"/>
-            </a:fillRef>
-            <a:effectRef idx="0">
-              <a:srgbClr val="FFFFFF"/>
-            </a:effectRef>
-            <a:fontRef idx="minor">
-              <a:schemeClr val="tx1"/>
-            </a:fontRef>
-          </p:style>
-        </p:cxnSp>
-        <p:cxnSp>
-          <p:nvCxnSpPr>
-            <p:cNvPr id="348223700" name="Conector angular 39"/>
-            <p:cNvCxnSpPr>
-              <a:stCxn id="21" idx="6"/>
-              <a:endCxn id="73" idx="1"/>
-            </p:cNvCxnSpPr>
-            <p:nvPr/>
-          </p:nvCxnSpPr>
-          <p:spPr bwMode="auto">
-            <a:xfrm rot="10800000">
-              <a:off x="1131570" y="408939"/>
-              <a:ext cx="5372100" cy="6647180"/>
-            </a:xfrm>
-            <a:prstGeom prst="bentConnector4">
-              <a:avLst>
-                <a:gd name="adj1" fmla="val 148475"/>
-                <a:gd name="adj2" fmla="val 108712"/>
-              </a:avLst>
-            </a:prstGeom>
-            <a:ln w="28575">
-              <a:solidFill>
-                <a:schemeClr val="tx1"/>
-              </a:solidFill>
-            </a:ln>
-          </p:spPr>
-          <p:style>
-            <a:lnRef idx="2">
-              <a:schemeClr val="accent1"/>
-            </a:lnRef>
-            <a:fillRef idx="0">
-              <a:srgbClr val="FFFFFF"/>
-            </a:fillRef>
-            <a:effectRef idx="0">
-              <a:srgbClr val="FFFFFF"/>
-            </a:effectRef>
-            <a:fontRef idx="minor">
-              <a:schemeClr val="tx1"/>
-            </a:fontRef>
-          </p:style>
-        </p:cxnSp>
         <p:grpSp>
           <p:nvGrpSpPr>
-            <p:cNvPr id="2094047646" name="Grupo 34"/>
+            <p:cNvPr id="84657872" name=""/>
             <p:cNvGrpSpPr/>
             <p:nvPr/>
           </p:nvGrpSpPr>
           <p:grpSpPr bwMode="auto">
-            <a:xfrm rot="5400000">
-              <a:off x="361632" y="5126990"/>
-              <a:ext cx="1177290" cy="1850390"/>
-              <a:chOff x="10635" y="8107"/>
-              <a:chExt cx="1854" cy="2914"/>
+            <a:xfrm rot="10799990">
+              <a:off x="9495702" y="4682122"/>
+              <a:ext cx="739116" cy="1160657"/>
+              <a:chOff x="0" y="0"/>
+              <a:chExt cx="739116" cy="1160657"/>
             </a:xfrm>
           </p:grpSpPr>
           <p:pic>
             <p:nvPicPr>
-              <p:cNvPr id="31" name="Imagen 30"/>
+              <p:cNvPr id="779337886" name=""/>
               <p:cNvPicPr>
                 <a:picLocks noChangeAspect="1"/>
               </p:cNvPicPr>
               <p:nvPr/>
             </p:nvPicPr>
             <p:blipFill rotWithShape="1">
-              <a:blip r:embed="rId9"/>
-              <a:srcRect l="15778" t="28976" r="51413" b="26881"/>
+              <a:blip r:embed="rId10"/>
+              <a:srcRect l="20991" t="21094" r="23841" b="26007"/>
               <a:stretch/>
             </p:blipFill>
             <p:spPr bwMode="auto">
-              <a:xfrm rot="5400000">
-                <a:off x="10186" y="8718"/>
-                <a:ext cx="2751" cy="1854"/>
+              <a:xfrm rot="18785429" flipH="0" flipV="0">
+                <a:off x="-15856" y="257175"/>
+                <a:ext cx="770830" cy="739116"/>
               </a:xfrm>
               <a:prstGeom prst="rect">
                 <a:avLst/>
@@ -7263,14 +7558,14 @@
           </p:pic>
           <p:sp>
             <p:nvSpPr>
-              <p:cNvPr id="32" name="Óvalo 31"/>
+              <p:cNvPr id="818295100" name="Óvalo 11"/>
               <p:cNvSpPr/>
               <p:nvPr/>
             </p:nvSpPr>
             <p:spPr bwMode="auto">
-              <a:xfrm rot="10800000">
-                <a:off x="11156" y="8107"/>
-                <a:ext cx="276" cy="277"/>
+              <a:xfrm flipH="0" flipV="0">
+                <a:off x="283664" y="0"/>
+                <a:ext cx="184948" cy="185618"/>
               </a:xfrm>
               <a:prstGeom prst="ellipse">
                 <a:avLst/>
@@ -7312,14 +7607,14 @@
           </p:sp>
           <p:sp>
             <p:nvSpPr>
-              <p:cNvPr id="33" name="Óvalo 32"/>
+              <p:cNvPr id="2030876603" name="Óvalo 11"/>
               <p:cNvSpPr/>
               <p:nvPr/>
             </p:nvSpPr>
             <p:spPr bwMode="auto">
-              <a:xfrm rot="10800000">
-                <a:off x="11761" y="8107"/>
-                <a:ext cx="276" cy="277"/>
+              <a:xfrm flipH="0" flipV="0">
+                <a:off x="283664" y="975039"/>
+                <a:ext cx="184948" cy="185618"/>
               </a:xfrm>
               <a:prstGeom prst="ellipse">
                 <a:avLst/>
@@ -7359,91 +7654,26 @@
               </a:p>
             </p:txBody>
           </p:sp>
-          <p:sp>
-            <p:nvSpPr>
-              <p:cNvPr id="34" name="Óvalo 33"/>
-              <p:cNvSpPr/>
-              <p:nvPr/>
-            </p:nvSpPr>
-            <p:spPr bwMode="auto">
-              <a:xfrm rot="16199999">
-                <a:off x="11157" y="8632"/>
-                <a:ext cx="934" cy="938"/>
-              </a:xfrm>
-              <a:prstGeom prst="ellipse">
-                <a:avLst/>
-              </a:prstGeom>
-              <a:solidFill>
-                <a:schemeClr val="bg1"/>
-              </a:solidFill>
-              <a:ln>
-                <a:solidFill>
-                  <a:schemeClr val="tx1"/>
-                </a:solidFill>
-              </a:ln>
-            </p:spPr>
-            <p:style>
-              <a:lnRef idx="2">
-                <a:schemeClr val="accent1">
-                  <a:lumMod val="75000"/>
-                </a:schemeClr>
-              </a:lnRef>
-              <a:fillRef idx="1">
-                <a:schemeClr val="accent1"/>
-              </a:fillRef>
-              <a:effectRef idx="0">
-                <a:srgbClr val="FFFFFF"/>
-              </a:effectRef>
-              <a:fontRef idx="minor">
-                <a:schemeClr val="lt1"/>
-              </a:fontRef>
-            </p:style>
-            <p:txBody>
-              <a:bodyPr lIns="0" tIns="0" rIns="0" bIns="0" rtlCol="0" anchor="ctr"/>
-              <a:p>
-                <a:pPr algn="ctr">
-                  <a:defRPr/>
-                </a:pPr>
-                <a:r>
-                  <a:rPr lang="es-MX" sz="1600" b="1">
-                    <a:solidFill>
-                      <a:srgbClr val="FF0000"/>
-                    </a:solidFill>
-                  </a:rPr>
-                  <a:t>12V</a:t>
-                </a:r>
-                <a:endParaRPr lang="es-MX" sz="1600" b="1">
-                  <a:solidFill>
-                    <a:srgbClr val="FF0000"/>
-                  </a:solidFill>
-                </a:endParaRPr>
-              </a:p>
-            </p:txBody>
-          </p:sp>
         </p:grpSp>
         <p:cxnSp>
           <p:nvCxnSpPr>
-            <p:cNvPr id="1269201989" name="Conector angular 40"/>
+            <p:cNvPr id="1056860577" name="Conector angular 36"/>
             <p:cNvCxnSpPr>
-              <a:stCxn id="19" idx="6"/>
-              <a:endCxn id="85" idx="0"/>
+              <a:endCxn id="818295100" idx="0"/>
             </p:cNvCxnSpPr>
             <p:nvPr/>
           </p:nvCxnSpPr>
           <p:spPr bwMode="auto">
-            <a:xfrm rot="10800000">
-              <a:off x="2391409" y="389889"/>
-              <a:ext cx="4112260" cy="6233160"/>
+            <a:xfrm rot="10799990" flipH="0" flipV="0">
+              <a:off x="9858681" y="5842780"/>
+              <a:ext cx="728068" cy="253219"/>
             </a:xfrm>
-            <a:prstGeom prst="bentConnector4">
-              <a:avLst>
-                <a:gd name="adj1" fmla="val 176374"/>
-                <a:gd name="adj2" fmla="val 112337"/>
-              </a:avLst>
+            <a:prstGeom prst="bentConnector2">
+              <a:avLst/>
             </a:prstGeom>
             <a:ln w="28575">
               <a:solidFill>
-                <a:srgbClr val="FE00DE"/>
+                <a:srgbClr val="FF0000"/>
               </a:solidFill>
             </a:ln>
           </p:spPr>
@@ -7498,7 +7728,7 @@
       </p:grpSpPr>
       <p:pic>
         <p:nvPicPr>
-          <p:cNvPr id="761179211" name="Imagen 3"/>
+          <p:cNvPr id="2097540073" name="Imagen 3"/>
           <p:cNvPicPr/>
           <p:nvPr/>
         </p:nvPicPr>
@@ -7518,7 +7748,7 @@
       </p:pic>
       <p:pic>
         <p:nvPicPr>
-          <p:cNvPr id="681838105" name="Imagen 5"/>
+          <p:cNvPr id="711489214" name="Imagen 5"/>
           <p:cNvPicPr>
             <a:picLocks noChangeAspect="1"/>
           </p:cNvPicPr>
@@ -7529,7 +7759,7 @@
           <a:stretch/>
         </p:blipFill>
         <p:spPr bwMode="auto">
-          <a:xfrm rot="16199999">
+          <a:xfrm rot="16199998">
             <a:off x="6195695" y="-101600"/>
             <a:ext cx="6496050" cy="6858000"/>
           </a:xfrm>
